--- a/docs/aaa-platform-presentation.pptx
+++ b/docs/aaa-platform-presentation.pptx
@@ -19,9 +19,10 @@
     <p:sldId id="267" r:id="rId13"/>
     <p:sldId id="268" r:id="rId14"/>
     <p:sldId id="269" r:id="rId15"/>
+    <p:sldId id="270" r:id="rId16"/>
   </p:sldIdLst>
   <p:notesMasterIdLst>
-    <p:notesMasterId r:id="rId16"/>
+    <p:notesMasterId r:id="rId17"/>
   </p:notesMasterIdLst>
   <p:sldSz cx="9144000" cy="5143500"/>
   <p:notesSz cx="5143500" cy="9144000"/>
@@ -997,6 +998,94 @@
 </p:notes>
 </file>
 
+<file path=ppt/notesSlides/notesSlide15.xml><?xml version="1.0" encoding="utf-8"?>
+<p:notes xmlns:a="http://schemas.openxmlformats.org/drawingml/2006/main" xmlns:r="http://schemas.openxmlformats.org/officeDocument/2006/relationships" xmlns:p="http://schemas.openxmlformats.org/presentationml/2006/main">
+  <p:cSld>
+    <p:spTree>
+      <p:nvGrpSpPr>
+        <p:cNvPr id="1" name=""/>
+        <p:cNvGrpSpPr/>
+        <p:nvPr/>
+      </p:nvGrpSpPr>
+      <p:grpSpPr>
+        <a:xfrm>
+          <a:off x="0" y="0"/>
+          <a:ext cx="0" cy="0"/>
+          <a:chOff x="0" y="0"/>
+          <a:chExt cx="0" cy="0"/>
+        </a:xfrm>
+      </p:grpSpPr>
+      <p:sp>
+        <p:nvSpPr>
+          <p:cNvPr id="2" name="Slide Image Placeholder 1"/>
+          <p:cNvSpPr>
+            <a:spLocks noGrp="1" noRot="1" noChangeAspect="1"/>
+          </p:cNvSpPr>
+          <p:nvPr>
+            <p:ph type="sldImg"/>
+          </p:nvPr>
+        </p:nvSpPr>
+        <p:spPr/>
+      </p:sp>
+      <p:sp>
+        <p:nvSpPr>
+          <p:cNvPr id="3" name="Notes Placeholder 2"/>
+          <p:cNvSpPr>
+            <a:spLocks noGrp="1"/>
+          </p:cNvSpPr>
+          <p:nvPr>
+            <p:ph type="body" idx="1"/>
+          </p:nvPr>
+        </p:nvSpPr>
+        <p:spPr/>
+        <p:txBody>
+          <a:bodyPr/>
+          <a:lstStyle/>
+          <a:p>
+            <a:r>
+              <a:rPr lang="en-US" dirty="0"/>
+              <a:t/>
+            </a:r>
+            <a:endParaRPr lang="en-US" dirty="0"/>
+          </a:p>
+        </p:txBody>
+      </p:sp>
+      <p:sp>
+        <p:nvSpPr>
+          <p:cNvPr id="4" name="Slide Number Placeholder 3"/>
+          <p:cNvSpPr>
+            <a:spLocks noGrp="1"/>
+          </p:cNvSpPr>
+          <p:nvPr>
+            <p:ph type="sldNum" sz="quarter" idx="10"/>
+          </p:nvPr>
+        </p:nvSpPr>
+        <p:spPr/>
+        <p:txBody>
+          <a:bodyPr/>
+          <a:lstStyle/>
+          <a:p>
+            <a:fld id="{F7021451-1387-4CA6-816F-3879F97B5CBC}" type="slidenum">
+              <a:rPr lang="en-US"/>
+              <a:t>15</a:t>
+            </a:fld>
+            <a:endParaRPr lang="en-US"/>
+          </a:p>
+        </p:txBody>
+      </p:sp>
+    </p:spTree>
+    <p:extLst>
+      <p:ext uri="{BB962C8B-B14F-4D97-AF65-F5344CB8AC3E}">
+        <p14:creationId xmlns:p14="http://schemas.microsoft.com/office/powerpoint/2010/main" val="1024086991"/>
+      </p:ext>
+    </p:extLst>
+  </p:cSld>
+  <p:clrMapOvr>
+    <a:masterClrMapping/>
+  </p:clrMapOvr>
+</p:notes>
+</file>
+
 <file path=ppt/notesSlides/notesSlide2.xml><?xml version="1.0" encoding="utf-8"?>
 <p:notes xmlns:a="http://schemas.openxmlformats.org/drawingml/2006/main" xmlns:r="http://schemas.openxmlformats.org/officeDocument/2006/relationships" xmlns:p="http://schemas.openxmlformats.org/presentationml/2006/main">
   <p:cSld>
@@ -3064,42 +3153,6 @@
       </p:sp>
       <p:sp>
         <p:nvSpPr>
-          <p:cNvPr id="4" name="Text 2"/>
-          <p:cNvSpPr/>
-          <p:nvPr/>
-        </p:nvSpPr>
-        <p:spPr>
-          <a:xfrm>
-            <a:off x="365760" y="777240"/>
-            <a:ext cx="8412480" cy="347472"/>
-          </a:xfrm>
-          <a:prstGeom prst="rect">
-            <a:avLst/>
-          </a:prstGeom>
-          <a:noFill/>
-          <a:ln/>
-        </p:spPr>
-        <p:txBody>
-          <a:bodyPr wrap="square" rtlCol="0" anchor="ctr"/>
-          <a:lstStyle/>
-          <a:p>
-            <a:pPr indent="0" marL="0">
-              <a:buNone/>
-            </a:pPr>
-            <a:r>
-              <a:rPr lang="en-US" sz="1300" i="1" dirty="0">
-                <a:solidFill>
-                  <a:srgbClr val="2E75B6"/>
-                </a:solidFill>
-              </a:rPr>
-              <a:t>Up to 100,000 profiles per job — JSON or CSV, never blocks the API</a:t>
-            </a:r>
-            <a:endParaRPr lang="en-US" sz="1300" dirty="0"/>
-          </a:p>
-        </p:txBody>
-      </p:sp>
-      <p:sp>
-        <p:nvSpPr>
           <p:cNvPr id="5" name="Shape 3"/>
           <p:cNvSpPr/>
           <p:nvPr/>
@@ -4273,7 +4326,7 @@
                 <a:ea typeface="Courier New" pitchFamily="34" charset="-122"/>
                 <a:cs typeface="Courier New" pitchFamily="34" charset="-120"/>
               </a:rPr>
-              <a:t> "status": "completed",</a:t>
+              <a:t xml:space="preserve"> "status": "completed",</a:t>
             </a:r>
             <a:endParaRPr lang="en-US" sz="900" dirty="0"/>
           </a:p>
@@ -4312,7 +4365,7 @@
                 <a:ea typeface="Courier New" pitchFamily="34" charset="-122"/>
                 <a:cs typeface="Courier New" pitchFamily="34" charset="-120"/>
               </a:rPr>
-              <a:t> "processed": 4997,</a:t>
+              <a:t xml:space="preserve"> "processed": 4997,</a:t>
             </a:r>
             <a:endParaRPr lang="en-US" sz="900" dirty="0"/>
           </a:p>
@@ -4351,7 +4404,7 @@
                 <a:ea typeface="Courier New" pitchFamily="34" charset="-122"/>
                 <a:cs typeface="Courier New" pitchFamily="34" charset="-120"/>
               </a:rPr>
-              <a:t> "failed": 3,</a:t>
+              <a:t xml:space="preserve"> "failed": 3,</a:t>
             </a:r>
             <a:endParaRPr lang="en-US" sz="900" dirty="0"/>
           </a:p>
@@ -4390,7 +4443,7 @@
                 <a:ea typeface="Courier New" pitchFamily="34" charset="-122"/>
                 <a:cs typeface="Courier New" pitchFamily="34" charset="-120"/>
               </a:rPr>
-              <a:t> "errors": [{</a:t>
+              <a:t xml:space="preserve"> "errors": [{</a:t>
             </a:r>
             <a:endParaRPr lang="en-US" sz="900" dirty="0"/>
           </a:p>
@@ -4429,7 +4482,7 @@
                 <a:ea typeface="Courier New" pitchFamily="34" charset="-122"/>
                 <a:cs typeface="Courier New" pitchFamily="34" charset="-120"/>
               </a:rPr>
-              <a:t>   "row": 42, "field": "imsi",</a:t>
+              <a:t xml:space="preserve">   "row": 42, "field": "imsi",</a:t>
             </a:r>
             <a:endParaRPr lang="en-US" sz="900" dirty="0"/>
           </a:p>
@@ -4468,9 +4521,45 @@
                 <a:ea typeface="Courier New" pitchFamily="34" charset="-122"/>
                 <a:cs typeface="Courier New" pitchFamily="34" charset="-120"/>
               </a:rPr>
-              <a:t>   "message": "Must be 15 digits"}]}</a:t>
+              <a:t xml:space="preserve">   "message": "Must be 15 digits"}]}</a:t>
             </a:r>
             <a:endParaRPr lang="en-US" sz="900" dirty="0"/>
+          </a:p>
+        </p:txBody>
+      </p:sp>
+      <p:sp>
+        <p:nvSpPr>
+          <p:cNvPr id="4" name="Text 2"/>
+          <p:cNvSpPr/>
+          <p:nvPr/>
+        </p:nvSpPr>
+        <p:spPr>
+          <a:xfrm>
+            <a:off x="365760" y="777240"/>
+            <a:ext cx="8412480" cy="347472"/>
+          </a:xfrm>
+          <a:prstGeom prst="rect">
+            <a:avLst/>
+          </a:prstGeom>
+          <a:noFill/>
+          <a:ln/>
+        </p:spPr>
+        <p:txBody>
+          <a:bodyPr wrap="square" tIns="0" rtlCol="0" anchor="t"/>
+          <a:lstStyle/>
+          <a:p>
+            <a:pPr indent="0" marL="0">
+              <a:buNone/>
+            </a:pPr>
+            <a:r>
+              <a:rPr lang="en-US" sz="1300" i="1" dirty="0">
+                <a:solidFill>
+                  <a:srgbClr val="2E75B6"/>
+                </a:solidFill>
+              </a:rPr>
+              <a:t>Up to 100,000 profiles per job — JSON or CSV, never blocks the API</a:t>
+            </a:r>
+            <a:endParaRPr lang="en-US" sz="1300" dirty="0"/>
           </a:p>
         </p:txBody>
       </p:sp>
@@ -4564,42 +4653,6 @@
               <a:t>Observability &amp; Monitoring</a:t>
             </a:r>
             <a:endParaRPr lang="en-US" sz="2200" dirty="0"/>
-          </a:p>
-        </p:txBody>
-      </p:sp>
-      <p:sp>
-        <p:nvSpPr>
-          <p:cNvPr id="4" name="Text 2"/>
-          <p:cNvSpPr/>
-          <p:nvPr/>
-        </p:nvSpPr>
-        <p:spPr>
-          <a:xfrm>
-            <a:off x="365760" y="777240"/>
-            <a:ext cx="8412480" cy="347472"/>
-          </a:xfrm>
-          <a:prstGeom prst="rect">
-            <a:avLst/>
-          </a:prstGeom>
-          <a:noFill/>
-          <a:ln/>
-        </p:spPr>
-        <p:txBody>
-          <a:bodyPr wrap="square" rtlCol="0" anchor="ctr"/>
-          <a:lstStyle/>
-          <a:p>
-            <a:pPr indent="0" marL="0">
-              <a:buNone/>
-            </a:pPr>
-            <a:r>
-              <a:rPr lang="en-US" sz="1300" i="1" dirty="0">
-                <a:solidFill>
-                  <a:srgbClr val="2E75B6"/>
-                </a:solidFill>
-              </a:rPr>
-              <a:t>Prometheus metrics, structured JSON logs, Grafana dashboards, auto-alerting</a:t>
-            </a:r>
-            <a:endParaRPr lang="en-US" sz="1300" dirty="0"/>
           </a:p>
         </p:txBody>
       </p:sp>
@@ -6751,6 +6804,42 @@
           </a:p>
         </p:txBody>
       </p:sp>
+      <p:sp>
+        <p:nvSpPr>
+          <p:cNvPr id="4" name="Text 2"/>
+          <p:cNvSpPr/>
+          <p:nvPr/>
+        </p:nvSpPr>
+        <p:spPr>
+          <a:xfrm>
+            <a:off x="365760" y="777240"/>
+            <a:ext cx="8412480" cy="347472"/>
+          </a:xfrm>
+          <a:prstGeom prst="rect">
+            <a:avLst/>
+          </a:prstGeom>
+          <a:noFill/>
+          <a:ln/>
+        </p:spPr>
+        <p:txBody>
+          <a:bodyPr wrap="square" tIns="0" rtlCol="0" anchor="t"/>
+          <a:lstStyle/>
+          <a:p>
+            <a:pPr indent="0" marL="0">
+              <a:buNone/>
+            </a:pPr>
+            <a:r>
+              <a:rPr lang="en-US" sz="1300" i="1" dirty="0">
+                <a:solidFill>
+                  <a:srgbClr val="2E75B6"/>
+                </a:solidFill>
+              </a:rPr>
+              <a:t>Prometheus metrics, structured JSON logs, Grafana dashboards, auto-alerting</a:t>
+            </a:r>
+            <a:endParaRPr lang="en-US" sz="1300" dirty="0"/>
+          </a:p>
+        </p:txBody>
+      </p:sp>
     </p:spTree>
   </p:cSld>
   <p:clrMapOvr>
@@ -6846,42 +6935,6 @@
       </p:sp>
       <p:sp>
         <p:nvSpPr>
-          <p:cNvPr id="4" name="Text 2"/>
-          <p:cNvSpPr/>
-          <p:nvPr/>
-        </p:nvSpPr>
-        <p:spPr>
-          <a:xfrm>
-            <a:off x="365760" y="777240"/>
-            <a:ext cx="8412480" cy="347472"/>
-          </a:xfrm>
-          <a:prstGeom prst="rect">
-            <a:avLst/>
-          </a:prstGeom>
-          <a:noFill/>
-          <a:ln/>
-        </p:spPr>
-        <p:txBody>
-          <a:bodyPr wrap="square" rtlCol="0" anchor="ctr"/>
-          <a:lstStyle/>
-          <a:p>
-            <a:pPr indent="0" marL="0">
-              <a:buNone/>
-            </a:pPr>
-            <a:r>
-              <a:rPr lang="en-US" sz="1300" i="1" dirty="0">
-                <a:solidFill>
-                  <a:srgbClr val="2E75B6"/>
-                </a:solidFill>
-              </a:rPr>
-              <a:t>Helm umbrella chart — all components in aaa-platform namespace</a:t>
-            </a:r>
-            <a:endParaRPr lang="en-US" sz="1300" dirty="0"/>
-          </a:p>
-        </p:txBody>
-      </p:sp>
-      <p:sp>
-        <p:nvSpPr>
           <p:cNvPr id="5" name="Shape 3"/>
           <p:cNvSpPr/>
           <p:nvPr/>
@@ -7922,7 +7975,7 @@
                 <a:ea typeface="Courier New" pitchFamily="34" charset="-122"/>
                 <a:cs typeface="Courier New" pitchFamily="34" charset="-120"/>
               </a:rPr>
-              <a:t>  aaa-database (CNPG)</a:t>
+              <a:t xml:space="preserve">  aaa-database (CNPG)</a:t>
             </a:r>
             <a:endParaRPr lang="en-US" sz="950" dirty="0"/>
           </a:p>
@@ -7961,7 +8014,7 @@
                 <a:ea typeface="Courier New" pitchFamily="34" charset="-122"/>
                 <a:cs typeface="Courier New" pitchFamily="34" charset="-120"/>
               </a:rPr>
-              <a:t>  aaa-lookup-service</a:t>
+              <a:t xml:space="preserve">  aaa-lookup-service</a:t>
             </a:r>
             <a:endParaRPr lang="en-US" sz="950" dirty="0"/>
           </a:p>
@@ -8000,7 +8053,7 @@
                 <a:ea typeface="Courier New" pitchFamily="34" charset="-122"/>
                 <a:cs typeface="Courier New" pitchFamily="34" charset="-120"/>
               </a:rPr>
-              <a:t>  subscriber-profile-api</a:t>
+              <a:t xml:space="preserve">  subscriber-profile-api</a:t>
             </a:r>
             <a:endParaRPr lang="en-US" sz="950" dirty="0"/>
           </a:p>
@@ -8039,7 +8092,7 @@
                 <a:ea typeface="Courier New" pitchFamily="34" charset="-122"/>
                 <a:cs typeface="Courier New" pitchFamily="34" charset="-120"/>
               </a:rPr>
-              <a:t>  aaa-management-ui</a:t>
+              <a:t xml:space="preserve">  aaa-management-ui</a:t>
             </a:r>
             <a:endParaRPr lang="en-US" sz="950" dirty="0"/>
           </a:p>
@@ -8211,6 +8264,42 @@
               <a:t>Prometheus: local-path / gp3 (5-50 Gi)</a:t>
             </a:r>
             <a:endParaRPr lang="en-US" sz="950" dirty="0"/>
+          </a:p>
+        </p:txBody>
+      </p:sp>
+      <p:sp>
+        <p:nvSpPr>
+          <p:cNvPr id="4" name="Text 2"/>
+          <p:cNvSpPr/>
+          <p:nvPr/>
+        </p:nvSpPr>
+        <p:spPr>
+          <a:xfrm>
+            <a:off x="365760" y="777240"/>
+            <a:ext cx="8412480" cy="347472"/>
+          </a:xfrm>
+          <a:prstGeom prst="rect">
+            <a:avLst/>
+          </a:prstGeom>
+          <a:noFill/>
+          <a:ln/>
+        </p:spPr>
+        <p:txBody>
+          <a:bodyPr wrap="square" tIns="0" rtlCol="0" anchor="t"/>
+          <a:lstStyle/>
+          <a:p>
+            <a:pPr indent="0" marL="0">
+              <a:buNone/>
+            </a:pPr>
+            <a:r>
+              <a:rPr lang="en-US" sz="1300" i="1" dirty="0">
+                <a:solidFill>
+                  <a:srgbClr val="2E75B6"/>
+                </a:solidFill>
+              </a:rPr>
+              <a:t>Helm umbrella chart — all components in aaa-platform namespace</a:t>
+            </a:r>
+            <a:endParaRPr lang="en-US" sz="1300" dirty="0"/>
           </a:p>
         </p:txBody>
       </p:sp>
@@ -8309,42 +8398,6 @@
       </p:sp>
       <p:sp>
         <p:nvSpPr>
-          <p:cNvPr id="4" name="Text 2"/>
-          <p:cNvSpPr/>
-          <p:nvPr/>
-        </p:nvSpPr>
-        <p:spPr>
-          <a:xfrm>
-            <a:off x="365760" y="777240"/>
-            <a:ext cx="8412480" cy="347472"/>
-          </a:xfrm>
-          <a:prstGeom prst="rect">
-            <a:avLst/>
-          </a:prstGeom>
-          <a:noFill/>
-          <a:ln/>
-        </p:spPr>
-        <p:txBody>
-          <a:bodyPr wrap="square" rtlCol="0" anchor="ctr"/>
-          <a:lstStyle/>
-          <a:p>
-            <a:pPr indent="0" marL="0">
-              <a:buNone/>
-            </a:pPr>
-            <a:r>
-              <a:rPr lang="en-US" sz="1300" i="1" dirty="0">
-                <a:solidFill>
-                  <a:srgbClr val="2E75B6"/>
-                </a:solidFill>
-              </a:rPr>
-              <a:t>Makefile-driven local development with k3d + hot-reload</a:t>
-            </a:r>
-            <a:endParaRPr lang="en-US" sz="1300" dirty="0"/>
-          </a:p>
-        </p:txBody>
-      </p:sp>
-      <p:sp>
-        <p:nvSpPr>
           <p:cNvPr id="5" name="Text 3"/>
           <p:cNvSpPr/>
           <p:nvPr/>
@@ -9731,6 +9784,42 @@
             <a:prstDash val="solid"/>
           </a:ln>
         </p:spPr>
+      </p:sp>
+      <p:sp>
+        <p:nvSpPr>
+          <p:cNvPr id="4" name="Text 2"/>
+          <p:cNvSpPr/>
+          <p:nvPr/>
+        </p:nvSpPr>
+        <p:spPr>
+          <a:xfrm>
+            <a:off x="365760" y="777240"/>
+            <a:ext cx="8412480" cy="347472"/>
+          </a:xfrm>
+          <a:prstGeom prst="rect">
+            <a:avLst/>
+          </a:prstGeom>
+          <a:noFill/>
+          <a:ln/>
+        </p:spPr>
+        <p:txBody>
+          <a:bodyPr wrap="square" tIns="0" rtlCol="0" anchor="t"/>
+          <a:lstStyle/>
+          <a:p>
+            <a:pPr indent="0" marL="0">
+              <a:buNone/>
+            </a:pPr>
+            <a:r>
+              <a:rPr lang="en-US" sz="1300" i="1" dirty="0">
+                <a:solidFill>
+                  <a:srgbClr val="2E75B6"/>
+                </a:solidFill>
+              </a:rPr>
+              <a:t>Makefile-driven local development with k3d + hot-reload</a:t>
+            </a:r>
+            <a:endParaRPr lang="en-US" sz="1300" dirty="0"/>
+          </a:p>
+        </p:txBody>
       </p:sp>
     </p:spTree>
   </p:cSld>
@@ -9743,6 +9832,4060 @@
 <file path=ppt/slides/slide14.xml><?xml version="1.0" encoding="utf-8"?>
 <p:sld xmlns:a="http://schemas.openxmlformats.org/drawingml/2006/main" xmlns:r="http://schemas.openxmlformats.org/officeDocument/2006/relationships" xmlns:p="http://schemas.openxmlformats.org/presentationml/2006/main">
   <p:cSld name="Slide 14">
+    <p:spTree>
+      <p:nvGrpSpPr>
+        <p:cNvPr id="1" name=""/>
+        <p:cNvGrpSpPr/>
+        <p:nvPr/>
+      </p:nvGrpSpPr>
+      <p:grpSpPr>
+        <a:xfrm>
+          <a:off x="0" y="0"/>
+          <a:ext cx="0" cy="0"/>
+          <a:chOff x="0" y="0"/>
+          <a:chExt cx="0" cy="0"/>
+        </a:xfrm>
+      </p:grpSpPr>
+      <p:sp>
+        <p:nvSpPr>
+          <p:cNvPr id="2" name="Shape 0"/>
+          <p:cNvSpPr/>
+          <p:nvPr/>
+        </p:nvSpPr>
+        <p:spPr>
+          <a:xfrm>
+            <a:off x="0" y="0"/>
+            <a:ext cx="9144000" cy="640080"/>
+          </a:xfrm>
+          <a:prstGeom prst="rect">
+            <a:avLst/>
+          </a:prstGeom>
+          <a:solidFill>
+            <a:srgbClr val="1E2761"/>
+          </a:solidFill>
+          <a:ln w="12700">
+            <a:solidFill>
+              <a:srgbClr val="1E2761"/>
+            </a:solidFill>
+            <a:prstDash val="solid"/>
+          </a:ln>
+        </p:spPr>
+      </p:sp>
+      <p:sp>
+        <p:nvSpPr>
+          <p:cNvPr id="3" name="Text 1"/>
+          <p:cNvSpPr/>
+          <p:nvPr/>
+        </p:nvSpPr>
+        <p:spPr>
+          <a:xfrm>
+            <a:off x="274320" y="0"/>
+            <a:ext cx="6400800" cy="640080"/>
+          </a:xfrm>
+          <a:prstGeom prst="rect">
+            <a:avLst/>
+          </a:prstGeom>
+          <a:noFill/>
+          <a:ln/>
+        </p:spPr>
+        <p:txBody>
+          <a:bodyPr wrap="square" lIns="0" tIns="0" rIns="0" bIns="0" rtlCol="0" anchor="ctr"/>
+          <a:lstStyle/>
+          <a:p>
+            <a:pPr indent="0" marL="0">
+              <a:buNone/>
+            </a:pPr>
+            <a:r>
+              <a:rPr lang="en-US" sz="2200" b="1" dirty="0">
+                <a:solidFill>
+                  <a:srgbClr val="FFFFFF"/>
+                </a:solidFill>
+              </a:rPr>
+              <a:t>Auto-Allocation Scenarios</a:t>
+            </a:r>
+            <a:endParaRPr lang="en-US" sz="2200" dirty="0"/>
+          </a:p>
+        </p:txBody>
+      </p:sp>
+      <p:sp>
+        <p:nvSpPr>
+          <p:cNvPr id="4" name="Text 2"/>
+          <p:cNvSpPr/>
+          <p:nvPr/>
+        </p:nvSpPr>
+        <p:spPr>
+          <a:xfrm>
+            <a:off x="6766560" y="0"/>
+            <a:ext cx="2011680" cy="640080"/>
+          </a:xfrm>
+          <a:prstGeom prst="rect">
+            <a:avLst/>
+          </a:prstGeom>
+          <a:noFill/>
+          <a:ln/>
+        </p:spPr>
+        <p:txBody>
+          <a:bodyPr wrap="square" lIns="0" tIns="0" rIns="0" bIns="0" rtlCol="0" anchor="ctr"/>
+          <a:lstStyle/>
+          <a:p>
+            <a:pPr algn="r" indent="0" marL="0">
+              <a:buNone/>
+            </a:pPr>
+            <a:r>
+              <a:rPr lang="en-US" sz="1000" dirty="0">
+                <a:solidFill>
+                  <a:srgbClr val="7EA8E8"/>
+                </a:solidFill>
+              </a:rPr>
+              <a:t>POST /v1/first-connection</a:t>
+            </a:r>
+            <a:endParaRPr lang="en-US" sz="1000" dirty="0"/>
+          </a:p>
+        </p:txBody>
+      </p:sp>
+      <p:sp>
+        <p:nvSpPr>
+          <p:cNvPr id="5" name="Shape 3"/>
+          <p:cNvSpPr/>
+          <p:nvPr/>
+        </p:nvSpPr>
+        <p:spPr>
+          <a:xfrm>
+            <a:off x="164592" y="749808"/>
+            <a:ext cx="347472" cy="329184"/>
+          </a:xfrm>
+          <a:prstGeom prst="rect">
+            <a:avLst/>
+          </a:prstGeom>
+          <a:solidFill>
+            <a:srgbClr val="1E2761"/>
+          </a:solidFill>
+          <a:ln w="3810">
+            <a:solidFill>
+              <a:srgbClr val="FFFFFF"/>
+            </a:solidFill>
+            <a:prstDash val="solid"/>
+          </a:ln>
+        </p:spPr>
+      </p:sp>
+      <p:sp>
+        <p:nvSpPr>
+          <p:cNvPr id="6" name="Text 4"/>
+          <p:cNvSpPr/>
+          <p:nvPr/>
+        </p:nvSpPr>
+        <p:spPr>
+          <a:xfrm>
+            <a:off x="192024" y="749808"/>
+            <a:ext cx="292608" cy="329184"/>
+          </a:xfrm>
+          <a:prstGeom prst="rect">
+            <a:avLst/>
+          </a:prstGeom>
+          <a:noFill/>
+          <a:ln/>
+        </p:spPr>
+        <p:txBody>
+          <a:bodyPr wrap="square" lIns="0" tIns="0" rIns="0" bIns="0" rtlCol="0" anchor="ctr"/>
+          <a:lstStyle/>
+          <a:p>
+            <a:pPr indent="0" marL="0">
+              <a:buNone/>
+            </a:pPr>
+            <a:r>
+              <a:rPr lang="en-US" sz="900" b="1" dirty="0">
+                <a:solidFill>
+                  <a:srgbClr val="FFFFFF"/>
+                </a:solidFill>
+              </a:rPr>
+              <a:t>#</a:t>
+            </a:r>
+            <a:endParaRPr lang="en-US" sz="900" dirty="0"/>
+          </a:p>
+        </p:txBody>
+      </p:sp>
+      <p:sp>
+        <p:nvSpPr>
+          <p:cNvPr id="7" name="Shape 5"/>
+          <p:cNvSpPr/>
+          <p:nvPr/>
+        </p:nvSpPr>
+        <p:spPr>
+          <a:xfrm>
+            <a:off x="512064" y="749808"/>
+            <a:ext cx="1417320" cy="329184"/>
+          </a:xfrm>
+          <a:prstGeom prst="rect">
+            <a:avLst/>
+          </a:prstGeom>
+          <a:solidFill>
+            <a:srgbClr val="1E2761"/>
+          </a:solidFill>
+          <a:ln w="3810">
+            <a:solidFill>
+              <a:srgbClr val="FFFFFF"/>
+            </a:solidFill>
+            <a:prstDash val="solid"/>
+          </a:ln>
+        </p:spPr>
+      </p:sp>
+      <p:sp>
+        <p:nvSpPr>
+          <p:cNvPr id="8" name="Text 6"/>
+          <p:cNvSpPr/>
+          <p:nvPr/>
+        </p:nvSpPr>
+        <p:spPr>
+          <a:xfrm>
+            <a:off x="539496" y="749808"/>
+            <a:ext cx="1362456" cy="329184"/>
+          </a:xfrm>
+          <a:prstGeom prst="rect">
+            <a:avLst/>
+          </a:prstGeom>
+          <a:noFill/>
+          <a:ln/>
+        </p:spPr>
+        <p:txBody>
+          <a:bodyPr wrap="square" lIns="0" tIns="0" rIns="0" bIns="0" rtlCol="0" anchor="ctr"/>
+          <a:lstStyle/>
+          <a:p>
+            <a:pPr indent="0" marL="0">
+              <a:buNone/>
+            </a:pPr>
+            <a:r>
+              <a:rPr lang="en-US" sz="900" b="1" dirty="0">
+                <a:solidFill>
+                  <a:srgbClr val="FFFFFF"/>
+                </a:solidFill>
+              </a:rPr>
+              <a:t>SIM type</a:t>
+            </a:r>
+            <a:endParaRPr lang="en-US" sz="900" dirty="0"/>
+          </a:p>
+        </p:txBody>
+      </p:sp>
+      <p:sp>
+        <p:nvSpPr>
+          <p:cNvPr id="9" name="Shape 7"/>
+          <p:cNvSpPr/>
+          <p:nvPr/>
+        </p:nvSpPr>
+        <p:spPr>
+          <a:xfrm>
+            <a:off x="1929384" y="749808"/>
+            <a:ext cx="1005840" cy="329184"/>
+          </a:xfrm>
+          <a:prstGeom prst="rect">
+            <a:avLst/>
+          </a:prstGeom>
+          <a:solidFill>
+            <a:srgbClr val="1E2761"/>
+          </a:solidFill>
+          <a:ln w="3810">
+            <a:solidFill>
+              <a:srgbClr val="FFFFFF"/>
+            </a:solidFill>
+            <a:prstDash val="solid"/>
+          </a:ln>
+        </p:spPr>
+      </p:sp>
+      <p:sp>
+        <p:nvSpPr>
+          <p:cNvPr id="10" name="Text 8"/>
+          <p:cNvSpPr/>
+          <p:nvPr/>
+        </p:nvSpPr>
+        <p:spPr>
+          <a:xfrm>
+            <a:off x="1956816" y="749808"/>
+            <a:ext cx="950976" cy="329184"/>
+          </a:xfrm>
+          <a:prstGeom prst="rect">
+            <a:avLst/>
+          </a:prstGeom>
+          <a:noFill/>
+          <a:ln/>
+        </p:spPr>
+        <p:txBody>
+          <a:bodyPr wrap="square" lIns="0" tIns="0" rIns="0" bIns="0" rtlCol="0" anchor="ctr"/>
+          <a:lstStyle/>
+          <a:p>
+            <a:pPr indent="0" marL="0">
+              <a:buNone/>
+            </a:pPr>
+            <a:r>
+              <a:rPr lang="en-US" sz="900" b="1" dirty="0">
+                <a:solidFill>
+                  <a:srgbClr val="FFFFFF"/>
+                </a:solidFill>
+              </a:rPr>
+              <a:t>Mode</a:t>
+            </a:r>
+            <a:endParaRPr lang="en-US" sz="900" dirty="0"/>
+          </a:p>
+        </p:txBody>
+      </p:sp>
+      <p:sp>
+        <p:nvSpPr>
+          <p:cNvPr id="11" name="Shape 9"/>
+          <p:cNvSpPr/>
+          <p:nvPr/>
+        </p:nvSpPr>
+        <p:spPr>
+          <a:xfrm>
+            <a:off x="2935224" y="749808"/>
+            <a:ext cx="1005840" cy="329184"/>
+          </a:xfrm>
+          <a:prstGeom prst="rect">
+            <a:avLst/>
+          </a:prstGeom>
+          <a:solidFill>
+            <a:srgbClr val="1E2761"/>
+          </a:solidFill>
+          <a:ln w="3810">
+            <a:solidFill>
+              <a:srgbClr val="FFFFFF"/>
+            </a:solidFill>
+            <a:prstDash val="solid"/>
+          </a:ln>
+        </p:spPr>
+      </p:sp>
+      <p:sp>
+        <p:nvSpPr>
+          <p:cNvPr id="12" name="Text 10"/>
+          <p:cNvSpPr/>
+          <p:nvPr/>
+        </p:nvSpPr>
+        <p:spPr>
+          <a:xfrm>
+            <a:off x="2962656" y="749808"/>
+            <a:ext cx="950976" cy="329184"/>
+          </a:xfrm>
+          <a:prstGeom prst="rect">
+            <a:avLst/>
+          </a:prstGeom>
+          <a:noFill/>
+          <a:ln/>
+        </p:spPr>
+        <p:txBody>
+          <a:bodyPr wrap="square" lIns="0" tIns="0" rIns="0" bIns="0" rtlCol="0" anchor="ctr"/>
+          <a:lstStyle/>
+          <a:p>
+            <a:pPr indent="0" marL="0">
+              <a:buNone/>
+            </a:pPr>
+            <a:r>
+              <a:rPr lang="en-US" sz="900" b="1" dirty="0">
+                <a:solidFill>
+                  <a:srgbClr val="FFFFFF"/>
+                </a:solidFill>
+              </a:rPr>
+              <a:t>APN catalog</a:t>
+            </a:r>
+            <a:endParaRPr lang="en-US" sz="900" dirty="0"/>
+          </a:p>
+        </p:txBody>
+      </p:sp>
+      <p:sp>
+        <p:nvSpPr>
+          <p:cNvPr id="13" name="Shape 11"/>
+          <p:cNvSpPr/>
+          <p:nvPr/>
+        </p:nvSpPr>
+        <p:spPr>
+          <a:xfrm>
+            <a:off x="3941064" y="749808"/>
+            <a:ext cx="658368" cy="329184"/>
+          </a:xfrm>
+          <a:prstGeom prst="rect">
+            <a:avLst/>
+          </a:prstGeom>
+          <a:solidFill>
+            <a:srgbClr val="1E2761"/>
+          </a:solidFill>
+          <a:ln w="3810">
+            <a:solidFill>
+              <a:srgbClr val="FFFFFF"/>
+            </a:solidFill>
+            <a:prstDash val="solid"/>
+          </a:ln>
+        </p:spPr>
+      </p:sp>
+      <p:sp>
+        <p:nvSpPr>
+          <p:cNvPr id="14" name="Text 12"/>
+          <p:cNvSpPr/>
+          <p:nvPr/>
+        </p:nvSpPr>
+        <p:spPr>
+          <a:xfrm>
+            <a:off x="3968496" y="749808"/>
+            <a:ext cx="603504" cy="329184"/>
+          </a:xfrm>
+          <a:prstGeom prst="rect">
+            <a:avLst/>
+          </a:prstGeom>
+          <a:noFill/>
+          <a:ln/>
+        </p:spPr>
+        <p:txBody>
+          <a:bodyPr wrap="square" lIns="0" tIns="0" rIns="0" bIns="0" rtlCol="0" anchor="ctr"/>
+          <a:lstStyle/>
+          <a:p>
+            <a:pPr indent="0" marL="0">
+              <a:buNone/>
+            </a:pPr>
+            <a:r>
+              <a:rPr lang="en-US" sz="900" b="1" dirty="0">
+                <a:solidFill>
+                  <a:srgbClr val="FFFFFF"/>
+                </a:solidFill>
+              </a:rPr>
+              <a:t>IPs / SIM</a:t>
+            </a:r>
+            <a:endParaRPr lang="en-US" sz="900" dirty="0"/>
+          </a:p>
+        </p:txBody>
+      </p:sp>
+      <p:sp>
+        <p:nvSpPr>
+          <p:cNvPr id="15" name="Shape 13"/>
+          <p:cNvSpPr/>
+          <p:nvPr/>
+        </p:nvSpPr>
+        <p:spPr>
+          <a:xfrm>
+            <a:off x="4599432" y="749808"/>
+            <a:ext cx="1371600" cy="329184"/>
+          </a:xfrm>
+          <a:prstGeom prst="rect">
+            <a:avLst/>
+          </a:prstGeom>
+          <a:solidFill>
+            <a:srgbClr val="1E2761"/>
+          </a:solidFill>
+          <a:ln w="3810">
+            <a:solidFill>
+              <a:srgbClr val="FFFFFF"/>
+            </a:solidFill>
+            <a:prstDash val="solid"/>
+          </a:ln>
+        </p:spPr>
+      </p:sp>
+      <p:sp>
+        <p:nvSpPr>
+          <p:cNvPr id="16" name="Text 14"/>
+          <p:cNvSpPr/>
+          <p:nvPr/>
+        </p:nvSpPr>
+        <p:spPr>
+          <a:xfrm>
+            <a:off x="4626864" y="749808"/>
+            <a:ext cx="1316736" cy="329184"/>
+          </a:xfrm>
+          <a:prstGeom prst="rect">
+            <a:avLst/>
+          </a:prstGeom>
+          <a:noFill/>
+          <a:ln/>
+        </p:spPr>
+        <p:txBody>
+          <a:bodyPr wrap="square" lIns="0" tIns="0" rIns="0" bIns="0" rtlCol="0" anchor="ctr"/>
+          <a:lstStyle/>
+          <a:p>
+            <a:pPr indent="0" marL="0">
+              <a:buNone/>
+            </a:pPr>
+            <a:r>
+              <a:rPr lang="en-US" sz="900" b="1" dirty="0">
+                <a:solidFill>
+                  <a:srgbClr val="FFFFFF"/>
+                </a:solidFill>
+              </a:rPr>
+              <a:t>Config steps</a:t>
+            </a:r>
+            <a:endParaRPr lang="en-US" sz="900" dirty="0"/>
+          </a:p>
+        </p:txBody>
+      </p:sp>
+      <p:sp>
+        <p:nvSpPr>
+          <p:cNvPr id="17" name="Shape 15"/>
+          <p:cNvSpPr/>
+          <p:nvPr/>
+        </p:nvSpPr>
+        <p:spPr>
+          <a:xfrm>
+            <a:off x="5971032" y="749808"/>
+            <a:ext cx="1691640" cy="329184"/>
+          </a:xfrm>
+          <a:prstGeom prst="rect">
+            <a:avLst/>
+          </a:prstGeom>
+          <a:solidFill>
+            <a:srgbClr val="1E2761"/>
+          </a:solidFill>
+          <a:ln w="3810">
+            <a:solidFill>
+              <a:srgbClr val="FFFFFF"/>
+            </a:solidFill>
+            <a:prstDash val="solid"/>
+          </a:ln>
+        </p:spPr>
+      </p:sp>
+      <p:sp>
+        <p:nvSpPr>
+          <p:cNvPr id="18" name="Text 16"/>
+          <p:cNvSpPr/>
+          <p:nvPr/>
+        </p:nvSpPr>
+        <p:spPr>
+          <a:xfrm>
+            <a:off x="5998464" y="749808"/>
+            <a:ext cx="1636776" cy="329184"/>
+          </a:xfrm>
+          <a:prstGeom prst="rect">
+            <a:avLst/>
+          </a:prstGeom>
+          <a:noFill/>
+          <a:ln/>
+        </p:spPr>
+        <p:txBody>
+          <a:bodyPr wrap="square" lIns="0" tIns="0" rIns="0" bIns="0" rtlCol="0" anchor="ctr"/>
+          <a:lstStyle/>
+          <a:p>
+            <a:pPr indent="0" marL="0">
+              <a:buNone/>
+            </a:pPr>
+            <a:r>
+              <a:rPr lang="en-US" sz="900" b="1" dirty="0">
+                <a:solidFill>
+                  <a:srgbClr val="FFFFFF"/>
+                </a:solidFill>
+              </a:rPr>
+              <a:t>First connect provisions</a:t>
+            </a:r>
+            <a:endParaRPr lang="en-US" sz="900" dirty="0"/>
+          </a:p>
+        </p:txBody>
+      </p:sp>
+      <p:sp>
+        <p:nvSpPr>
+          <p:cNvPr id="19" name="Shape 17"/>
+          <p:cNvSpPr/>
+          <p:nvPr/>
+        </p:nvSpPr>
+        <p:spPr>
+          <a:xfrm>
+            <a:off x="164592" y="1078992"/>
+            <a:ext cx="347472" cy="329184"/>
+          </a:xfrm>
+          <a:prstGeom prst="rect">
+            <a:avLst/>
+          </a:prstGeom>
+          <a:solidFill>
+            <a:srgbClr val="EFF3FB"/>
+          </a:solidFill>
+          <a:ln w="3810">
+            <a:solidFill>
+              <a:srgbClr val="D0D8E8"/>
+            </a:solidFill>
+            <a:prstDash val="solid"/>
+          </a:ln>
+        </p:spPr>
+      </p:sp>
+      <p:sp>
+        <p:nvSpPr>
+          <p:cNvPr id="20" name="Text 18"/>
+          <p:cNvSpPr/>
+          <p:nvPr/>
+        </p:nvSpPr>
+        <p:spPr>
+          <a:xfrm>
+            <a:off x="192024" y="1078992"/>
+            <a:ext cx="292608" cy="329184"/>
+          </a:xfrm>
+          <a:prstGeom prst="rect">
+            <a:avLst/>
+          </a:prstGeom>
+          <a:noFill/>
+          <a:ln/>
+        </p:spPr>
+        <p:txBody>
+          <a:bodyPr wrap="square" lIns="0" tIns="0" rIns="0" bIns="0" rtlCol="0" anchor="ctr"/>
+          <a:lstStyle/>
+          <a:p>
+            <a:pPr indent="0" marL="0">
+              <a:buNone/>
+            </a:pPr>
+            <a:r>
+              <a:rPr lang="en-US" sz="850" b="1" dirty="0">
+                <a:solidFill>
+                  <a:srgbClr val="1E2761"/>
+                </a:solidFill>
+              </a:rPr>
+              <a:t>S1</a:t>
+            </a:r>
+            <a:endParaRPr lang="en-US" sz="850" dirty="0"/>
+          </a:p>
+        </p:txBody>
+      </p:sp>
+      <p:sp>
+        <p:nvSpPr>
+          <p:cNvPr id="21" name="Shape 19"/>
+          <p:cNvSpPr/>
+          <p:nvPr/>
+        </p:nvSpPr>
+        <p:spPr>
+          <a:xfrm>
+            <a:off x="512064" y="1078992"/>
+            <a:ext cx="1417320" cy="329184"/>
+          </a:xfrm>
+          <a:prstGeom prst="rect">
+            <a:avLst/>
+          </a:prstGeom>
+          <a:solidFill>
+            <a:srgbClr val="EFF3FB"/>
+          </a:solidFill>
+          <a:ln w="3810">
+            <a:solidFill>
+              <a:srgbClr val="D0D8E8"/>
+            </a:solidFill>
+            <a:prstDash val="solid"/>
+          </a:ln>
+        </p:spPr>
+      </p:sp>
+      <p:sp>
+        <p:nvSpPr>
+          <p:cNvPr id="22" name="Text 20"/>
+          <p:cNvSpPr/>
+          <p:nvPr/>
+        </p:nvSpPr>
+        <p:spPr>
+          <a:xfrm>
+            <a:off x="539496" y="1078992"/>
+            <a:ext cx="1362456" cy="329184"/>
+          </a:xfrm>
+          <a:prstGeom prst="rect">
+            <a:avLst/>
+          </a:prstGeom>
+          <a:noFill/>
+          <a:ln/>
+        </p:spPr>
+        <p:txBody>
+          <a:bodyPr wrap="square" lIns="0" tIns="0" rIns="0" bIns="0" rtlCol="0" anchor="ctr"/>
+          <a:lstStyle/>
+          <a:p>
+            <a:pPr indent="0" marL="0">
+              <a:buNone/>
+            </a:pPr>
+            <a:r>
+              <a:rPr lang="en-US" sz="850" dirty="0">
+                <a:solidFill>
+                  <a:srgbClr val="1E2761"/>
+                </a:solidFill>
+              </a:rPr>
+              <a:t>Single-IMSI</a:t>
+            </a:r>
+            <a:endParaRPr lang="en-US" sz="850" dirty="0"/>
+          </a:p>
+        </p:txBody>
+      </p:sp>
+      <p:sp>
+        <p:nvSpPr>
+          <p:cNvPr id="23" name="Shape 21"/>
+          <p:cNvSpPr/>
+          <p:nvPr/>
+        </p:nvSpPr>
+        <p:spPr>
+          <a:xfrm>
+            <a:off x="1929384" y="1078992"/>
+            <a:ext cx="1005840" cy="329184"/>
+          </a:xfrm>
+          <a:prstGeom prst="rect">
+            <a:avLst/>
+          </a:prstGeom>
+          <a:solidFill>
+            <a:srgbClr val="EFF3FB"/>
+          </a:solidFill>
+          <a:ln w="3810">
+            <a:solidFill>
+              <a:srgbClr val="D0D8E8"/>
+            </a:solidFill>
+            <a:prstDash val="solid"/>
+          </a:ln>
+        </p:spPr>
+      </p:sp>
+      <p:sp>
+        <p:nvSpPr>
+          <p:cNvPr id="24" name="Text 22"/>
+          <p:cNvSpPr/>
+          <p:nvPr/>
+        </p:nvSpPr>
+        <p:spPr>
+          <a:xfrm>
+            <a:off x="1956816" y="1078992"/>
+            <a:ext cx="950976" cy="329184"/>
+          </a:xfrm>
+          <a:prstGeom prst="rect">
+            <a:avLst/>
+          </a:prstGeom>
+          <a:noFill/>
+          <a:ln/>
+        </p:spPr>
+        <p:txBody>
+          <a:bodyPr wrap="square" lIns="0" tIns="0" rIns="0" bIns="0" rtlCol="0" anchor="ctr"/>
+          <a:lstStyle/>
+          <a:p>
+            <a:pPr indent="0" marL="0">
+              <a:buNone/>
+            </a:pPr>
+            <a:r>
+              <a:rPr lang="en-US" sz="850" b="1" dirty="0">
+                <a:solidFill>
+                  <a:srgbClr val="2E75B6"/>
+                </a:solidFill>
+              </a:rPr>
+              <a:t>imsi</a:t>
+            </a:r>
+            <a:endParaRPr lang="en-US" sz="850" dirty="0"/>
+          </a:p>
+        </p:txBody>
+      </p:sp>
+      <p:sp>
+        <p:nvSpPr>
+          <p:cNvPr id="25" name="Shape 23"/>
+          <p:cNvSpPr/>
+          <p:nvPr/>
+        </p:nvSpPr>
+        <p:spPr>
+          <a:xfrm>
+            <a:off x="2935224" y="1078992"/>
+            <a:ext cx="1005840" cy="329184"/>
+          </a:xfrm>
+          <a:prstGeom prst="rect">
+            <a:avLst/>
+          </a:prstGeom>
+          <a:solidFill>
+            <a:srgbClr val="EFF3FB"/>
+          </a:solidFill>
+          <a:ln w="3810">
+            <a:solidFill>
+              <a:srgbClr val="D0D8E8"/>
+            </a:solidFill>
+            <a:prstDash val="solid"/>
+          </a:ln>
+        </p:spPr>
+      </p:sp>
+      <p:sp>
+        <p:nvSpPr>
+          <p:cNvPr id="26" name="Text 24"/>
+          <p:cNvSpPr/>
+          <p:nvPr/>
+        </p:nvSpPr>
+        <p:spPr>
+          <a:xfrm>
+            <a:off x="2962656" y="1078992"/>
+            <a:ext cx="950976" cy="329184"/>
+          </a:xfrm>
+          <a:prstGeom prst="rect">
+            <a:avLst/>
+          </a:prstGeom>
+          <a:noFill/>
+          <a:ln/>
+        </p:spPr>
+        <p:txBody>
+          <a:bodyPr wrap="square" lIns="0" tIns="0" rIns="0" bIns="0" rtlCol="0" anchor="ctr"/>
+          <a:lstStyle/>
+          <a:p>
+            <a:pPr indent="0" marL="0">
+              <a:buNone/>
+            </a:pPr>
+            <a:r>
+              <a:rPr lang="en-US" sz="850" dirty="0">
+                <a:solidFill>
+                  <a:srgbClr val="1E2761"/>
+                </a:solidFill>
+              </a:rPr>
+              <a:t>—</a:t>
+            </a:r>
+            <a:endParaRPr lang="en-US" sz="850" dirty="0"/>
+          </a:p>
+        </p:txBody>
+      </p:sp>
+      <p:sp>
+        <p:nvSpPr>
+          <p:cNvPr id="27" name="Shape 25"/>
+          <p:cNvSpPr/>
+          <p:nvPr/>
+        </p:nvSpPr>
+        <p:spPr>
+          <a:xfrm>
+            <a:off x="3941064" y="1078992"/>
+            <a:ext cx="658368" cy="329184"/>
+          </a:xfrm>
+          <a:prstGeom prst="rect">
+            <a:avLst/>
+          </a:prstGeom>
+          <a:solidFill>
+            <a:srgbClr val="EFF3FB"/>
+          </a:solidFill>
+          <a:ln w="3810">
+            <a:solidFill>
+              <a:srgbClr val="D0D8E8"/>
+            </a:solidFill>
+            <a:prstDash val="solid"/>
+          </a:ln>
+        </p:spPr>
+      </p:sp>
+      <p:sp>
+        <p:nvSpPr>
+          <p:cNvPr id="28" name="Text 26"/>
+          <p:cNvSpPr/>
+          <p:nvPr/>
+        </p:nvSpPr>
+        <p:spPr>
+          <a:xfrm>
+            <a:off x="3968496" y="1078992"/>
+            <a:ext cx="603504" cy="329184"/>
+          </a:xfrm>
+          <a:prstGeom prst="rect">
+            <a:avLst/>
+          </a:prstGeom>
+          <a:noFill/>
+          <a:ln/>
+        </p:spPr>
+        <p:txBody>
+          <a:bodyPr wrap="square" lIns="0" tIns="0" rIns="0" bIns="0" rtlCol="0" anchor="ctr"/>
+          <a:lstStyle/>
+          <a:p>
+            <a:pPr indent="0" marL="0">
+              <a:buNone/>
+            </a:pPr>
+            <a:r>
+              <a:rPr lang="en-US" sz="850" b="1" dirty="0">
+                <a:solidFill>
+                  <a:srgbClr val="2ECC8C"/>
+                </a:solidFill>
+              </a:rPr>
+              <a:t>1</a:t>
+            </a:r>
+            <a:endParaRPr lang="en-US" sz="850" dirty="0"/>
+          </a:p>
+        </p:txBody>
+      </p:sp>
+      <p:sp>
+        <p:nvSpPr>
+          <p:cNvPr id="29" name="Shape 27"/>
+          <p:cNvSpPr/>
+          <p:nvPr/>
+        </p:nvSpPr>
+        <p:spPr>
+          <a:xfrm>
+            <a:off x="4599432" y="1078992"/>
+            <a:ext cx="1371600" cy="329184"/>
+          </a:xfrm>
+          <a:prstGeom prst="rect">
+            <a:avLst/>
+          </a:prstGeom>
+          <a:solidFill>
+            <a:srgbClr val="EFF3FB"/>
+          </a:solidFill>
+          <a:ln w="3810">
+            <a:solidFill>
+              <a:srgbClr val="D0D8E8"/>
+            </a:solidFill>
+            <a:prstDash val="solid"/>
+          </a:ln>
+        </p:spPr>
+      </p:sp>
+      <p:sp>
+        <p:nvSpPr>
+          <p:cNvPr id="30" name="Text 28"/>
+          <p:cNvSpPr/>
+          <p:nvPr/>
+        </p:nvSpPr>
+        <p:spPr>
+          <a:xfrm>
+            <a:off x="4626864" y="1078992"/>
+            <a:ext cx="1316736" cy="329184"/>
+          </a:xfrm>
+          <a:prstGeom prst="rect">
+            <a:avLst/>
+          </a:prstGeom>
+          <a:noFill/>
+          <a:ln/>
+        </p:spPr>
+        <p:txBody>
+          <a:bodyPr wrap="square" lIns="0" tIns="0" rIns="0" bIns="0" rtlCol="0" anchor="ctr"/>
+          <a:lstStyle/>
+          <a:p>
+            <a:pPr indent="0" marL="0">
+              <a:buNone/>
+            </a:pPr>
+            <a:r>
+              <a:rPr lang="en-US" sz="850" dirty="0">
+                <a:solidFill>
+                  <a:srgbClr val="1E2761"/>
+                </a:solidFill>
+              </a:rPr>
+              <a:t>range-config + pool</a:t>
+            </a:r>
+            <a:endParaRPr lang="en-US" sz="850" dirty="0"/>
+          </a:p>
+        </p:txBody>
+      </p:sp>
+      <p:sp>
+        <p:nvSpPr>
+          <p:cNvPr id="31" name="Shape 29"/>
+          <p:cNvSpPr/>
+          <p:nvPr/>
+        </p:nvSpPr>
+        <p:spPr>
+          <a:xfrm>
+            <a:off x="5971032" y="1078992"/>
+            <a:ext cx="1691640" cy="329184"/>
+          </a:xfrm>
+          <a:prstGeom prst="rect">
+            <a:avLst/>
+          </a:prstGeom>
+          <a:solidFill>
+            <a:srgbClr val="EFF3FB"/>
+          </a:solidFill>
+          <a:ln w="3810">
+            <a:solidFill>
+              <a:srgbClr val="D0D8E8"/>
+            </a:solidFill>
+            <a:prstDash val="solid"/>
+          </a:ln>
+        </p:spPr>
+      </p:sp>
+      <p:sp>
+        <p:nvSpPr>
+          <p:cNvPr id="32" name="Text 30"/>
+          <p:cNvSpPr/>
+          <p:nvPr/>
+        </p:nvSpPr>
+        <p:spPr>
+          <a:xfrm>
+            <a:off x="5998464" y="1078992"/>
+            <a:ext cx="1636776" cy="329184"/>
+          </a:xfrm>
+          <a:prstGeom prst="rect">
+            <a:avLst/>
+          </a:prstGeom>
+          <a:noFill/>
+          <a:ln/>
+        </p:spPr>
+        <p:txBody>
+          <a:bodyPr wrap="square" lIns="0" tIns="0" rIns="0" bIns="0" rtlCol="0" anchor="ctr"/>
+          <a:lstStyle/>
+          <a:p>
+            <a:pPr indent="0" marL="0">
+              <a:buNone/>
+            </a:pPr>
+            <a:r>
+              <a:rPr lang="en-US" sz="850" dirty="0">
+                <a:solidFill>
+                  <a:srgbClr val="1E2761"/>
+                </a:solidFill>
+              </a:rPr>
+              <a:t>1 IP → imsi_apn_ips (apn=NULL)</a:t>
+            </a:r>
+            <a:endParaRPr lang="en-US" sz="850" dirty="0"/>
+          </a:p>
+        </p:txBody>
+      </p:sp>
+      <p:sp>
+        <p:nvSpPr>
+          <p:cNvPr id="33" name="Shape 31"/>
+          <p:cNvSpPr/>
+          <p:nvPr/>
+        </p:nvSpPr>
+        <p:spPr>
+          <a:xfrm>
+            <a:off x="164592" y="1408176"/>
+            <a:ext cx="347472" cy="329184"/>
+          </a:xfrm>
+          <a:prstGeom prst="rect">
+            <a:avLst/>
+          </a:prstGeom>
+          <a:solidFill>
+            <a:srgbClr val="FFFFFF"/>
+          </a:solidFill>
+          <a:ln w="3810">
+            <a:solidFill>
+              <a:srgbClr val="D0D8E8"/>
+            </a:solidFill>
+            <a:prstDash val="solid"/>
+          </a:ln>
+        </p:spPr>
+      </p:sp>
+      <p:sp>
+        <p:nvSpPr>
+          <p:cNvPr id="34" name="Text 32"/>
+          <p:cNvSpPr/>
+          <p:nvPr/>
+        </p:nvSpPr>
+        <p:spPr>
+          <a:xfrm>
+            <a:off x="192024" y="1408176"/>
+            <a:ext cx="292608" cy="329184"/>
+          </a:xfrm>
+          <a:prstGeom prst="rect">
+            <a:avLst/>
+          </a:prstGeom>
+          <a:noFill/>
+          <a:ln/>
+        </p:spPr>
+        <p:txBody>
+          <a:bodyPr wrap="square" lIns="0" tIns="0" rIns="0" bIns="0" rtlCol="0" anchor="ctr"/>
+          <a:lstStyle/>
+          <a:p>
+            <a:pPr indent="0" marL="0">
+              <a:buNone/>
+            </a:pPr>
+            <a:r>
+              <a:rPr lang="en-US" sz="850" b="1" dirty="0">
+                <a:solidFill>
+                  <a:srgbClr val="1E2761"/>
+                </a:solidFill>
+              </a:rPr>
+              <a:t>S2</a:t>
+            </a:r>
+            <a:endParaRPr lang="en-US" sz="850" dirty="0"/>
+          </a:p>
+        </p:txBody>
+      </p:sp>
+      <p:sp>
+        <p:nvSpPr>
+          <p:cNvPr id="35" name="Shape 33"/>
+          <p:cNvSpPr/>
+          <p:nvPr/>
+        </p:nvSpPr>
+        <p:spPr>
+          <a:xfrm>
+            <a:off x="512064" y="1408176"/>
+            <a:ext cx="1417320" cy="329184"/>
+          </a:xfrm>
+          <a:prstGeom prst="rect">
+            <a:avLst/>
+          </a:prstGeom>
+          <a:solidFill>
+            <a:srgbClr val="FFFFFF"/>
+          </a:solidFill>
+          <a:ln w="3810">
+            <a:solidFill>
+              <a:srgbClr val="D0D8E8"/>
+            </a:solidFill>
+            <a:prstDash val="solid"/>
+          </a:ln>
+        </p:spPr>
+      </p:sp>
+      <p:sp>
+        <p:nvSpPr>
+          <p:cNvPr id="36" name="Text 34"/>
+          <p:cNvSpPr/>
+          <p:nvPr/>
+        </p:nvSpPr>
+        <p:spPr>
+          <a:xfrm>
+            <a:off x="539496" y="1408176"/>
+            <a:ext cx="1362456" cy="329184"/>
+          </a:xfrm>
+          <a:prstGeom prst="rect">
+            <a:avLst/>
+          </a:prstGeom>
+          <a:noFill/>
+          <a:ln/>
+        </p:spPr>
+        <p:txBody>
+          <a:bodyPr wrap="square" lIns="0" tIns="0" rIns="0" bIns="0" rtlCol="0" anchor="ctr"/>
+          <a:lstStyle/>
+          <a:p>
+            <a:pPr indent="0" marL="0">
+              <a:buNone/>
+            </a:pPr>
+            <a:r>
+              <a:rPr lang="en-US" sz="850" dirty="0">
+                <a:solidFill>
+                  <a:srgbClr val="1E2761"/>
+                </a:solidFill>
+              </a:rPr>
+              <a:t>Single-IMSI</a:t>
+            </a:r>
+            <a:endParaRPr lang="en-US" sz="850" dirty="0"/>
+          </a:p>
+        </p:txBody>
+      </p:sp>
+      <p:sp>
+        <p:nvSpPr>
+          <p:cNvPr id="37" name="Shape 35"/>
+          <p:cNvSpPr/>
+          <p:nvPr/>
+        </p:nvSpPr>
+        <p:spPr>
+          <a:xfrm>
+            <a:off x="1929384" y="1408176"/>
+            <a:ext cx="1005840" cy="329184"/>
+          </a:xfrm>
+          <a:prstGeom prst="rect">
+            <a:avLst/>
+          </a:prstGeom>
+          <a:solidFill>
+            <a:srgbClr val="FFFFFF"/>
+          </a:solidFill>
+          <a:ln w="3810">
+            <a:solidFill>
+              <a:srgbClr val="D0D8E8"/>
+            </a:solidFill>
+            <a:prstDash val="solid"/>
+          </a:ln>
+        </p:spPr>
+      </p:sp>
+      <p:sp>
+        <p:nvSpPr>
+          <p:cNvPr id="38" name="Text 36"/>
+          <p:cNvSpPr/>
+          <p:nvPr/>
+        </p:nvSpPr>
+        <p:spPr>
+          <a:xfrm>
+            <a:off x="1956816" y="1408176"/>
+            <a:ext cx="950976" cy="329184"/>
+          </a:xfrm>
+          <a:prstGeom prst="rect">
+            <a:avLst/>
+          </a:prstGeom>
+          <a:noFill/>
+          <a:ln/>
+        </p:spPr>
+        <p:txBody>
+          <a:bodyPr wrap="square" lIns="0" tIns="0" rIns="0" bIns="0" rtlCol="0" anchor="ctr"/>
+          <a:lstStyle/>
+          <a:p>
+            <a:pPr indent="0" marL="0">
+              <a:buNone/>
+            </a:pPr>
+            <a:r>
+              <a:rPr lang="en-US" sz="850" b="1" dirty="0">
+                <a:solidFill>
+                  <a:srgbClr val="2E75B6"/>
+                </a:solidFill>
+              </a:rPr>
+              <a:t>imsi_apn</a:t>
+            </a:r>
+            <a:endParaRPr lang="en-US" sz="850" dirty="0"/>
+          </a:p>
+        </p:txBody>
+      </p:sp>
+      <p:sp>
+        <p:nvSpPr>
+          <p:cNvPr id="39" name="Shape 37"/>
+          <p:cNvSpPr/>
+          <p:nvPr/>
+        </p:nvSpPr>
+        <p:spPr>
+          <a:xfrm>
+            <a:off x="2935224" y="1408176"/>
+            <a:ext cx="1005840" cy="329184"/>
+          </a:xfrm>
+          <a:prstGeom prst="rect">
+            <a:avLst/>
+          </a:prstGeom>
+          <a:solidFill>
+            <a:srgbClr val="FFFFFF"/>
+          </a:solidFill>
+          <a:ln w="3810">
+            <a:solidFill>
+              <a:srgbClr val="D0D8E8"/>
+            </a:solidFill>
+            <a:prstDash val="solid"/>
+          </a:ln>
+        </p:spPr>
+      </p:sp>
+      <p:sp>
+        <p:nvSpPr>
+          <p:cNvPr id="40" name="Text 38"/>
+          <p:cNvSpPr/>
+          <p:nvPr/>
+        </p:nvSpPr>
+        <p:spPr>
+          <a:xfrm>
+            <a:off x="2962656" y="1408176"/>
+            <a:ext cx="950976" cy="329184"/>
+          </a:xfrm>
+          <a:prstGeom prst="rect">
+            <a:avLst/>
+          </a:prstGeom>
+          <a:noFill/>
+          <a:ln/>
+        </p:spPr>
+        <p:txBody>
+          <a:bodyPr wrap="square" lIns="0" tIns="0" rIns="0" bIns="0" rtlCol="0" anchor="ctr"/>
+          <a:lstStyle/>
+          <a:p>
+            <a:pPr indent="0" marL="0">
+              <a:buNone/>
+            </a:pPr>
+            <a:r>
+              <a:rPr lang="en-US" sz="850" dirty="0">
+                <a:solidFill>
+                  <a:srgbClr val="1E2761"/>
+                </a:solidFill>
+              </a:rPr>
+              <a:t>N APNs</a:t>
+            </a:r>
+            <a:endParaRPr lang="en-US" sz="850" dirty="0"/>
+          </a:p>
+        </p:txBody>
+      </p:sp>
+      <p:sp>
+        <p:nvSpPr>
+          <p:cNvPr id="41" name="Shape 39"/>
+          <p:cNvSpPr/>
+          <p:nvPr/>
+        </p:nvSpPr>
+        <p:spPr>
+          <a:xfrm>
+            <a:off x="3941064" y="1408176"/>
+            <a:ext cx="658368" cy="329184"/>
+          </a:xfrm>
+          <a:prstGeom prst="rect">
+            <a:avLst/>
+          </a:prstGeom>
+          <a:solidFill>
+            <a:srgbClr val="FFFFFF"/>
+          </a:solidFill>
+          <a:ln w="3810">
+            <a:solidFill>
+              <a:srgbClr val="D0D8E8"/>
+            </a:solidFill>
+            <a:prstDash val="solid"/>
+          </a:ln>
+        </p:spPr>
+      </p:sp>
+      <p:sp>
+        <p:nvSpPr>
+          <p:cNvPr id="42" name="Text 40"/>
+          <p:cNvSpPr/>
+          <p:nvPr/>
+        </p:nvSpPr>
+        <p:spPr>
+          <a:xfrm>
+            <a:off x="3968496" y="1408176"/>
+            <a:ext cx="603504" cy="329184"/>
+          </a:xfrm>
+          <a:prstGeom prst="rect">
+            <a:avLst/>
+          </a:prstGeom>
+          <a:noFill/>
+          <a:ln/>
+        </p:spPr>
+        <p:txBody>
+          <a:bodyPr wrap="square" lIns="0" tIns="0" rIns="0" bIns="0" rtlCol="0" anchor="ctr"/>
+          <a:lstStyle/>
+          <a:p>
+            <a:pPr indent="0" marL="0">
+              <a:buNone/>
+            </a:pPr>
+            <a:r>
+              <a:rPr lang="en-US" sz="850" b="1" dirty="0">
+                <a:solidFill>
+                  <a:srgbClr val="2ECC8C"/>
+                </a:solidFill>
+              </a:rPr>
+              <a:t>N</a:t>
+            </a:r>
+            <a:endParaRPr lang="en-US" sz="850" dirty="0"/>
+          </a:p>
+        </p:txBody>
+      </p:sp>
+      <p:sp>
+        <p:nvSpPr>
+          <p:cNvPr id="43" name="Shape 41"/>
+          <p:cNvSpPr/>
+          <p:nvPr/>
+        </p:nvSpPr>
+        <p:spPr>
+          <a:xfrm>
+            <a:off x="4599432" y="1408176"/>
+            <a:ext cx="1371600" cy="329184"/>
+          </a:xfrm>
+          <a:prstGeom prst="rect">
+            <a:avLst/>
+          </a:prstGeom>
+          <a:solidFill>
+            <a:srgbClr val="FFFFFF"/>
+          </a:solidFill>
+          <a:ln w="3810">
+            <a:solidFill>
+              <a:srgbClr val="D0D8E8"/>
+            </a:solidFill>
+            <a:prstDash val="solid"/>
+          </a:ln>
+        </p:spPr>
+      </p:sp>
+      <p:sp>
+        <p:nvSpPr>
+          <p:cNvPr id="44" name="Text 42"/>
+          <p:cNvSpPr/>
+          <p:nvPr/>
+        </p:nvSpPr>
+        <p:spPr>
+          <a:xfrm>
+            <a:off x="4626864" y="1408176"/>
+            <a:ext cx="1316736" cy="329184"/>
+          </a:xfrm>
+          <a:prstGeom prst="rect">
+            <a:avLst/>
+          </a:prstGeom>
+          <a:noFill/>
+          <a:ln/>
+        </p:spPr>
+        <p:txBody>
+          <a:bodyPr wrap="square" lIns="0" tIns="0" rIns="0" bIns="0" rtlCol="0" anchor="ctr"/>
+          <a:lstStyle/>
+          <a:p>
+            <a:pPr indent="0" marL="0">
+              <a:buNone/>
+            </a:pPr>
+            <a:r>
+              <a:rPr lang="en-US" sz="850" dirty="0">
+                <a:solidFill>
+                  <a:srgbClr val="1E2761"/>
+                </a:solidFill>
+              </a:rPr>
+              <a:t>range-config + apn-pools (×N)</a:t>
+            </a:r>
+            <a:endParaRPr lang="en-US" sz="850" dirty="0"/>
+          </a:p>
+        </p:txBody>
+      </p:sp>
+      <p:sp>
+        <p:nvSpPr>
+          <p:cNvPr id="45" name="Shape 43"/>
+          <p:cNvSpPr/>
+          <p:nvPr/>
+        </p:nvSpPr>
+        <p:spPr>
+          <a:xfrm>
+            <a:off x="5971032" y="1408176"/>
+            <a:ext cx="1691640" cy="329184"/>
+          </a:xfrm>
+          <a:prstGeom prst="rect">
+            <a:avLst/>
+          </a:prstGeom>
+          <a:solidFill>
+            <a:srgbClr val="FFFFFF"/>
+          </a:solidFill>
+          <a:ln w="3810">
+            <a:solidFill>
+              <a:srgbClr val="D0D8E8"/>
+            </a:solidFill>
+            <a:prstDash val="solid"/>
+          </a:ln>
+        </p:spPr>
+      </p:sp>
+      <p:sp>
+        <p:nvSpPr>
+          <p:cNvPr id="46" name="Text 44"/>
+          <p:cNvSpPr/>
+          <p:nvPr/>
+        </p:nvSpPr>
+        <p:spPr>
+          <a:xfrm>
+            <a:off x="5998464" y="1408176"/>
+            <a:ext cx="1636776" cy="329184"/>
+          </a:xfrm>
+          <a:prstGeom prst="rect">
+            <a:avLst/>
+          </a:prstGeom>
+          <a:noFill/>
+          <a:ln/>
+        </p:spPr>
+        <p:txBody>
+          <a:bodyPr wrap="square" lIns="0" tIns="0" rIns="0" bIns="0" rtlCol="0" anchor="ctr"/>
+          <a:lstStyle/>
+          <a:p>
+            <a:pPr indent="0" marL="0">
+              <a:buNone/>
+            </a:pPr>
+            <a:r>
+              <a:rPr lang="en-US" sz="850" dirty="0">
+                <a:solidFill>
+                  <a:srgbClr val="1E2761"/>
+                </a:solidFill>
+              </a:rPr>
+              <a:t>N IPs → imsi_apn_ips per APN</a:t>
+            </a:r>
+            <a:endParaRPr lang="en-US" sz="850" dirty="0"/>
+          </a:p>
+        </p:txBody>
+      </p:sp>
+      <p:sp>
+        <p:nvSpPr>
+          <p:cNvPr id="47" name="Shape 45"/>
+          <p:cNvSpPr/>
+          <p:nvPr/>
+        </p:nvSpPr>
+        <p:spPr>
+          <a:xfrm>
+            <a:off x="164592" y="1737360"/>
+            <a:ext cx="347472" cy="329184"/>
+          </a:xfrm>
+          <a:prstGeom prst="rect">
+            <a:avLst/>
+          </a:prstGeom>
+          <a:solidFill>
+            <a:srgbClr val="EFF3FB"/>
+          </a:solidFill>
+          <a:ln w="3810">
+            <a:solidFill>
+              <a:srgbClr val="D0D8E8"/>
+            </a:solidFill>
+            <a:prstDash val="solid"/>
+          </a:ln>
+        </p:spPr>
+      </p:sp>
+      <p:sp>
+        <p:nvSpPr>
+          <p:cNvPr id="48" name="Text 46"/>
+          <p:cNvSpPr/>
+          <p:nvPr/>
+        </p:nvSpPr>
+        <p:spPr>
+          <a:xfrm>
+            <a:off x="192024" y="1737360"/>
+            <a:ext cx="292608" cy="329184"/>
+          </a:xfrm>
+          <a:prstGeom prst="rect">
+            <a:avLst/>
+          </a:prstGeom>
+          <a:noFill/>
+          <a:ln/>
+        </p:spPr>
+        <p:txBody>
+          <a:bodyPr wrap="square" lIns="0" tIns="0" rIns="0" bIns="0" rtlCol="0" anchor="ctr"/>
+          <a:lstStyle/>
+          <a:p>
+            <a:pPr indent="0" marL="0">
+              <a:buNone/>
+            </a:pPr>
+            <a:r>
+              <a:rPr lang="en-US" sz="850" b="1" dirty="0">
+                <a:solidFill>
+                  <a:srgbClr val="1E2761"/>
+                </a:solidFill>
+              </a:rPr>
+              <a:t>S3</a:t>
+            </a:r>
+            <a:endParaRPr lang="en-US" sz="850" dirty="0"/>
+          </a:p>
+        </p:txBody>
+      </p:sp>
+      <p:sp>
+        <p:nvSpPr>
+          <p:cNvPr id="49" name="Shape 47"/>
+          <p:cNvSpPr/>
+          <p:nvPr/>
+        </p:nvSpPr>
+        <p:spPr>
+          <a:xfrm>
+            <a:off x="512064" y="1737360"/>
+            <a:ext cx="1417320" cy="329184"/>
+          </a:xfrm>
+          <a:prstGeom prst="rect">
+            <a:avLst/>
+          </a:prstGeom>
+          <a:solidFill>
+            <a:srgbClr val="EFF3FB"/>
+          </a:solidFill>
+          <a:ln w="3810">
+            <a:solidFill>
+              <a:srgbClr val="D0D8E8"/>
+            </a:solidFill>
+            <a:prstDash val="solid"/>
+          </a:ln>
+        </p:spPr>
+      </p:sp>
+      <p:sp>
+        <p:nvSpPr>
+          <p:cNvPr id="50" name="Text 48"/>
+          <p:cNvSpPr/>
+          <p:nvPr/>
+        </p:nvSpPr>
+        <p:spPr>
+          <a:xfrm>
+            <a:off x="539496" y="1737360"/>
+            <a:ext cx="1362456" cy="329184"/>
+          </a:xfrm>
+          <a:prstGeom prst="rect">
+            <a:avLst/>
+          </a:prstGeom>
+          <a:noFill/>
+          <a:ln/>
+        </p:spPr>
+        <p:txBody>
+          <a:bodyPr wrap="square" lIns="0" tIns="0" rIns="0" bIns="0" rtlCol="0" anchor="ctr"/>
+          <a:lstStyle/>
+          <a:p>
+            <a:pPr indent="0" marL="0">
+              <a:buNone/>
+            </a:pPr>
+            <a:r>
+              <a:rPr lang="en-US" sz="850" dirty="0">
+                <a:solidFill>
+                  <a:srgbClr val="1E2761"/>
+                </a:solidFill>
+              </a:rPr>
+              <a:t>Single-IMSI</a:t>
+            </a:r>
+            <a:endParaRPr lang="en-US" sz="850" dirty="0"/>
+          </a:p>
+        </p:txBody>
+      </p:sp>
+      <p:sp>
+        <p:nvSpPr>
+          <p:cNvPr id="51" name="Shape 49"/>
+          <p:cNvSpPr/>
+          <p:nvPr/>
+        </p:nvSpPr>
+        <p:spPr>
+          <a:xfrm>
+            <a:off x="1929384" y="1737360"/>
+            <a:ext cx="1005840" cy="329184"/>
+          </a:xfrm>
+          <a:prstGeom prst="rect">
+            <a:avLst/>
+          </a:prstGeom>
+          <a:solidFill>
+            <a:srgbClr val="EFF3FB"/>
+          </a:solidFill>
+          <a:ln w="3810">
+            <a:solidFill>
+              <a:srgbClr val="D0D8E8"/>
+            </a:solidFill>
+            <a:prstDash val="solid"/>
+          </a:ln>
+        </p:spPr>
+      </p:sp>
+      <p:sp>
+        <p:nvSpPr>
+          <p:cNvPr id="52" name="Text 50"/>
+          <p:cNvSpPr/>
+          <p:nvPr/>
+        </p:nvSpPr>
+        <p:spPr>
+          <a:xfrm>
+            <a:off x="1956816" y="1737360"/>
+            <a:ext cx="950976" cy="329184"/>
+          </a:xfrm>
+          <a:prstGeom prst="rect">
+            <a:avLst/>
+          </a:prstGeom>
+          <a:noFill/>
+          <a:ln/>
+        </p:spPr>
+        <p:txBody>
+          <a:bodyPr wrap="square" lIns="0" tIns="0" rIns="0" bIns="0" rtlCol="0" anchor="ctr"/>
+          <a:lstStyle/>
+          <a:p>
+            <a:pPr indent="0" marL="0">
+              <a:buNone/>
+            </a:pPr>
+            <a:r>
+              <a:rPr lang="en-US" sz="850" b="1" dirty="0">
+                <a:solidFill>
+                  <a:srgbClr val="2E75B6"/>
+                </a:solidFill>
+              </a:rPr>
+              <a:t>iccid</a:t>
+            </a:r>
+            <a:endParaRPr lang="en-US" sz="850" dirty="0"/>
+          </a:p>
+        </p:txBody>
+      </p:sp>
+      <p:sp>
+        <p:nvSpPr>
+          <p:cNvPr id="53" name="Shape 51"/>
+          <p:cNvSpPr/>
+          <p:nvPr/>
+        </p:nvSpPr>
+        <p:spPr>
+          <a:xfrm>
+            <a:off x="2935224" y="1737360"/>
+            <a:ext cx="1005840" cy="329184"/>
+          </a:xfrm>
+          <a:prstGeom prst="rect">
+            <a:avLst/>
+          </a:prstGeom>
+          <a:solidFill>
+            <a:srgbClr val="EFF3FB"/>
+          </a:solidFill>
+          <a:ln w="3810">
+            <a:solidFill>
+              <a:srgbClr val="D0D8E8"/>
+            </a:solidFill>
+            <a:prstDash val="solid"/>
+          </a:ln>
+        </p:spPr>
+      </p:sp>
+      <p:sp>
+        <p:nvSpPr>
+          <p:cNvPr id="54" name="Text 52"/>
+          <p:cNvSpPr/>
+          <p:nvPr/>
+        </p:nvSpPr>
+        <p:spPr>
+          <a:xfrm>
+            <a:off x="2962656" y="1737360"/>
+            <a:ext cx="950976" cy="329184"/>
+          </a:xfrm>
+          <a:prstGeom prst="rect">
+            <a:avLst/>
+          </a:prstGeom>
+          <a:noFill/>
+          <a:ln/>
+        </p:spPr>
+        <p:txBody>
+          <a:bodyPr wrap="square" lIns="0" tIns="0" rIns="0" bIns="0" rtlCol="0" anchor="ctr"/>
+          <a:lstStyle/>
+          <a:p>
+            <a:pPr indent="0" marL="0">
+              <a:buNone/>
+            </a:pPr>
+            <a:r>
+              <a:rPr lang="en-US" sz="850" dirty="0">
+                <a:solidFill>
+                  <a:srgbClr val="1E2761"/>
+                </a:solidFill>
+              </a:rPr>
+              <a:t>—</a:t>
+            </a:r>
+            <a:endParaRPr lang="en-US" sz="850" dirty="0"/>
+          </a:p>
+        </p:txBody>
+      </p:sp>
+      <p:sp>
+        <p:nvSpPr>
+          <p:cNvPr id="55" name="Shape 53"/>
+          <p:cNvSpPr/>
+          <p:nvPr/>
+        </p:nvSpPr>
+        <p:spPr>
+          <a:xfrm>
+            <a:off x="3941064" y="1737360"/>
+            <a:ext cx="658368" cy="329184"/>
+          </a:xfrm>
+          <a:prstGeom prst="rect">
+            <a:avLst/>
+          </a:prstGeom>
+          <a:solidFill>
+            <a:srgbClr val="EFF3FB"/>
+          </a:solidFill>
+          <a:ln w="3810">
+            <a:solidFill>
+              <a:srgbClr val="D0D8E8"/>
+            </a:solidFill>
+            <a:prstDash val="solid"/>
+          </a:ln>
+        </p:spPr>
+      </p:sp>
+      <p:sp>
+        <p:nvSpPr>
+          <p:cNvPr id="56" name="Text 54"/>
+          <p:cNvSpPr/>
+          <p:nvPr/>
+        </p:nvSpPr>
+        <p:spPr>
+          <a:xfrm>
+            <a:off x="3968496" y="1737360"/>
+            <a:ext cx="603504" cy="329184"/>
+          </a:xfrm>
+          <a:prstGeom prst="rect">
+            <a:avLst/>
+          </a:prstGeom>
+          <a:noFill/>
+          <a:ln/>
+        </p:spPr>
+        <p:txBody>
+          <a:bodyPr wrap="square" lIns="0" tIns="0" rIns="0" bIns="0" rtlCol="0" anchor="ctr"/>
+          <a:lstStyle/>
+          <a:p>
+            <a:pPr indent="0" marL="0">
+              <a:buNone/>
+            </a:pPr>
+            <a:r>
+              <a:rPr lang="en-US" sz="850" b="1" dirty="0">
+                <a:solidFill>
+                  <a:srgbClr val="2ECC8C"/>
+                </a:solidFill>
+              </a:rPr>
+              <a:t>1</a:t>
+            </a:r>
+            <a:endParaRPr lang="en-US" sz="850" dirty="0"/>
+          </a:p>
+        </p:txBody>
+      </p:sp>
+      <p:sp>
+        <p:nvSpPr>
+          <p:cNvPr id="57" name="Shape 55"/>
+          <p:cNvSpPr/>
+          <p:nvPr/>
+        </p:nvSpPr>
+        <p:spPr>
+          <a:xfrm>
+            <a:off x="4599432" y="1737360"/>
+            <a:ext cx="1371600" cy="329184"/>
+          </a:xfrm>
+          <a:prstGeom prst="rect">
+            <a:avLst/>
+          </a:prstGeom>
+          <a:solidFill>
+            <a:srgbClr val="EFF3FB"/>
+          </a:solidFill>
+          <a:ln w="3810">
+            <a:solidFill>
+              <a:srgbClr val="D0D8E8"/>
+            </a:solidFill>
+            <a:prstDash val="solid"/>
+          </a:ln>
+        </p:spPr>
+      </p:sp>
+      <p:sp>
+        <p:nvSpPr>
+          <p:cNvPr id="58" name="Text 56"/>
+          <p:cNvSpPr/>
+          <p:nvPr/>
+        </p:nvSpPr>
+        <p:spPr>
+          <a:xfrm>
+            <a:off x="4626864" y="1737360"/>
+            <a:ext cx="1316736" cy="329184"/>
+          </a:xfrm>
+          <a:prstGeom prst="rect">
+            <a:avLst/>
+          </a:prstGeom>
+          <a:noFill/>
+          <a:ln/>
+        </p:spPr>
+        <p:txBody>
+          <a:bodyPr wrap="square" lIns="0" tIns="0" rIns="0" bIns="0" rtlCol="0" anchor="ctr"/>
+          <a:lstStyle/>
+          <a:p>
+            <a:pPr indent="0" marL="0">
+              <a:buNone/>
+            </a:pPr>
+            <a:r>
+              <a:rPr lang="en-US" sz="850" dirty="0">
+                <a:solidFill>
+                  <a:srgbClr val="1E2761"/>
+                </a:solidFill>
+              </a:rPr>
+              <a:t>range-config + pool</a:t>
+            </a:r>
+            <a:endParaRPr lang="en-US" sz="850" dirty="0"/>
+          </a:p>
+        </p:txBody>
+      </p:sp>
+      <p:sp>
+        <p:nvSpPr>
+          <p:cNvPr id="59" name="Shape 57"/>
+          <p:cNvSpPr/>
+          <p:nvPr/>
+        </p:nvSpPr>
+        <p:spPr>
+          <a:xfrm>
+            <a:off x="5971032" y="1737360"/>
+            <a:ext cx="1691640" cy="329184"/>
+          </a:xfrm>
+          <a:prstGeom prst="rect">
+            <a:avLst/>
+          </a:prstGeom>
+          <a:solidFill>
+            <a:srgbClr val="EFF3FB"/>
+          </a:solidFill>
+          <a:ln w="3810">
+            <a:solidFill>
+              <a:srgbClr val="D0D8E8"/>
+            </a:solidFill>
+            <a:prstDash val="solid"/>
+          </a:ln>
+        </p:spPr>
+      </p:sp>
+      <p:sp>
+        <p:nvSpPr>
+          <p:cNvPr id="60" name="Text 58"/>
+          <p:cNvSpPr/>
+          <p:nvPr/>
+        </p:nvSpPr>
+        <p:spPr>
+          <a:xfrm>
+            <a:off x="5998464" y="1737360"/>
+            <a:ext cx="1636776" cy="329184"/>
+          </a:xfrm>
+          <a:prstGeom prst="rect">
+            <a:avLst/>
+          </a:prstGeom>
+          <a:noFill/>
+          <a:ln/>
+        </p:spPr>
+        <p:txBody>
+          <a:bodyPr wrap="square" lIns="0" tIns="0" rIns="0" bIns="0" rtlCol="0" anchor="ctr"/>
+          <a:lstStyle/>
+          <a:p>
+            <a:pPr indent="0" marL="0">
+              <a:buNone/>
+            </a:pPr>
+            <a:r>
+              <a:rPr lang="en-US" sz="850" dirty="0">
+                <a:solidFill>
+                  <a:srgbClr val="1E2761"/>
+                </a:solidFill>
+              </a:rPr>
+              <a:t>1 IP → device_apn_ips (apn=NULL)</a:t>
+            </a:r>
+            <a:endParaRPr lang="en-US" sz="850" dirty="0"/>
+          </a:p>
+        </p:txBody>
+      </p:sp>
+      <p:sp>
+        <p:nvSpPr>
+          <p:cNvPr id="61" name="Shape 59"/>
+          <p:cNvSpPr/>
+          <p:nvPr/>
+        </p:nvSpPr>
+        <p:spPr>
+          <a:xfrm>
+            <a:off x="164592" y="2066544"/>
+            <a:ext cx="347472" cy="329184"/>
+          </a:xfrm>
+          <a:prstGeom prst="rect">
+            <a:avLst/>
+          </a:prstGeom>
+          <a:solidFill>
+            <a:srgbClr val="FFFFFF"/>
+          </a:solidFill>
+          <a:ln w="3810">
+            <a:solidFill>
+              <a:srgbClr val="D0D8E8"/>
+            </a:solidFill>
+            <a:prstDash val="solid"/>
+          </a:ln>
+        </p:spPr>
+      </p:sp>
+      <p:sp>
+        <p:nvSpPr>
+          <p:cNvPr id="62" name="Text 60"/>
+          <p:cNvSpPr/>
+          <p:nvPr/>
+        </p:nvSpPr>
+        <p:spPr>
+          <a:xfrm>
+            <a:off x="192024" y="2066544"/>
+            <a:ext cx="292608" cy="329184"/>
+          </a:xfrm>
+          <a:prstGeom prst="rect">
+            <a:avLst/>
+          </a:prstGeom>
+          <a:noFill/>
+          <a:ln/>
+        </p:spPr>
+        <p:txBody>
+          <a:bodyPr wrap="square" lIns="0" tIns="0" rIns="0" bIns="0" rtlCol="0" anchor="ctr"/>
+          <a:lstStyle/>
+          <a:p>
+            <a:pPr indent="0" marL="0">
+              <a:buNone/>
+            </a:pPr>
+            <a:r>
+              <a:rPr lang="en-US" sz="850" b="1" dirty="0">
+                <a:solidFill>
+                  <a:srgbClr val="1E2761"/>
+                </a:solidFill>
+              </a:rPr>
+              <a:t>S4</a:t>
+            </a:r>
+            <a:endParaRPr lang="en-US" sz="850" dirty="0"/>
+          </a:p>
+        </p:txBody>
+      </p:sp>
+      <p:sp>
+        <p:nvSpPr>
+          <p:cNvPr id="63" name="Shape 61"/>
+          <p:cNvSpPr/>
+          <p:nvPr/>
+        </p:nvSpPr>
+        <p:spPr>
+          <a:xfrm>
+            <a:off x="512064" y="2066544"/>
+            <a:ext cx="1417320" cy="329184"/>
+          </a:xfrm>
+          <a:prstGeom prst="rect">
+            <a:avLst/>
+          </a:prstGeom>
+          <a:solidFill>
+            <a:srgbClr val="FFFFFF"/>
+          </a:solidFill>
+          <a:ln w="3810">
+            <a:solidFill>
+              <a:srgbClr val="D0D8E8"/>
+            </a:solidFill>
+            <a:prstDash val="solid"/>
+          </a:ln>
+        </p:spPr>
+      </p:sp>
+      <p:sp>
+        <p:nvSpPr>
+          <p:cNvPr id="64" name="Text 62"/>
+          <p:cNvSpPr/>
+          <p:nvPr/>
+        </p:nvSpPr>
+        <p:spPr>
+          <a:xfrm>
+            <a:off x="539496" y="2066544"/>
+            <a:ext cx="1362456" cy="329184"/>
+          </a:xfrm>
+          <a:prstGeom prst="rect">
+            <a:avLst/>
+          </a:prstGeom>
+          <a:noFill/>
+          <a:ln/>
+        </p:spPr>
+        <p:txBody>
+          <a:bodyPr wrap="square" lIns="0" tIns="0" rIns="0" bIns="0" rtlCol="0" anchor="ctr"/>
+          <a:lstStyle/>
+          <a:p>
+            <a:pPr indent="0" marL="0">
+              <a:buNone/>
+            </a:pPr>
+            <a:r>
+              <a:rPr lang="en-US" sz="850" dirty="0">
+                <a:solidFill>
+                  <a:srgbClr val="1E2761"/>
+                </a:solidFill>
+              </a:rPr>
+              <a:t>Single-IMSI</a:t>
+            </a:r>
+            <a:endParaRPr lang="en-US" sz="850" dirty="0"/>
+          </a:p>
+        </p:txBody>
+      </p:sp>
+      <p:sp>
+        <p:nvSpPr>
+          <p:cNvPr id="65" name="Shape 63"/>
+          <p:cNvSpPr/>
+          <p:nvPr/>
+        </p:nvSpPr>
+        <p:spPr>
+          <a:xfrm>
+            <a:off x="1929384" y="2066544"/>
+            <a:ext cx="1005840" cy="329184"/>
+          </a:xfrm>
+          <a:prstGeom prst="rect">
+            <a:avLst/>
+          </a:prstGeom>
+          <a:solidFill>
+            <a:srgbClr val="FFFFFF"/>
+          </a:solidFill>
+          <a:ln w="3810">
+            <a:solidFill>
+              <a:srgbClr val="D0D8E8"/>
+            </a:solidFill>
+            <a:prstDash val="solid"/>
+          </a:ln>
+        </p:spPr>
+      </p:sp>
+      <p:sp>
+        <p:nvSpPr>
+          <p:cNvPr id="66" name="Text 64"/>
+          <p:cNvSpPr/>
+          <p:nvPr/>
+        </p:nvSpPr>
+        <p:spPr>
+          <a:xfrm>
+            <a:off x="1956816" y="2066544"/>
+            <a:ext cx="950976" cy="329184"/>
+          </a:xfrm>
+          <a:prstGeom prst="rect">
+            <a:avLst/>
+          </a:prstGeom>
+          <a:noFill/>
+          <a:ln/>
+        </p:spPr>
+        <p:txBody>
+          <a:bodyPr wrap="square" lIns="0" tIns="0" rIns="0" bIns="0" rtlCol="0" anchor="ctr"/>
+          <a:lstStyle/>
+          <a:p>
+            <a:pPr indent="0" marL="0">
+              <a:buNone/>
+            </a:pPr>
+            <a:r>
+              <a:rPr lang="en-US" sz="850" b="1" dirty="0">
+                <a:solidFill>
+                  <a:srgbClr val="2E75B6"/>
+                </a:solidFill>
+              </a:rPr>
+              <a:t>iccid_apn</a:t>
+            </a:r>
+            <a:endParaRPr lang="en-US" sz="850" dirty="0"/>
+          </a:p>
+        </p:txBody>
+      </p:sp>
+      <p:sp>
+        <p:nvSpPr>
+          <p:cNvPr id="67" name="Shape 65"/>
+          <p:cNvSpPr/>
+          <p:nvPr/>
+        </p:nvSpPr>
+        <p:spPr>
+          <a:xfrm>
+            <a:off x="2935224" y="2066544"/>
+            <a:ext cx="1005840" cy="329184"/>
+          </a:xfrm>
+          <a:prstGeom prst="rect">
+            <a:avLst/>
+          </a:prstGeom>
+          <a:solidFill>
+            <a:srgbClr val="FFFFFF"/>
+          </a:solidFill>
+          <a:ln w="3810">
+            <a:solidFill>
+              <a:srgbClr val="D0D8E8"/>
+            </a:solidFill>
+            <a:prstDash val="solid"/>
+          </a:ln>
+        </p:spPr>
+      </p:sp>
+      <p:sp>
+        <p:nvSpPr>
+          <p:cNvPr id="68" name="Text 66"/>
+          <p:cNvSpPr/>
+          <p:nvPr/>
+        </p:nvSpPr>
+        <p:spPr>
+          <a:xfrm>
+            <a:off x="2962656" y="2066544"/>
+            <a:ext cx="950976" cy="329184"/>
+          </a:xfrm>
+          <a:prstGeom prst="rect">
+            <a:avLst/>
+          </a:prstGeom>
+          <a:noFill/>
+          <a:ln/>
+        </p:spPr>
+        <p:txBody>
+          <a:bodyPr wrap="square" lIns="0" tIns="0" rIns="0" bIns="0" rtlCol="0" anchor="ctr"/>
+          <a:lstStyle/>
+          <a:p>
+            <a:pPr indent="0" marL="0">
+              <a:buNone/>
+            </a:pPr>
+            <a:r>
+              <a:rPr lang="en-US" sz="850" dirty="0">
+                <a:solidFill>
+                  <a:srgbClr val="1E2761"/>
+                </a:solidFill>
+              </a:rPr>
+              <a:t>N APNs</a:t>
+            </a:r>
+            <a:endParaRPr lang="en-US" sz="850" dirty="0"/>
+          </a:p>
+        </p:txBody>
+      </p:sp>
+      <p:sp>
+        <p:nvSpPr>
+          <p:cNvPr id="69" name="Shape 67"/>
+          <p:cNvSpPr/>
+          <p:nvPr/>
+        </p:nvSpPr>
+        <p:spPr>
+          <a:xfrm>
+            <a:off x="3941064" y="2066544"/>
+            <a:ext cx="658368" cy="329184"/>
+          </a:xfrm>
+          <a:prstGeom prst="rect">
+            <a:avLst/>
+          </a:prstGeom>
+          <a:solidFill>
+            <a:srgbClr val="FFFFFF"/>
+          </a:solidFill>
+          <a:ln w="3810">
+            <a:solidFill>
+              <a:srgbClr val="D0D8E8"/>
+            </a:solidFill>
+            <a:prstDash val="solid"/>
+          </a:ln>
+        </p:spPr>
+      </p:sp>
+      <p:sp>
+        <p:nvSpPr>
+          <p:cNvPr id="70" name="Text 68"/>
+          <p:cNvSpPr/>
+          <p:nvPr/>
+        </p:nvSpPr>
+        <p:spPr>
+          <a:xfrm>
+            <a:off x="3968496" y="2066544"/>
+            <a:ext cx="603504" cy="329184"/>
+          </a:xfrm>
+          <a:prstGeom prst="rect">
+            <a:avLst/>
+          </a:prstGeom>
+          <a:noFill/>
+          <a:ln/>
+        </p:spPr>
+        <p:txBody>
+          <a:bodyPr wrap="square" lIns="0" tIns="0" rIns="0" bIns="0" rtlCol="0" anchor="ctr"/>
+          <a:lstStyle/>
+          <a:p>
+            <a:pPr indent="0" marL="0">
+              <a:buNone/>
+            </a:pPr>
+            <a:r>
+              <a:rPr lang="en-US" sz="850" b="1" dirty="0">
+                <a:solidFill>
+                  <a:srgbClr val="2ECC8C"/>
+                </a:solidFill>
+              </a:rPr>
+              <a:t>N</a:t>
+            </a:r>
+            <a:endParaRPr lang="en-US" sz="850" dirty="0"/>
+          </a:p>
+        </p:txBody>
+      </p:sp>
+      <p:sp>
+        <p:nvSpPr>
+          <p:cNvPr id="71" name="Shape 69"/>
+          <p:cNvSpPr/>
+          <p:nvPr/>
+        </p:nvSpPr>
+        <p:spPr>
+          <a:xfrm>
+            <a:off x="4599432" y="2066544"/>
+            <a:ext cx="1371600" cy="329184"/>
+          </a:xfrm>
+          <a:prstGeom prst="rect">
+            <a:avLst/>
+          </a:prstGeom>
+          <a:solidFill>
+            <a:srgbClr val="FFFFFF"/>
+          </a:solidFill>
+          <a:ln w="3810">
+            <a:solidFill>
+              <a:srgbClr val="D0D8E8"/>
+            </a:solidFill>
+            <a:prstDash val="solid"/>
+          </a:ln>
+        </p:spPr>
+      </p:sp>
+      <p:sp>
+        <p:nvSpPr>
+          <p:cNvPr id="72" name="Text 70"/>
+          <p:cNvSpPr/>
+          <p:nvPr/>
+        </p:nvSpPr>
+        <p:spPr>
+          <a:xfrm>
+            <a:off x="4626864" y="2066544"/>
+            <a:ext cx="1316736" cy="329184"/>
+          </a:xfrm>
+          <a:prstGeom prst="rect">
+            <a:avLst/>
+          </a:prstGeom>
+          <a:noFill/>
+          <a:ln/>
+        </p:spPr>
+        <p:txBody>
+          <a:bodyPr wrap="square" lIns="0" tIns="0" rIns="0" bIns="0" rtlCol="0" anchor="ctr"/>
+          <a:lstStyle/>
+          <a:p>
+            <a:pPr indent="0" marL="0">
+              <a:buNone/>
+            </a:pPr>
+            <a:r>
+              <a:rPr lang="en-US" sz="850" dirty="0">
+                <a:solidFill>
+                  <a:srgbClr val="1E2761"/>
+                </a:solidFill>
+              </a:rPr>
+              <a:t>range-config + apn-pools (×N)</a:t>
+            </a:r>
+            <a:endParaRPr lang="en-US" sz="850" dirty="0"/>
+          </a:p>
+        </p:txBody>
+      </p:sp>
+      <p:sp>
+        <p:nvSpPr>
+          <p:cNvPr id="73" name="Shape 71"/>
+          <p:cNvSpPr/>
+          <p:nvPr/>
+        </p:nvSpPr>
+        <p:spPr>
+          <a:xfrm>
+            <a:off x="5971032" y="2066544"/>
+            <a:ext cx="1691640" cy="329184"/>
+          </a:xfrm>
+          <a:prstGeom prst="rect">
+            <a:avLst/>
+          </a:prstGeom>
+          <a:solidFill>
+            <a:srgbClr val="FFFFFF"/>
+          </a:solidFill>
+          <a:ln w="3810">
+            <a:solidFill>
+              <a:srgbClr val="D0D8E8"/>
+            </a:solidFill>
+            <a:prstDash val="solid"/>
+          </a:ln>
+        </p:spPr>
+      </p:sp>
+      <p:sp>
+        <p:nvSpPr>
+          <p:cNvPr id="74" name="Text 72"/>
+          <p:cNvSpPr/>
+          <p:nvPr/>
+        </p:nvSpPr>
+        <p:spPr>
+          <a:xfrm>
+            <a:off x="5998464" y="2066544"/>
+            <a:ext cx="1636776" cy="329184"/>
+          </a:xfrm>
+          <a:prstGeom prst="rect">
+            <a:avLst/>
+          </a:prstGeom>
+          <a:noFill/>
+          <a:ln/>
+        </p:spPr>
+        <p:txBody>
+          <a:bodyPr wrap="square" lIns="0" tIns="0" rIns="0" bIns="0" rtlCol="0" anchor="ctr"/>
+          <a:lstStyle/>
+          <a:p>
+            <a:pPr indent="0" marL="0">
+              <a:buNone/>
+            </a:pPr>
+            <a:r>
+              <a:rPr lang="en-US" sz="850" dirty="0">
+                <a:solidFill>
+                  <a:srgbClr val="1E2761"/>
+                </a:solidFill>
+              </a:rPr>
+              <a:t>N IPs → device_apn_ips per APN</a:t>
+            </a:r>
+            <a:endParaRPr lang="en-US" sz="850" dirty="0"/>
+          </a:p>
+        </p:txBody>
+      </p:sp>
+      <p:sp>
+        <p:nvSpPr>
+          <p:cNvPr id="75" name="Shape 73"/>
+          <p:cNvSpPr/>
+          <p:nvPr/>
+        </p:nvSpPr>
+        <p:spPr>
+          <a:xfrm>
+            <a:off x="164592" y="2395728"/>
+            <a:ext cx="347472" cy="329184"/>
+          </a:xfrm>
+          <a:prstGeom prst="rect">
+            <a:avLst/>
+          </a:prstGeom>
+          <a:solidFill>
+            <a:srgbClr val="EFF3FB"/>
+          </a:solidFill>
+          <a:ln w="3810">
+            <a:solidFill>
+              <a:srgbClr val="D0D8E8"/>
+            </a:solidFill>
+            <a:prstDash val="solid"/>
+          </a:ln>
+        </p:spPr>
+      </p:sp>
+      <p:sp>
+        <p:nvSpPr>
+          <p:cNvPr id="76" name="Text 74"/>
+          <p:cNvSpPr/>
+          <p:nvPr/>
+        </p:nvSpPr>
+        <p:spPr>
+          <a:xfrm>
+            <a:off x="192024" y="2395728"/>
+            <a:ext cx="292608" cy="329184"/>
+          </a:xfrm>
+          <a:prstGeom prst="rect">
+            <a:avLst/>
+          </a:prstGeom>
+          <a:noFill/>
+          <a:ln/>
+        </p:spPr>
+        <p:txBody>
+          <a:bodyPr wrap="square" lIns="0" tIns="0" rIns="0" bIns="0" rtlCol="0" anchor="ctr"/>
+          <a:lstStyle/>
+          <a:p>
+            <a:pPr indent="0" marL="0">
+              <a:buNone/>
+            </a:pPr>
+            <a:r>
+              <a:rPr lang="en-US" sz="850" b="1" dirty="0">
+                <a:solidFill>
+                  <a:srgbClr val="1E2761"/>
+                </a:solidFill>
+              </a:rPr>
+              <a:t>M1</a:t>
+            </a:r>
+            <a:endParaRPr lang="en-US" sz="850" dirty="0"/>
+          </a:p>
+        </p:txBody>
+      </p:sp>
+      <p:sp>
+        <p:nvSpPr>
+          <p:cNvPr id="77" name="Shape 75"/>
+          <p:cNvSpPr/>
+          <p:nvPr/>
+        </p:nvSpPr>
+        <p:spPr>
+          <a:xfrm>
+            <a:off x="512064" y="2395728"/>
+            <a:ext cx="1417320" cy="329184"/>
+          </a:xfrm>
+          <a:prstGeom prst="rect">
+            <a:avLst/>
+          </a:prstGeom>
+          <a:solidFill>
+            <a:srgbClr val="EFF3FB"/>
+          </a:solidFill>
+          <a:ln w="3810">
+            <a:solidFill>
+              <a:srgbClr val="D0D8E8"/>
+            </a:solidFill>
+            <a:prstDash val="solid"/>
+          </a:ln>
+        </p:spPr>
+      </p:sp>
+      <p:sp>
+        <p:nvSpPr>
+          <p:cNvPr id="78" name="Text 76"/>
+          <p:cNvSpPr/>
+          <p:nvPr/>
+        </p:nvSpPr>
+        <p:spPr>
+          <a:xfrm>
+            <a:off x="539496" y="2395728"/>
+            <a:ext cx="1362456" cy="329184"/>
+          </a:xfrm>
+          <a:prstGeom prst="rect">
+            <a:avLst/>
+          </a:prstGeom>
+          <a:noFill/>
+          <a:ln/>
+        </p:spPr>
+        <p:txBody>
+          <a:bodyPr wrap="square" lIns="0" tIns="0" rIns="0" bIns="0" rtlCol="0" anchor="ctr"/>
+          <a:lstStyle/>
+          <a:p>
+            <a:pPr indent="0" marL="0">
+              <a:buNone/>
+            </a:pPr>
+            <a:r>
+              <a:rPr lang="en-US" sz="850" dirty="0">
+                <a:solidFill>
+                  <a:srgbClr val="1E2761"/>
+                </a:solidFill>
+              </a:rPr>
+              <a:t>Multi-IMSI (M)</a:t>
+            </a:r>
+            <a:endParaRPr lang="en-US" sz="850" dirty="0"/>
+          </a:p>
+        </p:txBody>
+      </p:sp>
+      <p:sp>
+        <p:nvSpPr>
+          <p:cNvPr id="79" name="Shape 77"/>
+          <p:cNvSpPr/>
+          <p:nvPr/>
+        </p:nvSpPr>
+        <p:spPr>
+          <a:xfrm>
+            <a:off x="1929384" y="2395728"/>
+            <a:ext cx="1005840" cy="329184"/>
+          </a:xfrm>
+          <a:prstGeom prst="rect">
+            <a:avLst/>
+          </a:prstGeom>
+          <a:solidFill>
+            <a:srgbClr val="EFF3FB"/>
+          </a:solidFill>
+          <a:ln w="3810">
+            <a:solidFill>
+              <a:srgbClr val="D0D8E8"/>
+            </a:solidFill>
+            <a:prstDash val="solid"/>
+          </a:ln>
+        </p:spPr>
+      </p:sp>
+      <p:sp>
+        <p:nvSpPr>
+          <p:cNvPr id="80" name="Text 78"/>
+          <p:cNvSpPr/>
+          <p:nvPr/>
+        </p:nvSpPr>
+        <p:spPr>
+          <a:xfrm>
+            <a:off x="1956816" y="2395728"/>
+            <a:ext cx="950976" cy="329184"/>
+          </a:xfrm>
+          <a:prstGeom prst="rect">
+            <a:avLst/>
+          </a:prstGeom>
+          <a:noFill/>
+          <a:ln/>
+        </p:spPr>
+        <p:txBody>
+          <a:bodyPr wrap="square" lIns="0" tIns="0" rIns="0" bIns="0" rtlCol="0" anchor="ctr"/>
+          <a:lstStyle/>
+          <a:p>
+            <a:pPr indent="0" marL="0">
+              <a:buNone/>
+            </a:pPr>
+            <a:r>
+              <a:rPr lang="en-US" sz="850" b="1" dirty="0">
+                <a:solidFill>
+                  <a:srgbClr val="4FC3F7"/>
+                </a:solidFill>
+              </a:rPr>
+              <a:t>imsi</a:t>
+            </a:r>
+            <a:endParaRPr lang="en-US" sz="850" dirty="0"/>
+          </a:p>
+        </p:txBody>
+      </p:sp>
+      <p:sp>
+        <p:nvSpPr>
+          <p:cNvPr id="81" name="Shape 79"/>
+          <p:cNvSpPr/>
+          <p:nvPr/>
+        </p:nvSpPr>
+        <p:spPr>
+          <a:xfrm>
+            <a:off x="2935224" y="2395728"/>
+            <a:ext cx="1005840" cy="329184"/>
+          </a:xfrm>
+          <a:prstGeom prst="rect">
+            <a:avLst/>
+          </a:prstGeom>
+          <a:solidFill>
+            <a:srgbClr val="EFF3FB"/>
+          </a:solidFill>
+          <a:ln w="3810">
+            <a:solidFill>
+              <a:srgbClr val="D0D8E8"/>
+            </a:solidFill>
+            <a:prstDash val="solid"/>
+          </a:ln>
+        </p:spPr>
+      </p:sp>
+      <p:sp>
+        <p:nvSpPr>
+          <p:cNvPr id="82" name="Text 80"/>
+          <p:cNvSpPr/>
+          <p:nvPr/>
+        </p:nvSpPr>
+        <p:spPr>
+          <a:xfrm>
+            <a:off x="2962656" y="2395728"/>
+            <a:ext cx="950976" cy="329184"/>
+          </a:xfrm>
+          <a:prstGeom prst="rect">
+            <a:avLst/>
+          </a:prstGeom>
+          <a:noFill/>
+          <a:ln/>
+        </p:spPr>
+        <p:txBody>
+          <a:bodyPr wrap="square" lIns="0" tIns="0" rIns="0" bIns="0" rtlCol="0" anchor="ctr"/>
+          <a:lstStyle/>
+          <a:p>
+            <a:pPr indent="0" marL="0">
+              <a:buNone/>
+            </a:pPr>
+            <a:r>
+              <a:rPr lang="en-US" sz="850" dirty="0">
+                <a:solidFill>
+                  <a:srgbClr val="1E2761"/>
+                </a:solidFill>
+              </a:rPr>
+              <a:t>—</a:t>
+            </a:r>
+            <a:endParaRPr lang="en-US" sz="850" dirty="0"/>
+          </a:p>
+        </p:txBody>
+      </p:sp>
+      <p:sp>
+        <p:nvSpPr>
+          <p:cNvPr id="83" name="Shape 81"/>
+          <p:cNvSpPr/>
+          <p:nvPr/>
+        </p:nvSpPr>
+        <p:spPr>
+          <a:xfrm>
+            <a:off x="3941064" y="2395728"/>
+            <a:ext cx="658368" cy="329184"/>
+          </a:xfrm>
+          <a:prstGeom prst="rect">
+            <a:avLst/>
+          </a:prstGeom>
+          <a:solidFill>
+            <a:srgbClr val="EFF3FB"/>
+          </a:solidFill>
+          <a:ln w="3810">
+            <a:solidFill>
+              <a:srgbClr val="D0D8E8"/>
+            </a:solidFill>
+            <a:prstDash val="solid"/>
+          </a:ln>
+        </p:spPr>
+      </p:sp>
+      <p:sp>
+        <p:nvSpPr>
+          <p:cNvPr id="84" name="Text 82"/>
+          <p:cNvSpPr/>
+          <p:nvPr/>
+        </p:nvSpPr>
+        <p:spPr>
+          <a:xfrm>
+            <a:off x="3968496" y="2395728"/>
+            <a:ext cx="603504" cy="329184"/>
+          </a:xfrm>
+          <a:prstGeom prst="rect">
+            <a:avLst/>
+          </a:prstGeom>
+          <a:noFill/>
+          <a:ln/>
+        </p:spPr>
+        <p:txBody>
+          <a:bodyPr wrap="square" lIns="0" tIns="0" rIns="0" bIns="0" rtlCol="0" anchor="ctr"/>
+          <a:lstStyle/>
+          <a:p>
+            <a:pPr indent="0" marL="0">
+              <a:buNone/>
+            </a:pPr>
+            <a:r>
+              <a:rPr lang="en-US" sz="850" b="1" dirty="0">
+                <a:solidFill>
+                  <a:srgbClr val="2ECC8C"/>
+                </a:solidFill>
+              </a:rPr>
+              <a:t>M</a:t>
+            </a:r>
+            <a:endParaRPr lang="en-US" sz="850" dirty="0"/>
+          </a:p>
+        </p:txBody>
+      </p:sp>
+      <p:sp>
+        <p:nvSpPr>
+          <p:cNvPr id="85" name="Shape 83"/>
+          <p:cNvSpPr/>
+          <p:nvPr/>
+        </p:nvSpPr>
+        <p:spPr>
+          <a:xfrm>
+            <a:off x="4599432" y="2395728"/>
+            <a:ext cx="1371600" cy="329184"/>
+          </a:xfrm>
+          <a:prstGeom prst="rect">
+            <a:avLst/>
+          </a:prstGeom>
+          <a:solidFill>
+            <a:srgbClr val="EFF3FB"/>
+          </a:solidFill>
+          <a:ln w="3810">
+            <a:solidFill>
+              <a:srgbClr val="D0D8E8"/>
+            </a:solidFill>
+            <a:prstDash val="solid"/>
+          </a:ln>
+        </p:spPr>
+      </p:sp>
+      <p:sp>
+        <p:nvSpPr>
+          <p:cNvPr id="86" name="Text 84"/>
+          <p:cNvSpPr/>
+          <p:nvPr/>
+        </p:nvSpPr>
+        <p:spPr>
+          <a:xfrm>
+            <a:off x="4626864" y="2395728"/>
+            <a:ext cx="1316736" cy="329184"/>
+          </a:xfrm>
+          <a:prstGeom prst="rect">
+            <a:avLst/>
+          </a:prstGeom>
+          <a:noFill/>
+          <a:ln/>
+        </p:spPr>
+        <p:txBody>
+          <a:bodyPr wrap="square" lIns="0" tIns="0" rIns="0" bIns="0" rtlCol="0" anchor="ctr"/>
+          <a:lstStyle/>
+          <a:p>
+            <a:pPr indent="0" marL="0">
+              <a:buNone/>
+            </a:pPr>
+            <a:r>
+              <a:rPr lang="en-US" sz="850" dirty="0">
+                <a:solidFill>
+                  <a:srgbClr val="1E2761"/>
+                </a:solidFill>
+              </a:rPr>
+              <a:t>iccid-range + M slots (per-slot pools opt.)</a:t>
+            </a:r>
+            <a:endParaRPr lang="en-US" sz="850" dirty="0"/>
+          </a:p>
+        </p:txBody>
+      </p:sp>
+      <p:sp>
+        <p:nvSpPr>
+          <p:cNvPr id="87" name="Shape 85"/>
+          <p:cNvSpPr/>
+          <p:nvPr/>
+        </p:nvSpPr>
+        <p:spPr>
+          <a:xfrm>
+            <a:off x="5971032" y="2395728"/>
+            <a:ext cx="1691640" cy="329184"/>
+          </a:xfrm>
+          <a:prstGeom prst="rect">
+            <a:avLst/>
+          </a:prstGeom>
+          <a:solidFill>
+            <a:srgbClr val="EFF3FB"/>
+          </a:solidFill>
+          <a:ln w="3810">
+            <a:solidFill>
+              <a:srgbClr val="D0D8E8"/>
+            </a:solidFill>
+            <a:prstDash val="solid"/>
+          </a:ln>
+        </p:spPr>
+      </p:sp>
+      <p:sp>
+        <p:nvSpPr>
+          <p:cNvPr id="88" name="Text 86"/>
+          <p:cNvSpPr/>
+          <p:nvPr/>
+        </p:nvSpPr>
+        <p:spPr>
+          <a:xfrm>
+            <a:off x="5998464" y="2395728"/>
+            <a:ext cx="1636776" cy="329184"/>
+          </a:xfrm>
+          <a:prstGeom prst="rect">
+            <a:avLst/>
+          </a:prstGeom>
+          <a:noFill/>
+          <a:ln/>
+        </p:spPr>
+        <p:txBody>
+          <a:bodyPr wrap="square" lIns="0" tIns="0" rIns="0" bIns="0" rtlCol="0" anchor="ctr"/>
+          <a:lstStyle/>
+          <a:p>
+            <a:pPr indent="0" marL="0">
+              <a:buNone/>
+            </a:pPr>
+            <a:r>
+              <a:rPr lang="en-US" sz="850" dirty="0">
+                <a:solidFill>
+                  <a:srgbClr val="1E2761"/>
+                </a:solidFill>
+              </a:rPr>
+              <a:t>M IPs — 1 per slot, all in 1 COMMIT</a:t>
+            </a:r>
+            <a:endParaRPr lang="en-US" sz="850" dirty="0"/>
+          </a:p>
+        </p:txBody>
+      </p:sp>
+      <p:sp>
+        <p:nvSpPr>
+          <p:cNvPr id="89" name="Shape 87"/>
+          <p:cNvSpPr/>
+          <p:nvPr/>
+        </p:nvSpPr>
+        <p:spPr>
+          <a:xfrm>
+            <a:off x="164592" y="2724912"/>
+            <a:ext cx="347472" cy="329184"/>
+          </a:xfrm>
+          <a:prstGeom prst="rect">
+            <a:avLst/>
+          </a:prstGeom>
+          <a:solidFill>
+            <a:srgbClr val="FFFFFF"/>
+          </a:solidFill>
+          <a:ln w="3810">
+            <a:solidFill>
+              <a:srgbClr val="D0D8E8"/>
+            </a:solidFill>
+            <a:prstDash val="solid"/>
+          </a:ln>
+        </p:spPr>
+      </p:sp>
+      <p:sp>
+        <p:nvSpPr>
+          <p:cNvPr id="90" name="Text 88"/>
+          <p:cNvSpPr/>
+          <p:nvPr/>
+        </p:nvSpPr>
+        <p:spPr>
+          <a:xfrm>
+            <a:off x="192024" y="2724912"/>
+            <a:ext cx="292608" cy="329184"/>
+          </a:xfrm>
+          <a:prstGeom prst="rect">
+            <a:avLst/>
+          </a:prstGeom>
+          <a:noFill/>
+          <a:ln/>
+        </p:spPr>
+        <p:txBody>
+          <a:bodyPr wrap="square" lIns="0" tIns="0" rIns="0" bIns="0" rtlCol="0" anchor="ctr"/>
+          <a:lstStyle/>
+          <a:p>
+            <a:pPr indent="0" marL="0">
+              <a:buNone/>
+            </a:pPr>
+            <a:r>
+              <a:rPr lang="en-US" sz="850" b="1" dirty="0">
+                <a:solidFill>
+                  <a:srgbClr val="1E2761"/>
+                </a:solidFill>
+              </a:rPr>
+              <a:t>M2</a:t>
+            </a:r>
+            <a:endParaRPr lang="en-US" sz="850" dirty="0"/>
+          </a:p>
+        </p:txBody>
+      </p:sp>
+      <p:sp>
+        <p:nvSpPr>
+          <p:cNvPr id="91" name="Shape 89"/>
+          <p:cNvSpPr/>
+          <p:nvPr/>
+        </p:nvSpPr>
+        <p:spPr>
+          <a:xfrm>
+            <a:off x="512064" y="2724912"/>
+            <a:ext cx="1417320" cy="329184"/>
+          </a:xfrm>
+          <a:prstGeom prst="rect">
+            <a:avLst/>
+          </a:prstGeom>
+          <a:solidFill>
+            <a:srgbClr val="FFFFFF"/>
+          </a:solidFill>
+          <a:ln w="3810">
+            <a:solidFill>
+              <a:srgbClr val="D0D8E8"/>
+            </a:solidFill>
+            <a:prstDash val="solid"/>
+          </a:ln>
+        </p:spPr>
+      </p:sp>
+      <p:sp>
+        <p:nvSpPr>
+          <p:cNvPr id="92" name="Text 90"/>
+          <p:cNvSpPr/>
+          <p:nvPr/>
+        </p:nvSpPr>
+        <p:spPr>
+          <a:xfrm>
+            <a:off x="539496" y="2724912"/>
+            <a:ext cx="1362456" cy="329184"/>
+          </a:xfrm>
+          <a:prstGeom prst="rect">
+            <a:avLst/>
+          </a:prstGeom>
+          <a:noFill/>
+          <a:ln/>
+        </p:spPr>
+        <p:txBody>
+          <a:bodyPr wrap="square" lIns="0" tIns="0" rIns="0" bIns="0" rtlCol="0" anchor="ctr"/>
+          <a:lstStyle/>
+          <a:p>
+            <a:pPr indent="0" marL="0">
+              <a:buNone/>
+            </a:pPr>
+            <a:r>
+              <a:rPr lang="en-US" sz="850" dirty="0">
+                <a:solidFill>
+                  <a:srgbClr val="1E2761"/>
+                </a:solidFill>
+              </a:rPr>
+              <a:t>Multi-IMSI (M)</a:t>
+            </a:r>
+            <a:endParaRPr lang="en-US" sz="850" dirty="0"/>
+          </a:p>
+        </p:txBody>
+      </p:sp>
+      <p:sp>
+        <p:nvSpPr>
+          <p:cNvPr id="93" name="Shape 91"/>
+          <p:cNvSpPr/>
+          <p:nvPr/>
+        </p:nvSpPr>
+        <p:spPr>
+          <a:xfrm>
+            <a:off x="1929384" y="2724912"/>
+            <a:ext cx="1005840" cy="329184"/>
+          </a:xfrm>
+          <a:prstGeom prst="rect">
+            <a:avLst/>
+          </a:prstGeom>
+          <a:solidFill>
+            <a:srgbClr val="FFFFFF"/>
+          </a:solidFill>
+          <a:ln w="3810">
+            <a:solidFill>
+              <a:srgbClr val="D0D8E8"/>
+            </a:solidFill>
+            <a:prstDash val="solid"/>
+          </a:ln>
+        </p:spPr>
+      </p:sp>
+      <p:sp>
+        <p:nvSpPr>
+          <p:cNvPr id="94" name="Text 92"/>
+          <p:cNvSpPr/>
+          <p:nvPr/>
+        </p:nvSpPr>
+        <p:spPr>
+          <a:xfrm>
+            <a:off x="1956816" y="2724912"/>
+            <a:ext cx="950976" cy="329184"/>
+          </a:xfrm>
+          <a:prstGeom prst="rect">
+            <a:avLst/>
+          </a:prstGeom>
+          <a:noFill/>
+          <a:ln/>
+        </p:spPr>
+        <p:txBody>
+          <a:bodyPr wrap="square" lIns="0" tIns="0" rIns="0" bIns="0" rtlCol="0" anchor="ctr"/>
+          <a:lstStyle/>
+          <a:p>
+            <a:pPr indent="0" marL="0">
+              <a:buNone/>
+            </a:pPr>
+            <a:r>
+              <a:rPr lang="en-US" sz="850" b="1" dirty="0">
+                <a:solidFill>
+                  <a:srgbClr val="4FC3F7"/>
+                </a:solidFill>
+              </a:rPr>
+              <a:t>imsi_apn</a:t>
+            </a:r>
+            <a:endParaRPr lang="en-US" sz="850" dirty="0"/>
+          </a:p>
+        </p:txBody>
+      </p:sp>
+      <p:sp>
+        <p:nvSpPr>
+          <p:cNvPr id="95" name="Shape 93"/>
+          <p:cNvSpPr/>
+          <p:nvPr/>
+        </p:nvSpPr>
+        <p:spPr>
+          <a:xfrm>
+            <a:off x="2935224" y="2724912"/>
+            <a:ext cx="1005840" cy="329184"/>
+          </a:xfrm>
+          <a:prstGeom prst="rect">
+            <a:avLst/>
+          </a:prstGeom>
+          <a:solidFill>
+            <a:srgbClr val="FFFFFF"/>
+          </a:solidFill>
+          <a:ln w="3810">
+            <a:solidFill>
+              <a:srgbClr val="D0D8E8"/>
+            </a:solidFill>
+            <a:prstDash val="solid"/>
+          </a:ln>
+        </p:spPr>
+      </p:sp>
+      <p:sp>
+        <p:nvSpPr>
+          <p:cNvPr id="96" name="Text 94"/>
+          <p:cNvSpPr/>
+          <p:nvPr/>
+        </p:nvSpPr>
+        <p:spPr>
+          <a:xfrm>
+            <a:off x="2962656" y="2724912"/>
+            <a:ext cx="950976" cy="329184"/>
+          </a:xfrm>
+          <a:prstGeom prst="rect">
+            <a:avLst/>
+          </a:prstGeom>
+          <a:noFill/>
+          <a:ln/>
+        </p:spPr>
+        <p:txBody>
+          <a:bodyPr wrap="square" lIns="0" tIns="0" rIns="0" bIns="0" rtlCol="0" anchor="ctr"/>
+          <a:lstStyle/>
+          <a:p>
+            <a:pPr indent="0" marL="0">
+              <a:buNone/>
+            </a:pPr>
+            <a:r>
+              <a:rPr lang="en-US" sz="850" dirty="0">
+                <a:solidFill>
+                  <a:srgbClr val="1E2761"/>
+                </a:solidFill>
+              </a:rPr>
+              <a:t>N APNs</a:t>
+            </a:r>
+            <a:endParaRPr lang="en-US" sz="850" dirty="0"/>
+          </a:p>
+        </p:txBody>
+      </p:sp>
+      <p:sp>
+        <p:nvSpPr>
+          <p:cNvPr id="97" name="Shape 95"/>
+          <p:cNvSpPr/>
+          <p:nvPr/>
+        </p:nvSpPr>
+        <p:spPr>
+          <a:xfrm>
+            <a:off x="3941064" y="2724912"/>
+            <a:ext cx="658368" cy="329184"/>
+          </a:xfrm>
+          <a:prstGeom prst="rect">
+            <a:avLst/>
+          </a:prstGeom>
+          <a:solidFill>
+            <a:srgbClr val="FFFFFF"/>
+          </a:solidFill>
+          <a:ln w="3810">
+            <a:solidFill>
+              <a:srgbClr val="D0D8E8"/>
+            </a:solidFill>
+            <a:prstDash val="solid"/>
+          </a:ln>
+        </p:spPr>
+      </p:sp>
+      <p:sp>
+        <p:nvSpPr>
+          <p:cNvPr id="98" name="Text 96"/>
+          <p:cNvSpPr/>
+          <p:nvPr/>
+        </p:nvSpPr>
+        <p:spPr>
+          <a:xfrm>
+            <a:off x="3968496" y="2724912"/>
+            <a:ext cx="603504" cy="329184"/>
+          </a:xfrm>
+          <a:prstGeom prst="rect">
+            <a:avLst/>
+          </a:prstGeom>
+          <a:noFill/>
+          <a:ln/>
+        </p:spPr>
+        <p:txBody>
+          <a:bodyPr wrap="square" lIns="0" tIns="0" rIns="0" bIns="0" rtlCol="0" anchor="ctr"/>
+          <a:lstStyle/>
+          <a:p>
+            <a:pPr indent="0" marL="0">
+              <a:buNone/>
+            </a:pPr>
+            <a:r>
+              <a:rPr lang="en-US" sz="850" b="1" dirty="0">
+                <a:solidFill>
+                  <a:srgbClr val="2ECC8C"/>
+                </a:solidFill>
+              </a:rPr>
+              <a:t>M×N</a:t>
+            </a:r>
+            <a:endParaRPr lang="en-US" sz="850" dirty="0"/>
+          </a:p>
+        </p:txBody>
+      </p:sp>
+      <p:sp>
+        <p:nvSpPr>
+          <p:cNvPr id="99" name="Shape 97"/>
+          <p:cNvSpPr/>
+          <p:nvPr/>
+        </p:nvSpPr>
+        <p:spPr>
+          <a:xfrm>
+            <a:off x="4599432" y="2724912"/>
+            <a:ext cx="1371600" cy="329184"/>
+          </a:xfrm>
+          <a:prstGeom prst="rect">
+            <a:avLst/>
+          </a:prstGeom>
+          <a:solidFill>
+            <a:srgbClr val="FFFFFF"/>
+          </a:solidFill>
+          <a:ln w="3810">
+            <a:solidFill>
+              <a:srgbClr val="D0D8E8"/>
+            </a:solidFill>
+            <a:prstDash val="solid"/>
+          </a:ln>
+        </p:spPr>
+      </p:sp>
+      <p:sp>
+        <p:nvSpPr>
+          <p:cNvPr id="100" name="Text 98"/>
+          <p:cNvSpPr/>
+          <p:nvPr/>
+        </p:nvSpPr>
+        <p:spPr>
+          <a:xfrm>
+            <a:off x="4626864" y="2724912"/>
+            <a:ext cx="1316736" cy="329184"/>
+          </a:xfrm>
+          <a:prstGeom prst="rect">
+            <a:avLst/>
+          </a:prstGeom>
+          <a:noFill/>
+          <a:ln/>
+        </p:spPr>
+        <p:txBody>
+          <a:bodyPr wrap="square" lIns="0" tIns="0" rIns="0" bIns="0" rtlCol="0" anchor="ctr"/>
+          <a:lstStyle/>
+          <a:p>
+            <a:pPr indent="0" marL="0">
+              <a:buNone/>
+            </a:pPr>
+            <a:r>
+              <a:rPr lang="en-US" sz="850" dirty="0">
+                <a:solidFill>
+                  <a:srgbClr val="1E2761"/>
+                </a:solidFill>
+              </a:rPr>
+              <a:t>iccid-range + M slots + apn-pools on each slot</a:t>
+            </a:r>
+            <a:endParaRPr lang="en-US" sz="850" dirty="0"/>
+          </a:p>
+        </p:txBody>
+      </p:sp>
+      <p:sp>
+        <p:nvSpPr>
+          <p:cNvPr id="101" name="Shape 99"/>
+          <p:cNvSpPr/>
+          <p:nvPr/>
+        </p:nvSpPr>
+        <p:spPr>
+          <a:xfrm>
+            <a:off x="5971032" y="2724912"/>
+            <a:ext cx="1691640" cy="329184"/>
+          </a:xfrm>
+          <a:prstGeom prst="rect">
+            <a:avLst/>
+          </a:prstGeom>
+          <a:solidFill>
+            <a:srgbClr val="FFFFFF"/>
+          </a:solidFill>
+          <a:ln w="3810">
+            <a:solidFill>
+              <a:srgbClr val="D0D8E8"/>
+            </a:solidFill>
+            <a:prstDash val="solid"/>
+          </a:ln>
+        </p:spPr>
+      </p:sp>
+      <p:sp>
+        <p:nvSpPr>
+          <p:cNvPr id="102" name="Text 100"/>
+          <p:cNvSpPr/>
+          <p:nvPr/>
+        </p:nvSpPr>
+        <p:spPr>
+          <a:xfrm>
+            <a:off x="5998464" y="2724912"/>
+            <a:ext cx="1636776" cy="329184"/>
+          </a:xfrm>
+          <a:prstGeom prst="rect">
+            <a:avLst/>
+          </a:prstGeom>
+          <a:noFill/>
+          <a:ln/>
+        </p:spPr>
+        <p:txBody>
+          <a:bodyPr wrap="square" lIns="0" tIns="0" rIns="0" bIns="0" rtlCol="0" anchor="ctr"/>
+          <a:lstStyle/>
+          <a:p>
+            <a:pPr indent="0" marL="0">
+              <a:buNone/>
+            </a:pPr>
+            <a:r>
+              <a:rPr lang="en-US" sz="850" dirty="0">
+                <a:solidFill>
+                  <a:srgbClr val="1E2761"/>
+                </a:solidFill>
+              </a:rPr>
+              <a:t>M×N IPs — per-slot per-APN, 1 COMMIT</a:t>
+            </a:r>
+            <a:endParaRPr lang="en-US" sz="850" dirty="0"/>
+          </a:p>
+        </p:txBody>
+      </p:sp>
+      <p:sp>
+        <p:nvSpPr>
+          <p:cNvPr id="103" name="Shape 101"/>
+          <p:cNvSpPr/>
+          <p:nvPr/>
+        </p:nvSpPr>
+        <p:spPr>
+          <a:xfrm>
+            <a:off x="164592" y="3054096"/>
+            <a:ext cx="347472" cy="329184"/>
+          </a:xfrm>
+          <a:prstGeom prst="rect">
+            <a:avLst/>
+          </a:prstGeom>
+          <a:solidFill>
+            <a:srgbClr val="EFF3FB"/>
+          </a:solidFill>
+          <a:ln w="3810">
+            <a:solidFill>
+              <a:srgbClr val="D0D8E8"/>
+            </a:solidFill>
+            <a:prstDash val="solid"/>
+          </a:ln>
+        </p:spPr>
+      </p:sp>
+      <p:sp>
+        <p:nvSpPr>
+          <p:cNvPr id="104" name="Text 102"/>
+          <p:cNvSpPr/>
+          <p:nvPr/>
+        </p:nvSpPr>
+        <p:spPr>
+          <a:xfrm>
+            <a:off x="192024" y="3054096"/>
+            <a:ext cx="292608" cy="329184"/>
+          </a:xfrm>
+          <a:prstGeom prst="rect">
+            <a:avLst/>
+          </a:prstGeom>
+          <a:noFill/>
+          <a:ln/>
+        </p:spPr>
+        <p:txBody>
+          <a:bodyPr wrap="square" lIns="0" tIns="0" rIns="0" bIns="0" rtlCol="0" anchor="ctr"/>
+          <a:lstStyle/>
+          <a:p>
+            <a:pPr indent="0" marL="0">
+              <a:buNone/>
+            </a:pPr>
+            <a:r>
+              <a:rPr lang="en-US" sz="850" b="1" dirty="0">
+                <a:solidFill>
+                  <a:srgbClr val="1E2761"/>
+                </a:solidFill>
+              </a:rPr>
+              <a:t>M3</a:t>
+            </a:r>
+            <a:endParaRPr lang="en-US" sz="850" dirty="0"/>
+          </a:p>
+        </p:txBody>
+      </p:sp>
+      <p:sp>
+        <p:nvSpPr>
+          <p:cNvPr id="105" name="Shape 103"/>
+          <p:cNvSpPr/>
+          <p:nvPr/>
+        </p:nvSpPr>
+        <p:spPr>
+          <a:xfrm>
+            <a:off x="512064" y="3054096"/>
+            <a:ext cx="1417320" cy="329184"/>
+          </a:xfrm>
+          <a:prstGeom prst="rect">
+            <a:avLst/>
+          </a:prstGeom>
+          <a:solidFill>
+            <a:srgbClr val="EFF3FB"/>
+          </a:solidFill>
+          <a:ln w="3810">
+            <a:solidFill>
+              <a:srgbClr val="D0D8E8"/>
+            </a:solidFill>
+            <a:prstDash val="solid"/>
+          </a:ln>
+        </p:spPr>
+      </p:sp>
+      <p:sp>
+        <p:nvSpPr>
+          <p:cNvPr id="106" name="Text 104"/>
+          <p:cNvSpPr/>
+          <p:nvPr/>
+        </p:nvSpPr>
+        <p:spPr>
+          <a:xfrm>
+            <a:off x="539496" y="3054096"/>
+            <a:ext cx="1362456" cy="329184"/>
+          </a:xfrm>
+          <a:prstGeom prst="rect">
+            <a:avLst/>
+          </a:prstGeom>
+          <a:noFill/>
+          <a:ln/>
+        </p:spPr>
+        <p:txBody>
+          <a:bodyPr wrap="square" lIns="0" tIns="0" rIns="0" bIns="0" rtlCol="0" anchor="ctr"/>
+          <a:lstStyle/>
+          <a:p>
+            <a:pPr indent="0" marL="0">
+              <a:buNone/>
+            </a:pPr>
+            <a:r>
+              <a:rPr lang="en-US" sz="850" dirty="0">
+                <a:solidFill>
+                  <a:srgbClr val="1E2761"/>
+                </a:solidFill>
+              </a:rPr>
+              <a:t>Multi-IMSI (M)</a:t>
+            </a:r>
+            <a:endParaRPr lang="en-US" sz="850" dirty="0"/>
+          </a:p>
+        </p:txBody>
+      </p:sp>
+      <p:sp>
+        <p:nvSpPr>
+          <p:cNvPr id="107" name="Shape 105"/>
+          <p:cNvSpPr/>
+          <p:nvPr/>
+        </p:nvSpPr>
+        <p:spPr>
+          <a:xfrm>
+            <a:off x="1929384" y="3054096"/>
+            <a:ext cx="1005840" cy="329184"/>
+          </a:xfrm>
+          <a:prstGeom prst="rect">
+            <a:avLst/>
+          </a:prstGeom>
+          <a:solidFill>
+            <a:srgbClr val="EFF3FB"/>
+          </a:solidFill>
+          <a:ln w="3810">
+            <a:solidFill>
+              <a:srgbClr val="D0D8E8"/>
+            </a:solidFill>
+            <a:prstDash val="solid"/>
+          </a:ln>
+        </p:spPr>
+      </p:sp>
+      <p:sp>
+        <p:nvSpPr>
+          <p:cNvPr id="108" name="Text 106"/>
+          <p:cNvSpPr/>
+          <p:nvPr/>
+        </p:nvSpPr>
+        <p:spPr>
+          <a:xfrm>
+            <a:off x="1956816" y="3054096"/>
+            <a:ext cx="950976" cy="329184"/>
+          </a:xfrm>
+          <a:prstGeom prst="rect">
+            <a:avLst/>
+          </a:prstGeom>
+          <a:noFill/>
+          <a:ln/>
+        </p:spPr>
+        <p:txBody>
+          <a:bodyPr wrap="square" lIns="0" tIns="0" rIns="0" bIns="0" rtlCol="0" anchor="ctr"/>
+          <a:lstStyle/>
+          <a:p>
+            <a:pPr indent="0" marL="0">
+              <a:buNone/>
+            </a:pPr>
+            <a:r>
+              <a:rPr lang="en-US" sz="850" b="1" dirty="0">
+                <a:solidFill>
+                  <a:srgbClr val="4FC3F7"/>
+                </a:solidFill>
+              </a:rPr>
+              <a:t>iccid</a:t>
+            </a:r>
+            <a:endParaRPr lang="en-US" sz="850" dirty="0"/>
+          </a:p>
+        </p:txBody>
+      </p:sp>
+      <p:sp>
+        <p:nvSpPr>
+          <p:cNvPr id="109" name="Shape 107"/>
+          <p:cNvSpPr/>
+          <p:nvPr/>
+        </p:nvSpPr>
+        <p:spPr>
+          <a:xfrm>
+            <a:off x="2935224" y="3054096"/>
+            <a:ext cx="1005840" cy="329184"/>
+          </a:xfrm>
+          <a:prstGeom prst="rect">
+            <a:avLst/>
+          </a:prstGeom>
+          <a:solidFill>
+            <a:srgbClr val="EFF3FB"/>
+          </a:solidFill>
+          <a:ln w="3810">
+            <a:solidFill>
+              <a:srgbClr val="D0D8E8"/>
+            </a:solidFill>
+            <a:prstDash val="solid"/>
+          </a:ln>
+        </p:spPr>
+      </p:sp>
+      <p:sp>
+        <p:nvSpPr>
+          <p:cNvPr id="110" name="Text 108"/>
+          <p:cNvSpPr/>
+          <p:nvPr/>
+        </p:nvSpPr>
+        <p:spPr>
+          <a:xfrm>
+            <a:off x="2962656" y="3054096"/>
+            <a:ext cx="950976" cy="329184"/>
+          </a:xfrm>
+          <a:prstGeom prst="rect">
+            <a:avLst/>
+          </a:prstGeom>
+          <a:noFill/>
+          <a:ln/>
+        </p:spPr>
+        <p:txBody>
+          <a:bodyPr wrap="square" lIns="0" tIns="0" rIns="0" bIns="0" rtlCol="0" anchor="ctr"/>
+          <a:lstStyle/>
+          <a:p>
+            <a:pPr indent="0" marL="0">
+              <a:buNone/>
+            </a:pPr>
+            <a:r>
+              <a:rPr lang="en-US" sz="850" dirty="0">
+                <a:solidFill>
+                  <a:srgbClr val="1E2761"/>
+                </a:solidFill>
+              </a:rPr>
+              <a:t>—</a:t>
+            </a:r>
+            <a:endParaRPr lang="en-US" sz="850" dirty="0"/>
+          </a:p>
+        </p:txBody>
+      </p:sp>
+      <p:sp>
+        <p:nvSpPr>
+          <p:cNvPr id="111" name="Shape 109"/>
+          <p:cNvSpPr/>
+          <p:nvPr/>
+        </p:nvSpPr>
+        <p:spPr>
+          <a:xfrm>
+            <a:off x="3941064" y="3054096"/>
+            <a:ext cx="658368" cy="329184"/>
+          </a:xfrm>
+          <a:prstGeom prst="rect">
+            <a:avLst/>
+          </a:prstGeom>
+          <a:solidFill>
+            <a:srgbClr val="EFF3FB"/>
+          </a:solidFill>
+          <a:ln w="3810">
+            <a:solidFill>
+              <a:srgbClr val="D0D8E8"/>
+            </a:solidFill>
+            <a:prstDash val="solid"/>
+          </a:ln>
+        </p:spPr>
+      </p:sp>
+      <p:sp>
+        <p:nvSpPr>
+          <p:cNvPr id="112" name="Text 110"/>
+          <p:cNvSpPr/>
+          <p:nvPr/>
+        </p:nvSpPr>
+        <p:spPr>
+          <a:xfrm>
+            <a:off x="3968496" y="3054096"/>
+            <a:ext cx="603504" cy="329184"/>
+          </a:xfrm>
+          <a:prstGeom prst="rect">
+            <a:avLst/>
+          </a:prstGeom>
+          <a:noFill/>
+          <a:ln/>
+        </p:spPr>
+        <p:txBody>
+          <a:bodyPr wrap="square" lIns="0" tIns="0" rIns="0" bIns="0" rtlCol="0" anchor="ctr"/>
+          <a:lstStyle/>
+          <a:p>
+            <a:pPr indent="0" marL="0">
+              <a:buNone/>
+            </a:pPr>
+            <a:r>
+              <a:rPr lang="en-US" sz="850" b="1" dirty="0">
+                <a:solidFill>
+                  <a:srgbClr val="2ECC8C"/>
+                </a:solidFill>
+              </a:rPr>
+              <a:t>1</a:t>
+            </a:r>
+            <a:endParaRPr lang="en-US" sz="850" dirty="0"/>
+          </a:p>
+        </p:txBody>
+      </p:sp>
+      <p:sp>
+        <p:nvSpPr>
+          <p:cNvPr id="113" name="Shape 111"/>
+          <p:cNvSpPr/>
+          <p:nvPr/>
+        </p:nvSpPr>
+        <p:spPr>
+          <a:xfrm>
+            <a:off x="4599432" y="3054096"/>
+            <a:ext cx="1371600" cy="329184"/>
+          </a:xfrm>
+          <a:prstGeom prst="rect">
+            <a:avLst/>
+          </a:prstGeom>
+          <a:solidFill>
+            <a:srgbClr val="EFF3FB"/>
+          </a:solidFill>
+          <a:ln w="3810">
+            <a:solidFill>
+              <a:srgbClr val="D0D8E8"/>
+            </a:solidFill>
+            <a:prstDash val="solid"/>
+          </a:ln>
+        </p:spPr>
+      </p:sp>
+      <p:sp>
+        <p:nvSpPr>
+          <p:cNvPr id="114" name="Text 112"/>
+          <p:cNvSpPr/>
+          <p:nvPr/>
+        </p:nvSpPr>
+        <p:spPr>
+          <a:xfrm>
+            <a:off x="4626864" y="3054096"/>
+            <a:ext cx="1316736" cy="329184"/>
+          </a:xfrm>
+          <a:prstGeom prst="rect">
+            <a:avLst/>
+          </a:prstGeom>
+          <a:noFill/>
+          <a:ln/>
+        </p:spPr>
+        <p:txBody>
+          <a:bodyPr wrap="square" lIns="0" tIns="0" rIns="0" bIns="0" rtlCol="0" anchor="ctr"/>
+          <a:lstStyle/>
+          <a:p>
+            <a:pPr indent="0" marL="0">
+              <a:buNone/>
+            </a:pPr>
+            <a:r>
+              <a:rPr lang="en-US" sz="850" dirty="0">
+                <a:solidFill>
+                  <a:srgbClr val="1E2761"/>
+                </a:solidFill>
+              </a:rPr>
+              <a:t>iccid-range + M slots</a:t>
+            </a:r>
+            <a:endParaRPr lang="en-US" sz="850" dirty="0"/>
+          </a:p>
+        </p:txBody>
+      </p:sp>
+      <p:sp>
+        <p:nvSpPr>
+          <p:cNvPr id="115" name="Shape 113"/>
+          <p:cNvSpPr/>
+          <p:nvPr/>
+        </p:nvSpPr>
+        <p:spPr>
+          <a:xfrm>
+            <a:off x="5971032" y="3054096"/>
+            <a:ext cx="1691640" cy="329184"/>
+          </a:xfrm>
+          <a:prstGeom prst="rect">
+            <a:avLst/>
+          </a:prstGeom>
+          <a:solidFill>
+            <a:srgbClr val="EFF3FB"/>
+          </a:solidFill>
+          <a:ln w="3810">
+            <a:solidFill>
+              <a:srgbClr val="D0D8E8"/>
+            </a:solidFill>
+            <a:prstDash val="solid"/>
+          </a:ln>
+        </p:spPr>
+      </p:sp>
+      <p:sp>
+        <p:nvSpPr>
+          <p:cNvPr id="116" name="Text 114"/>
+          <p:cNvSpPr/>
+          <p:nvPr/>
+        </p:nvSpPr>
+        <p:spPr>
+          <a:xfrm>
+            <a:off x="5998464" y="3054096"/>
+            <a:ext cx="1636776" cy="329184"/>
+          </a:xfrm>
+          <a:prstGeom prst="rect">
+            <a:avLst/>
+          </a:prstGeom>
+          <a:noFill/>
+          <a:ln/>
+        </p:spPr>
+        <p:txBody>
+          <a:bodyPr wrap="square" lIns="0" tIns="0" rIns="0" bIns="0" rtlCol="0" anchor="ctr"/>
+          <a:lstStyle/>
+          <a:p>
+            <a:pPr indent="0" marL="0">
+              <a:buNone/>
+            </a:pPr>
+            <a:r>
+              <a:rPr lang="en-US" sz="850" dirty="0">
+                <a:solidFill>
+                  <a:srgbClr val="1E2761"/>
+                </a:solidFill>
+              </a:rPr>
+              <a:t>1 IP shared — all slots, 1 COMMIT</a:t>
+            </a:r>
+            <a:endParaRPr lang="en-US" sz="850" dirty="0"/>
+          </a:p>
+        </p:txBody>
+      </p:sp>
+      <p:sp>
+        <p:nvSpPr>
+          <p:cNvPr id="117" name="Shape 115"/>
+          <p:cNvSpPr/>
+          <p:nvPr/>
+        </p:nvSpPr>
+        <p:spPr>
+          <a:xfrm>
+            <a:off x="164592" y="3383280"/>
+            <a:ext cx="347472" cy="329184"/>
+          </a:xfrm>
+          <a:prstGeom prst="rect">
+            <a:avLst/>
+          </a:prstGeom>
+          <a:solidFill>
+            <a:srgbClr val="FFFFFF"/>
+          </a:solidFill>
+          <a:ln w="3810">
+            <a:solidFill>
+              <a:srgbClr val="D0D8E8"/>
+            </a:solidFill>
+            <a:prstDash val="solid"/>
+          </a:ln>
+        </p:spPr>
+      </p:sp>
+      <p:sp>
+        <p:nvSpPr>
+          <p:cNvPr id="118" name="Text 116"/>
+          <p:cNvSpPr/>
+          <p:nvPr/>
+        </p:nvSpPr>
+        <p:spPr>
+          <a:xfrm>
+            <a:off x="192024" y="3383280"/>
+            <a:ext cx="292608" cy="329184"/>
+          </a:xfrm>
+          <a:prstGeom prst="rect">
+            <a:avLst/>
+          </a:prstGeom>
+          <a:noFill/>
+          <a:ln/>
+        </p:spPr>
+        <p:txBody>
+          <a:bodyPr wrap="square" lIns="0" tIns="0" rIns="0" bIns="0" rtlCol="0" anchor="ctr"/>
+          <a:lstStyle/>
+          <a:p>
+            <a:pPr indent="0" marL="0">
+              <a:buNone/>
+            </a:pPr>
+            <a:r>
+              <a:rPr lang="en-US" sz="850" b="1" dirty="0">
+                <a:solidFill>
+                  <a:srgbClr val="1E2761"/>
+                </a:solidFill>
+              </a:rPr>
+              <a:t>M4</a:t>
+            </a:r>
+            <a:endParaRPr lang="en-US" sz="850" dirty="0"/>
+          </a:p>
+        </p:txBody>
+      </p:sp>
+      <p:sp>
+        <p:nvSpPr>
+          <p:cNvPr id="119" name="Shape 117"/>
+          <p:cNvSpPr/>
+          <p:nvPr/>
+        </p:nvSpPr>
+        <p:spPr>
+          <a:xfrm>
+            <a:off x="512064" y="3383280"/>
+            <a:ext cx="1417320" cy="329184"/>
+          </a:xfrm>
+          <a:prstGeom prst="rect">
+            <a:avLst/>
+          </a:prstGeom>
+          <a:solidFill>
+            <a:srgbClr val="FFFFFF"/>
+          </a:solidFill>
+          <a:ln w="3810">
+            <a:solidFill>
+              <a:srgbClr val="D0D8E8"/>
+            </a:solidFill>
+            <a:prstDash val="solid"/>
+          </a:ln>
+        </p:spPr>
+      </p:sp>
+      <p:sp>
+        <p:nvSpPr>
+          <p:cNvPr id="120" name="Text 118"/>
+          <p:cNvSpPr/>
+          <p:nvPr/>
+        </p:nvSpPr>
+        <p:spPr>
+          <a:xfrm>
+            <a:off x="539496" y="3383280"/>
+            <a:ext cx="1362456" cy="329184"/>
+          </a:xfrm>
+          <a:prstGeom prst="rect">
+            <a:avLst/>
+          </a:prstGeom>
+          <a:noFill/>
+          <a:ln/>
+        </p:spPr>
+        <p:txBody>
+          <a:bodyPr wrap="square" lIns="0" tIns="0" rIns="0" bIns="0" rtlCol="0" anchor="ctr"/>
+          <a:lstStyle/>
+          <a:p>
+            <a:pPr indent="0" marL="0">
+              <a:buNone/>
+            </a:pPr>
+            <a:r>
+              <a:rPr lang="en-US" sz="850" dirty="0">
+                <a:solidFill>
+                  <a:srgbClr val="1E2761"/>
+                </a:solidFill>
+              </a:rPr>
+              <a:t>Multi-IMSI (M)</a:t>
+            </a:r>
+            <a:endParaRPr lang="en-US" sz="850" dirty="0"/>
+          </a:p>
+        </p:txBody>
+      </p:sp>
+      <p:sp>
+        <p:nvSpPr>
+          <p:cNvPr id="121" name="Shape 119"/>
+          <p:cNvSpPr/>
+          <p:nvPr/>
+        </p:nvSpPr>
+        <p:spPr>
+          <a:xfrm>
+            <a:off x="1929384" y="3383280"/>
+            <a:ext cx="1005840" cy="329184"/>
+          </a:xfrm>
+          <a:prstGeom prst="rect">
+            <a:avLst/>
+          </a:prstGeom>
+          <a:solidFill>
+            <a:srgbClr val="FFFFFF"/>
+          </a:solidFill>
+          <a:ln w="3810">
+            <a:solidFill>
+              <a:srgbClr val="D0D8E8"/>
+            </a:solidFill>
+            <a:prstDash val="solid"/>
+          </a:ln>
+        </p:spPr>
+      </p:sp>
+      <p:sp>
+        <p:nvSpPr>
+          <p:cNvPr id="122" name="Text 120"/>
+          <p:cNvSpPr/>
+          <p:nvPr/>
+        </p:nvSpPr>
+        <p:spPr>
+          <a:xfrm>
+            <a:off x="1956816" y="3383280"/>
+            <a:ext cx="950976" cy="329184"/>
+          </a:xfrm>
+          <a:prstGeom prst="rect">
+            <a:avLst/>
+          </a:prstGeom>
+          <a:noFill/>
+          <a:ln/>
+        </p:spPr>
+        <p:txBody>
+          <a:bodyPr wrap="square" lIns="0" tIns="0" rIns="0" bIns="0" rtlCol="0" anchor="ctr"/>
+          <a:lstStyle/>
+          <a:p>
+            <a:pPr indent="0" marL="0">
+              <a:buNone/>
+            </a:pPr>
+            <a:r>
+              <a:rPr lang="en-US" sz="850" b="1" dirty="0">
+                <a:solidFill>
+                  <a:srgbClr val="4FC3F7"/>
+                </a:solidFill>
+              </a:rPr>
+              <a:t>iccid_apn</a:t>
+            </a:r>
+            <a:endParaRPr lang="en-US" sz="850" dirty="0"/>
+          </a:p>
+        </p:txBody>
+      </p:sp>
+      <p:sp>
+        <p:nvSpPr>
+          <p:cNvPr id="123" name="Shape 121"/>
+          <p:cNvSpPr/>
+          <p:nvPr/>
+        </p:nvSpPr>
+        <p:spPr>
+          <a:xfrm>
+            <a:off x="2935224" y="3383280"/>
+            <a:ext cx="1005840" cy="329184"/>
+          </a:xfrm>
+          <a:prstGeom prst="rect">
+            <a:avLst/>
+          </a:prstGeom>
+          <a:solidFill>
+            <a:srgbClr val="FFFFFF"/>
+          </a:solidFill>
+          <a:ln w="3810">
+            <a:solidFill>
+              <a:srgbClr val="D0D8E8"/>
+            </a:solidFill>
+            <a:prstDash val="solid"/>
+          </a:ln>
+        </p:spPr>
+      </p:sp>
+      <p:sp>
+        <p:nvSpPr>
+          <p:cNvPr id="124" name="Text 122"/>
+          <p:cNvSpPr/>
+          <p:nvPr/>
+        </p:nvSpPr>
+        <p:spPr>
+          <a:xfrm>
+            <a:off x="2962656" y="3383280"/>
+            <a:ext cx="950976" cy="329184"/>
+          </a:xfrm>
+          <a:prstGeom prst="rect">
+            <a:avLst/>
+          </a:prstGeom>
+          <a:noFill/>
+          <a:ln/>
+        </p:spPr>
+        <p:txBody>
+          <a:bodyPr wrap="square" lIns="0" tIns="0" rIns="0" bIns="0" rtlCol="0" anchor="ctr"/>
+          <a:lstStyle/>
+          <a:p>
+            <a:pPr indent="0" marL="0">
+              <a:buNone/>
+            </a:pPr>
+            <a:r>
+              <a:rPr lang="en-US" sz="850" dirty="0">
+                <a:solidFill>
+                  <a:srgbClr val="1E2761"/>
+                </a:solidFill>
+              </a:rPr>
+              <a:t>N APNs</a:t>
+            </a:r>
+            <a:endParaRPr lang="en-US" sz="850" dirty="0"/>
+          </a:p>
+        </p:txBody>
+      </p:sp>
+      <p:sp>
+        <p:nvSpPr>
+          <p:cNvPr id="125" name="Shape 123"/>
+          <p:cNvSpPr/>
+          <p:nvPr/>
+        </p:nvSpPr>
+        <p:spPr>
+          <a:xfrm>
+            <a:off x="3941064" y="3383280"/>
+            <a:ext cx="658368" cy="329184"/>
+          </a:xfrm>
+          <a:prstGeom prst="rect">
+            <a:avLst/>
+          </a:prstGeom>
+          <a:solidFill>
+            <a:srgbClr val="FFFFFF"/>
+          </a:solidFill>
+          <a:ln w="3810">
+            <a:solidFill>
+              <a:srgbClr val="D0D8E8"/>
+            </a:solidFill>
+            <a:prstDash val="solid"/>
+          </a:ln>
+        </p:spPr>
+      </p:sp>
+      <p:sp>
+        <p:nvSpPr>
+          <p:cNvPr id="126" name="Text 124"/>
+          <p:cNvSpPr/>
+          <p:nvPr/>
+        </p:nvSpPr>
+        <p:spPr>
+          <a:xfrm>
+            <a:off x="3968496" y="3383280"/>
+            <a:ext cx="603504" cy="329184"/>
+          </a:xfrm>
+          <a:prstGeom prst="rect">
+            <a:avLst/>
+          </a:prstGeom>
+          <a:noFill/>
+          <a:ln/>
+        </p:spPr>
+        <p:txBody>
+          <a:bodyPr wrap="square" lIns="0" tIns="0" rIns="0" bIns="0" rtlCol="0" anchor="ctr"/>
+          <a:lstStyle/>
+          <a:p>
+            <a:pPr indent="0" marL="0">
+              <a:buNone/>
+            </a:pPr>
+            <a:r>
+              <a:rPr lang="en-US" sz="850" b="1" dirty="0">
+                <a:solidFill>
+                  <a:srgbClr val="2ECC8C"/>
+                </a:solidFill>
+              </a:rPr>
+              <a:t>N</a:t>
+            </a:r>
+            <a:endParaRPr lang="en-US" sz="850" dirty="0"/>
+          </a:p>
+        </p:txBody>
+      </p:sp>
+      <p:sp>
+        <p:nvSpPr>
+          <p:cNvPr id="127" name="Shape 125"/>
+          <p:cNvSpPr/>
+          <p:nvPr/>
+        </p:nvSpPr>
+        <p:spPr>
+          <a:xfrm>
+            <a:off x="4599432" y="3383280"/>
+            <a:ext cx="1371600" cy="329184"/>
+          </a:xfrm>
+          <a:prstGeom prst="rect">
+            <a:avLst/>
+          </a:prstGeom>
+          <a:solidFill>
+            <a:srgbClr val="FFFFFF"/>
+          </a:solidFill>
+          <a:ln w="3810">
+            <a:solidFill>
+              <a:srgbClr val="D0D8E8"/>
+            </a:solidFill>
+            <a:prstDash val="solid"/>
+          </a:ln>
+        </p:spPr>
+      </p:sp>
+      <p:sp>
+        <p:nvSpPr>
+          <p:cNvPr id="128" name="Text 126"/>
+          <p:cNvSpPr/>
+          <p:nvPr/>
+        </p:nvSpPr>
+        <p:spPr>
+          <a:xfrm>
+            <a:off x="4626864" y="3383280"/>
+            <a:ext cx="1316736" cy="329184"/>
+          </a:xfrm>
+          <a:prstGeom prst="rect">
+            <a:avLst/>
+          </a:prstGeom>
+          <a:noFill/>
+          <a:ln/>
+        </p:spPr>
+        <p:txBody>
+          <a:bodyPr wrap="square" lIns="0" tIns="0" rIns="0" bIns="0" rtlCol="0" anchor="ctr"/>
+          <a:lstStyle/>
+          <a:p>
+            <a:pPr indent="0" marL="0">
+              <a:buNone/>
+            </a:pPr>
+            <a:r>
+              <a:rPr lang="en-US" sz="850" dirty="0">
+                <a:solidFill>
+                  <a:srgbClr val="1E2761"/>
+                </a:solidFill>
+              </a:rPr>
+              <a:t>iccid-range + M slots + apn-pools</a:t>
+            </a:r>
+            <a:endParaRPr lang="en-US" sz="850" dirty="0"/>
+          </a:p>
+        </p:txBody>
+      </p:sp>
+      <p:sp>
+        <p:nvSpPr>
+          <p:cNvPr id="129" name="Shape 127"/>
+          <p:cNvSpPr/>
+          <p:nvPr/>
+        </p:nvSpPr>
+        <p:spPr>
+          <a:xfrm>
+            <a:off x="5971032" y="3383280"/>
+            <a:ext cx="1691640" cy="329184"/>
+          </a:xfrm>
+          <a:prstGeom prst="rect">
+            <a:avLst/>
+          </a:prstGeom>
+          <a:solidFill>
+            <a:srgbClr val="FFFFFF"/>
+          </a:solidFill>
+          <a:ln w="3810">
+            <a:solidFill>
+              <a:srgbClr val="D0D8E8"/>
+            </a:solidFill>
+            <a:prstDash val="solid"/>
+          </a:ln>
+        </p:spPr>
+      </p:sp>
+      <p:sp>
+        <p:nvSpPr>
+          <p:cNvPr id="130" name="Text 128"/>
+          <p:cNvSpPr/>
+          <p:nvPr/>
+        </p:nvSpPr>
+        <p:spPr>
+          <a:xfrm>
+            <a:off x="5998464" y="3383280"/>
+            <a:ext cx="1636776" cy="329184"/>
+          </a:xfrm>
+          <a:prstGeom prst="rect">
+            <a:avLst/>
+          </a:prstGeom>
+          <a:noFill/>
+          <a:ln/>
+        </p:spPr>
+        <p:txBody>
+          <a:bodyPr wrap="square" lIns="0" tIns="0" rIns="0" bIns="0" rtlCol="0" anchor="ctr"/>
+          <a:lstStyle/>
+          <a:p>
+            <a:pPr indent="0" marL="0">
+              <a:buNone/>
+            </a:pPr>
+            <a:r>
+              <a:rPr lang="en-US" sz="850" dirty="0">
+                <a:solidFill>
+                  <a:srgbClr val="1E2761"/>
+                </a:solidFill>
+              </a:rPr>
+              <a:t>N IPs shared card-level, 1 COMMIT</a:t>
+            </a:r>
+            <a:endParaRPr lang="en-US" sz="850" dirty="0"/>
+          </a:p>
+        </p:txBody>
+      </p:sp>
+      <p:sp>
+        <p:nvSpPr>
+          <p:cNvPr id="131" name="Shape 129"/>
+          <p:cNvSpPr/>
+          <p:nvPr/>
+        </p:nvSpPr>
+        <p:spPr>
+          <a:xfrm>
+            <a:off x="164592" y="3785616"/>
+            <a:ext cx="8814816" cy="713232"/>
+          </a:xfrm>
+          <a:prstGeom prst="rect">
+            <a:avLst/>
+          </a:prstGeom>
+          <a:solidFill>
+            <a:srgbClr val="EEF3FB"/>
+          </a:solidFill>
+          <a:ln w="7620">
+            <a:solidFill>
+              <a:srgbClr val="2E75B6"/>
+            </a:solidFill>
+            <a:prstDash val="solid"/>
+          </a:ln>
+        </p:spPr>
+      </p:sp>
+      <p:sp>
+        <p:nvSpPr>
+          <p:cNvPr id="132" name="Text 130"/>
+          <p:cNvSpPr/>
+          <p:nvPr/>
+        </p:nvSpPr>
+        <p:spPr>
+          <a:xfrm>
+            <a:off x="256032" y="3803904"/>
+            <a:ext cx="8631936" cy="658368"/>
+          </a:xfrm>
+          <a:prstGeom prst="rect">
+            <a:avLst/>
+          </a:prstGeom>
+          <a:noFill/>
+          <a:ln/>
+        </p:spPr>
+        <p:txBody>
+          <a:bodyPr wrap="square" lIns="0" tIns="0" rIns="0" bIns="0" rtlCol="0" anchor="ctr"/>
+          <a:lstStyle/>
+          <a:p>
+            <a:pPr indent="0" marL="0">
+              <a:buNone/>
+            </a:pPr>
+            <a:r>
+              <a:rPr lang="en-US" sz="850" dirty="0">
+                <a:solidFill>
+                  <a:srgbClr val="1E2761"/>
+                </a:solidFill>
+              </a:rPr>
+              <a:t>N = APN entries in range_config_apn_pools  ·  M = active IMSI slots  ·  All scenarios are idempotent — repeat calls return existing IP with single read, no allocation</a:t>
+            </a:r>
+            <a:endParaRPr lang="en-US" sz="850" dirty="0"/>
+          </a:p>
+          <a:p>
+            <a:pPr indent="0" marL="0">
+              <a:buNone/>
+            </a:pPr>
+            <a:r>
+              <a:rPr lang="en-US" sz="850" dirty="0">
+                <a:solidFill>
+                  <a:srgbClr val="1E2761"/>
+                </a:solidFill>
+              </a:rPr>
+              <a:t>Pool resolution: APN override (range_config_apn_pools) → slot pool (imsi_range_configs) → parent pool (iccid_range_configs)  ·  M2 example: 2 slots × 2 APNs = 4 IPs per SIM in one COMMIT</a:t>
+            </a:r>
+            <a:endParaRPr lang="en-US" sz="850" dirty="0"/>
+          </a:p>
+          <a:p>
+            <a:pPr indent="0" marL="0">
+              <a:buNone/>
+            </a:pPr>
+            <a:r>
+              <a:rPr lang="en-US" sz="850" dirty="0">
+                <a:solidFill>
+                  <a:srgbClr val="1E2761"/>
+                </a:solidFill>
+              </a:rPr>
+              <a:t>Bulk provisioning: all 8 scenarios supported via POST /v1/profiles/bulk — supply static_ip/pool_id per IP entry for pre-provisioned, or omit for auto-allocation via range config</a:t>
+            </a:r>
+            <a:endParaRPr lang="en-US" sz="850" dirty="0"/>
+          </a:p>
+        </p:txBody>
+      </p:sp>
+    </p:spTree>
+  </p:cSld>
+  <p:clrMapOvr>
+    <a:masterClrMapping/>
+  </p:clrMapOvr>
+</p:sld>
+</file>
+
+<file path=ppt/slides/slide15.xml><?xml version="1.0" encoding="utf-8"?>
+<p:sld xmlns:a="http://schemas.openxmlformats.org/drawingml/2006/main" xmlns:r="http://schemas.openxmlformats.org/officeDocument/2006/relationships" xmlns:p="http://schemas.openxmlformats.org/presentationml/2006/main">
+  <p:cSld name="Slide 15">
     <p:bg>
       <p:bgPr>
         <a:solidFill>
@@ -11048,42 +15191,6 @@
       </p:sp>
       <p:sp>
         <p:nvSpPr>
-          <p:cNvPr id="4" name="Text 2"/>
-          <p:cNvSpPr/>
-          <p:nvPr/>
-        </p:nvSpPr>
-        <p:spPr>
-          <a:xfrm>
-            <a:off x="365760" y="777240"/>
-            <a:ext cx="8412480" cy="347472"/>
-          </a:xfrm>
-          <a:prstGeom prst="rect">
-            <a:avLst/>
-          </a:prstGeom>
-          <a:noFill/>
-          <a:ln/>
-        </p:spPr>
-        <p:txBody>
-          <a:bodyPr wrap="square" rtlCol="0" anchor="ctr"/>
-          <a:lstStyle/>
-          <a:p>
-            <a:pPr indent="0" marL="0">
-              <a:buNone/>
-            </a:pPr>
-            <a:r>
-              <a:rPr lang="en-US" sz="1300" i="1" dirty="0">
-                <a:solidFill>
-                  <a:srgbClr val="2E75B6"/>
-                </a:solidFill>
-              </a:rPr>
-              <a:t>aaa-radius-server orchestrates two independent backend services optimized for their workloads</a:t>
-            </a:r>
-            <a:endParaRPr lang="en-US" sz="1300" dirty="0"/>
-          </a:p>
-        </p:txBody>
-      </p:sp>
-      <p:sp>
-        <p:nvSpPr>
           <p:cNvPr id="5" name="Shape 3"/>
           <p:cNvSpPr/>
           <p:nvPr/>
@@ -11835,6 +15942,42 @@
               <a:t>Async bulk operations up to 100K profiles/job</a:t>
             </a:r>
             <a:endParaRPr lang="en-US" sz="1100" dirty="0"/>
+          </a:p>
+        </p:txBody>
+      </p:sp>
+      <p:sp>
+        <p:nvSpPr>
+          <p:cNvPr id="4" name="Text 2"/>
+          <p:cNvSpPr/>
+          <p:nvPr/>
+        </p:nvSpPr>
+        <p:spPr>
+          <a:xfrm>
+            <a:off x="365760" y="777240"/>
+            <a:ext cx="8412480" cy="347472"/>
+          </a:xfrm>
+          <a:prstGeom prst="rect">
+            <a:avLst/>
+          </a:prstGeom>
+          <a:noFill/>
+          <a:ln/>
+        </p:spPr>
+        <p:txBody>
+          <a:bodyPr wrap="square" tIns="0" rtlCol="0" anchor="t"/>
+          <a:lstStyle/>
+          <a:p>
+            <a:pPr indent="0" marL="0">
+              <a:buNone/>
+            </a:pPr>
+            <a:r>
+              <a:rPr lang="en-US" sz="1300" i="1" dirty="0">
+                <a:solidFill>
+                  <a:srgbClr val="2E75B6"/>
+                </a:solidFill>
+              </a:rPr>
+              <a:t>aaa-radius-server orchestrates two independent backend services optimized for their workloads</a:t>
+            </a:r>
+            <a:endParaRPr lang="en-US" sz="1300" dirty="0"/>
           </a:p>
         </p:txBody>
       </p:sp>
@@ -12703,7 +16846,7 @@
                   <a:srgbClr val="7EA8E8"/>
                 </a:solidFill>
               </a:rPr>
-              <a:t>subscriber_imsis.imsi is a PK — single-page lookup, no full-table scan</a:t>
+              <a:t>imsi2device.imsi is a PK — single-page lookup, no full-table scan</a:t>
             </a:r>
             <a:endParaRPr lang="en-US" sz="1050" dirty="0"/>
           </a:p>
@@ -13095,42 +17238,6 @@
       </p:sp>
       <p:sp>
         <p:nvSpPr>
-          <p:cNvPr id="4" name="Text 2"/>
-          <p:cNvSpPr/>
-          <p:nvPr/>
-        </p:nvSpPr>
-        <p:spPr>
-          <a:xfrm>
-            <a:off x="365760" y="777240"/>
-            <a:ext cx="8412480" cy="347472"/>
-          </a:xfrm>
-          <a:prstGeom prst="rect">
-            <a:avLst/>
-          </a:prstGeom>
-          <a:noFill/>
-          <a:ln/>
-        </p:spPr>
-        <p:txBody>
-          <a:bodyPr wrap="square" rtlCol="0" anchor="ctr"/>
-          <a:lstStyle/>
-          <a:p>
-            <a:pPr indent="0" marL="0">
-              <a:buNone/>
-            </a:pPr>
-            <a:r>
-              <a:rPr lang="en-US" sz="1300" i="1" dirty="0">
-                <a:solidFill>
-                  <a:srgbClr val="2E75B6"/>
-                </a:solidFill>
-              </a:rPr>
-              <a:t>Steady-state: every Access-Request handled entirely by aaa-lookup-service</a:t>
-            </a:r>
-            <a:endParaRPr lang="en-US" sz="1300" dirty="0"/>
-          </a:p>
-        </p:txBody>
-      </p:sp>
-      <p:sp>
-        <p:nvSpPr>
           <p:cNvPr id="5" name="Shape 3"/>
           <p:cNvSpPr/>
           <p:nvPr/>
@@ -14245,6 +18352,42 @@
               <a:t>SLA: p99 &lt; 15ms end-to-end</a:t>
             </a:r>
             <a:endParaRPr lang="en-US" sz="1100" dirty="0"/>
+          </a:p>
+        </p:txBody>
+      </p:sp>
+      <p:sp>
+        <p:nvSpPr>
+          <p:cNvPr id="4" name="Text 2"/>
+          <p:cNvSpPr/>
+          <p:nvPr/>
+        </p:nvSpPr>
+        <p:spPr>
+          <a:xfrm>
+            <a:off x="365760" y="777240"/>
+            <a:ext cx="8412480" cy="347472"/>
+          </a:xfrm>
+          <a:prstGeom prst="rect">
+            <a:avLst/>
+          </a:prstGeom>
+          <a:noFill/>
+          <a:ln/>
+        </p:spPr>
+        <p:txBody>
+          <a:bodyPr wrap="square" tIns="0" rtlCol="0" anchor="t"/>
+          <a:lstStyle/>
+          <a:p>
+            <a:pPr indent="0" marL="0">
+              <a:buNone/>
+            </a:pPr>
+            <a:r>
+              <a:rPr lang="en-US" sz="1300" i="1" dirty="0">
+                <a:solidFill>
+                  <a:srgbClr val="2E75B6"/>
+                </a:solidFill>
+              </a:rPr>
+              <a:t>Steady-state: every Access-Request handled entirely by aaa-lookup-service</a:t>
+            </a:r>
+            <a:endParaRPr lang="en-US" sz="1300" dirty="0"/>
           </a:p>
         </p:txBody>
       </p:sp>
@@ -14343,42 +18486,6 @@
       </p:sp>
       <p:sp>
         <p:nvSpPr>
-          <p:cNvPr id="4" name="Text 2"/>
-          <p:cNvSpPr/>
-          <p:nvPr/>
-        </p:nvSpPr>
-        <p:spPr>
-          <a:xfrm>
-            <a:off x="365760" y="777240"/>
-            <a:ext cx="8412480" cy="347472"/>
-          </a:xfrm>
-          <a:prstGeom prst="rect">
-            <a:avLst/>
-          </a:prstGeom>
-          <a:noFill/>
-          <a:ln/>
-        </p:spPr>
-        <p:txBody>
-          <a:bodyPr wrap="square" rtlCol="0" anchor="ctr"/>
-          <a:lstStyle/>
-          <a:p>
-            <a:pPr indent="0" marL="0">
-              <a:buNone/>
-            </a:pPr>
-            <a:r>
-              <a:rPr lang="en-US" sz="1300" i="1" dirty="0">
-                <a:solidFill>
-                  <a:srgbClr val="2E75B6"/>
-                </a:solidFill>
-              </a:rPr>
-              <a:t>Unknown IMSI → auto-provisioned in a single atomic transaction</a:t>
-            </a:r>
-            <a:endParaRPr lang="en-US" sz="1300" dirty="0"/>
-          </a:p>
-        </p:txBody>
-      </p:sp>
-      <p:sp>
-        <p:nvSpPr>
           <p:cNvPr id="5" name="Shape 3"/>
           <p:cNvSpPr/>
           <p:nvPr/>
@@ -14575,7 +18682,7 @@
                 <a:ea typeface="Courier New" pitchFamily="34" charset="-122"/>
                 <a:cs typeface="Courier New" pitchFamily="34" charset="-120"/>
               </a:rPr>
-              <a:t>→ IMSI not found in subscriber_imsis</a:t>
+              <a:t>→ IMSI not found in imsi2device</a:t>
             </a:r>
             <a:endParaRPr lang="en-US" sz="1050" dirty="0"/>
           </a:p>
@@ -14866,7 +18973,7 @@
                 <a:ea typeface="Courier New" pitchFamily="34" charset="-122"/>
                 <a:cs typeface="Courier New" pitchFamily="34" charset="-120"/>
               </a:rPr>
-              <a:t>   FOR UPDATE SKIP LOCKED</a:t>
+              <a:t xml:space="preserve">   FOR UPDATE SKIP LOCKED</a:t>
             </a:r>
             <a:endParaRPr lang="en-US" sz="950" dirty="0"/>
           </a:p>
@@ -15508,6 +19615,42 @@
               <a:t>Alert fires automatically.</a:t>
             </a:r>
             <a:endParaRPr lang="en-US" sz="1000" dirty="0"/>
+          </a:p>
+        </p:txBody>
+      </p:sp>
+      <p:sp>
+        <p:nvSpPr>
+          <p:cNvPr id="4" name="Text 2"/>
+          <p:cNvSpPr/>
+          <p:nvPr/>
+        </p:nvSpPr>
+        <p:spPr>
+          <a:xfrm>
+            <a:off x="365760" y="777240"/>
+            <a:ext cx="8412480" cy="347472"/>
+          </a:xfrm>
+          <a:prstGeom prst="rect">
+            <a:avLst/>
+          </a:prstGeom>
+          <a:noFill/>
+          <a:ln/>
+        </p:spPr>
+        <p:txBody>
+          <a:bodyPr wrap="square" tIns="0" rtlCol="0" anchor="t"/>
+          <a:lstStyle/>
+          <a:p>
+            <a:pPr indent="0" marL="0">
+              <a:buNone/>
+            </a:pPr>
+            <a:r>
+              <a:rPr lang="en-US" sz="1300" i="1" dirty="0">
+                <a:solidFill>
+                  <a:srgbClr val="2E75B6"/>
+                </a:solidFill>
+              </a:rPr>
+              <a:t>Unknown IMSI → auto-provisioned in a single atomic transaction</a:t>
+            </a:r>
+            <a:endParaRPr lang="en-US" sz="1300" dirty="0"/>
           </a:p>
         </p:txBody>
       </p:sp>
@@ -15606,42 +19749,6 @@
       </p:sp>
       <p:sp>
         <p:nvSpPr>
-          <p:cNvPr id="4" name="Text 2"/>
-          <p:cNvSpPr/>
-          <p:nvPr/>
-        </p:nvSpPr>
-        <p:spPr>
-          <a:xfrm>
-            <a:off x="365760" y="777240"/>
-            <a:ext cx="8412480" cy="347472"/>
-          </a:xfrm>
-          <a:prstGeom prst="rect">
-            <a:avLst/>
-          </a:prstGeom>
-          <a:noFill/>
-          <a:ln/>
-        </p:spPr>
-        <p:txBody>
-          <a:bodyPr wrap="square" rtlCol="0" anchor="ctr"/>
-          <a:lstStyle/>
-          <a:p>
-            <a:pPr indent="0" marL="0">
-              <a:buNone/>
-            </a:pPr>
-            <a:r>
-              <a:rPr lang="en-US" sz="1300" i="1" dirty="0">
-                <a:solidFill>
-                  <a:srgbClr val="2E75B6"/>
-                </a:solidFill>
-              </a:rPr>
-              <a:t>One IP allocated per card; all sibling slots pre-provisioned in a single transaction</a:t>
-            </a:r>
-            <a:endParaRPr lang="en-US" sz="1300" dirty="0"/>
-          </a:p>
-        </p:txBody>
-      </p:sp>
-      <p:sp>
-        <p:nvSpPr>
           <p:cNvPr id="5" name="Shape 3"/>
           <p:cNvSpPr/>
           <p:nvPr/>
@@ -16267,7 +20374,7 @@
                 <a:ea typeface="Courier New" pitchFamily="34" charset="-122"/>
                 <a:cs typeface="Courier New" pitchFamily="34" charset="-120"/>
               </a:rPr>
-              <a:t>       - 278770...000</a:t>
+              <a:t xml:space="preserve">       - 278770...000</a:t>
             </a:r>
             <a:endParaRPr lang="en-US" sz="850" dirty="0"/>
           </a:p>
@@ -16654,7 +20761,7 @@
                 <a:ea typeface="Courier New" pitchFamily="34" charset="-122"/>
                 <a:cs typeface="Courier New" pitchFamily="34" charset="-120"/>
               </a:rPr>
-              <a:t>1 IP allocated from pool</a:t>
+              <a:t>IP per slot (imsi mode)</a:t>
             </a:r>
             <a:endParaRPr lang="en-US" sz="850" dirty="0"/>
           </a:p>
@@ -16671,7 +20778,7 @@
                 <a:ea typeface="Courier New" pitchFamily="34" charset="-122"/>
                 <a:cs typeface="Courier New" pitchFamily="34" charset="-120"/>
               </a:rPr>
-              <a:t>Slot 1 + Slot 2 both INSERTed</a:t>
+              <a:t>or 1 IP card (iccid mode)</a:t>
             </a:r>
             <a:endParaRPr lang="en-US" sz="850" dirty="0"/>
           </a:p>
@@ -16688,7 +20795,7 @@
                 <a:ea typeface="Courier New" pitchFamily="34" charset="-122"/>
                 <a:cs typeface="Courier New" pitchFamily="34" charset="-120"/>
               </a:rPr>
-              <a:t>Single COMMIT</a:t>
+              <a:t>All slots INSERTed, 1 COMMIT</a:t>
             </a:r>
             <a:endParaRPr lang="en-US" sz="850" dirty="0"/>
           </a:p>
@@ -16951,7 +21058,7 @@
                   <a:srgbClr val="FFFFFF"/>
                 </a:solidFill>
               </a:rPr>
-              <a:t>Key: ONE IP allocated per physical card, regardless of IMSI count. All slots share the same IP address.</a:t>
+              <a:t>Key: All siblings provisioned in ONE transaction (thundering herd protection). imsi mode → IP per slot. iccid mode → 1 shared IP per card.</a:t>
             </a:r>
             <a:endParaRPr lang="en-US" sz="1150" dirty="0"/>
           </a:p>
@@ -16981,6 +21088,42 @@
             <a:prstDash val="solid"/>
           </a:ln>
         </p:spPr>
+      </p:sp>
+      <p:sp>
+        <p:nvSpPr>
+          <p:cNvPr id="4" name="Text 2"/>
+          <p:cNvSpPr/>
+          <p:nvPr/>
+        </p:nvSpPr>
+        <p:spPr>
+          <a:xfrm>
+            <a:off x="365760" y="777240"/>
+            <a:ext cx="8412480" cy="347472"/>
+          </a:xfrm>
+          <a:prstGeom prst="rect">
+            <a:avLst/>
+          </a:prstGeom>
+          <a:noFill/>
+          <a:ln/>
+        </p:spPr>
+        <p:txBody>
+          <a:bodyPr wrap="square" tIns="0" rtlCol="0" anchor="t"/>
+          <a:lstStyle/>
+          <a:p>
+            <a:pPr indent="0" marL="0">
+              <a:buNone/>
+            </a:pPr>
+            <a:r>
+              <a:rPr lang="en-US" sz="1300" i="1" dirty="0">
+                <a:solidFill>
+                  <a:srgbClr val="2E75B6"/>
+                </a:solidFill>
+              </a:rPr>
+              <a:t>All sibling slots pre-provisioned atomically — each from its own per-slot pool</a:t>
+            </a:r>
+            <a:endParaRPr lang="en-US" sz="1300" dirty="0"/>
+          </a:p>
+        </p:txBody>
       </p:sp>
     </p:spTree>
   </p:cSld>
@@ -17069,45 +21212,9 @@
                   <a:srgbClr val="FFFFFF"/>
                 </a:solidFill>
               </a:rPr>
-              <a:t>Data Model: 8 PostgreSQL Tables</a:t>
+              <a:t>Data Model: 9 PostgreSQL Tables</a:t>
             </a:r>
             <a:endParaRPr lang="en-US" sz="2200" dirty="0"/>
-          </a:p>
-        </p:txBody>
-      </p:sp>
-      <p:sp>
-        <p:nvSpPr>
-          <p:cNvPr id="4" name="Text 2"/>
-          <p:cNvSpPr/>
-          <p:nvPr/>
-        </p:nvSpPr>
-        <p:spPr>
-          <a:xfrm>
-            <a:off x="365760" y="777240"/>
-            <a:ext cx="8412480" cy="347472"/>
-          </a:xfrm>
-          <a:prstGeom prst="rect">
-            <a:avLst/>
-          </a:prstGeom>
-          <a:noFill/>
-          <a:ln/>
-        </p:spPr>
-        <p:txBody>
-          <a:bodyPr wrap="square" rtlCol="0" anchor="ctr"/>
-          <a:lstStyle/>
-          <a:p>
-            <a:pPr indent="0" marL="0">
-              <a:buNone/>
-            </a:pPr>
-            <a:r>
-              <a:rPr lang="en-US" sz="1300" i="1" dirty="0">
-                <a:solidFill>
-                  <a:srgbClr val="2E75B6"/>
-                </a:solidFill>
-              </a:rPr>
-              <a:t>Three logical groups — subscriber data, IP pools, and range configurations</a:t>
-            </a:r>
-            <a:endParaRPr lang="en-US" sz="1300" dirty="0"/>
           </a:p>
         </p:txBody>
       </p:sp>
@@ -17230,7 +21337,7 @@
                 <a:ea typeface="Courier New" pitchFamily="34" charset="-122"/>
                 <a:cs typeface="Courier New" pitchFamily="34" charset="-120"/>
               </a:rPr>
-              <a:t>subscriber_profiles</a:t>
+              <a:t>device_profiles</a:t>
             </a:r>
             <a:endParaRPr lang="en-US" sz="1000" dirty="0"/>
           </a:p>
@@ -17330,7 +21437,7 @@
                 <a:ea typeface="Courier New" pitchFamily="34" charset="-122"/>
                 <a:cs typeface="Courier New" pitchFamily="34" charset="-120"/>
               </a:rPr>
-              <a:t>subscriber_imsis</a:t>
+              <a:t>imsi2device</a:t>
             </a:r>
             <a:endParaRPr lang="en-US" sz="1000" dirty="0"/>
           </a:p>
@@ -17430,7 +21537,7 @@
                 <a:ea typeface="Courier New" pitchFamily="34" charset="-122"/>
                 <a:cs typeface="Courier New" pitchFamily="34" charset="-120"/>
               </a:rPr>
-              <a:t>subscriber_apn_ips</a:t>
+              <a:t>imsi_apn_ips</a:t>
             </a:r>
             <a:endParaRPr lang="en-US" sz="1000" dirty="0"/>
           </a:p>
@@ -17530,7 +21637,7 @@
                 <a:ea typeface="Courier New" pitchFamily="34" charset="-122"/>
                 <a:cs typeface="Courier New" pitchFamily="34" charset="-120"/>
               </a:rPr>
-              <a:t>subscriber_iccid_ips</a:t>
+              <a:t>device_apn_ips</a:t>
             </a:r>
             <a:endParaRPr lang="en-US" sz="1000" dirty="0"/>
           </a:p>
@@ -18152,7 +22259,7 @@
                 <a:ea typeface="Courier New" pitchFamily="34" charset="-122"/>
                 <a:cs typeface="Courier New" pitchFamily="34" charset="-120"/>
               </a:rPr>
-              <a:t>bulk_jobs</a:t>
+              <a:t>range_config_apn_pools</a:t>
             </a:r>
             <a:endParaRPr lang="en-US" sz="1000" dirty="0"/>
           </a:p>
@@ -18188,7 +22295,7 @@
                   <a:srgbClr val="8FA1BD"/>
                 </a:solidFill>
               </a:rPr>
-              <a:t>PK: job_id (UUID)  |  Async bulk job tracking</a:t>
+              <a:t>PK: id (BIGINT)  |  Per-APN pool overrides</a:t>
             </a:r>
             <a:endParaRPr lang="en-US" sz="900" dirty="0"/>
           </a:p>
@@ -18202,8 +22309,8 @@
         </p:nvSpPr>
         <p:spPr>
           <a:xfrm>
-            <a:off x="274320" y="4023360"/>
-            <a:ext cx="8595360" cy="868680"/>
+            <a:off x="6217920" y="3328416"/>
+            <a:ext cx="2651760" cy="566928"/>
           </a:xfrm>
           <a:prstGeom prst="rect">
             <a:avLst/>
@@ -18211,9 +22318,9 @@
           <a:solidFill>
             <a:srgbClr val="EEF3FB"/>
           </a:solidFill>
-          <a:ln w="10160">
-            <a:solidFill>
-              <a:srgbClr val="2E75B6"/>
+          <a:ln w="6350">
+            <a:solidFill>
+              <a:srgbClr val="D0D8E8"/>
             </a:solidFill>
             <a:prstDash val="solid"/>
           </a:ln>
@@ -18227,93 +22334,32 @@
         </p:nvSpPr>
         <p:spPr>
           <a:xfrm>
-            <a:off x="457200" y="4069080"/>
-            <a:ext cx="1828800" cy="256032"/>
-          </a:xfrm>
-          <a:prstGeom prst="rect">
-            <a:avLst/>
-          </a:prstGeom>
-          <a:noFill/>
-          <a:ln/>
-        </p:spPr>
-        <p:txBody>
-          <a:bodyPr wrap="square" lIns="0" tIns="0" rIns="0" bIns="0" rtlCol="0" anchor="ctr"/>
-          <a:lstStyle/>
-          <a:p>
-            <a:pPr indent="0" marL="0">
-              <a:buNone/>
-            </a:pPr>
-            <a:r>
-              <a:rPr lang="en-US" sz="1100" b="1" dirty="0">
+            <a:off x="6327648" y="3364992"/>
+            <a:ext cx="2432304" cy="219456"/>
+          </a:xfrm>
+          <a:prstGeom prst="rect">
+            <a:avLst/>
+          </a:prstGeom>
+          <a:noFill/>
+          <a:ln/>
+        </p:spPr>
+        <p:txBody>
+          <a:bodyPr wrap="square" lIns="0" tIns="0" rIns="0" bIns="0" rtlCol="0" anchor="ctr"/>
+          <a:lstStyle/>
+          <a:p>
+            <a:pPr indent="0" marL="0">
+              <a:buNone/>
+            </a:pPr>
+            <a:r>
+              <a:rPr lang="en-US" sz="1000" b="1" dirty="0">
                 <a:solidFill>
                   <a:srgbClr val="1E2761"/>
-                </a:solidFill>
-              </a:rPr>
-              <a:t>ip_resolution modes:</a:t>
-            </a:r>
-            <a:endParaRPr lang="en-US" sz="1100" dirty="0"/>
-          </a:p>
-        </p:txBody>
-      </p:sp>
-      <p:sp>
-        <p:nvSpPr>
-          <p:cNvPr id="40" name="Shape 38"/>
-          <p:cNvSpPr/>
-          <p:nvPr/>
-        </p:nvSpPr>
-        <p:spPr>
-          <a:xfrm>
-            <a:off x="1828800" y="4069080"/>
-            <a:ext cx="1645920" cy="749808"/>
-          </a:xfrm>
-          <a:prstGeom prst="rect">
-            <a:avLst/>
-          </a:prstGeom>
-          <a:solidFill>
-            <a:srgbClr val="1E2761"/>
-          </a:solidFill>
-          <a:ln w="6350">
-            <a:solidFill>
-              <a:srgbClr val="2E75B6"/>
-            </a:solidFill>
-            <a:prstDash val="solid"/>
-          </a:ln>
-        </p:spPr>
-      </p:sp>
-      <p:sp>
-        <p:nvSpPr>
-          <p:cNvPr id="41" name="Text 39"/>
-          <p:cNvSpPr/>
-          <p:nvPr/>
-        </p:nvSpPr>
-        <p:spPr>
-          <a:xfrm>
-            <a:off x="1828800" y="4096512"/>
-            <a:ext cx="1645920" cy="292608"/>
-          </a:xfrm>
-          <a:prstGeom prst="rect">
-            <a:avLst/>
-          </a:prstGeom>
-          <a:noFill/>
-          <a:ln/>
-        </p:spPr>
-        <p:txBody>
-          <a:bodyPr wrap="square" lIns="0" tIns="0" rIns="0" bIns="0" rtlCol="0" anchor="ctr"/>
-          <a:lstStyle/>
-          <a:p>
-            <a:pPr algn="ctr" indent="0" marL="0">
-              <a:buNone/>
-            </a:pPr>
-            <a:r>
-              <a:rPr lang="en-US" sz="1000" b="1" dirty="0">
-                <a:solidFill>
-                  <a:srgbClr val="4FC3F7"/>
                 </a:solidFill>
                 <a:latin typeface="Courier New" pitchFamily="34" charset="0"/>
                 <a:ea typeface="Courier New" pitchFamily="34" charset="-122"/>
                 <a:cs typeface="Courier New" pitchFamily="34" charset="-120"/>
               </a:rPr>
-              <a:t>imsi</a:t>
+              <a:t>bulk_jobs</a:t>
             </a:r>
             <a:endParaRPr lang="en-US" sz="1000" dirty="0"/>
           </a:p>
@@ -18321,37 +22367,98 @@
       </p:sp>
       <p:sp>
         <p:nvSpPr>
+          <p:cNvPr id="40" name="Text 38"/>
+          <p:cNvSpPr/>
+          <p:nvPr/>
+        </p:nvSpPr>
+        <p:spPr>
+          <a:xfrm>
+            <a:off x="6327648" y="3602736"/>
+            <a:ext cx="2432304" cy="201168"/>
+          </a:xfrm>
+          <a:prstGeom prst="rect">
+            <a:avLst/>
+          </a:prstGeom>
+          <a:noFill/>
+          <a:ln/>
+        </p:spPr>
+        <p:txBody>
+          <a:bodyPr wrap="square" lIns="0" tIns="0" rIns="0" bIns="0" rtlCol="0" anchor="ctr"/>
+          <a:lstStyle/>
+          <a:p>
+            <a:pPr indent="0" marL="0">
+              <a:buNone/>
+            </a:pPr>
+            <a:r>
+              <a:rPr lang="en-US" sz="900" dirty="0">
+                <a:solidFill>
+                  <a:srgbClr val="8FA1BD"/>
+                </a:solidFill>
+              </a:rPr>
+              <a:t>PK: job_id (UUID)  |  Async bulk job tracking</a:t>
+            </a:r>
+            <a:endParaRPr lang="en-US" sz="900" dirty="0"/>
+          </a:p>
+        </p:txBody>
+      </p:sp>
+      <p:sp>
+        <p:nvSpPr>
+          <p:cNvPr id="41" name="Shape 39"/>
+          <p:cNvSpPr/>
+          <p:nvPr/>
+        </p:nvSpPr>
+        <p:spPr>
+          <a:xfrm>
+            <a:off x="274320" y="4023360"/>
+            <a:ext cx="8595360" cy="868680"/>
+          </a:xfrm>
+          <a:prstGeom prst="rect">
+            <a:avLst/>
+          </a:prstGeom>
+          <a:solidFill>
+            <a:srgbClr val="EEF3FB"/>
+          </a:solidFill>
+          <a:ln w="10160">
+            <a:solidFill>
+              <a:srgbClr val="2E75B6"/>
+            </a:solidFill>
+            <a:prstDash val="solid"/>
+          </a:ln>
+        </p:spPr>
+      </p:sp>
+      <p:sp>
+        <p:nvSpPr>
           <p:cNvPr id="42" name="Text 40"/>
           <p:cNvSpPr/>
           <p:nvPr/>
         </p:nvSpPr>
         <p:spPr>
           <a:xfrm>
-            <a:off x="1828800" y="4389120"/>
-            <a:ext cx="1645920" cy="365760"/>
-          </a:xfrm>
-          <a:prstGeom prst="rect">
-            <a:avLst/>
-          </a:prstGeom>
-          <a:noFill/>
-          <a:ln/>
-        </p:spPr>
-        <p:txBody>
-          <a:bodyPr wrap="square" lIns="0" tIns="0" rIns="0" bIns="0" rtlCol="0" anchor="ctr"/>
-          <a:lstStyle/>
-          <a:p>
-            <a:pPr algn="ctr" indent="0" marL="0">
-              <a:buNone/>
-            </a:pPr>
-            <a:r>
-              <a:rPr lang="en-US" sz="900" dirty="0">
-                <a:solidFill>
-                  <a:srgbClr val="CADCFC"/>
-                </a:solidFill>
-              </a:rPr>
-              <a:t>IP per IMSI, all APNs</a:t>
-            </a:r>
-            <a:endParaRPr lang="en-US" sz="900" dirty="0"/>
+            <a:off x="457200" y="4069080"/>
+            <a:ext cx="1828800" cy="256032"/>
+          </a:xfrm>
+          <a:prstGeom prst="rect">
+            <a:avLst/>
+          </a:prstGeom>
+          <a:noFill/>
+          <a:ln/>
+        </p:spPr>
+        <p:txBody>
+          <a:bodyPr wrap="square" lIns="0" tIns="0" rIns="0" bIns="0" rtlCol="0" anchor="ctr"/>
+          <a:lstStyle/>
+          <a:p>
+            <a:pPr indent="0" marL="0">
+              <a:buNone/>
+            </a:pPr>
+            <a:r>
+              <a:rPr lang="en-US" sz="1100" b="1" dirty="0">
+                <a:solidFill>
+                  <a:srgbClr val="1E2761"/>
+                </a:solidFill>
+              </a:rPr>
+              <a:t>ip_resolution modes:</a:t>
+            </a:r>
+            <a:endParaRPr lang="en-US" sz="1100" dirty="0"/>
           </a:p>
         </p:txBody>
       </p:sp>
@@ -18363,7 +22470,7 @@
         </p:nvSpPr>
         <p:spPr>
           <a:xfrm>
-            <a:off x="3611880" y="4069080"/>
+            <a:off x="1828800" y="4069080"/>
             <a:ext cx="1645920" cy="749808"/>
           </a:xfrm>
           <a:prstGeom prst="rect">
@@ -18388,7 +22495,7 @@
         </p:nvSpPr>
         <p:spPr>
           <a:xfrm>
-            <a:off x="3611880" y="4096512"/>
+            <a:off x="1828800" y="4096512"/>
             <a:ext cx="1645920" cy="292608"/>
           </a:xfrm>
           <a:prstGeom prst="rect">
@@ -18413,7 +22520,7 @@
                 <a:ea typeface="Courier New" pitchFamily="34" charset="-122"/>
                 <a:cs typeface="Courier New" pitchFamily="34" charset="-120"/>
               </a:rPr>
-              <a:t>imsi_apn</a:t>
+              <a:t>imsi</a:t>
             </a:r>
             <a:endParaRPr lang="en-US" sz="1000" dirty="0"/>
           </a:p>
@@ -18427,7 +22534,7 @@
         </p:nvSpPr>
         <p:spPr>
           <a:xfrm>
-            <a:off x="3611880" y="4389120"/>
+            <a:off x="1828800" y="4389120"/>
             <a:ext cx="1645920" cy="365760"/>
           </a:xfrm>
           <a:prstGeom prst="rect">
@@ -18449,7 +22556,7 @@
                   <a:srgbClr val="CADCFC"/>
                 </a:solidFill>
               </a:rPr>
-              <a:t>IP per IMSI per APN</a:t>
+              <a:t>IP per IMSI, all APNs</a:t>
             </a:r>
             <a:endParaRPr lang="en-US" sz="900" dirty="0"/>
           </a:p>
@@ -18463,7 +22570,7 @@
         </p:nvSpPr>
         <p:spPr>
           <a:xfrm>
-            <a:off x="5394960" y="4069080"/>
+            <a:off x="3611880" y="4069080"/>
             <a:ext cx="1645920" cy="749808"/>
           </a:xfrm>
           <a:prstGeom prst="rect">
@@ -18488,7 +22595,7 @@
         </p:nvSpPr>
         <p:spPr>
           <a:xfrm>
-            <a:off x="5394960" y="4096512"/>
+            <a:off x="3611880" y="4096512"/>
             <a:ext cx="1645920" cy="292608"/>
           </a:xfrm>
           <a:prstGeom prst="rect">
@@ -18513,7 +22620,7 @@
                 <a:ea typeface="Courier New" pitchFamily="34" charset="-122"/>
                 <a:cs typeface="Courier New" pitchFamily="34" charset="-120"/>
               </a:rPr>
-              <a:t>iccid</a:t>
+              <a:t>imsi_apn</a:t>
             </a:r>
             <a:endParaRPr lang="en-US" sz="1000" dirty="0"/>
           </a:p>
@@ -18527,7 +22634,7 @@
         </p:nvSpPr>
         <p:spPr>
           <a:xfrm>
-            <a:off x="5394960" y="4389120"/>
+            <a:off x="3611880" y="4389120"/>
             <a:ext cx="1645920" cy="365760"/>
           </a:xfrm>
           <a:prstGeom prst="rect">
@@ -18549,7 +22656,7 @@
                   <a:srgbClr val="CADCFC"/>
                 </a:solidFill>
               </a:rPr>
-              <a:t>IP per card, all APNs</a:t>
+              <a:t>IP per IMSI per APN</a:t>
             </a:r>
             <a:endParaRPr lang="en-US" sz="900" dirty="0"/>
           </a:p>
@@ -18563,7 +22670,7 @@
         </p:nvSpPr>
         <p:spPr>
           <a:xfrm>
-            <a:off x="7178040" y="4069080"/>
+            <a:off x="5394960" y="4069080"/>
             <a:ext cx="1645920" cy="749808"/>
           </a:xfrm>
           <a:prstGeom prst="rect">
@@ -18588,7 +22695,7 @@
         </p:nvSpPr>
         <p:spPr>
           <a:xfrm>
-            <a:off x="7178040" y="4096512"/>
+            <a:off x="5394960" y="4096512"/>
             <a:ext cx="1645920" cy="292608"/>
           </a:xfrm>
           <a:prstGeom prst="rect">
@@ -18613,6 +22720,106 @@
                 <a:ea typeface="Courier New" pitchFamily="34" charset="-122"/>
                 <a:cs typeface="Courier New" pitchFamily="34" charset="-120"/>
               </a:rPr>
+              <a:t>iccid</a:t>
+            </a:r>
+            <a:endParaRPr lang="en-US" sz="1000" dirty="0"/>
+          </a:p>
+        </p:txBody>
+      </p:sp>
+      <p:sp>
+        <p:nvSpPr>
+          <p:cNvPr id="51" name="Text 49"/>
+          <p:cNvSpPr/>
+          <p:nvPr/>
+        </p:nvSpPr>
+        <p:spPr>
+          <a:xfrm>
+            <a:off x="5394960" y="4389120"/>
+            <a:ext cx="1645920" cy="365760"/>
+          </a:xfrm>
+          <a:prstGeom prst="rect">
+            <a:avLst/>
+          </a:prstGeom>
+          <a:noFill/>
+          <a:ln/>
+        </p:spPr>
+        <p:txBody>
+          <a:bodyPr wrap="square" lIns="0" tIns="0" rIns="0" bIns="0" rtlCol="0" anchor="ctr"/>
+          <a:lstStyle/>
+          <a:p>
+            <a:pPr algn="ctr" indent="0" marL="0">
+              <a:buNone/>
+            </a:pPr>
+            <a:r>
+              <a:rPr lang="en-US" sz="900" dirty="0">
+                <a:solidFill>
+                  <a:srgbClr val="CADCFC"/>
+                </a:solidFill>
+              </a:rPr>
+              <a:t>IP per card, all APNs</a:t>
+            </a:r>
+            <a:endParaRPr lang="en-US" sz="900" dirty="0"/>
+          </a:p>
+        </p:txBody>
+      </p:sp>
+      <p:sp>
+        <p:nvSpPr>
+          <p:cNvPr id="52" name="Shape 50"/>
+          <p:cNvSpPr/>
+          <p:nvPr/>
+        </p:nvSpPr>
+        <p:spPr>
+          <a:xfrm>
+            <a:off x="7178040" y="4069080"/>
+            <a:ext cx="1645920" cy="749808"/>
+          </a:xfrm>
+          <a:prstGeom prst="rect">
+            <a:avLst/>
+          </a:prstGeom>
+          <a:solidFill>
+            <a:srgbClr val="1E2761"/>
+          </a:solidFill>
+          <a:ln w="6350">
+            <a:solidFill>
+              <a:srgbClr val="2E75B6"/>
+            </a:solidFill>
+            <a:prstDash val="solid"/>
+          </a:ln>
+        </p:spPr>
+      </p:sp>
+      <p:sp>
+        <p:nvSpPr>
+          <p:cNvPr id="53" name="Text 51"/>
+          <p:cNvSpPr/>
+          <p:nvPr/>
+        </p:nvSpPr>
+        <p:spPr>
+          <a:xfrm>
+            <a:off x="7178040" y="4096512"/>
+            <a:ext cx="1645920" cy="292608"/>
+          </a:xfrm>
+          <a:prstGeom prst="rect">
+            <a:avLst/>
+          </a:prstGeom>
+          <a:noFill/>
+          <a:ln/>
+        </p:spPr>
+        <p:txBody>
+          <a:bodyPr wrap="square" lIns="0" tIns="0" rIns="0" bIns="0" rtlCol="0" anchor="ctr"/>
+          <a:lstStyle/>
+          <a:p>
+            <a:pPr algn="ctr" indent="0" marL="0">
+              <a:buNone/>
+            </a:pPr>
+            <a:r>
+              <a:rPr lang="en-US" sz="1000" b="1" dirty="0">
+                <a:solidFill>
+                  <a:srgbClr val="4FC3F7"/>
+                </a:solidFill>
+                <a:latin typeface="Courier New" pitchFamily="34" charset="0"/>
+                <a:ea typeface="Courier New" pitchFamily="34" charset="-122"/>
+                <a:cs typeface="Courier New" pitchFamily="34" charset="-120"/>
+              </a:rPr>
               <a:t>iccid_apn</a:t>
             </a:r>
             <a:endParaRPr lang="en-US" sz="1000" dirty="0"/>
@@ -18621,7 +22828,7 @@
       </p:sp>
       <p:sp>
         <p:nvSpPr>
-          <p:cNvPr id="51" name="Text 49"/>
+          <p:cNvPr id="54" name="Text 52"/>
           <p:cNvSpPr/>
           <p:nvPr/>
         </p:nvSpPr>
@@ -18652,6 +22859,42 @@
               <a:t>IP per card per APN</a:t>
             </a:r>
             <a:endParaRPr lang="en-US" sz="900" dirty="0"/>
+          </a:p>
+        </p:txBody>
+      </p:sp>
+      <p:sp>
+        <p:nvSpPr>
+          <p:cNvPr id="4" name="Text 2"/>
+          <p:cNvSpPr/>
+          <p:nvPr/>
+        </p:nvSpPr>
+        <p:spPr>
+          <a:xfrm>
+            <a:off x="365760" y="777240"/>
+            <a:ext cx="8412480" cy="347472"/>
+          </a:xfrm>
+          <a:prstGeom prst="rect">
+            <a:avLst/>
+          </a:prstGeom>
+          <a:noFill/>
+          <a:ln/>
+        </p:spPr>
+        <p:txBody>
+          <a:bodyPr wrap="square" tIns="0" rtlCol="0" anchor="t"/>
+          <a:lstStyle/>
+          <a:p>
+            <a:pPr indent="0" marL="0">
+              <a:buNone/>
+            </a:pPr>
+            <a:r>
+              <a:rPr lang="en-US" sz="1300" i="1" dirty="0">
+                <a:solidFill>
+                  <a:srgbClr val="2E75B6"/>
+                </a:solidFill>
+              </a:rPr>
+              <a:t>Three logical groups — subscriber data, IP pools, and range configurations</a:t>
+            </a:r>
+            <a:endParaRPr lang="en-US" sz="1300" dirty="0"/>
           </a:p>
         </p:txBody>
       </p:sp>
@@ -18750,42 +22993,6 @@
       </p:sp>
       <p:sp>
         <p:nvSpPr>
-          <p:cNvPr id="4" name="Text 2"/>
-          <p:cNvSpPr/>
-          <p:nvPr/>
-        </p:nvSpPr>
-        <p:spPr>
-          <a:xfrm>
-            <a:off x="365760" y="777240"/>
-            <a:ext cx="8412480" cy="347472"/>
-          </a:xfrm>
-          <a:prstGeom prst="rect">
-            <a:avLst/>
-          </a:prstGeom>
-          <a:noFill/>
-          <a:ln/>
-        </p:spPr>
-        <p:txBody>
-          <a:bodyPr wrap="square" rtlCol="0" anchor="ctr"/>
-          <a:lstStyle/>
-          <a:p>
-            <a:pPr indent="0" marL="0">
-              <a:buNone/>
-            </a:pPr>
-            <a:r>
-              <a:rPr lang="en-US" sz="1300" i="1" dirty="0">
-                <a:solidFill>
-                  <a:srgbClr val="2E75B6"/>
-                </a:solidFill>
-              </a:rPr>
-              <a:t>Full lifecycle management with JWT authentication (OAuth 2.0 Bearer)</a:t>
-            </a:r>
-            <a:endParaRPr lang="en-US" sz="1300" dirty="0"/>
-          </a:p>
-        </p:txBody>
-      </p:sp>
-      <p:sp>
-        <p:nvSpPr>
           <p:cNvPr id="5" name="Shape 3"/>
           <p:cNvSpPr/>
           <p:nvPr/>
@@ -19982,7 +24189,7 @@
                 <a:ea typeface="Courier New" pitchFamily="34" charset="-122"/>
                 <a:cs typeface="Courier New" pitchFamily="34" charset="-120"/>
               </a:rPr>
-              <a:t>POST /v1/iccid-range-configs</a:t>
+              <a:t>GET/POST/DELETE .../apn-pools</a:t>
             </a:r>
             <a:endParaRPr lang="en-US" sz="950" dirty="0"/>
           </a:p>
@@ -20046,7 +24253,7 @@
                 <a:ea typeface="Courier New" pitchFamily="34" charset="-122"/>
                 <a:cs typeface="Courier New" pitchFamily="34" charset="-120"/>
               </a:rPr>
-              <a:t>.../imsi-slots (multi-IMSI)</a:t>
+              <a:t>POST /v1/iccid-range-configs</a:t>
             </a:r>
             <a:endParaRPr lang="en-US" sz="950" dirty="0"/>
           </a:p>
@@ -20110,7 +24317,7 @@
                 <a:ea typeface="Courier New" pitchFamily="34" charset="-122"/>
                 <a:cs typeface="Courier New" pitchFamily="34" charset="-120"/>
               </a:rPr>
-              <a:t>PATCH / DELETE both types</a:t>
+              <a:t>.../imsi-slots (multi-IMSI)</a:t>
             </a:r>
             <a:endParaRPr lang="en-US" sz="950" dirty="0"/>
           </a:p>
@@ -20747,6 +24954,42 @@
               <a:t>→ queued / processing / done</a:t>
             </a:r>
             <a:endParaRPr lang="en-US" sz="950" dirty="0"/>
+          </a:p>
+        </p:txBody>
+      </p:sp>
+      <p:sp>
+        <p:nvSpPr>
+          <p:cNvPr id="4" name="Text 2"/>
+          <p:cNvSpPr/>
+          <p:nvPr/>
+        </p:nvSpPr>
+        <p:spPr>
+          <a:xfrm>
+            <a:off x="365760" y="777240"/>
+            <a:ext cx="8412480" cy="347472"/>
+          </a:xfrm>
+          <a:prstGeom prst="rect">
+            <a:avLst/>
+          </a:prstGeom>
+          <a:noFill/>
+          <a:ln/>
+        </p:spPr>
+        <p:txBody>
+          <a:bodyPr wrap="square" tIns="0" rtlCol="0" anchor="t"/>
+          <a:lstStyle/>
+          <a:p>
+            <a:pPr indent="0" marL="0">
+              <a:buNone/>
+            </a:pPr>
+            <a:r>
+              <a:rPr lang="en-US" sz="1300" i="1" dirty="0">
+                <a:solidFill>
+                  <a:srgbClr val="2E75B6"/>
+                </a:solidFill>
+              </a:rPr>
+              <a:t>Full lifecycle management with JWT authentication (OAuth 2.0 Bearer)</a:t>
+            </a:r>
+            <a:endParaRPr lang="en-US" sz="1300" dirty="0"/>
           </a:p>
         </p:txBody>
       </p:sp>

--- a/docs/aaa-platform-presentation.pptx
+++ b/docs/aaa-platform-presentation.pptx
@@ -7,6 +7,7 @@
   <p:sldIdLst>
     <p:sldId id="256" r:id="rId2"/>
     <p:sldId id="257" r:id="rId3"/>
+    <p:sldId id="271" r:id="rId22"/>
     <p:sldId id="258" r:id="rId4"/>
     <p:sldId id="259" r:id="rId5"/>
     <p:sldId id="260" r:id="rId6"/>
@@ -2147,6 +2148,10 @@
             <a:prstDash val="solid"/>
           </a:ln>
         </p:spPr>
+        <p:txBody>
+          <a:bodyPr/>
+          <a:p/>
+        </p:txBody>
       </p:sp>
       <p:sp>
         <p:nvSpPr>
@@ -2174,6 +2179,10 @@
             <a:prstDash val="solid"/>
           </a:ln>
         </p:spPr>
+        <p:txBody>
+          <a:bodyPr/>
+          <a:p/>
+        </p:txBody>
       </p:sp>
       <p:sp>
         <p:nvSpPr>
@@ -2199,6 +2208,10 @@
             <a:prstDash val="solid"/>
           </a:ln>
         </p:spPr>
+        <p:txBody>
+          <a:bodyPr/>
+          <a:p/>
+        </p:txBody>
       </p:sp>
       <p:sp>
         <p:nvSpPr>
@@ -2226,6 +2239,10 @@
             <a:prstDash val="solid"/>
           </a:ln>
         </p:spPr>
+        <p:txBody>
+          <a:bodyPr/>
+          <a:p/>
+        </p:txBody>
       </p:sp>
       <p:sp>
         <p:nvSpPr>
@@ -2421,6 +2438,10 @@
             <a:prstDash val="solid"/>
           </a:ln>
         </p:spPr>
+        <p:txBody>
+          <a:bodyPr/>
+          <a:p/>
+        </p:txBody>
       </p:sp>
       <p:sp>
         <p:nvSpPr>
@@ -2446,6 +2467,10 @@
             <a:prstDash val="solid"/>
           </a:ln>
         </p:spPr>
+        <p:txBody>
+          <a:bodyPr/>
+          <a:p/>
+        </p:txBody>
       </p:sp>
       <p:sp>
         <p:nvSpPr>
@@ -2543,6 +2568,10 @@
             <a:prstDash val="solid"/>
           </a:ln>
         </p:spPr>
+        <p:txBody>
+          <a:bodyPr/>
+          <a:p/>
+        </p:txBody>
       </p:sp>
       <p:sp>
         <p:nvSpPr>
@@ -2568,6 +2597,10 @@
             <a:prstDash val="solid"/>
           </a:ln>
         </p:spPr>
+        <p:txBody>
+          <a:bodyPr/>
+          <a:p/>
+        </p:txBody>
       </p:sp>
       <p:sp>
         <p:nvSpPr>
@@ -2665,6 +2698,10 @@
             <a:prstDash val="solid"/>
           </a:ln>
         </p:spPr>
+        <p:txBody>
+          <a:bodyPr/>
+          <a:p/>
+        </p:txBody>
       </p:sp>
       <p:sp>
         <p:nvSpPr>
@@ -2690,6 +2727,10 @@
             <a:prstDash val="solid"/>
           </a:ln>
         </p:spPr>
+        <p:txBody>
+          <a:bodyPr/>
+          <a:p/>
+        </p:txBody>
       </p:sp>
       <p:sp>
         <p:nvSpPr>
@@ -2821,6 +2862,10 @@
             <a:prstDash val="solid"/>
           </a:ln>
         </p:spPr>
+        <p:txBody>
+          <a:bodyPr/>
+          <a:p/>
+        </p:txBody>
       </p:sp>
       <p:sp>
         <p:nvSpPr>
@@ -2880,6 +2925,10 @@
             <a:prstDash val="solid"/>
           </a:ln>
         </p:spPr>
+        <p:txBody>
+          <a:bodyPr/>
+          <a:p/>
+        </p:txBody>
       </p:sp>
       <p:sp>
         <p:nvSpPr>
@@ -2939,6 +2988,10 @@
             <a:prstDash val="solid"/>
           </a:ln>
         </p:spPr>
+        <p:txBody>
+          <a:bodyPr/>
+          <a:p/>
+        </p:txBody>
       </p:sp>
       <p:sp>
         <p:nvSpPr>
@@ -2998,6 +3051,10 @@
             <a:prstDash val="solid"/>
           </a:ln>
         </p:spPr>
+        <p:txBody>
+          <a:bodyPr/>
+          <a:p/>
+        </p:txBody>
       </p:sp>
       <p:sp>
         <p:nvSpPr>
@@ -3057,6 +3114,10 @@
             <a:prstDash val="solid"/>
           </a:ln>
         </p:spPr>
+        <p:txBody>
+          <a:bodyPr/>
+          <a:p/>
+        </p:txBody>
       </p:sp>
     </p:spTree>
   </p:cSld>
@@ -3114,6 +3175,10 @@
             <a:prstDash val="solid"/>
           </a:ln>
         </p:spPr>
+        <p:txBody>
+          <a:bodyPr/>
+          <a:p/>
+        </p:txBody>
       </p:sp>
       <p:sp>
         <p:nvSpPr>
@@ -3182,6 +3247,10 @@
             </a:outerShdw>
           </a:effectLst>
         </p:spPr>
+        <p:txBody>
+          <a:bodyPr/>
+          <a:p/>
+        </p:txBody>
       </p:sp>
       <p:sp>
         <p:nvSpPr>
@@ -3207,6 +3276,10 @@
             <a:prstDash val="solid"/>
           </a:ln>
         </p:spPr>
+        <p:txBody>
+          <a:bodyPr/>
+          <a:p/>
+        </p:txBody>
       </p:sp>
       <p:sp>
         <p:nvSpPr>
@@ -3411,6 +3484,10 @@
             </a:outerShdw>
           </a:effectLst>
         </p:spPr>
+        <p:txBody>
+          <a:bodyPr/>
+          <a:p/>
+        </p:txBody>
       </p:sp>
       <p:sp>
         <p:nvSpPr>
@@ -3436,6 +3513,10 @@
             <a:prstDash val="solid"/>
           </a:ln>
         </p:spPr>
+        <p:txBody>
+          <a:bodyPr/>
+          <a:p/>
+        </p:txBody>
       </p:sp>
       <p:sp>
         <p:nvSpPr>
@@ -3640,6 +3721,10 @@
             </a:outerShdw>
           </a:effectLst>
         </p:spPr>
+        <p:txBody>
+          <a:bodyPr/>
+          <a:p/>
+        </p:txBody>
       </p:sp>
       <p:sp>
         <p:nvSpPr>
@@ -3665,6 +3750,10 @@
             <a:prstDash val="solid"/>
           </a:ln>
         </p:spPr>
+        <p:txBody>
+          <a:bodyPr/>
+          <a:p/>
+        </p:txBody>
       </p:sp>
       <p:sp>
         <p:nvSpPr>
@@ -3869,6 +3958,10 @@
             </a:outerShdw>
           </a:effectLst>
         </p:spPr>
+        <p:txBody>
+          <a:bodyPr/>
+          <a:p/>
+        </p:txBody>
       </p:sp>
       <p:sp>
         <p:nvSpPr>
@@ -3894,6 +3987,10 @@
             <a:prstDash val="solid"/>
           </a:ln>
         </p:spPr>
+        <p:txBody>
+          <a:bodyPr/>
+          <a:p/>
+        </p:txBody>
       </p:sp>
       <p:sp>
         <p:nvSpPr>
@@ -4055,6 +4152,10 @@
             <a:prstDash val="solid"/>
           </a:ln>
         </p:spPr>
+        <p:txBody>
+          <a:bodyPr/>
+          <a:p/>
+        </p:txBody>
       </p:sp>
       <p:sp>
         <p:nvSpPr>
@@ -4080,6 +4181,10 @@
             <a:prstDash val="solid"/>
           </a:ln>
         </p:spPr>
+        <p:txBody>
+          <a:bodyPr/>
+          <a:p/>
+        </p:txBody>
       </p:sp>
       <p:sp>
         <p:nvSpPr>
@@ -4217,6 +4322,10 @@
             <a:prstDash val="solid"/>
           </a:ln>
         </p:spPr>
+        <p:txBody>
+          <a:bodyPr/>
+          <a:p/>
+        </p:txBody>
       </p:sp>
       <p:sp>
         <p:nvSpPr>
@@ -4619,6 +4728,10 @@
             <a:prstDash val="solid"/>
           </a:ln>
         </p:spPr>
+        <p:txBody>
+          <a:bodyPr/>
+          <a:p/>
+        </p:txBody>
       </p:sp>
       <p:sp>
         <p:nvSpPr>
@@ -6204,6 +6317,10 @@
             <a:prstDash val="solid"/>
           </a:ln>
         </p:spPr>
+        <p:txBody>
+          <a:bodyPr/>
+          <a:p/>
+        </p:txBody>
       </p:sp>
       <p:sp>
         <p:nvSpPr>
@@ -6229,6 +6346,10 @@
             <a:prstDash val="solid"/>
           </a:ln>
         </p:spPr>
+        <p:txBody>
+          <a:bodyPr/>
+          <a:p/>
+        </p:txBody>
       </p:sp>
       <p:sp>
         <p:nvSpPr>
@@ -6326,6 +6447,10 @@
             <a:prstDash val="solid"/>
           </a:ln>
         </p:spPr>
+        <p:txBody>
+          <a:bodyPr/>
+          <a:p/>
+        </p:txBody>
       </p:sp>
       <p:sp>
         <p:nvSpPr>
@@ -6351,6 +6476,10 @@
             <a:prstDash val="solid"/>
           </a:ln>
         </p:spPr>
+        <p:txBody>
+          <a:bodyPr/>
+          <a:p/>
+        </p:txBody>
       </p:sp>
       <p:sp>
         <p:nvSpPr>
@@ -6448,6 +6577,10 @@
             <a:prstDash val="solid"/>
           </a:ln>
         </p:spPr>
+        <p:txBody>
+          <a:bodyPr/>
+          <a:p/>
+        </p:txBody>
       </p:sp>
       <p:sp>
         <p:nvSpPr>
@@ -6473,6 +6606,10 @@
             <a:prstDash val="solid"/>
           </a:ln>
         </p:spPr>
+        <p:txBody>
+          <a:bodyPr/>
+          <a:p/>
+        </p:txBody>
       </p:sp>
       <p:sp>
         <p:nvSpPr>
@@ -6570,6 +6707,10 @@
             <a:prstDash val="solid"/>
           </a:ln>
         </p:spPr>
+        <p:txBody>
+          <a:bodyPr/>
+          <a:p/>
+        </p:txBody>
       </p:sp>
       <p:sp>
         <p:nvSpPr>
@@ -6595,6 +6736,10 @@
             <a:prstDash val="solid"/>
           </a:ln>
         </p:spPr>
+        <p:txBody>
+          <a:bodyPr/>
+          <a:p/>
+        </p:txBody>
       </p:sp>
       <p:sp>
         <p:nvSpPr>
@@ -6728,6 +6873,10 @@
             <a:prstDash val="solid"/>
           </a:ln>
         </p:spPr>
+        <p:txBody>
+          <a:bodyPr/>
+          <a:p/>
+        </p:txBody>
       </p:sp>
       <p:sp>
         <p:nvSpPr>
@@ -6896,6 +7045,10 @@
             <a:prstDash val="solid"/>
           </a:ln>
         </p:spPr>
+        <p:txBody>
+          <a:bodyPr/>
+          <a:p/>
+        </p:txBody>
       </p:sp>
       <p:sp>
         <p:nvSpPr>
@@ -6957,6 +7110,10 @@
             <a:prstDash val="solid"/>
           </a:ln>
         </p:spPr>
+        <p:txBody>
+          <a:bodyPr/>
+          <a:p/>
+        </p:txBody>
       </p:sp>
       <p:sp>
         <p:nvSpPr>
@@ -7025,6 +7182,10 @@
             </a:outerShdw>
           </a:effectLst>
         </p:spPr>
+        <p:txBody>
+          <a:bodyPr/>
+          <a:p/>
+        </p:txBody>
       </p:sp>
       <p:sp>
         <p:nvSpPr>
@@ -7143,6 +7304,10 @@
             </a:outerShdw>
           </a:effectLst>
         </p:spPr>
+        <p:txBody>
+          <a:bodyPr/>
+          <a:p/>
+        </p:txBody>
       </p:sp>
       <p:sp>
         <p:nvSpPr>
@@ -7261,6 +7426,10 @@
             </a:outerShdw>
           </a:effectLst>
         </p:spPr>
+        <p:txBody>
+          <a:bodyPr/>
+          <a:p/>
+        </p:txBody>
       </p:sp>
       <p:sp>
         <p:nvSpPr>
@@ -7379,6 +7548,10 @@
             </a:outerShdw>
           </a:effectLst>
         </p:spPr>
+        <p:txBody>
+          <a:bodyPr/>
+          <a:p/>
+        </p:txBody>
       </p:sp>
       <p:sp>
         <p:nvSpPr>
@@ -7488,6 +7661,10 @@
             <a:prstDash val="dash"/>
           </a:ln>
         </p:spPr>
+        <p:txBody>
+          <a:bodyPr/>
+          <a:p/>
+        </p:txBody>
       </p:sp>
       <p:sp>
         <p:nvSpPr>
@@ -7511,6 +7688,10 @@
             <a:prstDash val="dash"/>
           </a:ln>
         </p:spPr>
+        <p:txBody>
+          <a:bodyPr/>
+          <a:p/>
+        </p:txBody>
       </p:sp>
       <p:sp>
         <p:nvSpPr>
@@ -7536,6 +7717,10 @@
             <a:prstDash val="solid"/>
           </a:ln>
         </p:spPr>
+        <p:txBody>
+          <a:bodyPr/>
+          <a:p/>
+        </p:txBody>
       </p:sp>
       <p:sp>
         <p:nvSpPr>
@@ -7561,6 +7746,10 @@
             <a:prstDash val="solid"/>
           </a:ln>
         </p:spPr>
+        <p:txBody>
+          <a:bodyPr/>
+          <a:p/>
+        </p:txBody>
       </p:sp>
       <p:sp>
         <p:nvSpPr>
@@ -7622,6 +7811,10 @@
             <a:prstDash val="solid"/>
           </a:ln>
         </p:spPr>
+        <p:txBody>
+          <a:bodyPr/>
+          <a:p/>
+        </p:txBody>
       </p:sp>
       <p:sp>
         <p:nvSpPr>
@@ -7683,6 +7876,10 @@
             <a:prstDash val="solid"/>
           </a:ln>
         </p:spPr>
+        <p:txBody>
+          <a:bodyPr/>
+          <a:p/>
+        </p:txBody>
       </p:sp>
       <p:sp>
         <p:nvSpPr>
@@ -7744,6 +7941,10 @@
             <a:prstDash val="solid"/>
           </a:ln>
         </p:spPr>
+        <p:txBody>
+          <a:bodyPr/>
+          <a:p/>
+        </p:txBody>
       </p:sp>
       <p:sp>
         <p:nvSpPr>
@@ -7805,6 +8006,10 @@
             <a:prstDash val="solid"/>
           </a:ln>
         </p:spPr>
+        <p:txBody>
+          <a:bodyPr/>
+          <a:p/>
+        </p:txBody>
       </p:sp>
       <p:sp>
         <p:nvSpPr>
@@ -7866,6 +8071,10 @@
             <a:prstDash val="solid"/>
           </a:ln>
         </p:spPr>
+        <p:txBody>
+          <a:bodyPr/>
+          <a:p/>
+        </p:txBody>
       </p:sp>
       <p:sp>
         <p:nvSpPr>
@@ -8122,6 +8331,10 @@
             <a:prstDash val="solid"/>
           </a:ln>
         </p:spPr>
+        <p:txBody>
+          <a:bodyPr/>
+          <a:p/>
+        </p:txBody>
       </p:sp>
       <p:sp>
         <p:nvSpPr>
@@ -8359,6 +8572,10 @@
             <a:prstDash val="solid"/>
           </a:ln>
         </p:spPr>
+        <p:txBody>
+          <a:bodyPr/>
+          <a:p/>
+        </p:txBody>
       </p:sp>
       <p:sp>
         <p:nvSpPr>
@@ -8456,6 +8673,10 @@
             <a:prstDash val="solid"/>
           </a:ln>
         </p:spPr>
+        <p:txBody>
+          <a:bodyPr/>
+          <a:p/>
+        </p:txBody>
       </p:sp>
       <p:sp>
         <p:nvSpPr>
@@ -8556,6 +8777,10 @@
             <a:prstDash val="solid"/>
           </a:ln>
         </p:spPr>
+        <p:txBody>
+          <a:bodyPr/>
+          <a:p/>
+        </p:txBody>
       </p:sp>
       <p:sp>
         <p:nvSpPr>
@@ -8656,6 +8881,10 @@
             <a:prstDash val="solid"/>
           </a:ln>
         </p:spPr>
+        <p:txBody>
+          <a:bodyPr/>
+          <a:p/>
+        </p:txBody>
       </p:sp>
       <p:sp>
         <p:nvSpPr>
@@ -8792,6 +9021,10 @@
             <a:prstDash val="solid"/>
           </a:ln>
         </p:spPr>
+        <p:txBody>
+          <a:bodyPr/>
+          <a:p/>
+        </p:txBody>
       </p:sp>
       <p:sp>
         <p:nvSpPr>
@@ -8892,6 +9125,10 @@
             <a:prstDash val="solid"/>
           </a:ln>
         </p:spPr>
+        <p:txBody>
+          <a:bodyPr/>
+          <a:p/>
+        </p:txBody>
       </p:sp>
       <p:sp>
         <p:nvSpPr>
@@ -8992,6 +9229,10 @@
             <a:prstDash val="solid"/>
           </a:ln>
         </p:spPr>
+        <p:txBody>
+          <a:bodyPr/>
+          <a:p/>
+        </p:txBody>
       </p:sp>
       <p:sp>
         <p:nvSpPr>
@@ -9092,6 +9333,10 @@
             <a:prstDash val="solid"/>
           </a:ln>
         </p:spPr>
+        <p:txBody>
+          <a:bodyPr/>
+          <a:p/>
+        </p:txBody>
       </p:sp>
       <p:sp>
         <p:nvSpPr>
@@ -9192,6 +9437,10 @@
             <a:prstDash val="solid"/>
           </a:ln>
         </p:spPr>
+        <p:txBody>
+          <a:bodyPr/>
+          <a:p/>
+        </p:txBody>
       </p:sp>
       <p:sp>
         <p:nvSpPr>
@@ -9217,6 +9466,10 @@
             <a:prstDash val="solid"/>
           </a:ln>
         </p:spPr>
+        <p:txBody>
+          <a:bodyPr/>
+          <a:p/>
+        </p:txBody>
       </p:sp>
       <p:sp>
         <p:nvSpPr>
@@ -9312,6 +9565,10 @@
             <a:prstDash val="solid"/>
           </a:ln>
         </p:spPr>
+        <p:txBody>
+          <a:bodyPr/>
+          <a:p/>
+        </p:txBody>
       </p:sp>
       <p:sp>
         <p:nvSpPr>
@@ -9371,6 +9628,10 @@
             <a:prstDash val="solid"/>
           </a:ln>
         </p:spPr>
+        <p:txBody>
+          <a:bodyPr/>
+          <a:p/>
+        </p:txBody>
       </p:sp>
       <p:sp>
         <p:nvSpPr>
@@ -9430,6 +9691,10 @@
             <a:prstDash val="solid"/>
           </a:ln>
         </p:spPr>
+        <p:txBody>
+          <a:bodyPr/>
+          <a:p/>
+        </p:txBody>
       </p:sp>
       <p:sp>
         <p:nvSpPr>
@@ -9489,6 +9754,10 @@
             <a:prstDash val="solid"/>
           </a:ln>
         </p:spPr>
+        <p:txBody>
+          <a:bodyPr/>
+          <a:p/>
+        </p:txBody>
       </p:sp>
       <p:sp>
         <p:nvSpPr>
@@ -9548,6 +9817,10 @@
             <a:prstDash val="solid"/>
           </a:ln>
         </p:spPr>
+        <p:txBody>
+          <a:bodyPr/>
+          <a:p/>
+        </p:txBody>
       </p:sp>
       <p:sp>
         <p:nvSpPr>
@@ -9607,6 +9880,10 @@
             <a:prstDash val="solid"/>
           </a:ln>
         </p:spPr>
+        <p:txBody>
+          <a:bodyPr/>
+          <a:p/>
+        </p:txBody>
       </p:sp>
       <p:sp>
         <p:nvSpPr>
@@ -9666,6 +9943,10 @@
             <a:prstDash val="solid"/>
           </a:ln>
         </p:spPr>
+        <p:txBody>
+          <a:bodyPr/>
+          <a:p/>
+        </p:txBody>
       </p:sp>
       <p:sp>
         <p:nvSpPr>
@@ -9725,6 +10006,10 @@
             <a:prstDash val="solid"/>
           </a:ln>
         </p:spPr>
+        <p:txBody>
+          <a:bodyPr/>
+          <a:p/>
+        </p:txBody>
       </p:sp>
       <p:sp>
         <p:nvSpPr>
@@ -9784,6 +10069,10 @@
             <a:prstDash val="solid"/>
           </a:ln>
         </p:spPr>
+        <p:txBody>
+          <a:bodyPr/>
+          <a:p/>
+        </p:txBody>
       </p:sp>
       <p:sp>
         <p:nvSpPr>
@@ -9870,6 +10159,10 @@
             <a:prstDash val="solid"/>
           </a:ln>
         </p:spPr>
+        <p:txBody>
+          <a:bodyPr/>
+          <a:p/>
+        </p:txBody>
       </p:sp>
       <p:sp>
         <p:nvSpPr>
@@ -9967,6 +10260,10 @@
             <a:prstDash val="solid"/>
           </a:ln>
         </p:spPr>
+        <p:txBody>
+          <a:bodyPr/>
+          <a:p/>
+        </p:txBody>
       </p:sp>
       <p:sp>
         <p:nvSpPr>
@@ -10028,6 +10325,10 @@
             <a:prstDash val="solid"/>
           </a:ln>
         </p:spPr>
+        <p:txBody>
+          <a:bodyPr/>
+          <a:p/>
+        </p:txBody>
       </p:sp>
       <p:sp>
         <p:nvSpPr>
@@ -10089,6 +10390,10 @@
             <a:prstDash val="solid"/>
           </a:ln>
         </p:spPr>
+        <p:txBody>
+          <a:bodyPr/>
+          <a:p/>
+        </p:txBody>
       </p:sp>
       <p:sp>
         <p:nvSpPr>
@@ -10150,6 +10455,10 @@
             <a:prstDash val="solid"/>
           </a:ln>
         </p:spPr>
+        <p:txBody>
+          <a:bodyPr/>
+          <a:p/>
+        </p:txBody>
       </p:sp>
       <p:sp>
         <p:nvSpPr>
@@ -10211,6 +10520,10 @@
             <a:prstDash val="solid"/>
           </a:ln>
         </p:spPr>
+        <p:txBody>
+          <a:bodyPr/>
+          <a:p/>
+        </p:txBody>
       </p:sp>
       <p:sp>
         <p:nvSpPr>
@@ -10272,6 +10585,10 @@
             <a:prstDash val="solid"/>
           </a:ln>
         </p:spPr>
+        <p:txBody>
+          <a:bodyPr/>
+          <a:p/>
+        </p:txBody>
       </p:sp>
       <p:sp>
         <p:nvSpPr>
@@ -10333,6 +10650,10 @@
             <a:prstDash val="solid"/>
           </a:ln>
         </p:spPr>
+        <p:txBody>
+          <a:bodyPr/>
+          <a:p/>
+        </p:txBody>
       </p:sp>
       <p:sp>
         <p:nvSpPr>
@@ -10394,6 +10715,10 @@
             <a:prstDash val="solid"/>
           </a:ln>
         </p:spPr>
+        <p:txBody>
+          <a:bodyPr/>
+          <a:p/>
+        </p:txBody>
       </p:sp>
       <p:sp>
         <p:nvSpPr>
@@ -10455,6 +10780,10 @@
             <a:prstDash val="solid"/>
           </a:ln>
         </p:spPr>
+        <p:txBody>
+          <a:bodyPr/>
+          <a:p/>
+        </p:txBody>
       </p:sp>
       <p:sp>
         <p:nvSpPr>
@@ -10516,6 +10845,10 @@
             <a:prstDash val="solid"/>
           </a:ln>
         </p:spPr>
+        <p:txBody>
+          <a:bodyPr/>
+          <a:p/>
+        </p:txBody>
       </p:sp>
       <p:sp>
         <p:nvSpPr>
@@ -10577,6 +10910,10 @@
             <a:prstDash val="solid"/>
           </a:ln>
         </p:spPr>
+        <p:txBody>
+          <a:bodyPr/>
+          <a:p/>
+        </p:txBody>
       </p:sp>
       <p:sp>
         <p:nvSpPr>
@@ -10638,6 +10975,10 @@
             <a:prstDash val="solid"/>
           </a:ln>
         </p:spPr>
+        <p:txBody>
+          <a:bodyPr/>
+          <a:p/>
+        </p:txBody>
       </p:sp>
       <p:sp>
         <p:nvSpPr>
@@ -10699,6 +11040,10 @@
             <a:prstDash val="solid"/>
           </a:ln>
         </p:spPr>
+        <p:txBody>
+          <a:bodyPr/>
+          <a:p/>
+        </p:txBody>
       </p:sp>
       <p:sp>
         <p:nvSpPr>
@@ -10760,6 +11105,10 @@
             <a:prstDash val="solid"/>
           </a:ln>
         </p:spPr>
+        <p:txBody>
+          <a:bodyPr/>
+          <a:p/>
+        </p:txBody>
       </p:sp>
       <p:sp>
         <p:nvSpPr>
@@ -10821,6 +11170,10 @@
             <a:prstDash val="solid"/>
           </a:ln>
         </p:spPr>
+        <p:txBody>
+          <a:bodyPr/>
+          <a:p/>
+        </p:txBody>
       </p:sp>
       <p:sp>
         <p:nvSpPr>
@@ -10882,6 +11235,10 @@
             <a:prstDash val="solid"/>
           </a:ln>
         </p:spPr>
+        <p:txBody>
+          <a:bodyPr/>
+          <a:p/>
+        </p:txBody>
       </p:sp>
       <p:sp>
         <p:nvSpPr>
@@ -10943,6 +11300,10 @@
             <a:prstDash val="solid"/>
           </a:ln>
         </p:spPr>
+        <p:txBody>
+          <a:bodyPr/>
+          <a:p/>
+        </p:txBody>
       </p:sp>
       <p:sp>
         <p:nvSpPr>
@@ -11004,6 +11365,10 @@
             <a:prstDash val="solid"/>
           </a:ln>
         </p:spPr>
+        <p:txBody>
+          <a:bodyPr/>
+          <a:p/>
+        </p:txBody>
       </p:sp>
       <p:sp>
         <p:nvSpPr>
@@ -11065,6 +11430,10 @@
             <a:prstDash val="solid"/>
           </a:ln>
         </p:spPr>
+        <p:txBody>
+          <a:bodyPr/>
+          <a:p/>
+        </p:txBody>
       </p:sp>
       <p:sp>
         <p:nvSpPr>
@@ -11126,6 +11495,10 @@
             <a:prstDash val="solid"/>
           </a:ln>
         </p:spPr>
+        <p:txBody>
+          <a:bodyPr/>
+          <a:p/>
+        </p:txBody>
       </p:sp>
       <p:sp>
         <p:nvSpPr>
@@ -11187,6 +11560,10 @@
             <a:prstDash val="solid"/>
           </a:ln>
         </p:spPr>
+        <p:txBody>
+          <a:bodyPr/>
+          <a:p/>
+        </p:txBody>
       </p:sp>
       <p:sp>
         <p:nvSpPr>
@@ -11248,6 +11625,10 @@
             <a:prstDash val="solid"/>
           </a:ln>
         </p:spPr>
+        <p:txBody>
+          <a:bodyPr/>
+          <a:p/>
+        </p:txBody>
       </p:sp>
       <p:sp>
         <p:nvSpPr>
@@ -11309,6 +11690,10 @@
             <a:prstDash val="solid"/>
           </a:ln>
         </p:spPr>
+        <p:txBody>
+          <a:bodyPr/>
+          <a:p/>
+        </p:txBody>
       </p:sp>
       <p:sp>
         <p:nvSpPr>
@@ -11370,6 +11755,10 @@
             <a:prstDash val="solid"/>
           </a:ln>
         </p:spPr>
+        <p:txBody>
+          <a:bodyPr/>
+          <a:p/>
+        </p:txBody>
       </p:sp>
       <p:sp>
         <p:nvSpPr>
@@ -11431,6 +11820,10 @@
             <a:prstDash val="solid"/>
           </a:ln>
         </p:spPr>
+        <p:txBody>
+          <a:bodyPr/>
+          <a:p/>
+        </p:txBody>
       </p:sp>
       <p:sp>
         <p:nvSpPr>
@@ -11492,6 +11885,10 @@
             <a:prstDash val="solid"/>
           </a:ln>
         </p:spPr>
+        <p:txBody>
+          <a:bodyPr/>
+          <a:p/>
+        </p:txBody>
       </p:sp>
       <p:sp>
         <p:nvSpPr>
@@ -11553,6 +11950,10 @@
             <a:prstDash val="solid"/>
           </a:ln>
         </p:spPr>
+        <p:txBody>
+          <a:bodyPr/>
+          <a:p/>
+        </p:txBody>
       </p:sp>
       <p:sp>
         <p:nvSpPr>
@@ -11614,6 +12015,10 @@
             <a:prstDash val="solid"/>
           </a:ln>
         </p:spPr>
+        <p:txBody>
+          <a:bodyPr/>
+          <a:p/>
+        </p:txBody>
       </p:sp>
       <p:sp>
         <p:nvSpPr>
@@ -11675,6 +12080,10 @@
             <a:prstDash val="solid"/>
           </a:ln>
         </p:spPr>
+        <p:txBody>
+          <a:bodyPr/>
+          <a:p/>
+        </p:txBody>
       </p:sp>
       <p:sp>
         <p:nvSpPr>
@@ -11736,6 +12145,10 @@
             <a:prstDash val="solid"/>
           </a:ln>
         </p:spPr>
+        <p:txBody>
+          <a:bodyPr/>
+          <a:p/>
+        </p:txBody>
       </p:sp>
       <p:sp>
         <p:nvSpPr>
@@ -11797,6 +12210,10 @@
             <a:prstDash val="solid"/>
           </a:ln>
         </p:spPr>
+        <p:txBody>
+          <a:bodyPr/>
+          <a:p/>
+        </p:txBody>
       </p:sp>
       <p:sp>
         <p:nvSpPr>
@@ -11858,6 +12275,10 @@
             <a:prstDash val="solid"/>
           </a:ln>
         </p:spPr>
+        <p:txBody>
+          <a:bodyPr/>
+          <a:p/>
+        </p:txBody>
       </p:sp>
       <p:sp>
         <p:nvSpPr>
@@ -11919,6 +12340,10 @@
             <a:prstDash val="solid"/>
           </a:ln>
         </p:spPr>
+        <p:txBody>
+          <a:bodyPr/>
+          <a:p/>
+        </p:txBody>
       </p:sp>
       <p:sp>
         <p:nvSpPr>
@@ -11980,6 +12405,10 @@
             <a:prstDash val="solid"/>
           </a:ln>
         </p:spPr>
+        <p:txBody>
+          <a:bodyPr/>
+          <a:p/>
+        </p:txBody>
       </p:sp>
       <p:sp>
         <p:nvSpPr>
@@ -12041,6 +12470,10 @@
             <a:prstDash val="solid"/>
           </a:ln>
         </p:spPr>
+        <p:txBody>
+          <a:bodyPr/>
+          <a:p/>
+        </p:txBody>
       </p:sp>
       <p:sp>
         <p:nvSpPr>
@@ -12102,6 +12535,10 @@
             <a:prstDash val="solid"/>
           </a:ln>
         </p:spPr>
+        <p:txBody>
+          <a:bodyPr/>
+          <a:p/>
+        </p:txBody>
       </p:sp>
       <p:sp>
         <p:nvSpPr>
@@ -12163,6 +12600,10 @@
             <a:prstDash val="solid"/>
           </a:ln>
         </p:spPr>
+        <p:txBody>
+          <a:bodyPr/>
+          <a:p/>
+        </p:txBody>
       </p:sp>
       <p:sp>
         <p:nvSpPr>
@@ -12224,6 +12665,10 @@
             <a:prstDash val="solid"/>
           </a:ln>
         </p:spPr>
+        <p:txBody>
+          <a:bodyPr/>
+          <a:p/>
+        </p:txBody>
       </p:sp>
       <p:sp>
         <p:nvSpPr>
@@ -12285,6 +12730,10 @@
             <a:prstDash val="solid"/>
           </a:ln>
         </p:spPr>
+        <p:txBody>
+          <a:bodyPr/>
+          <a:p/>
+        </p:txBody>
       </p:sp>
       <p:sp>
         <p:nvSpPr>
@@ -12346,6 +12795,10 @@
             <a:prstDash val="solid"/>
           </a:ln>
         </p:spPr>
+        <p:txBody>
+          <a:bodyPr/>
+          <a:p/>
+        </p:txBody>
       </p:sp>
       <p:sp>
         <p:nvSpPr>
@@ -12407,6 +12860,10 @@
             <a:prstDash val="solid"/>
           </a:ln>
         </p:spPr>
+        <p:txBody>
+          <a:bodyPr/>
+          <a:p/>
+        </p:txBody>
       </p:sp>
       <p:sp>
         <p:nvSpPr>
@@ -12468,6 +12925,10 @@
             <a:prstDash val="solid"/>
           </a:ln>
         </p:spPr>
+        <p:txBody>
+          <a:bodyPr/>
+          <a:p/>
+        </p:txBody>
       </p:sp>
       <p:sp>
         <p:nvSpPr>
@@ -12529,6 +12990,10 @@
             <a:prstDash val="solid"/>
           </a:ln>
         </p:spPr>
+        <p:txBody>
+          <a:bodyPr/>
+          <a:p/>
+        </p:txBody>
       </p:sp>
       <p:sp>
         <p:nvSpPr>
@@ -12590,6 +13055,10 @@
             <a:prstDash val="solid"/>
           </a:ln>
         </p:spPr>
+        <p:txBody>
+          <a:bodyPr/>
+          <a:p/>
+        </p:txBody>
       </p:sp>
       <p:sp>
         <p:nvSpPr>
@@ -12651,6 +13120,10 @@
             <a:prstDash val="solid"/>
           </a:ln>
         </p:spPr>
+        <p:txBody>
+          <a:bodyPr/>
+          <a:p/>
+        </p:txBody>
       </p:sp>
       <p:sp>
         <p:nvSpPr>
@@ -12712,6 +13185,10 @@
             <a:prstDash val="solid"/>
           </a:ln>
         </p:spPr>
+        <p:txBody>
+          <a:bodyPr/>
+          <a:p/>
+        </p:txBody>
       </p:sp>
       <p:sp>
         <p:nvSpPr>
@@ -12773,6 +13250,10 @@
             <a:prstDash val="solid"/>
           </a:ln>
         </p:spPr>
+        <p:txBody>
+          <a:bodyPr/>
+          <a:p/>
+        </p:txBody>
       </p:sp>
       <p:sp>
         <p:nvSpPr>
@@ -12834,6 +13315,10 @@
             <a:prstDash val="solid"/>
           </a:ln>
         </p:spPr>
+        <p:txBody>
+          <a:bodyPr/>
+          <a:p/>
+        </p:txBody>
       </p:sp>
       <p:sp>
         <p:nvSpPr>
@@ -12895,6 +13380,10 @@
             <a:prstDash val="solid"/>
           </a:ln>
         </p:spPr>
+        <p:txBody>
+          <a:bodyPr/>
+          <a:p/>
+        </p:txBody>
       </p:sp>
       <p:sp>
         <p:nvSpPr>
@@ -12956,6 +13445,10 @@
             <a:prstDash val="solid"/>
           </a:ln>
         </p:spPr>
+        <p:txBody>
+          <a:bodyPr/>
+          <a:p/>
+        </p:txBody>
       </p:sp>
       <p:sp>
         <p:nvSpPr>
@@ -13017,6 +13510,10 @@
             <a:prstDash val="solid"/>
           </a:ln>
         </p:spPr>
+        <p:txBody>
+          <a:bodyPr/>
+          <a:p/>
+        </p:txBody>
       </p:sp>
       <p:sp>
         <p:nvSpPr>
@@ -13078,6 +13575,10 @@
             <a:prstDash val="solid"/>
           </a:ln>
         </p:spPr>
+        <p:txBody>
+          <a:bodyPr/>
+          <a:p/>
+        </p:txBody>
       </p:sp>
       <p:sp>
         <p:nvSpPr>
@@ -13139,6 +13640,10 @@
             <a:prstDash val="solid"/>
           </a:ln>
         </p:spPr>
+        <p:txBody>
+          <a:bodyPr/>
+          <a:p/>
+        </p:txBody>
       </p:sp>
       <p:sp>
         <p:nvSpPr>
@@ -13200,6 +13705,10 @@
             <a:prstDash val="solid"/>
           </a:ln>
         </p:spPr>
+        <p:txBody>
+          <a:bodyPr/>
+          <a:p/>
+        </p:txBody>
       </p:sp>
       <p:sp>
         <p:nvSpPr>
@@ -13261,6 +13770,10 @@
             <a:prstDash val="solid"/>
           </a:ln>
         </p:spPr>
+        <p:txBody>
+          <a:bodyPr/>
+          <a:p/>
+        </p:txBody>
       </p:sp>
       <p:sp>
         <p:nvSpPr>
@@ -13322,6 +13835,10 @@
             <a:prstDash val="solid"/>
           </a:ln>
         </p:spPr>
+        <p:txBody>
+          <a:bodyPr/>
+          <a:p/>
+        </p:txBody>
       </p:sp>
       <p:sp>
         <p:nvSpPr>
@@ -13383,6 +13900,10 @@
             <a:prstDash val="solid"/>
           </a:ln>
         </p:spPr>
+        <p:txBody>
+          <a:bodyPr/>
+          <a:p/>
+        </p:txBody>
       </p:sp>
       <p:sp>
         <p:nvSpPr>
@@ -13444,6 +13965,10 @@
             <a:prstDash val="solid"/>
           </a:ln>
         </p:spPr>
+        <p:txBody>
+          <a:bodyPr/>
+          <a:p/>
+        </p:txBody>
       </p:sp>
       <p:sp>
         <p:nvSpPr>
@@ -13505,6 +14030,10 @@
             <a:prstDash val="solid"/>
           </a:ln>
         </p:spPr>
+        <p:txBody>
+          <a:bodyPr/>
+          <a:p/>
+        </p:txBody>
       </p:sp>
       <p:sp>
         <p:nvSpPr>
@@ -13566,6 +14095,10 @@
             <a:prstDash val="solid"/>
           </a:ln>
         </p:spPr>
+        <p:txBody>
+          <a:bodyPr/>
+          <a:p/>
+        </p:txBody>
       </p:sp>
       <p:sp>
         <p:nvSpPr>
@@ -13627,6 +14160,10 @@
             <a:prstDash val="solid"/>
           </a:ln>
         </p:spPr>
+        <p:txBody>
+          <a:bodyPr/>
+          <a:p/>
+        </p:txBody>
       </p:sp>
       <p:sp>
         <p:nvSpPr>
@@ -13688,6 +14225,10 @@
             <a:prstDash val="solid"/>
           </a:ln>
         </p:spPr>
+        <p:txBody>
+          <a:bodyPr/>
+          <a:p/>
+        </p:txBody>
       </p:sp>
       <p:sp>
         <p:nvSpPr>
@@ -13749,6 +14290,10 @@
             <a:prstDash val="solid"/>
           </a:ln>
         </p:spPr>
+        <p:txBody>
+          <a:bodyPr/>
+          <a:p/>
+        </p:txBody>
       </p:sp>
       <p:sp>
         <p:nvSpPr>
@@ -13810,6 +14355,10 @@
             <a:prstDash val="solid"/>
           </a:ln>
         </p:spPr>
+        <p:txBody>
+          <a:bodyPr/>
+          <a:p/>
+        </p:txBody>
       </p:sp>
       <p:sp>
         <p:nvSpPr>
@@ -13931,6 +14480,10 @@
             <a:prstDash val="solid"/>
           </a:ln>
         </p:spPr>
+        <p:txBody>
+          <a:bodyPr/>
+          <a:p/>
+        </p:txBody>
       </p:sp>
       <p:sp>
         <p:nvSpPr>
@@ -13992,6 +14545,10 @@
             <a:prstDash val="solid"/>
           </a:ln>
         </p:spPr>
+        <p:txBody>
+          <a:bodyPr/>
+          <a:p/>
+        </p:txBody>
       </p:sp>
       <p:sp>
         <p:nvSpPr>
@@ -14017,6 +14574,10 @@
             <a:prstDash val="solid"/>
           </a:ln>
         </p:spPr>
+        <p:txBody>
+          <a:bodyPr/>
+          <a:p/>
+        </p:txBody>
       </p:sp>
       <p:sp>
         <p:nvSpPr>
@@ -14114,6 +14675,10 @@
             <a:prstDash val="solid"/>
           </a:ln>
         </p:spPr>
+        <p:txBody>
+          <a:bodyPr/>
+          <a:p/>
+        </p:txBody>
       </p:sp>
       <p:sp>
         <p:nvSpPr>
@@ -14139,6 +14704,10 @@
             <a:prstDash val="solid"/>
           </a:ln>
         </p:spPr>
+        <p:txBody>
+          <a:bodyPr/>
+          <a:p/>
+        </p:txBody>
       </p:sp>
       <p:sp>
         <p:nvSpPr>
@@ -14236,6 +14805,10 @@
             <a:prstDash val="solid"/>
           </a:ln>
         </p:spPr>
+        <p:txBody>
+          <a:bodyPr/>
+          <a:p/>
+        </p:txBody>
       </p:sp>
       <p:sp>
         <p:nvSpPr>
@@ -14261,6 +14834,10 @@
             <a:prstDash val="solid"/>
           </a:ln>
         </p:spPr>
+        <p:txBody>
+          <a:bodyPr/>
+          <a:p/>
+        </p:txBody>
       </p:sp>
       <p:sp>
         <p:nvSpPr>
@@ -14358,6 +14935,10 @@
             <a:prstDash val="solid"/>
           </a:ln>
         </p:spPr>
+        <p:txBody>
+          <a:bodyPr/>
+          <a:p/>
+        </p:txBody>
       </p:sp>
       <p:sp>
         <p:nvSpPr>
@@ -14383,6 +14964,10 @@
             <a:prstDash val="solid"/>
           </a:ln>
         </p:spPr>
+        <p:txBody>
+          <a:bodyPr/>
+          <a:p/>
+        </p:txBody>
       </p:sp>
       <p:sp>
         <p:nvSpPr>
@@ -14478,6 +15063,10 @@
             <a:prstDash val="solid"/>
           </a:ln>
         </p:spPr>
+        <p:txBody>
+          <a:bodyPr/>
+          <a:p/>
+        </p:txBody>
       </p:sp>
       <p:sp>
         <p:nvSpPr>
@@ -14515,6 +15104,2036 @@
           </a:p>
         </p:txBody>
       </p:sp>
+    </p:spTree>
+  </p:cSld>
+  <p:clrMapOvr>
+    <a:masterClrMapping/>
+  </p:clrMapOvr>
+</p:sld>
+</file>
+
+<file path=ppt/slides/slide16.xml><?xml version="1.0" encoding="utf-8"?>
+<p:sld xmlns:a="http://schemas.openxmlformats.org/drawingml/2006/main" xmlns:p="http://schemas.openxmlformats.org/presentationml/2006/main" xmlns:r="http://schemas.openxmlformats.org/officeDocument/2006/relationships">
+  <p:cSld>
+    <p:bg>
+      <p:bgPr>
+        <a:solidFill>
+          <a:srgbClr val="EEF3FB"/>
+        </a:solidFill>
+        <a:effectLst/>
+      </p:bgPr>
+    </p:bg>
+    <p:spTree>
+      <p:nvGrpSpPr>
+        <p:cNvPr id="1" name=""/>
+        <p:cNvGrpSpPr/>
+        <p:nvPr/>
+      </p:nvGrpSpPr>
+      <p:grpSpPr/>
+      <p:sp>
+        <p:nvSpPr>
+          <p:cNvPr id="2" name="Rectangle 1"/>
+          <p:cNvSpPr/>
+          <p:nvPr/>
+        </p:nvSpPr>
+        <p:spPr>
+          <a:xfrm>
+            <a:off x="0" y="0"/>
+            <a:ext cx="9144000" cy="480000"/>
+          </a:xfrm>
+          <a:prstGeom prst="rect">
+            <a:avLst/>
+          </a:prstGeom>
+          <a:solidFill>
+            <a:srgbClr val="1F3864"/>
+          </a:solidFill>
+          <a:ln>
+            <a:noFill/>
+          </a:ln>
+        </p:spPr>
+        <p:style>
+          <a:lnRef idx="1">
+            <a:schemeClr val="accent1"/>
+          </a:lnRef>
+          <a:fillRef idx="3">
+            <a:schemeClr val="accent1"/>
+          </a:fillRef>
+          <a:effectRef idx="2">
+            <a:schemeClr val="accent1"/>
+          </a:effectRef>
+          <a:fontRef idx="minor">
+            <a:schemeClr val="lt1"/>
+          </a:fontRef>
+        </p:style>
+        <p:txBody>
+          <a:bodyPr rtlCol="0" anchor="ctr" wrap="none" lIns="320000"/>
+          <a:lstStyle/>
+          <a:p>
+            <a:pPr algn="l"/>
+            <a:r>
+              <a:rPr sz="2200" b="1">
+                <a:solidFill>
+                  <a:srgbClr val="FFFFFF"/>
+                </a:solidFill>
+              </a:rPr>
+              <a:t>Service Architecture</a:t>
+            </a:r>
+          </a:p>
+        </p:txBody>
+      </p:sp>
+      <p:sp>
+        <p:nvSpPr>
+          <p:cNvPr id="3" name="Rectangle 2"/>
+          <p:cNvSpPr/>
+          <p:nvPr/>
+        </p:nvSpPr>
+        <p:spPr>
+          <a:xfrm>
+            <a:off x="1710000" y="767000"/>
+            <a:ext cx="980000" cy="243000"/>
+          </a:xfrm>
+          <a:prstGeom prst="rect">
+            <a:avLst/>
+          </a:prstGeom>
+          <a:solidFill>
+            <a:srgbClr val="4472C4"/>
+          </a:solidFill>
+          <a:ln>
+            <a:noFill/>
+          </a:ln>
+        </p:spPr>
+        <p:style>
+          <a:lnRef idx="1">
+            <a:schemeClr val="accent1"/>
+          </a:lnRef>
+          <a:fillRef idx="3">
+            <a:schemeClr val="accent1"/>
+          </a:fillRef>
+          <a:effectRef idx="2">
+            <a:schemeClr val="accent1"/>
+          </a:effectRef>
+          <a:fontRef idx="minor">
+            <a:schemeClr val="lt1"/>
+          </a:fontRef>
+        </p:style>
+        <p:txBody>
+          <a:bodyPr rtlCol="0" anchor="ctr"/>
+          <a:lstStyle/>
+          <a:p>
+            <a:pPr algn="ctr"/>
+          </a:p>
+        </p:txBody>
+      </p:sp>
+      <p:sp>
+        <p:nvSpPr>
+          <p:cNvPr id="4" name="Oval 3"/>
+          <p:cNvSpPr/>
+          <p:nvPr/>
+        </p:nvSpPr>
+        <p:spPr>
+          <a:xfrm>
+            <a:off x="1710000" y="915000"/>
+            <a:ext cx="980000" cy="114000"/>
+          </a:xfrm>
+          <a:prstGeom prst="ellipse">
+            <a:avLst/>
+          </a:prstGeom>
+          <a:solidFill>
+            <a:srgbClr val="2E5EB8"/>
+          </a:solidFill>
+          <a:ln w="6350">
+            <a:solidFill>
+              <a:srgbClr val="4472C4"/>
+            </a:solidFill>
+          </a:ln>
+        </p:spPr>
+        <p:style>
+          <a:lnRef idx="1">
+            <a:schemeClr val="accent1"/>
+          </a:lnRef>
+          <a:fillRef idx="3">
+            <a:schemeClr val="accent1"/>
+          </a:fillRef>
+          <a:effectRef idx="2">
+            <a:schemeClr val="accent1"/>
+          </a:effectRef>
+          <a:fontRef idx="minor">
+            <a:schemeClr val="lt1"/>
+          </a:fontRef>
+        </p:style>
+        <p:txBody>
+          <a:bodyPr rtlCol="0" anchor="ctr"/>
+          <a:lstStyle/>
+          <a:p>
+            <a:pPr algn="ctr"/>
+          </a:p>
+        </p:txBody>
+      </p:sp>
+      <p:sp>
+        <p:nvSpPr>
+          <p:cNvPr id="5" name="Oval 4"/>
+          <p:cNvSpPr/>
+          <p:nvPr/>
+        </p:nvSpPr>
+        <p:spPr>
+          <a:xfrm>
+            <a:off x="1710000" y="710000"/>
+            <a:ext cx="980000" cy="114000"/>
+          </a:xfrm>
+          <a:prstGeom prst="ellipse">
+            <a:avLst/>
+          </a:prstGeom>
+          <a:solidFill>
+            <a:srgbClr val="9DB6E4"/>
+          </a:solidFill>
+          <a:ln w="9525">
+            <a:solidFill>
+              <a:srgbClr val="4472C4"/>
+            </a:solidFill>
+          </a:ln>
+        </p:spPr>
+        <p:style>
+          <a:lnRef idx="1">
+            <a:schemeClr val="accent1"/>
+          </a:lnRef>
+          <a:fillRef idx="3">
+            <a:schemeClr val="accent1"/>
+          </a:fillRef>
+          <a:effectRef idx="2">
+            <a:schemeClr val="accent1"/>
+          </a:effectRef>
+          <a:fontRef idx="minor">
+            <a:schemeClr val="lt1"/>
+          </a:fontRef>
+        </p:style>
+        <p:txBody>
+          <a:bodyPr rtlCol="0" anchor="ctr" wrap="square"/>
+          <a:lstStyle/>
+          <a:p>
+            <a:pPr algn="ctr"/>
+            <a:r>
+              <a:rPr sz="800" b="1">
+                <a:solidFill>
+                  <a:srgbClr val="FFFFFF"/>
+                </a:solidFill>
+              </a:rPr>
+              <a:t>PostgreSQL</a:t>
+            </a:r>
+          </a:p>
+        </p:txBody>
+      </p:sp>
+      <p:sp>
+        <p:nvSpPr>
+          <p:cNvPr id="6" name="Rectangle 5"/>
+          <p:cNvSpPr/>
+          <p:nvPr/>
+        </p:nvSpPr>
+        <p:spPr>
+          <a:xfrm>
+            <a:off x="3560000" y="767000"/>
+            <a:ext cx="980000" cy="243000"/>
+          </a:xfrm>
+          <a:prstGeom prst="rect">
+            <a:avLst/>
+          </a:prstGeom>
+          <a:solidFill>
+            <a:srgbClr val="4472C4"/>
+          </a:solidFill>
+          <a:ln>
+            <a:noFill/>
+          </a:ln>
+        </p:spPr>
+        <p:style>
+          <a:lnRef idx="1">
+            <a:schemeClr val="accent1"/>
+          </a:lnRef>
+          <a:fillRef idx="3">
+            <a:schemeClr val="accent1"/>
+          </a:fillRef>
+          <a:effectRef idx="2">
+            <a:schemeClr val="accent1"/>
+          </a:effectRef>
+          <a:fontRef idx="minor">
+            <a:schemeClr val="lt1"/>
+          </a:fontRef>
+        </p:style>
+        <p:txBody>
+          <a:bodyPr rtlCol="0" anchor="ctr"/>
+          <a:lstStyle/>
+          <a:p>
+            <a:pPr algn="ctr"/>
+          </a:p>
+        </p:txBody>
+      </p:sp>
+      <p:sp>
+        <p:nvSpPr>
+          <p:cNvPr id="7" name="Oval 6"/>
+          <p:cNvSpPr/>
+          <p:nvPr/>
+        </p:nvSpPr>
+        <p:spPr>
+          <a:xfrm>
+            <a:off x="3560000" y="915000"/>
+            <a:ext cx="980000" cy="114000"/>
+          </a:xfrm>
+          <a:prstGeom prst="ellipse">
+            <a:avLst/>
+          </a:prstGeom>
+          <a:solidFill>
+            <a:srgbClr val="2E5EB8"/>
+          </a:solidFill>
+          <a:ln w="6350">
+            <a:solidFill>
+              <a:srgbClr val="4472C4"/>
+            </a:solidFill>
+          </a:ln>
+        </p:spPr>
+        <p:style>
+          <a:lnRef idx="1">
+            <a:schemeClr val="accent1"/>
+          </a:lnRef>
+          <a:fillRef idx="3">
+            <a:schemeClr val="accent1"/>
+          </a:fillRef>
+          <a:effectRef idx="2">
+            <a:schemeClr val="accent1"/>
+          </a:effectRef>
+          <a:fontRef idx="minor">
+            <a:schemeClr val="lt1"/>
+          </a:fontRef>
+        </p:style>
+        <p:txBody>
+          <a:bodyPr rtlCol="0" anchor="ctr"/>
+          <a:lstStyle/>
+          <a:p>
+            <a:pPr algn="ctr"/>
+          </a:p>
+        </p:txBody>
+      </p:sp>
+      <p:sp>
+        <p:nvSpPr>
+          <p:cNvPr id="8" name="Oval 7"/>
+          <p:cNvSpPr/>
+          <p:nvPr/>
+        </p:nvSpPr>
+        <p:spPr>
+          <a:xfrm>
+            <a:off x="3560000" y="710000"/>
+            <a:ext cx="980000" cy="114000"/>
+          </a:xfrm>
+          <a:prstGeom prst="ellipse">
+            <a:avLst/>
+          </a:prstGeom>
+          <a:solidFill>
+            <a:srgbClr val="9DB6E4"/>
+          </a:solidFill>
+          <a:ln w="9525">
+            <a:solidFill>
+              <a:srgbClr val="4472C4"/>
+            </a:solidFill>
+          </a:ln>
+        </p:spPr>
+        <p:style>
+          <a:lnRef idx="1">
+            <a:schemeClr val="accent1"/>
+          </a:lnRef>
+          <a:fillRef idx="3">
+            <a:schemeClr val="accent1"/>
+          </a:fillRef>
+          <a:effectRef idx="2">
+            <a:schemeClr val="accent1"/>
+          </a:effectRef>
+          <a:fontRef idx="minor">
+            <a:schemeClr val="lt1"/>
+          </a:fontRef>
+        </p:style>
+        <p:txBody>
+          <a:bodyPr rtlCol="0" anchor="ctr" wrap="square"/>
+          <a:lstStyle/>
+          <a:p>
+            <a:pPr algn="ctr"/>
+            <a:r>
+              <a:rPr sz="800" b="1">
+                <a:solidFill>
+                  <a:srgbClr val="FFFFFF"/>
+                </a:solidFill>
+              </a:rPr>
+              <a:t>PostgreSQL</a:t>
+            </a:r>
+          </a:p>
+        </p:txBody>
+      </p:sp>
+      <p:sp>
+        <p:nvSpPr>
+          <p:cNvPr id="9" name="Rectangle 8"/>
+          <p:cNvSpPr/>
+          <p:nvPr/>
+        </p:nvSpPr>
+        <p:spPr>
+          <a:xfrm>
+            <a:off x="5410000" y="767000"/>
+            <a:ext cx="980000" cy="243000"/>
+          </a:xfrm>
+          <a:prstGeom prst="rect">
+            <a:avLst/>
+          </a:prstGeom>
+          <a:solidFill>
+            <a:srgbClr val="4472C4"/>
+          </a:solidFill>
+          <a:ln>
+            <a:noFill/>
+          </a:ln>
+        </p:spPr>
+        <p:style>
+          <a:lnRef idx="1">
+            <a:schemeClr val="accent1"/>
+          </a:lnRef>
+          <a:fillRef idx="3">
+            <a:schemeClr val="accent1"/>
+          </a:fillRef>
+          <a:effectRef idx="2">
+            <a:schemeClr val="accent1"/>
+          </a:effectRef>
+          <a:fontRef idx="minor">
+            <a:schemeClr val="lt1"/>
+          </a:fontRef>
+        </p:style>
+        <p:txBody>
+          <a:bodyPr rtlCol="0" anchor="ctr"/>
+          <a:lstStyle/>
+          <a:p>
+            <a:pPr algn="ctr"/>
+          </a:p>
+        </p:txBody>
+      </p:sp>
+      <p:sp>
+        <p:nvSpPr>
+          <p:cNvPr id="10" name="Oval 9"/>
+          <p:cNvSpPr/>
+          <p:nvPr/>
+        </p:nvSpPr>
+        <p:spPr>
+          <a:xfrm>
+            <a:off x="5410000" y="915000"/>
+            <a:ext cx="980000" cy="114000"/>
+          </a:xfrm>
+          <a:prstGeom prst="ellipse">
+            <a:avLst/>
+          </a:prstGeom>
+          <a:solidFill>
+            <a:srgbClr val="2E5EB8"/>
+          </a:solidFill>
+          <a:ln w="6350">
+            <a:solidFill>
+              <a:srgbClr val="4472C4"/>
+            </a:solidFill>
+          </a:ln>
+        </p:spPr>
+        <p:style>
+          <a:lnRef idx="1">
+            <a:schemeClr val="accent1"/>
+          </a:lnRef>
+          <a:fillRef idx="3">
+            <a:schemeClr val="accent1"/>
+          </a:fillRef>
+          <a:effectRef idx="2">
+            <a:schemeClr val="accent1"/>
+          </a:effectRef>
+          <a:fontRef idx="minor">
+            <a:schemeClr val="lt1"/>
+          </a:fontRef>
+        </p:style>
+        <p:txBody>
+          <a:bodyPr rtlCol="0" anchor="ctr"/>
+          <a:lstStyle/>
+          <a:p>
+            <a:pPr algn="ctr"/>
+          </a:p>
+        </p:txBody>
+      </p:sp>
+      <p:sp>
+        <p:nvSpPr>
+          <p:cNvPr id="11" name="Oval 10"/>
+          <p:cNvSpPr/>
+          <p:nvPr/>
+        </p:nvSpPr>
+        <p:spPr>
+          <a:xfrm>
+            <a:off x="5410000" y="710000"/>
+            <a:ext cx="980000" cy="114000"/>
+          </a:xfrm>
+          <a:prstGeom prst="ellipse">
+            <a:avLst/>
+          </a:prstGeom>
+          <a:solidFill>
+            <a:srgbClr val="9DB6E4"/>
+          </a:solidFill>
+          <a:ln w="9525">
+            <a:solidFill>
+              <a:srgbClr val="4472C4"/>
+            </a:solidFill>
+          </a:ln>
+        </p:spPr>
+        <p:style>
+          <a:lnRef idx="1">
+            <a:schemeClr val="accent1"/>
+          </a:lnRef>
+          <a:fillRef idx="3">
+            <a:schemeClr val="accent1"/>
+          </a:fillRef>
+          <a:effectRef idx="2">
+            <a:schemeClr val="accent1"/>
+          </a:effectRef>
+          <a:fontRef idx="minor">
+            <a:schemeClr val="lt1"/>
+          </a:fontRef>
+        </p:style>
+        <p:txBody>
+          <a:bodyPr rtlCol="0" anchor="ctr" wrap="square"/>
+          <a:lstStyle/>
+          <a:p>
+            <a:pPr algn="ctr"/>
+            <a:r>
+              <a:rPr sz="800" b="1">
+                <a:solidFill>
+                  <a:srgbClr val="FFFFFF"/>
+                </a:solidFill>
+              </a:rPr>
+              <a:t>PostgreSQL</a:t>
+            </a:r>
+          </a:p>
+        </p:txBody>
+      </p:sp>
+      <p:sp>
+        <p:nvSpPr>
+          <p:cNvPr id="12" name="Oval 11"/>
+          <p:cNvSpPr/>
+          <p:nvPr/>
+        </p:nvSpPr>
+        <p:spPr>
+          <a:xfrm>
+            <a:off x="1405000" y="1590000"/>
+            <a:ext cx="1650000" cy="360000"/>
+          </a:xfrm>
+          <a:prstGeom prst="ellipse">
+            <a:avLst/>
+          </a:prstGeom>
+          <a:solidFill>
+            <a:srgbClr val="4472C4"/>
+          </a:solidFill>
+          <a:ln w="9525">
+            <a:solidFill>
+              <a:srgbClr val="9DB6E4"/>
+            </a:solidFill>
+          </a:ln>
+        </p:spPr>
+        <p:style>
+          <a:lnRef idx="1">
+            <a:schemeClr val="accent1"/>
+          </a:lnRef>
+          <a:fillRef idx="3">
+            <a:schemeClr val="accent1"/>
+          </a:fillRef>
+          <a:effectRef idx="2">
+            <a:schemeClr val="accent1"/>
+          </a:effectRef>
+          <a:fontRef idx="minor">
+            <a:schemeClr val="lt1"/>
+          </a:fontRef>
+        </p:style>
+        <p:txBody>
+          <a:bodyPr rtlCol="0" anchor="ctr" wrap="square"/>
+          <a:lstStyle/>
+          <a:p>
+            <a:pPr algn="ctr"/>
+            <a:r>
+              <a:rPr sz="100" b="1">
+                <a:solidFill>
+                  <a:srgbClr val="FFFFFF"/>
+                </a:solidFill>
+              </a:rPr>
+              <a:t/>
+            </a:r>
+          </a:p>
+        </p:txBody>
+      </p:sp>
+      <p:sp>
+        <p:nvSpPr>
+          <p:cNvPr id="13" name="Oval 12"/>
+          <p:cNvSpPr/>
+          <p:nvPr/>
+        </p:nvSpPr>
+        <p:spPr>
+          <a:xfrm>
+            <a:off x="1275000" y="1520000"/>
+            <a:ext cx="1650000" cy="360000"/>
+          </a:xfrm>
+          <a:prstGeom prst="ellipse">
+            <a:avLst/>
+          </a:prstGeom>
+          <a:solidFill>
+            <a:srgbClr val="4472C4"/>
+          </a:solidFill>
+          <a:ln w="9525">
+            <a:solidFill>
+              <a:srgbClr val="9DB6E4"/>
+            </a:solidFill>
+          </a:ln>
+        </p:spPr>
+        <p:style>
+          <a:lnRef idx="1">
+            <a:schemeClr val="accent1"/>
+          </a:lnRef>
+          <a:fillRef idx="3">
+            <a:schemeClr val="accent1"/>
+          </a:fillRef>
+          <a:effectRef idx="2">
+            <a:schemeClr val="accent1"/>
+          </a:effectRef>
+          <a:fontRef idx="minor">
+            <a:schemeClr val="lt1"/>
+          </a:fontRef>
+        </p:style>
+        <p:txBody>
+          <a:bodyPr rtlCol="0" anchor="ctr" wrap="square"/>
+          <a:lstStyle/>
+          <a:p>
+            <a:pPr algn="ctr"/>
+            <a:r>
+              <a:rPr sz="900" b="1">
+                <a:solidFill>
+                  <a:srgbClr val="FFFFFF"/>
+                </a:solidFill>
+              </a:rPr>
+              <a:t>Lookup service</a:t>
+            </a:r>
+          </a:p>
+        </p:txBody>
+      </p:sp>
+      <p:sp>
+        <p:nvSpPr>
+          <p:cNvPr id="14" name="Oval 13"/>
+          <p:cNvSpPr/>
+          <p:nvPr/>
+        </p:nvSpPr>
+        <p:spPr>
+          <a:xfrm>
+            <a:off x="3850000" y="1520000"/>
+            <a:ext cx="2500000" cy="360000"/>
+          </a:xfrm>
+          <a:prstGeom prst="ellipse">
+            <a:avLst/>
+          </a:prstGeom>
+          <a:solidFill>
+            <a:srgbClr val="4472C4"/>
+          </a:solidFill>
+          <a:ln w="9525">
+            <a:solidFill>
+              <a:srgbClr val="9DB6E4"/>
+            </a:solidFill>
+          </a:ln>
+        </p:spPr>
+        <p:style>
+          <a:lnRef idx="1">
+            <a:schemeClr val="accent1"/>
+          </a:lnRef>
+          <a:fillRef idx="3">
+            <a:schemeClr val="accent1"/>
+          </a:fillRef>
+          <a:effectRef idx="2">
+            <a:schemeClr val="accent1"/>
+          </a:effectRef>
+          <a:fontRef idx="minor">
+            <a:schemeClr val="lt1"/>
+          </a:fontRef>
+        </p:style>
+        <p:txBody>
+          <a:bodyPr rtlCol="0" anchor="ctr" wrap="square"/>
+          <a:lstStyle/>
+          <a:p>
+            <a:pPr algn="ctr"/>
+            <a:r>
+              <a:rPr sz="800" b="1">
+                <a:solidFill>
+                  <a:srgbClr val="FFFFFF"/>
+                </a:solidFill>
+              </a:rPr>
+              <a:t>1st Connection &amp;
+Provisioning</a:t>
+            </a:r>
+          </a:p>
+        </p:txBody>
+      </p:sp>
+      <p:sp>
+        <p:nvSpPr>
+          <p:cNvPr id="15" name="Oval 14"/>
+          <p:cNvSpPr/>
+          <p:nvPr/>
+        </p:nvSpPr>
+        <p:spPr>
+          <a:xfrm>
+            <a:off x="7825000" y="1500000"/>
+            <a:ext cx="750000" cy="400000"/>
+          </a:xfrm>
+          <a:prstGeom prst="ellipse">
+            <a:avLst/>
+          </a:prstGeom>
+          <a:solidFill>
+            <a:srgbClr val="4472C4"/>
+          </a:solidFill>
+          <a:ln w="9525">
+            <a:solidFill>
+              <a:srgbClr val="FFFFFF"/>
+            </a:solidFill>
+          </a:ln>
+        </p:spPr>
+        <p:style>
+          <a:lnRef idx="1">
+            <a:schemeClr val="accent1"/>
+          </a:lnRef>
+          <a:fillRef idx="3">
+            <a:schemeClr val="accent1"/>
+          </a:fillRef>
+          <a:effectRef idx="2">
+            <a:schemeClr val="accent1"/>
+          </a:effectRef>
+          <a:fontRef idx="minor">
+            <a:schemeClr val="lt1"/>
+          </a:fontRef>
+        </p:style>
+        <p:txBody>
+          <a:bodyPr rtlCol="0" anchor="ctr" wrap="square"/>
+          <a:lstStyle/>
+          <a:p>
+            <a:pPr algn="ctr"/>
+            <a:r>
+              <a:rPr sz="1000" b="1">
+                <a:solidFill>
+                  <a:srgbClr val="FFFFFF"/>
+                </a:solidFill>
+              </a:rPr>
+              <a:t>UI</a:t>
+            </a:r>
+          </a:p>
+        </p:txBody>
+      </p:sp>
+      <p:sp>
+        <p:nvSpPr>
+          <p:cNvPr id="16" name="Oval 15"/>
+          <p:cNvSpPr/>
+          <p:nvPr/>
+        </p:nvSpPr>
+        <p:spPr>
+          <a:xfrm>
+            <a:off x="810000" y="2630000"/>
+            <a:ext cx="1380000" cy="300000"/>
+          </a:xfrm>
+          <a:prstGeom prst="ellipse">
+            <a:avLst/>
+          </a:prstGeom>
+          <a:solidFill>
+            <a:srgbClr val="4472C4"/>
+          </a:solidFill>
+          <a:ln w="9525">
+            <a:solidFill>
+              <a:srgbClr val="9DB6E4"/>
+            </a:solidFill>
+          </a:ln>
+        </p:spPr>
+        <p:style>
+          <a:lnRef idx="1">
+            <a:schemeClr val="accent1"/>
+          </a:lnRef>
+          <a:fillRef idx="3">
+            <a:schemeClr val="accent1"/>
+          </a:fillRef>
+          <a:effectRef idx="2">
+            <a:schemeClr val="accent1"/>
+          </a:effectRef>
+          <a:fontRef idx="minor">
+            <a:schemeClr val="lt1"/>
+          </a:fontRef>
+        </p:style>
+        <p:txBody>
+          <a:bodyPr rtlCol="0" anchor="ctr" wrap="square"/>
+          <a:lstStyle/>
+          <a:p>
+            <a:pPr algn="ctr"/>
+            <a:r>
+              <a:rPr sz="800" b="1">
+                <a:solidFill>
+                  <a:srgbClr val="FFFFFF"/>
+                </a:solidFill>
+              </a:rPr>
+              <a:t>Radius to Rest</a:t>
+            </a:r>
+          </a:p>
+        </p:txBody>
+      </p:sp>
+      <p:sp>
+        <p:nvSpPr>
+          <p:cNvPr id="17" name="Oval 16"/>
+          <p:cNvSpPr/>
+          <p:nvPr/>
+        </p:nvSpPr>
+        <p:spPr>
+          <a:xfrm>
+            <a:off x="3210000" y="2630000"/>
+            <a:ext cx="1380000" cy="300000"/>
+          </a:xfrm>
+          <a:prstGeom prst="ellipse">
+            <a:avLst/>
+          </a:prstGeom>
+          <a:solidFill>
+            <a:srgbClr val="4472C4"/>
+          </a:solidFill>
+          <a:ln w="9525">
+            <a:solidFill>
+              <a:srgbClr val="9DB6E4"/>
+            </a:solidFill>
+          </a:ln>
+        </p:spPr>
+        <p:style>
+          <a:lnRef idx="1">
+            <a:schemeClr val="accent1"/>
+          </a:lnRef>
+          <a:fillRef idx="3">
+            <a:schemeClr val="accent1"/>
+          </a:fillRef>
+          <a:effectRef idx="2">
+            <a:schemeClr val="accent1"/>
+          </a:effectRef>
+          <a:fontRef idx="minor">
+            <a:schemeClr val="lt1"/>
+          </a:fontRef>
+        </p:style>
+        <p:txBody>
+          <a:bodyPr rtlCol="0" anchor="ctr" wrap="square"/>
+          <a:lstStyle/>
+          <a:p>
+            <a:pPr algn="ctr"/>
+            <a:r>
+              <a:rPr sz="800" b="1">
+                <a:solidFill>
+                  <a:srgbClr val="FFFFFF"/>
+                </a:solidFill>
+              </a:rPr>
+              <a:t>Radius to Rest</a:t>
+            </a:r>
+          </a:p>
+        </p:txBody>
+      </p:sp>
+      <p:sp>
+        <p:nvSpPr>
+          <p:cNvPr id="18" name="Oval 17"/>
+          <p:cNvSpPr/>
+          <p:nvPr/>
+        </p:nvSpPr>
+        <p:spPr>
+          <a:xfrm>
+            <a:off x="5610000" y="2630000"/>
+            <a:ext cx="1380000" cy="300000"/>
+          </a:xfrm>
+          <a:prstGeom prst="ellipse">
+            <a:avLst/>
+          </a:prstGeom>
+          <a:solidFill>
+            <a:srgbClr val="4472C4"/>
+          </a:solidFill>
+          <a:ln w="9525">
+            <a:solidFill>
+              <a:srgbClr val="9DB6E4"/>
+            </a:solidFill>
+          </a:ln>
+        </p:spPr>
+        <p:style>
+          <a:lnRef idx="1">
+            <a:schemeClr val="accent1"/>
+          </a:lnRef>
+          <a:fillRef idx="3">
+            <a:schemeClr val="accent1"/>
+          </a:fillRef>
+          <a:effectRef idx="2">
+            <a:schemeClr val="accent1"/>
+          </a:effectRef>
+          <a:fontRef idx="minor">
+            <a:schemeClr val="lt1"/>
+          </a:fontRef>
+        </p:style>
+        <p:txBody>
+          <a:bodyPr rtlCol="0" anchor="ctr" wrap="square"/>
+          <a:lstStyle/>
+          <a:p>
+            <a:pPr algn="ctr"/>
+            <a:r>
+              <a:rPr sz="800" b="1">
+                <a:solidFill>
+                  <a:srgbClr val="FFFFFF"/>
+                </a:solidFill>
+              </a:rPr>
+              <a:t>Radius to Rest</a:t>
+            </a:r>
+          </a:p>
+        </p:txBody>
+      </p:sp>
+      <p:sp>
+        <p:nvSpPr>
+          <p:cNvPr id="19" name="Rounded Rectangle 18"/>
+          <p:cNvSpPr/>
+          <p:nvPr/>
+        </p:nvSpPr>
+        <p:spPr>
+          <a:xfrm>
+            <a:off x="155000" y="3735000"/>
+            <a:ext cx="570000" cy="250000"/>
+          </a:xfrm>
+          <a:prstGeom prst="roundRect">
+            <a:avLst/>
+          </a:prstGeom>
+          <a:solidFill>
+            <a:srgbClr val="4472C4"/>
+          </a:solidFill>
+          <a:ln w="6350">
+            <a:solidFill>
+              <a:srgbClr val="4472C4"/>
+            </a:solidFill>
+          </a:ln>
+        </p:spPr>
+        <p:style>
+          <a:lnRef idx="1">
+            <a:schemeClr val="accent1"/>
+          </a:lnRef>
+          <a:fillRef idx="3">
+            <a:schemeClr val="accent1"/>
+          </a:fillRef>
+          <a:effectRef idx="2">
+            <a:schemeClr val="accent1"/>
+          </a:effectRef>
+          <a:fontRef idx="minor">
+            <a:schemeClr val="lt1"/>
+          </a:fontRef>
+        </p:style>
+        <p:txBody>
+          <a:bodyPr rtlCol="0" anchor="ctr" wrap="square"/>
+          <a:lstStyle/>
+          <a:p>
+            <a:pPr algn="ctr"/>
+            <a:r>
+              <a:rPr sz="750" b="1">
+                <a:solidFill>
+                  <a:srgbClr val="FFFFFF"/>
+                </a:solidFill>
+              </a:rPr>
+              <a:t>SMF</a:t>
+            </a:r>
+          </a:p>
+        </p:txBody>
+      </p:sp>
+      <p:sp>
+        <p:nvSpPr>
+          <p:cNvPr id="20" name="Rounded Rectangle 19"/>
+          <p:cNvSpPr/>
+          <p:nvPr/>
+        </p:nvSpPr>
+        <p:spPr>
+          <a:xfrm>
+            <a:off x="755000" y="3735000"/>
+            <a:ext cx="570000" cy="250000"/>
+          </a:xfrm>
+          <a:prstGeom prst="roundRect">
+            <a:avLst/>
+          </a:prstGeom>
+          <a:solidFill>
+            <a:srgbClr val="4472C4"/>
+          </a:solidFill>
+          <a:ln w="6350">
+            <a:solidFill>
+              <a:srgbClr val="4472C4"/>
+            </a:solidFill>
+          </a:ln>
+        </p:spPr>
+        <p:style>
+          <a:lnRef idx="1">
+            <a:schemeClr val="accent1"/>
+          </a:lnRef>
+          <a:fillRef idx="3">
+            <a:schemeClr val="accent1"/>
+          </a:fillRef>
+          <a:effectRef idx="2">
+            <a:schemeClr val="accent1"/>
+          </a:effectRef>
+          <a:fontRef idx="minor">
+            <a:schemeClr val="lt1"/>
+          </a:fontRef>
+        </p:style>
+        <p:txBody>
+          <a:bodyPr rtlCol="0" anchor="ctr" wrap="square"/>
+          <a:lstStyle/>
+          <a:p>
+            <a:pPr algn="ctr"/>
+            <a:r>
+              <a:rPr sz="750" b="1">
+                <a:solidFill>
+                  <a:srgbClr val="FFFFFF"/>
+                </a:solidFill>
+              </a:rPr>
+              <a:t>SMF</a:t>
+            </a:r>
+          </a:p>
+        </p:txBody>
+      </p:sp>
+      <p:sp>
+        <p:nvSpPr>
+          <p:cNvPr id="21" name="Rounded Rectangle 20"/>
+          <p:cNvSpPr/>
+          <p:nvPr/>
+        </p:nvSpPr>
+        <p:spPr>
+          <a:xfrm>
+            <a:off x="1355000" y="3735000"/>
+            <a:ext cx="570000" cy="250000"/>
+          </a:xfrm>
+          <a:prstGeom prst="roundRect">
+            <a:avLst/>
+          </a:prstGeom>
+          <a:solidFill>
+            <a:srgbClr val="4472C4"/>
+          </a:solidFill>
+          <a:ln w="6350">
+            <a:solidFill>
+              <a:srgbClr val="4472C4"/>
+            </a:solidFill>
+          </a:ln>
+        </p:spPr>
+        <p:style>
+          <a:lnRef idx="1">
+            <a:schemeClr val="accent1"/>
+          </a:lnRef>
+          <a:fillRef idx="3">
+            <a:schemeClr val="accent1"/>
+          </a:fillRef>
+          <a:effectRef idx="2">
+            <a:schemeClr val="accent1"/>
+          </a:effectRef>
+          <a:fontRef idx="minor">
+            <a:schemeClr val="lt1"/>
+          </a:fontRef>
+        </p:style>
+        <p:txBody>
+          <a:bodyPr rtlCol="0" anchor="ctr" wrap="square"/>
+          <a:lstStyle/>
+          <a:p>
+            <a:pPr algn="ctr"/>
+            <a:r>
+              <a:rPr sz="750" b="1">
+                <a:solidFill>
+                  <a:srgbClr val="FFFFFF"/>
+                </a:solidFill>
+              </a:rPr>
+              <a:t>SMF</a:t>
+            </a:r>
+          </a:p>
+        </p:txBody>
+      </p:sp>
+      <p:sp>
+        <p:nvSpPr>
+          <p:cNvPr id="22" name="Rounded Rectangle 21"/>
+          <p:cNvSpPr/>
+          <p:nvPr/>
+        </p:nvSpPr>
+        <p:spPr>
+          <a:xfrm>
+            <a:off x="1955000" y="3735000"/>
+            <a:ext cx="570000" cy="250000"/>
+          </a:xfrm>
+          <a:prstGeom prst="roundRect">
+            <a:avLst/>
+          </a:prstGeom>
+          <a:solidFill>
+            <a:srgbClr val="4472C4"/>
+          </a:solidFill>
+          <a:ln w="6350">
+            <a:solidFill>
+              <a:srgbClr val="4472C4"/>
+            </a:solidFill>
+          </a:ln>
+        </p:spPr>
+        <p:style>
+          <a:lnRef idx="1">
+            <a:schemeClr val="accent1"/>
+          </a:lnRef>
+          <a:fillRef idx="3">
+            <a:schemeClr val="accent1"/>
+          </a:fillRef>
+          <a:effectRef idx="2">
+            <a:schemeClr val="accent1"/>
+          </a:effectRef>
+          <a:fontRef idx="minor">
+            <a:schemeClr val="lt1"/>
+          </a:fontRef>
+        </p:style>
+        <p:txBody>
+          <a:bodyPr rtlCol="0" anchor="ctr" wrap="square"/>
+          <a:lstStyle/>
+          <a:p>
+            <a:pPr algn="ctr"/>
+            <a:r>
+              <a:rPr sz="750" b="1">
+                <a:solidFill>
+                  <a:srgbClr val="FFFFFF"/>
+                </a:solidFill>
+              </a:rPr>
+              <a:t>SMF</a:t>
+            </a:r>
+          </a:p>
+        </p:txBody>
+      </p:sp>
+      <p:sp>
+        <p:nvSpPr>
+          <p:cNvPr id="23" name="Rounded Rectangle 22"/>
+          <p:cNvSpPr/>
+          <p:nvPr/>
+        </p:nvSpPr>
+        <p:spPr>
+          <a:xfrm>
+            <a:off x="2815000" y="3735000"/>
+            <a:ext cx="570000" cy="250000"/>
+          </a:xfrm>
+          <a:prstGeom prst="roundRect">
+            <a:avLst/>
+          </a:prstGeom>
+          <a:solidFill>
+            <a:srgbClr val="4472C4"/>
+          </a:solidFill>
+          <a:ln w="6350">
+            <a:solidFill>
+              <a:srgbClr val="4472C4"/>
+            </a:solidFill>
+          </a:ln>
+        </p:spPr>
+        <p:style>
+          <a:lnRef idx="1">
+            <a:schemeClr val="accent1"/>
+          </a:lnRef>
+          <a:fillRef idx="3">
+            <a:schemeClr val="accent1"/>
+          </a:fillRef>
+          <a:effectRef idx="2">
+            <a:schemeClr val="accent1"/>
+          </a:effectRef>
+          <a:fontRef idx="minor">
+            <a:schemeClr val="lt1"/>
+          </a:fontRef>
+        </p:style>
+        <p:txBody>
+          <a:bodyPr rtlCol="0" anchor="ctr" wrap="square"/>
+          <a:lstStyle/>
+          <a:p>
+            <a:pPr algn="ctr"/>
+            <a:r>
+              <a:rPr sz="750" b="1">
+                <a:solidFill>
+                  <a:srgbClr val="FFFFFF"/>
+                </a:solidFill>
+              </a:rPr>
+              <a:t>SMF</a:t>
+            </a:r>
+          </a:p>
+        </p:txBody>
+      </p:sp>
+      <p:sp>
+        <p:nvSpPr>
+          <p:cNvPr id="24" name="Rounded Rectangle 23"/>
+          <p:cNvSpPr/>
+          <p:nvPr/>
+        </p:nvSpPr>
+        <p:spPr>
+          <a:xfrm>
+            <a:off x="3415000" y="3735000"/>
+            <a:ext cx="570000" cy="250000"/>
+          </a:xfrm>
+          <a:prstGeom prst="roundRect">
+            <a:avLst/>
+          </a:prstGeom>
+          <a:solidFill>
+            <a:srgbClr val="4472C4"/>
+          </a:solidFill>
+          <a:ln w="6350">
+            <a:solidFill>
+              <a:srgbClr val="4472C4"/>
+            </a:solidFill>
+          </a:ln>
+        </p:spPr>
+        <p:style>
+          <a:lnRef idx="1">
+            <a:schemeClr val="accent1"/>
+          </a:lnRef>
+          <a:fillRef idx="3">
+            <a:schemeClr val="accent1"/>
+          </a:fillRef>
+          <a:effectRef idx="2">
+            <a:schemeClr val="accent1"/>
+          </a:effectRef>
+          <a:fontRef idx="minor">
+            <a:schemeClr val="lt1"/>
+          </a:fontRef>
+        </p:style>
+        <p:txBody>
+          <a:bodyPr rtlCol="0" anchor="ctr" wrap="square"/>
+          <a:lstStyle/>
+          <a:p>
+            <a:pPr algn="ctr"/>
+            <a:r>
+              <a:rPr sz="750" b="1">
+                <a:solidFill>
+                  <a:srgbClr val="FFFFFF"/>
+                </a:solidFill>
+              </a:rPr>
+              <a:t>SMF</a:t>
+            </a:r>
+          </a:p>
+        </p:txBody>
+      </p:sp>
+      <p:sp>
+        <p:nvSpPr>
+          <p:cNvPr id="25" name="Rounded Rectangle 24"/>
+          <p:cNvSpPr/>
+          <p:nvPr/>
+        </p:nvSpPr>
+        <p:spPr>
+          <a:xfrm>
+            <a:off x="4015000" y="3735000"/>
+            <a:ext cx="570000" cy="250000"/>
+          </a:xfrm>
+          <a:prstGeom prst="roundRect">
+            <a:avLst/>
+          </a:prstGeom>
+          <a:solidFill>
+            <a:srgbClr val="4472C4"/>
+          </a:solidFill>
+          <a:ln w="6350">
+            <a:solidFill>
+              <a:srgbClr val="4472C4"/>
+            </a:solidFill>
+          </a:ln>
+        </p:spPr>
+        <p:style>
+          <a:lnRef idx="1">
+            <a:schemeClr val="accent1"/>
+          </a:lnRef>
+          <a:fillRef idx="3">
+            <a:schemeClr val="accent1"/>
+          </a:fillRef>
+          <a:effectRef idx="2">
+            <a:schemeClr val="accent1"/>
+          </a:effectRef>
+          <a:fontRef idx="minor">
+            <a:schemeClr val="lt1"/>
+          </a:fontRef>
+        </p:style>
+        <p:txBody>
+          <a:bodyPr rtlCol="0" anchor="ctr" wrap="square"/>
+          <a:lstStyle/>
+          <a:p>
+            <a:pPr algn="ctr"/>
+            <a:r>
+              <a:rPr sz="750" b="1">
+                <a:solidFill>
+                  <a:srgbClr val="FFFFFF"/>
+                </a:solidFill>
+              </a:rPr>
+              <a:t>SMF</a:t>
+            </a:r>
+          </a:p>
+        </p:txBody>
+      </p:sp>
+      <p:sp>
+        <p:nvSpPr>
+          <p:cNvPr id="26" name="Rounded Rectangle 25"/>
+          <p:cNvSpPr/>
+          <p:nvPr/>
+        </p:nvSpPr>
+        <p:spPr>
+          <a:xfrm>
+            <a:off x="4615000" y="3735000"/>
+            <a:ext cx="570000" cy="250000"/>
+          </a:xfrm>
+          <a:prstGeom prst="roundRect">
+            <a:avLst/>
+          </a:prstGeom>
+          <a:solidFill>
+            <a:srgbClr val="4472C4"/>
+          </a:solidFill>
+          <a:ln w="6350">
+            <a:solidFill>
+              <a:srgbClr val="4472C4"/>
+            </a:solidFill>
+          </a:ln>
+        </p:spPr>
+        <p:style>
+          <a:lnRef idx="1">
+            <a:schemeClr val="accent1"/>
+          </a:lnRef>
+          <a:fillRef idx="3">
+            <a:schemeClr val="accent1"/>
+          </a:fillRef>
+          <a:effectRef idx="2">
+            <a:schemeClr val="accent1"/>
+          </a:effectRef>
+          <a:fontRef idx="minor">
+            <a:schemeClr val="lt1"/>
+          </a:fontRef>
+        </p:style>
+        <p:txBody>
+          <a:bodyPr rtlCol="0" anchor="ctr" wrap="square"/>
+          <a:lstStyle/>
+          <a:p>
+            <a:pPr algn="ctr"/>
+            <a:r>
+              <a:rPr sz="750" b="1">
+                <a:solidFill>
+                  <a:srgbClr val="FFFFFF"/>
+                </a:solidFill>
+              </a:rPr>
+              <a:t>SMF</a:t>
+            </a:r>
+          </a:p>
+        </p:txBody>
+      </p:sp>
+      <p:sp>
+        <p:nvSpPr>
+          <p:cNvPr id="27" name="Rounded Rectangle 26"/>
+          <p:cNvSpPr/>
+          <p:nvPr/>
+        </p:nvSpPr>
+        <p:spPr>
+          <a:xfrm>
+            <a:off x="5465000" y="3735000"/>
+            <a:ext cx="570000" cy="250000"/>
+          </a:xfrm>
+          <a:prstGeom prst="roundRect">
+            <a:avLst/>
+          </a:prstGeom>
+          <a:solidFill>
+            <a:srgbClr val="4472C4"/>
+          </a:solidFill>
+          <a:ln w="6350">
+            <a:solidFill>
+              <a:srgbClr val="4472C4"/>
+            </a:solidFill>
+          </a:ln>
+        </p:spPr>
+        <p:style>
+          <a:lnRef idx="1">
+            <a:schemeClr val="accent1"/>
+          </a:lnRef>
+          <a:fillRef idx="3">
+            <a:schemeClr val="accent1"/>
+          </a:fillRef>
+          <a:effectRef idx="2">
+            <a:schemeClr val="accent1"/>
+          </a:effectRef>
+          <a:fontRef idx="minor">
+            <a:schemeClr val="lt1"/>
+          </a:fontRef>
+        </p:style>
+        <p:txBody>
+          <a:bodyPr rtlCol="0" anchor="ctr" wrap="square"/>
+          <a:lstStyle/>
+          <a:p>
+            <a:pPr algn="ctr"/>
+            <a:r>
+              <a:rPr sz="750" b="1">
+                <a:solidFill>
+                  <a:srgbClr val="FFFFFF"/>
+                </a:solidFill>
+              </a:rPr>
+              <a:t>SMF</a:t>
+            </a:r>
+          </a:p>
+        </p:txBody>
+      </p:sp>
+      <p:sp>
+        <p:nvSpPr>
+          <p:cNvPr id="28" name="Rounded Rectangle 27"/>
+          <p:cNvSpPr/>
+          <p:nvPr/>
+        </p:nvSpPr>
+        <p:spPr>
+          <a:xfrm>
+            <a:off x="6065000" y="3735000"/>
+            <a:ext cx="570000" cy="250000"/>
+          </a:xfrm>
+          <a:prstGeom prst="roundRect">
+            <a:avLst/>
+          </a:prstGeom>
+          <a:solidFill>
+            <a:srgbClr val="4472C4"/>
+          </a:solidFill>
+          <a:ln w="6350">
+            <a:solidFill>
+              <a:srgbClr val="4472C4"/>
+            </a:solidFill>
+          </a:ln>
+        </p:spPr>
+        <p:style>
+          <a:lnRef idx="1">
+            <a:schemeClr val="accent1"/>
+          </a:lnRef>
+          <a:fillRef idx="3">
+            <a:schemeClr val="accent1"/>
+          </a:fillRef>
+          <a:effectRef idx="2">
+            <a:schemeClr val="accent1"/>
+          </a:effectRef>
+          <a:fontRef idx="minor">
+            <a:schemeClr val="lt1"/>
+          </a:fontRef>
+        </p:style>
+        <p:txBody>
+          <a:bodyPr rtlCol="0" anchor="ctr" wrap="square"/>
+          <a:lstStyle/>
+          <a:p>
+            <a:pPr algn="ctr"/>
+            <a:r>
+              <a:rPr sz="750" b="1">
+                <a:solidFill>
+                  <a:srgbClr val="FFFFFF"/>
+                </a:solidFill>
+              </a:rPr>
+              <a:t>SMF</a:t>
+            </a:r>
+          </a:p>
+        </p:txBody>
+      </p:sp>
+      <p:sp>
+        <p:nvSpPr>
+          <p:cNvPr id="29" name="Rounded Rectangle 28"/>
+          <p:cNvSpPr/>
+          <p:nvPr/>
+        </p:nvSpPr>
+        <p:spPr>
+          <a:xfrm>
+            <a:off x="7070000" y="3735000"/>
+            <a:ext cx="860000" cy="250000"/>
+          </a:xfrm>
+          <a:prstGeom prst="roundRect">
+            <a:avLst/>
+          </a:prstGeom>
+          <a:solidFill>
+            <a:srgbClr val="70AD47"/>
+          </a:solidFill>
+          <a:ln w="6350">
+            <a:solidFill>
+              <a:srgbClr val="70AD47"/>
+            </a:solidFill>
+          </a:ln>
+        </p:spPr>
+        <p:style>
+          <a:lnRef idx="1">
+            <a:schemeClr val="accent1"/>
+          </a:lnRef>
+          <a:fillRef idx="3">
+            <a:schemeClr val="accent1"/>
+          </a:fillRef>
+          <a:effectRef idx="2">
+            <a:schemeClr val="accent1"/>
+          </a:effectRef>
+          <a:fontRef idx="minor">
+            <a:schemeClr val="lt1"/>
+          </a:fontRef>
+        </p:style>
+        <p:txBody>
+          <a:bodyPr rtlCol="0" anchor="ctr" wrap="square"/>
+          <a:lstStyle/>
+          <a:p>
+            <a:pPr algn="ctr"/>
+            <a:r>
+              <a:rPr sz="800" b="1">
+                <a:solidFill>
+                  <a:srgbClr val="FFFFFF"/>
+                </a:solidFill>
+              </a:rPr>
+              <a:t>QA Automation</a:t>
+            </a:r>
+          </a:p>
+        </p:txBody>
+      </p:sp>
+      <p:cxnSp>
+        <p:nvCxnSpPr>
+          <p:cNvPr id="101" name="arrow101"/>
+          <p:cNvCxnSpPr/>
+          <p:nvPr/>
+        </p:nvCxnSpPr>
+        <p:spPr>
+          <a:xfrm flipH="1">
+            <a:off x="2100000" y="1010000"/>
+            <a:ext cx="100000" cy="510000"/>
+          </a:xfrm>
+          <a:prstGeom prst="line">
+            <a:avLst/>
+          </a:prstGeom>
+          <a:ln w="9525">
+            <a:solidFill>
+              <a:srgbClr val="4472C4"/>
+            </a:solidFill>
+            <a:headEnd type="none"/>
+            <a:tailEnd type="arrow" w="sm" len="sm"/>
+          </a:ln>
+        </p:spPr>
+      </p:cxnSp>
+      <p:cxnSp>
+        <p:nvCxnSpPr>
+          <p:cNvPr id="102" name="arrow102"/>
+          <p:cNvCxnSpPr/>
+          <p:nvPr/>
+        </p:nvCxnSpPr>
+        <p:spPr>
+          <a:xfrm>
+            <a:off x="2200000" y="1010000"/>
+            <a:ext cx="2900000" cy="510000"/>
+          </a:xfrm>
+          <a:prstGeom prst="line">
+            <a:avLst/>
+          </a:prstGeom>
+          <a:ln w="9525">
+            <a:solidFill>
+              <a:srgbClr val="4472C4"/>
+            </a:solidFill>
+            <a:headEnd type="none"/>
+            <a:tailEnd type="arrow" w="sm" len="sm"/>
+          </a:ln>
+        </p:spPr>
+      </p:cxnSp>
+      <p:cxnSp>
+        <p:nvCxnSpPr>
+          <p:cNvPr id="103" name="arrow103"/>
+          <p:cNvCxnSpPr/>
+          <p:nvPr/>
+        </p:nvCxnSpPr>
+        <p:spPr>
+          <a:xfrm flipH="1">
+            <a:off x="2100000" y="1010000"/>
+            <a:ext cx="1950000" cy="510000"/>
+          </a:xfrm>
+          <a:prstGeom prst="line">
+            <a:avLst/>
+          </a:prstGeom>
+          <a:ln w="9525">
+            <a:solidFill>
+              <a:srgbClr val="4472C4"/>
+            </a:solidFill>
+            <a:headEnd type="none"/>
+            <a:tailEnd type="arrow" w="sm" len="sm"/>
+          </a:ln>
+        </p:spPr>
+      </p:cxnSp>
+      <p:cxnSp>
+        <p:nvCxnSpPr>
+          <p:cNvPr id="104" name="arrow104"/>
+          <p:cNvCxnSpPr/>
+          <p:nvPr/>
+        </p:nvCxnSpPr>
+        <p:spPr>
+          <a:xfrm>
+            <a:off x="4050000" y="1010000"/>
+            <a:ext cx="1050000" cy="510000"/>
+          </a:xfrm>
+          <a:prstGeom prst="line">
+            <a:avLst/>
+          </a:prstGeom>
+          <a:ln w="9525">
+            <a:solidFill>
+              <a:srgbClr val="4472C4"/>
+            </a:solidFill>
+            <a:headEnd type="none"/>
+            <a:tailEnd type="arrow" w="sm" len="sm"/>
+          </a:ln>
+        </p:spPr>
+      </p:cxnSp>
+      <p:cxnSp>
+        <p:nvCxnSpPr>
+          <p:cNvPr id="105" name="arrow105"/>
+          <p:cNvCxnSpPr/>
+          <p:nvPr/>
+        </p:nvCxnSpPr>
+        <p:spPr>
+          <a:xfrm flipH="1">
+            <a:off x="2100000" y="1010000"/>
+            <a:ext cx="3800000" cy="510000"/>
+          </a:xfrm>
+          <a:prstGeom prst="line">
+            <a:avLst/>
+          </a:prstGeom>
+          <a:ln w="9525">
+            <a:solidFill>
+              <a:srgbClr val="4472C4"/>
+            </a:solidFill>
+            <a:headEnd type="none"/>
+            <a:tailEnd type="arrow" w="sm" len="sm"/>
+          </a:ln>
+        </p:spPr>
+      </p:cxnSp>
+      <p:cxnSp>
+        <p:nvCxnSpPr>
+          <p:cNvPr id="106" name="arrow106"/>
+          <p:cNvCxnSpPr/>
+          <p:nvPr/>
+        </p:nvCxnSpPr>
+        <p:spPr>
+          <a:xfrm flipH="1">
+            <a:off x="5100000" y="1010000"/>
+            <a:ext cx="800000" cy="510000"/>
+          </a:xfrm>
+          <a:prstGeom prst="line">
+            <a:avLst/>
+          </a:prstGeom>
+          <a:ln w="9525">
+            <a:solidFill>
+              <a:srgbClr val="4472C4"/>
+            </a:solidFill>
+            <a:headEnd type="none"/>
+            <a:tailEnd type="arrow" w="sm" len="sm"/>
+          </a:ln>
+        </p:spPr>
+      </p:cxnSp>
+      <p:cxnSp>
+        <p:nvCxnSpPr>
+          <p:cNvPr id="107" name="arrow107"/>
+          <p:cNvCxnSpPr/>
+          <p:nvPr/>
+        </p:nvCxnSpPr>
+        <p:spPr>
+          <a:xfrm flipH="1">
+            <a:off x="1500000" y="1880000"/>
+            <a:ext cx="600000" cy="750000"/>
+          </a:xfrm>
+          <a:prstGeom prst="line">
+            <a:avLst/>
+          </a:prstGeom>
+          <a:ln w="9525">
+            <a:solidFill>
+              <a:srgbClr val="4472C4"/>
+            </a:solidFill>
+            <a:headEnd type="none"/>
+            <a:tailEnd type="arrow" w="sm" len="sm"/>
+          </a:ln>
+        </p:spPr>
+      </p:cxnSp>
+      <p:cxnSp>
+        <p:nvCxnSpPr>
+          <p:cNvPr id="108" name="arrow108"/>
+          <p:cNvCxnSpPr/>
+          <p:nvPr/>
+        </p:nvCxnSpPr>
+        <p:spPr>
+          <a:xfrm>
+            <a:off x="2100000" y="1880000"/>
+            <a:ext cx="1800000" cy="750000"/>
+          </a:xfrm>
+          <a:prstGeom prst="line">
+            <a:avLst/>
+          </a:prstGeom>
+          <a:ln w="9525">
+            <a:solidFill>
+              <a:srgbClr val="4472C4"/>
+            </a:solidFill>
+            <a:headEnd type="none"/>
+            <a:tailEnd type="arrow" w="sm" len="sm"/>
+          </a:ln>
+        </p:spPr>
+      </p:cxnSp>
+      <p:cxnSp>
+        <p:nvCxnSpPr>
+          <p:cNvPr id="109" name="arrow109"/>
+          <p:cNvCxnSpPr/>
+          <p:nvPr/>
+        </p:nvCxnSpPr>
+        <p:spPr>
+          <a:xfrm>
+            <a:off x="2100000" y="1880000"/>
+            <a:ext cx="4200000" cy="750000"/>
+          </a:xfrm>
+          <a:prstGeom prst="line">
+            <a:avLst/>
+          </a:prstGeom>
+          <a:ln w="9525">
+            <a:solidFill>
+              <a:srgbClr val="4472C4"/>
+            </a:solidFill>
+            <a:headEnd type="none"/>
+            <a:tailEnd type="arrow" w="sm" len="sm"/>
+          </a:ln>
+        </p:spPr>
+      </p:cxnSp>
+      <p:cxnSp>
+        <p:nvCxnSpPr>
+          <p:cNvPr id="110" name="arrow110"/>
+          <p:cNvCxnSpPr/>
+          <p:nvPr/>
+        </p:nvCxnSpPr>
+        <p:spPr>
+          <a:xfrm flipH="1">
+            <a:off x="1500000" y="1880000"/>
+            <a:ext cx="3600000" cy="750000"/>
+          </a:xfrm>
+          <a:prstGeom prst="line">
+            <a:avLst/>
+          </a:prstGeom>
+          <a:ln w="9525">
+            <a:solidFill>
+              <a:srgbClr val="4472C4"/>
+            </a:solidFill>
+            <a:headEnd type="none"/>
+            <a:tailEnd type="arrow" w="sm" len="sm"/>
+          </a:ln>
+        </p:spPr>
+      </p:cxnSp>
+      <p:cxnSp>
+        <p:nvCxnSpPr>
+          <p:cNvPr id="111" name="arrow111"/>
+          <p:cNvCxnSpPr/>
+          <p:nvPr/>
+        </p:nvCxnSpPr>
+        <p:spPr>
+          <a:xfrm flipH="1">
+            <a:off x="3900000" y="1880000"/>
+            <a:ext cx="1200000" cy="750000"/>
+          </a:xfrm>
+          <a:prstGeom prst="line">
+            <a:avLst/>
+          </a:prstGeom>
+          <a:ln w="9525">
+            <a:solidFill>
+              <a:srgbClr val="4472C4"/>
+            </a:solidFill>
+            <a:headEnd type="none"/>
+            <a:tailEnd type="arrow" w="sm" len="sm"/>
+          </a:ln>
+        </p:spPr>
+      </p:cxnSp>
+      <p:cxnSp>
+        <p:nvCxnSpPr>
+          <p:cNvPr id="112" name="arrow112"/>
+          <p:cNvCxnSpPr/>
+          <p:nvPr/>
+        </p:nvCxnSpPr>
+        <p:spPr>
+          <a:xfrm>
+            <a:off x="5100000" y="1880000"/>
+            <a:ext cx="1200000" cy="750000"/>
+          </a:xfrm>
+          <a:prstGeom prst="line">
+            <a:avLst/>
+          </a:prstGeom>
+          <a:ln w="9525">
+            <a:solidFill>
+              <a:srgbClr val="4472C4"/>
+            </a:solidFill>
+            <a:headEnd type="none"/>
+            <a:tailEnd type="arrow" w="sm" len="sm"/>
+          </a:ln>
+        </p:spPr>
+      </p:cxnSp>
+      <p:cxnSp>
+        <p:nvCxnSpPr>
+          <p:cNvPr id="113" name="arrow113"/>
+          <p:cNvCxnSpPr/>
+          <p:nvPr/>
+        </p:nvCxnSpPr>
+        <p:spPr>
+          <a:xfrm flipH="1">
+            <a:off x="440000" y="2930000"/>
+            <a:ext cx="1060000" cy="805000"/>
+          </a:xfrm>
+          <a:prstGeom prst="line">
+            <a:avLst/>
+          </a:prstGeom>
+          <a:ln w="9525">
+            <a:solidFill>
+              <a:srgbClr val="4472C4"/>
+            </a:solidFill>
+            <a:headEnd type="none"/>
+            <a:tailEnd type="arrow" w="sm" len="sm"/>
+          </a:ln>
+        </p:spPr>
+      </p:cxnSp>
+      <p:cxnSp>
+        <p:nvCxnSpPr>
+          <p:cNvPr id="114" name="arrow114"/>
+          <p:cNvCxnSpPr/>
+          <p:nvPr/>
+        </p:nvCxnSpPr>
+        <p:spPr>
+          <a:xfrm flipH="1">
+            <a:off x="1040000" y="2930000"/>
+            <a:ext cx="460000" cy="805000"/>
+          </a:xfrm>
+          <a:prstGeom prst="line">
+            <a:avLst/>
+          </a:prstGeom>
+          <a:ln w="9525">
+            <a:solidFill>
+              <a:srgbClr val="4472C4"/>
+            </a:solidFill>
+            <a:headEnd type="none"/>
+            <a:tailEnd type="arrow" w="sm" len="sm"/>
+          </a:ln>
+        </p:spPr>
+      </p:cxnSp>
+      <p:cxnSp>
+        <p:nvCxnSpPr>
+          <p:cNvPr id="115" name="arrow115"/>
+          <p:cNvCxnSpPr/>
+          <p:nvPr/>
+        </p:nvCxnSpPr>
+        <p:spPr>
+          <a:xfrm>
+            <a:off x="1500000" y="2930000"/>
+            <a:ext cx="140000" cy="805000"/>
+          </a:xfrm>
+          <a:prstGeom prst="line">
+            <a:avLst/>
+          </a:prstGeom>
+          <a:ln w="9525">
+            <a:solidFill>
+              <a:srgbClr val="4472C4"/>
+            </a:solidFill>
+            <a:headEnd type="none"/>
+            <a:tailEnd type="arrow" w="sm" len="sm"/>
+          </a:ln>
+        </p:spPr>
+      </p:cxnSp>
+      <p:cxnSp>
+        <p:nvCxnSpPr>
+          <p:cNvPr id="116" name="arrow116"/>
+          <p:cNvCxnSpPr/>
+          <p:nvPr/>
+        </p:nvCxnSpPr>
+        <p:spPr>
+          <a:xfrm>
+            <a:off x="1500000" y="2930000"/>
+            <a:ext cx="740000" cy="805000"/>
+          </a:xfrm>
+          <a:prstGeom prst="line">
+            <a:avLst/>
+          </a:prstGeom>
+          <a:ln w="9525">
+            <a:solidFill>
+              <a:srgbClr val="4472C4"/>
+            </a:solidFill>
+            <a:headEnd type="none"/>
+            <a:tailEnd type="arrow" w="sm" len="sm"/>
+          </a:ln>
+        </p:spPr>
+      </p:cxnSp>
+      <p:cxnSp>
+        <p:nvCxnSpPr>
+          <p:cNvPr id="117" name="arrow117"/>
+          <p:cNvCxnSpPr/>
+          <p:nvPr/>
+        </p:nvCxnSpPr>
+        <p:spPr>
+          <a:xfrm flipH="1">
+            <a:off x="3100000" y="2930000"/>
+            <a:ext cx="800000" cy="805000"/>
+          </a:xfrm>
+          <a:prstGeom prst="line">
+            <a:avLst/>
+          </a:prstGeom>
+          <a:ln w="9525">
+            <a:solidFill>
+              <a:srgbClr val="4472C4"/>
+            </a:solidFill>
+            <a:headEnd type="none"/>
+            <a:tailEnd type="arrow" w="sm" len="sm"/>
+          </a:ln>
+        </p:spPr>
+      </p:cxnSp>
+      <p:cxnSp>
+        <p:nvCxnSpPr>
+          <p:cNvPr id="118" name="arrow118"/>
+          <p:cNvCxnSpPr/>
+          <p:nvPr/>
+        </p:nvCxnSpPr>
+        <p:spPr>
+          <a:xfrm flipH="1">
+            <a:off x="3700000" y="2930000"/>
+            <a:ext cx="200000" cy="805000"/>
+          </a:xfrm>
+          <a:prstGeom prst="line">
+            <a:avLst/>
+          </a:prstGeom>
+          <a:ln w="9525">
+            <a:solidFill>
+              <a:srgbClr val="4472C4"/>
+            </a:solidFill>
+            <a:headEnd type="none"/>
+            <a:tailEnd type="arrow" w="sm" len="sm"/>
+          </a:ln>
+        </p:spPr>
+      </p:cxnSp>
+      <p:cxnSp>
+        <p:nvCxnSpPr>
+          <p:cNvPr id="119" name="arrow119"/>
+          <p:cNvCxnSpPr/>
+          <p:nvPr/>
+        </p:nvCxnSpPr>
+        <p:spPr>
+          <a:xfrm>
+            <a:off x="3900000" y="2930000"/>
+            <a:ext cx="400000" cy="805000"/>
+          </a:xfrm>
+          <a:prstGeom prst="line">
+            <a:avLst/>
+          </a:prstGeom>
+          <a:ln w="9525">
+            <a:solidFill>
+              <a:srgbClr val="4472C4"/>
+            </a:solidFill>
+            <a:headEnd type="none"/>
+            <a:tailEnd type="arrow" w="sm" len="sm"/>
+          </a:ln>
+        </p:spPr>
+      </p:cxnSp>
+      <p:cxnSp>
+        <p:nvCxnSpPr>
+          <p:cNvPr id="120" name="arrow120"/>
+          <p:cNvCxnSpPr/>
+          <p:nvPr/>
+        </p:nvCxnSpPr>
+        <p:spPr>
+          <a:xfrm>
+            <a:off x="3900000" y="2930000"/>
+            <a:ext cx="1000000" cy="805000"/>
+          </a:xfrm>
+          <a:prstGeom prst="line">
+            <a:avLst/>
+          </a:prstGeom>
+          <a:ln w="9525">
+            <a:solidFill>
+              <a:srgbClr val="4472C4"/>
+            </a:solidFill>
+            <a:headEnd type="none"/>
+            <a:tailEnd type="arrow" w="sm" len="sm"/>
+          </a:ln>
+        </p:spPr>
+      </p:cxnSp>
+      <p:cxnSp>
+        <p:nvCxnSpPr>
+          <p:cNvPr id="121" name="arrow121"/>
+          <p:cNvCxnSpPr/>
+          <p:nvPr/>
+        </p:nvCxnSpPr>
+        <p:spPr>
+          <a:xfrm flipH="1">
+            <a:off x="5750000" y="2930000"/>
+            <a:ext cx="550000" cy="805000"/>
+          </a:xfrm>
+          <a:prstGeom prst="line">
+            <a:avLst/>
+          </a:prstGeom>
+          <a:ln w="9525">
+            <a:solidFill>
+              <a:srgbClr val="4472C4"/>
+            </a:solidFill>
+            <a:headEnd type="none"/>
+            <a:tailEnd type="arrow" w="sm" len="sm"/>
+          </a:ln>
+        </p:spPr>
+      </p:cxnSp>
+      <p:cxnSp>
+        <p:nvCxnSpPr>
+          <p:cNvPr id="122" name="arrow122"/>
+          <p:cNvCxnSpPr/>
+          <p:nvPr/>
+        </p:nvCxnSpPr>
+        <p:spPr>
+          <a:xfrm>
+            <a:off x="6300000" y="2930000"/>
+            <a:ext cx="50000" cy="805000"/>
+          </a:xfrm>
+          <a:prstGeom prst="line">
+            <a:avLst/>
+          </a:prstGeom>
+          <a:ln w="9525">
+            <a:solidFill>
+              <a:srgbClr val="4472C4"/>
+            </a:solidFill>
+            <a:headEnd type="none"/>
+            <a:tailEnd type="arrow" w="sm" len="sm"/>
+          </a:ln>
+        </p:spPr>
+      </p:cxnSp>
+      <p:cxnSp>
+        <p:nvCxnSpPr>
+          <p:cNvPr id="123" name="arrow123"/>
+          <p:cNvCxnSpPr/>
+          <p:nvPr/>
+        </p:nvCxnSpPr>
+        <p:spPr>
+          <a:xfrm flipH="1">
+            <a:off x="6350000" y="1700000"/>
+            <a:ext cx="1670000" cy="1"/>
+          </a:xfrm>
+          <a:prstGeom prst="line">
+            <a:avLst/>
+          </a:prstGeom>
+          <a:ln w="9525">
+            <a:solidFill>
+              <a:srgbClr val="4472C4"/>
+            </a:solidFill>
+            <a:headEnd type="none"/>
+            <a:tailEnd type="arrow" w="sm" len="sm"/>
+          </a:ln>
+        </p:spPr>
+      </p:cxnSp>
+      <p:cxnSp>
+        <p:nvCxnSpPr>
+          <p:cNvPr id="501" name="arrow501"/>
+          <p:cNvCxnSpPr/>
+          <p:nvPr/>
+        </p:nvCxnSpPr>
+        <p:spPr>
+          <a:xfrm flipH="1" flipV="1">
+            <a:off x="6300000" y="2930000"/>
+            <a:ext cx="1200000" cy="805000"/>
+          </a:xfrm>
+          <a:prstGeom prst="line">
+            <a:avLst/>
+          </a:prstGeom>
+          <a:ln w="9525">
+            <a:solidFill>
+              <a:srgbClr val="4472C4"/>
+            </a:solidFill>
+            <a:headEnd type="none"/>
+            <a:tailEnd type="arrow" w="sm" len="sm"/>
+          </a:ln>
+        </p:spPr>
+      </p:cxnSp>
+      <p:cxnSp>
+        <p:nvCxnSpPr>
+          <p:cNvPr id="502" name="arrow502"/>
+          <p:cNvCxnSpPr/>
+          <p:nvPr/>
+        </p:nvCxnSpPr>
+        <p:spPr>
+          <a:xfrm flipH="1" flipV="1">
+            <a:off x="3900000" y="2930000"/>
+            <a:ext cx="3600000" cy="805000"/>
+          </a:xfrm>
+          <a:prstGeom prst="line">
+            <a:avLst/>
+          </a:prstGeom>
+          <a:ln w="9525">
+            <a:solidFill>
+              <a:srgbClr val="4472C4"/>
+            </a:solidFill>
+            <a:headEnd type="none"/>
+            <a:tailEnd type="arrow" w="sm" len="sm"/>
+          </a:ln>
+        </p:spPr>
+      </p:cxnSp>
     </p:spTree>
   </p:cSld>
   <p:clrMapOvr>
@@ -14571,6 +17190,10 @@
             <a:prstDash val="solid"/>
           </a:ln>
         </p:spPr>
+        <p:txBody>
+          <a:bodyPr/>
+          <a:p/>
+        </p:txBody>
       </p:sp>
       <p:sp>
         <p:nvSpPr>
@@ -14632,6 +17255,10 @@
             <a:prstDash val="solid"/>
           </a:ln>
         </p:spPr>
+        <p:txBody>
+          <a:bodyPr/>
+          <a:p/>
+        </p:txBody>
       </p:sp>
       <p:sp>
         <p:nvSpPr>
@@ -14657,6 +17284,10 @@
             <a:prstDash val="solid"/>
           </a:ln>
         </p:spPr>
+        <p:txBody>
+          <a:bodyPr/>
+          <a:p/>
+        </p:txBody>
       </p:sp>
       <p:sp>
         <p:nvSpPr>
@@ -14754,6 +17385,10 @@
             <a:prstDash val="solid"/>
           </a:ln>
         </p:spPr>
+        <p:txBody>
+          <a:bodyPr/>
+          <a:p/>
+        </p:txBody>
       </p:sp>
       <p:sp>
         <p:nvSpPr>
@@ -14779,6 +17414,10 @@
             <a:prstDash val="solid"/>
           </a:ln>
         </p:spPr>
+        <p:txBody>
+          <a:bodyPr/>
+          <a:p/>
+        </p:txBody>
       </p:sp>
       <p:sp>
         <p:nvSpPr>
@@ -14876,6 +17515,10 @@
             <a:prstDash val="solid"/>
           </a:ln>
         </p:spPr>
+        <p:txBody>
+          <a:bodyPr/>
+          <a:p/>
+        </p:txBody>
       </p:sp>
       <p:sp>
         <p:nvSpPr>
@@ -14901,6 +17544,10 @@
             <a:prstDash val="solid"/>
           </a:ln>
         </p:spPr>
+        <p:txBody>
+          <a:bodyPr/>
+          <a:p/>
+        </p:txBody>
       </p:sp>
       <p:sp>
         <p:nvSpPr>
@@ -14998,6 +17645,10 @@
             <a:prstDash val="solid"/>
           </a:ln>
         </p:spPr>
+        <p:txBody>
+          <a:bodyPr/>
+          <a:p/>
+        </p:txBody>
       </p:sp>
       <p:sp>
         <p:nvSpPr>
@@ -15023,6 +17674,10 @@
             <a:prstDash val="solid"/>
           </a:ln>
         </p:spPr>
+        <p:txBody>
+          <a:bodyPr/>
+          <a:p/>
+        </p:txBody>
       </p:sp>
       <p:sp>
         <p:nvSpPr>
@@ -15152,6 +17807,10 @@
             <a:prstDash val="solid"/>
           </a:ln>
         </p:spPr>
+        <p:txBody>
+          <a:bodyPr/>
+          <a:p/>
+        </p:txBody>
       </p:sp>
       <p:sp>
         <p:nvSpPr>
@@ -15220,6 +17879,10 @@
             </a:outerShdw>
           </a:effectLst>
         </p:spPr>
+        <p:txBody>
+          <a:bodyPr/>
+          <a:p/>
+        </p:txBody>
       </p:sp>
       <p:sp>
         <p:nvSpPr>
@@ -15245,6 +17908,10 @@
             <a:prstDash val="solid"/>
           </a:ln>
         </p:spPr>
+        <p:txBody>
+          <a:bodyPr/>
+          <a:p/>
+        </p:txBody>
       </p:sp>
       <p:sp>
         <p:nvSpPr>
@@ -15340,6 +18007,10 @@
             <a:prstDash val="solid"/>
           </a:ln>
         </p:spPr>
+        <p:txBody>
+          <a:bodyPr/>
+          <a:p/>
+        </p:txBody>
       </p:sp>
       <p:sp>
         <p:nvSpPr>
@@ -15363,6 +18034,10 @@
             <a:prstDash val="solid"/>
           </a:ln>
         </p:spPr>
+        <p:txBody>
+          <a:bodyPr/>
+          <a:p/>
+        </p:txBody>
       </p:sp>
       <p:sp>
         <p:nvSpPr>
@@ -15422,6 +18097,10 @@
             <a:prstDash val="solid"/>
           </a:ln>
         </p:spPr>
+        <p:txBody>
+          <a:bodyPr/>
+          <a:p/>
+        </p:txBody>
       </p:sp>
       <p:sp>
         <p:nvSpPr>
@@ -15445,6 +18124,10 @@
             <a:prstDash val="solid"/>
           </a:ln>
         </p:spPr>
+        <p:txBody>
+          <a:bodyPr/>
+          <a:p/>
+        </p:txBody>
       </p:sp>
       <p:sp>
         <p:nvSpPr>
@@ -15504,6 +18187,10 @@
             <a:prstDash val="dash"/>
           </a:ln>
         </p:spPr>
+        <p:txBody>
+          <a:bodyPr/>
+          <a:p/>
+        </p:txBody>
       </p:sp>
       <p:sp>
         <p:nvSpPr>
@@ -16037,6 +18724,10 @@
             <a:prstDash val="solid"/>
           </a:ln>
         </p:spPr>
+        <p:txBody>
+          <a:bodyPr/>
+          <a:p/>
+        </p:txBody>
       </p:sp>
       <p:sp>
         <p:nvSpPr>
@@ -16105,6 +18796,10 @@
             </a:outerShdw>
           </a:effectLst>
         </p:spPr>
+        <p:txBody>
+          <a:bodyPr/>
+          <a:p/>
+        </p:txBody>
       </p:sp>
       <p:sp>
         <p:nvSpPr>
@@ -16130,6 +18825,10 @@
             <a:prstDash val="solid"/>
           </a:ln>
         </p:spPr>
+        <p:txBody>
+          <a:bodyPr/>
+          <a:p/>
+        </p:txBody>
       </p:sp>
       <p:sp>
         <p:nvSpPr>
@@ -16234,6 +18933,10 @@
             </a:outerShdw>
           </a:effectLst>
         </p:spPr>
+        <p:txBody>
+          <a:bodyPr/>
+          <a:p/>
+        </p:txBody>
       </p:sp>
       <p:sp>
         <p:nvSpPr>
@@ -16259,6 +18962,10 @@
             <a:prstDash val="solid"/>
           </a:ln>
         </p:spPr>
+        <p:txBody>
+          <a:bodyPr/>
+          <a:p/>
+        </p:txBody>
       </p:sp>
       <p:sp>
         <p:nvSpPr>
@@ -16363,6 +19070,10 @@
             </a:outerShdw>
           </a:effectLst>
         </p:spPr>
+        <p:txBody>
+          <a:bodyPr/>
+          <a:p/>
+        </p:txBody>
       </p:sp>
       <p:sp>
         <p:nvSpPr>
@@ -16388,6 +19099,10 @@
             <a:prstDash val="solid"/>
           </a:ln>
         </p:spPr>
+        <p:txBody>
+          <a:bodyPr/>
+          <a:p/>
+        </p:txBody>
       </p:sp>
       <p:sp>
         <p:nvSpPr>
@@ -16492,6 +19207,10 @@
             </a:outerShdw>
           </a:effectLst>
         </p:spPr>
+        <p:txBody>
+          <a:bodyPr/>
+          <a:p/>
+        </p:txBody>
       </p:sp>
       <p:sp>
         <p:nvSpPr>
@@ -16517,6 +19236,10 @@
             <a:prstDash val="solid"/>
           </a:ln>
         </p:spPr>
+        <p:txBody>
+          <a:bodyPr/>
+          <a:p/>
+        </p:txBody>
       </p:sp>
       <p:sp>
         <p:nvSpPr>
@@ -16548,7 +19271,7 @@
                   <a:srgbClr val="FFFFFF"/>
                 </a:solidFill>
               </a:rPr>
-              <a:t>253</a:t>
+              <a:t>10,000</a:t>
             </a:r>
             <a:endParaRPr lang="en-US" sz="2800" dirty="0"/>
           </a:p>
@@ -16584,7 +19307,7 @@
                   <a:srgbClr val="CADCFC"/>
                 </a:solidFill>
               </a:rPr>
-              <a:t>IPs per /24 Pool</a:t>
+              <a:t>Access request per sec</a:t>
             </a:r>
             <a:endParaRPr lang="en-US" sz="950" dirty="0"/>
           </a:p>
@@ -16621,6 +19344,10 @@
             </a:outerShdw>
           </a:effectLst>
         </p:spPr>
+        <p:txBody>
+          <a:bodyPr/>
+          <a:p/>
+        </p:txBody>
       </p:sp>
       <p:sp>
         <p:nvSpPr>
@@ -16646,6 +19373,10 @@
             <a:prstDash val="solid"/>
           </a:ln>
         </p:spPr>
+        <p:txBody>
+          <a:bodyPr/>
+          <a:p/>
+        </p:txBody>
       </p:sp>
       <p:sp>
         <p:nvSpPr>
@@ -16779,6 +19510,10 @@
             <a:prstDash val="solid"/>
           </a:ln>
         </p:spPr>
+        <p:txBody>
+          <a:bodyPr/>
+          <a:p/>
+        </p:txBody>
       </p:sp>
       <p:sp>
         <p:nvSpPr>
@@ -16876,6 +19611,10 @@
             <a:prstDash val="solid"/>
           </a:ln>
         </p:spPr>
+        <p:txBody>
+          <a:bodyPr/>
+          <a:p/>
+        </p:txBody>
       </p:sp>
       <p:sp>
         <p:nvSpPr>
@@ -16973,6 +19712,10 @@
             <a:prstDash val="solid"/>
           </a:ln>
         </p:spPr>
+        <p:txBody>
+          <a:bodyPr/>
+          <a:p/>
+        </p:txBody>
       </p:sp>
       <p:sp>
         <p:nvSpPr>
@@ -17070,6 +19813,10 @@
             <a:prstDash val="solid"/>
           </a:ln>
         </p:spPr>
+        <p:txBody>
+          <a:bodyPr/>
+          <a:p/>
+        </p:txBody>
       </p:sp>
       <p:sp>
         <p:nvSpPr>
@@ -17199,6 +19946,10 @@
             <a:prstDash val="solid"/>
           </a:ln>
         </p:spPr>
+        <p:txBody>
+          <a:bodyPr/>
+          <a:p/>
+        </p:txBody>
       </p:sp>
       <p:sp>
         <p:nvSpPr>
@@ -17267,6 +20018,10 @@
             </a:outerShdw>
           </a:effectLst>
         </p:spPr>
+        <p:txBody>
+          <a:bodyPr/>
+          <a:p/>
+        </p:txBody>
       </p:sp>
       <p:sp>
         <p:nvSpPr>
@@ -17326,6 +20081,10 @@
             <a:prstDash val="dash"/>
           </a:ln>
         </p:spPr>
+        <p:txBody>
+          <a:bodyPr/>
+          <a:p/>
+        </p:txBody>
       </p:sp>
       <p:sp>
         <p:nvSpPr>
@@ -17358,6 +20117,10 @@
             </a:outerShdw>
           </a:effectLst>
         </p:spPr>
+        <p:txBody>
+          <a:bodyPr/>
+          <a:p/>
+        </p:txBody>
       </p:sp>
       <p:sp>
         <p:nvSpPr>
@@ -17445,6 +20208,10 @@
             <a:prstDash val="dash"/>
           </a:ln>
         </p:spPr>
+        <p:txBody>
+          <a:bodyPr/>
+          <a:p/>
+        </p:txBody>
       </p:sp>
       <p:sp>
         <p:nvSpPr>
@@ -17477,6 +20244,10 @@
             </a:outerShdw>
           </a:effectLst>
         </p:spPr>
+        <p:txBody>
+          <a:bodyPr/>
+          <a:p/>
+        </p:txBody>
       </p:sp>
       <p:sp>
         <p:nvSpPr>
@@ -17550,6 +20321,10 @@
             <a:prstDash val="dash"/>
           </a:ln>
         </p:spPr>
+        <p:txBody>
+          <a:bodyPr/>
+          <a:p/>
+        </p:txBody>
       </p:sp>
       <p:sp>
         <p:nvSpPr>
@@ -17573,6 +20348,10 @@
             <a:prstDash val="solid"/>
           </a:ln>
         </p:spPr>
+        <p:txBody>
+          <a:bodyPr/>
+          <a:p/>
+        </p:txBody>
       </p:sp>
       <p:sp>
         <p:nvSpPr>
@@ -17668,6 +20447,10 @@
             <a:prstDash val="solid"/>
           </a:ln>
         </p:spPr>
+        <p:txBody>
+          <a:bodyPr/>
+          <a:p/>
+        </p:txBody>
       </p:sp>
       <p:sp>
         <p:nvSpPr>
@@ -17763,6 +20546,10 @@
             <a:prstDash val="dash"/>
           </a:ln>
         </p:spPr>
+        <p:txBody>
+          <a:bodyPr/>
+          <a:p/>
+        </p:txBody>
       </p:sp>
       <p:sp>
         <p:nvSpPr>
@@ -17858,6 +20645,10 @@
             <a:prstDash val="dash"/>
           </a:ln>
         </p:spPr>
+        <p:txBody>
+          <a:bodyPr/>
+          <a:p/>
+        </p:txBody>
       </p:sp>
       <p:sp>
         <p:nvSpPr>
@@ -17991,6 +20782,10 @@
             <a:prstDash val="solid"/>
           </a:ln>
         </p:spPr>
+        <p:txBody>
+          <a:bodyPr/>
+          <a:p/>
+        </p:txBody>
       </p:sp>
       <p:sp>
         <p:nvSpPr>
@@ -18088,6 +20883,10 @@
             <a:prstDash val="solid"/>
           </a:ln>
         </p:spPr>
+        <p:txBody>
+          <a:bodyPr/>
+          <a:p/>
+        </p:txBody>
       </p:sp>
       <p:sp>
         <p:nvSpPr>
@@ -18185,6 +20984,10 @@
             <a:prstDash val="solid"/>
           </a:ln>
         </p:spPr>
+        <p:txBody>
+          <a:bodyPr/>
+          <a:p/>
+        </p:txBody>
       </p:sp>
       <p:sp>
         <p:nvSpPr>
@@ -18318,6 +21121,10 @@
             <a:prstDash val="solid"/>
           </a:ln>
         </p:spPr>
+        <p:txBody>
+          <a:bodyPr/>
+          <a:p/>
+        </p:txBody>
       </p:sp>
       <p:sp>
         <p:nvSpPr>
@@ -18447,6 +21254,10 @@
             <a:prstDash val="solid"/>
           </a:ln>
         </p:spPr>
+        <p:txBody>
+          <a:bodyPr/>
+          <a:p/>
+        </p:txBody>
       </p:sp>
       <p:sp>
         <p:nvSpPr>
@@ -18515,6 +21326,10 @@
             </a:outerShdw>
           </a:effectLst>
         </p:spPr>
+        <p:txBody>
+          <a:bodyPr/>
+          <a:p/>
+        </p:txBody>
       </p:sp>
       <p:sp>
         <p:nvSpPr>
@@ -18542,6 +21357,10 @@
             <a:prstDash val="solid"/>
           </a:ln>
         </p:spPr>
+        <p:txBody>
+          <a:bodyPr/>
+          <a:p/>
+        </p:txBody>
       </p:sp>
       <p:sp>
         <p:nvSpPr>
@@ -18772,6 +21591,10 @@
             </a:outerShdw>
           </a:effectLst>
         </p:spPr>
+        <p:txBody>
+          <a:bodyPr/>
+          <a:p/>
+        </p:txBody>
       </p:sp>
       <p:sp>
         <p:nvSpPr>
@@ -18799,6 +21622,10 @@
             <a:prstDash val="solid"/>
           </a:ln>
         </p:spPr>
+        <p:txBody>
+          <a:bodyPr/>
+          <a:p/>
+        </p:txBody>
       </p:sp>
       <p:sp>
         <p:nvSpPr>
@@ -19056,6 +21883,10 @@
             <a:prstDash val="solid"/>
           </a:ln>
         </p:spPr>
+        <p:txBody>
+          <a:bodyPr/>
+          <a:p/>
+        </p:txBody>
       </p:sp>
       <p:sp>
         <p:nvSpPr>
@@ -19081,6 +21912,10 @@
             <a:prstDash val="solid"/>
           </a:ln>
         </p:spPr>
+        <p:txBody>
+          <a:bodyPr/>
+          <a:p/>
+        </p:txBody>
       </p:sp>
       <p:sp>
         <p:nvSpPr>
@@ -19206,6 +22041,10 @@
             <a:prstDash val="solid"/>
           </a:ln>
         </p:spPr>
+        <p:txBody>
+          <a:bodyPr/>
+          <a:p/>
+        </p:txBody>
       </p:sp>
       <p:sp>
         <p:nvSpPr>
@@ -19231,6 +22070,10 @@
             <a:prstDash val="solid"/>
           </a:ln>
         </p:spPr>
+        <p:txBody>
+          <a:bodyPr/>
+          <a:p/>
+        </p:txBody>
       </p:sp>
       <p:sp>
         <p:nvSpPr>
@@ -19356,6 +22199,10 @@
             <a:prstDash val="solid"/>
           </a:ln>
         </p:spPr>
+        <p:txBody>
+          <a:bodyPr/>
+          <a:p/>
+        </p:txBody>
       </p:sp>
       <p:sp>
         <p:nvSpPr>
@@ -19381,6 +22228,10 @@
             <a:prstDash val="solid"/>
           </a:ln>
         </p:spPr>
+        <p:txBody>
+          <a:bodyPr/>
+          <a:p/>
+        </p:txBody>
       </p:sp>
       <p:sp>
         <p:nvSpPr>
@@ -19492,6 +22343,10 @@
             <a:prstDash val="solid"/>
           </a:ln>
         </p:spPr>
+        <p:txBody>
+          <a:bodyPr/>
+          <a:p/>
+        </p:txBody>
       </p:sp>
       <p:sp>
         <p:nvSpPr>
@@ -19517,6 +22372,10 @@
             <a:prstDash val="solid"/>
           </a:ln>
         </p:spPr>
+        <p:txBody>
+          <a:bodyPr/>
+          <a:p/>
+        </p:txBody>
       </p:sp>
       <p:sp>
         <p:nvSpPr>
@@ -19710,6 +22569,10 @@
             <a:prstDash val="solid"/>
           </a:ln>
         </p:spPr>
+        <p:txBody>
+          <a:bodyPr/>
+          <a:p/>
+        </p:txBody>
       </p:sp>
       <p:sp>
         <p:nvSpPr>
@@ -19773,6 +22636,10 @@
             <a:prstDash val="solid"/>
           </a:ln>
         </p:spPr>
+        <p:txBody>
+          <a:bodyPr/>
+          <a:p/>
+        </p:txBody>
       </p:sp>
       <p:sp>
         <p:nvSpPr>
@@ -19798,6 +22665,10 @@
             <a:prstDash val="solid"/>
           </a:ln>
         </p:spPr>
+        <p:txBody>
+          <a:bodyPr/>
+          <a:p/>
+        </p:txBody>
       </p:sp>
       <p:sp>
         <p:nvSpPr>
@@ -19859,6 +22730,10 @@
             <a:prstDash val="solid"/>
           </a:ln>
         </p:spPr>
+        <p:txBody>
+          <a:bodyPr/>
+          <a:p/>
+        </p:txBody>
       </p:sp>
       <p:sp>
         <p:nvSpPr>
@@ -19920,6 +22795,10 @@
             <a:prstDash val="solid"/>
           </a:ln>
         </p:spPr>
+        <p:txBody>
+          <a:bodyPr/>
+          <a:p/>
+        </p:txBody>
       </p:sp>
       <p:sp>
         <p:nvSpPr>
@@ -20024,6 +22903,10 @@
             </a:outerShdw>
           </a:effectLst>
         </p:spPr>
+        <p:txBody>
+          <a:bodyPr/>
+          <a:p/>
+        </p:txBody>
       </p:sp>
       <p:sp>
         <p:nvSpPr>
@@ -20049,6 +22932,10 @@
             <a:prstDash val="solid"/>
           </a:ln>
         </p:spPr>
+        <p:txBody>
+          <a:bodyPr/>
+          <a:p/>
+        </p:txBody>
       </p:sp>
       <p:sp>
         <p:nvSpPr>
@@ -20226,6 +23113,10 @@
             </a:outerShdw>
           </a:effectLst>
         </p:spPr>
+        <p:txBody>
+          <a:bodyPr/>
+          <a:p/>
+        </p:txBody>
       </p:sp>
       <p:sp>
         <p:nvSpPr>
@@ -20251,6 +23142,10 @@
             <a:prstDash val="solid"/>
           </a:ln>
         </p:spPr>
+        <p:txBody>
+          <a:bodyPr/>
+          <a:p/>
+        </p:txBody>
       </p:sp>
       <p:sp>
         <p:nvSpPr>
@@ -20428,6 +23323,10 @@
             </a:outerShdw>
           </a:effectLst>
         </p:spPr>
+        <p:txBody>
+          <a:bodyPr/>
+          <a:p/>
+        </p:txBody>
       </p:sp>
       <p:sp>
         <p:nvSpPr>
@@ -20453,6 +23352,10 @@
             <a:prstDash val="solid"/>
           </a:ln>
         </p:spPr>
+        <p:txBody>
+          <a:bodyPr/>
+          <a:p/>
+        </p:txBody>
       </p:sp>
       <p:sp>
         <p:nvSpPr>
@@ -20630,6 +23533,10 @@
             </a:outerShdw>
           </a:effectLst>
         </p:spPr>
+        <p:txBody>
+          <a:bodyPr/>
+          <a:p/>
+        </p:txBody>
       </p:sp>
       <p:sp>
         <p:nvSpPr>
@@ -20655,6 +23562,10 @@
             <a:prstDash val="solid"/>
           </a:ln>
         </p:spPr>
+        <p:txBody>
+          <a:bodyPr/>
+          <a:p/>
+        </p:txBody>
       </p:sp>
       <p:sp>
         <p:nvSpPr>
@@ -20832,6 +23743,10 @@
             </a:outerShdw>
           </a:effectLst>
         </p:spPr>
+        <p:txBody>
+          <a:bodyPr/>
+          <a:p/>
+        </p:txBody>
       </p:sp>
       <p:sp>
         <p:nvSpPr>
@@ -20857,6 +23772,10 @@
             <a:prstDash val="solid"/>
           </a:ln>
         </p:spPr>
+        <p:txBody>
+          <a:bodyPr/>
+          <a:p/>
+        </p:txBody>
       </p:sp>
       <p:sp>
         <p:nvSpPr>
@@ -21027,6 +23946,10 @@
             <a:prstDash val="solid"/>
           </a:ln>
         </p:spPr>
+        <p:txBody>
+          <a:bodyPr/>
+          <a:p/>
+        </p:txBody>
       </p:sp>
       <p:sp>
         <p:nvSpPr>
@@ -21088,6 +24011,10 @@
             <a:prstDash val="solid"/>
           </a:ln>
         </p:spPr>
+        <p:txBody>
+          <a:bodyPr/>
+          <a:p/>
+        </p:txBody>
       </p:sp>
       <p:sp>
         <p:nvSpPr>
@@ -21181,6 +24108,10 @@
             <a:prstDash val="solid"/>
           </a:ln>
         </p:spPr>
+        <p:txBody>
+          <a:bodyPr/>
+          <a:p/>
+        </p:txBody>
       </p:sp>
       <p:sp>
         <p:nvSpPr>
@@ -21242,6 +24173,10 @@
             <a:prstDash val="solid"/>
           </a:ln>
         </p:spPr>
+        <p:txBody>
+          <a:bodyPr/>
+          <a:p/>
+        </p:txBody>
       </p:sp>
       <p:sp>
         <p:nvSpPr>
@@ -21303,6 +24238,10 @@
             <a:prstDash val="solid"/>
           </a:ln>
         </p:spPr>
+        <p:txBody>
+          <a:bodyPr/>
+          <a:p/>
+        </p:txBody>
       </p:sp>
       <p:sp>
         <p:nvSpPr>
@@ -21403,6 +24342,10 @@
             <a:prstDash val="solid"/>
           </a:ln>
         </p:spPr>
+        <p:txBody>
+          <a:bodyPr/>
+          <a:p/>
+        </p:txBody>
       </p:sp>
       <p:sp>
         <p:nvSpPr>
@@ -21503,6 +24446,10 @@
             <a:prstDash val="solid"/>
           </a:ln>
         </p:spPr>
+        <p:txBody>
+          <a:bodyPr/>
+          <a:p/>
+        </p:txBody>
       </p:sp>
       <p:sp>
         <p:nvSpPr>
@@ -21603,6 +24550,10 @@
             <a:prstDash val="solid"/>
           </a:ln>
         </p:spPr>
+        <p:txBody>
+          <a:bodyPr/>
+          <a:p/>
+        </p:txBody>
       </p:sp>
       <p:sp>
         <p:nvSpPr>
@@ -21703,6 +24654,10 @@
             <a:prstDash val="solid"/>
           </a:ln>
         </p:spPr>
+        <p:txBody>
+          <a:bodyPr/>
+          <a:p/>
+        </p:txBody>
       </p:sp>
       <p:sp>
         <p:nvSpPr>
@@ -21764,6 +24719,10 @@
             <a:prstDash val="solid"/>
           </a:ln>
         </p:spPr>
+        <p:txBody>
+          <a:bodyPr/>
+          <a:p/>
+        </p:txBody>
       </p:sp>
       <p:sp>
         <p:nvSpPr>
@@ -21864,6 +24823,10 @@
             <a:prstDash val="solid"/>
           </a:ln>
         </p:spPr>
+        <p:txBody>
+          <a:bodyPr/>
+          <a:p/>
+        </p:txBody>
       </p:sp>
       <p:sp>
         <p:nvSpPr>
@@ -21964,6 +24927,10 @@
             <a:prstDash val="solid"/>
           </a:ln>
         </p:spPr>
+        <p:txBody>
+          <a:bodyPr/>
+          <a:p/>
+        </p:txBody>
       </p:sp>
       <p:sp>
         <p:nvSpPr>
@@ -22025,6 +24992,10 @@
             <a:prstDash val="solid"/>
           </a:ln>
         </p:spPr>
+        <p:txBody>
+          <a:bodyPr/>
+          <a:p/>
+        </p:txBody>
       </p:sp>
       <p:sp>
         <p:nvSpPr>
@@ -22125,6 +25096,10 @@
             <a:prstDash val="solid"/>
           </a:ln>
         </p:spPr>
+        <p:txBody>
+          <a:bodyPr/>
+          <a:p/>
+        </p:txBody>
       </p:sp>
       <p:sp>
         <p:nvSpPr>
@@ -22225,6 +25200,10 @@
             <a:prstDash val="solid"/>
           </a:ln>
         </p:spPr>
+        <p:txBody>
+          <a:bodyPr/>
+          <a:p/>
+        </p:txBody>
       </p:sp>
       <p:sp>
         <p:nvSpPr>
@@ -22325,6 +25304,10 @@
             <a:prstDash val="solid"/>
           </a:ln>
         </p:spPr>
+        <p:txBody>
+          <a:bodyPr/>
+          <a:p/>
+        </p:txBody>
       </p:sp>
       <p:sp>
         <p:nvSpPr>
@@ -22425,6 +25408,10 @@
             <a:prstDash val="solid"/>
           </a:ln>
         </p:spPr>
+        <p:txBody>
+          <a:bodyPr/>
+          <a:p/>
+        </p:txBody>
       </p:sp>
       <p:sp>
         <p:nvSpPr>
@@ -22486,6 +25473,10 @@
             <a:prstDash val="solid"/>
           </a:ln>
         </p:spPr>
+        <p:txBody>
+          <a:bodyPr/>
+          <a:p/>
+        </p:txBody>
       </p:sp>
       <p:sp>
         <p:nvSpPr>
@@ -22586,6 +25577,10 @@
             <a:prstDash val="solid"/>
           </a:ln>
         </p:spPr>
+        <p:txBody>
+          <a:bodyPr/>
+          <a:p/>
+        </p:txBody>
       </p:sp>
       <p:sp>
         <p:nvSpPr>
@@ -22686,6 +25681,10 @@
             <a:prstDash val="solid"/>
           </a:ln>
         </p:spPr>
+        <p:txBody>
+          <a:bodyPr/>
+          <a:p/>
+        </p:txBody>
       </p:sp>
       <p:sp>
         <p:nvSpPr>
@@ -22786,6 +25785,10 @@
             <a:prstDash val="solid"/>
           </a:ln>
         </p:spPr>
+        <p:txBody>
+          <a:bodyPr/>
+          <a:p/>
+        </p:txBody>
       </p:sp>
       <p:sp>
         <p:nvSpPr>
@@ -22954,6 +25957,10 @@
             <a:prstDash val="solid"/>
           </a:ln>
         </p:spPr>
+        <p:txBody>
+          <a:bodyPr/>
+          <a:p/>
+        </p:txBody>
       </p:sp>
       <p:sp>
         <p:nvSpPr>
@@ -23015,6 +26022,10 @@
             <a:prstDash val="solid"/>
           </a:ln>
         </p:spPr>
+        <p:txBody>
+          <a:bodyPr/>
+          <a:p/>
+        </p:txBody>
       </p:sp>
       <p:sp>
         <p:nvSpPr>
@@ -23076,6 +26087,10 @@
             <a:prstDash val="solid"/>
           </a:ln>
         </p:spPr>
+        <p:txBody>
+          <a:bodyPr/>
+          <a:p/>
+        </p:txBody>
       </p:sp>
       <p:sp>
         <p:nvSpPr>
@@ -23140,6 +26155,10 @@
             <a:prstDash val="solid"/>
           </a:ln>
         </p:spPr>
+        <p:txBody>
+          <a:bodyPr/>
+          <a:p/>
+        </p:txBody>
       </p:sp>
       <p:sp>
         <p:nvSpPr>
@@ -23204,6 +26223,10 @@
             <a:prstDash val="solid"/>
           </a:ln>
         </p:spPr>
+        <p:txBody>
+          <a:bodyPr/>
+          <a:p/>
+        </p:txBody>
       </p:sp>
       <p:sp>
         <p:nvSpPr>
@@ -23268,6 +26291,10 @@
             <a:prstDash val="solid"/>
           </a:ln>
         </p:spPr>
+        <p:txBody>
+          <a:bodyPr/>
+          <a:p/>
+        </p:txBody>
       </p:sp>
       <p:sp>
         <p:nvSpPr>
@@ -23332,6 +26359,10 @@
             <a:prstDash val="solid"/>
           </a:ln>
         </p:spPr>
+        <p:txBody>
+          <a:bodyPr/>
+          <a:p/>
+        </p:txBody>
       </p:sp>
       <p:sp>
         <p:nvSpPr>
@@ -23396,6 +26427,10 @@
             <a:prstDash val="solid"/>
           </a:ln>
         </p:spPr>
+        <p:txBody>
+          <a:bodyPr/>
+          <a:p/>
+        </p:txBody>
       </p:sp>
       <p:sp>
         <p:nvSpPr>
@@ -23457,6 +26492,10 @@
             <a:prstDash val="solid"/>
           </a:ln>
         </p:spPr>
+        <p:txBody>
+          <a:bodyPr/>
+          <a:p/>
+        </p:txBody>
       </p:sp>
       <p:sp>
         <p:nvSpPr>
@@ -23521,6 +26560,10 @@
             <a:prstDash val="solid"/>
           </a:ln>
         </p:spPr>
+        <p:txBody>
+          <a:bodyPr/>
+          <a:p/>
+        </p:txBody>
       </p:sp>
       <p:sp>
         <p:nvSpPr>
@@ -23585,6 +26628,10 @@
             <a:prstDash val="solid"/>
           </a:ln>
         </p:spPr>
+        <p:txBody>
+          <a:bodyPr/>
+          <a:p/>
+        </p:txBody>
       </p:sp>
       <p:sp>
         <p:nvSpPr>
@@ -23649,6 +26696,10 @@
             <a:prstDash val="solid"/>
           </a:ln>
         </p:spPr>
+        <p:txBody>
+          <a:bodyPr/>
+          <a:p/>
+        </p:txBody>
       </p:sp>
       <p:sp>
         <p:nvSpPr>
@@ -23713,6 +26764,10 @@
             <a:prstDash val="solid"/>
           </a:ln>
         </p:spPr>
+        <p:txBody>
+          <a:bodyPr/>
+          <a:p/>
+        </p:txBody>
       </p:sp>
       <p:sp>
         <p:nvSpPr>
@@ -23774,6 +26829,10 @@
             <a:prstDash val="solid"/>
           </a:ln>
         </p:spPr>
+        <p:txBody>
+          <a:bodyPr/>
+          <a:p/>
+        </p:txBody>
       </p:sp>
       <p:sp>
         <p:nvSpPr>
@@ -23838,6 +26897,10 @@
             <a:prstDash val="solid"/>
           </a:ln>
         </p:spPr>
+        <p:txBody>
+          <a:bodyPr/>
+          <a:p/>
+        </p:txBody>
       </p:sp>
       <p:sp>
         <p:nvSpPr>
@@ -23902,6 +26965,10 @@
             <a:prstDash val="solid"/>
           </a:ln>
         </p:spPr>
+        <p:txBody>
+          <a:bodyPr/>
+          <a:p/>
+        </p:txBody>
       </p:sp>
       <p:sp>
         <p:nvSpPr>
@@ -23966,6 +27033,10 @@
             <a:prstDash val="solid"/>
           </a:ln>
         </p:spPr>
+        <p:txBody>
+          <a:bodyPr/>
+          <a:p/>
+        </p:txBody>
       </p:sp>
       <p:sp>
         <p:nvSpPr>
@@ -24030,6 +27101,10 @@
             <a:prstDash val="solid"/>
           </a:ln>
         </p:spPr>
+        <p:txBody>
+          <a:bodyPr/>
+          <a:p/>
+        </p:txBody>
       </p:sp>
       <p:sp>
         <p:nvSpPr>
@@ -24091,6 +27166,10 @@
             <a:prstDash val="solid"/>
           </a:ln>
         </p:spPr>
+        <p:txBody>
+          <a:bodyPr/>
+          <a:p/>
+        </p:txBody>
       </p:sp>
       <p:sp>
         <p:nvSpPr>
@@ -24155,6 +27234,10 @@
             <a:prstDash val="solid"/>
           </a:ln>
         </p:spPr>
+        <p:txBody>
+          <a:bodyPr/>
+          <a:p/>
+        </p:txBody>
       </p:sp>
       <p:sp>
         <p:nvSpPr>
@@ -24219,6 +27302,10 @@
             <a:prstDash val="solid"/>
           </a:ln>
         </p:spPr>
+        <p:txBody>
+          <a:bodyPr/>
+          <a:p/>
+        </p:txBody>
       </p:sp>
       <p:sp>
         <p:nvSpPr>
@@ -24283,6 +27370,10 @@
             <a:prstDash val="solid"/>
           </a:ln>
         </p:spPr>
+        <p:txBody>
+          <a:bodyPr/>
+          <a:p/>
+        </p:txBody>
       </p:sp>
       <p:sp>
         <p:nvSpPr>
@@ -24347,6 +27438,10 @@
             <a:prstDash val="solid"/>
           </a:ln>
         </p:spPr>
+        <p:txBody>
+          <a:bodyPr/>
+          <a:p/>
+        </p:txBody>
       </p:sp>
       <p:sp>
         <p:nvSpPr>
@@ -24408,6 +27503,10 @@
             <a:prstDash val="solid"/>
           </a:ln>
         </p:spPr>
+        <p:txBody>
+          <a:bodyPr/>
+          <a:p/>
+        </p:txBody>
       </p:sp>
       <p:sp>
         <p:nvSpPr>
@@ -24472,6 +27571,10 @@
             <a:prstDash val="solid"/>
           </a:ln>
         </p:spPr>
+        <p:txBody>
+          <a:bodyPr/>
+          <a:p/>
+        </p:txBody>
       </p:sp>
       <p:sp>
         <p:nvSpPr>
@@ -24536,6 +27639,10 @@
             <a:prstDash val="solid"/>
           </a:ln>
         </p:spPr>
+        <p:txBody>
+          <a:bodyPr/>
+          <a:p/>
+        </p:txBody>
       </p:sp>
       <p:sp>
         <p:nvSpPr>
@@ -24600,6 +27707,10 @@
             <a:prstDash val="solid"/>
           </a:ln>
         </p:spPr>
+        <p:txBody>
+          <a:bodyPr/>
+          <a:p/>
+        </p:txBody>
       </p:sp>
       <p:sp>
         <p:nvSpPr>
@@ -24664,6 +27775,10 @@
             <a:prstDash val="solid"/>
           </a:ln>
         </p:spPr>
+        <p:txBody>
+          <a:bodyPr/>
+          <a:p/>
+        </p:txBody>
       </p:sp>
       <p:sp>
         <p:nvSpPr>
@@ -24725,6 +27840,10 @@
             <a:prstDash val="solid"/>
           </a:ln>
         </p:spPr>
+        <p:txBody>
+          <a:bodyPr/>
+          <a:p/>
+        </p:txBody>
       </p:sp>
       <p:sp>
         <p:nvSpPr>
@@ -24789,6 +27908,10 @@
             <a:prstDash val="solid"/>
           </a:ln>
         </p:spPr>
+        <p:txBody>
+          <a:bodyPr/>
+          <a:p/>
+        </p:txBody>
       </p:sp>
       <p:sp>
         <p:nvSpPr>
@@ -24853,6 +27976,10 @@
             <a:prstDash val="solid"/>
           </a:ln>
         </p:spPr>
+        <p:txBody>
+          <a:bodyPr/>
+          <a:p/>
+        </p:txBody>
       </p:sp>
       <p:sp>
         <p:nvSpPr>
@@ -24917,6 +28044,10 @@
             <a:prstDash val="solid"/>
           </a:ln>
         </p:spPr>
+        <p:txBody>
+          <a:bodyPr/>
+          <a:p/>
+        </p:txBody>
       </p:sp>
       <p:sp>
         <p:nvSpPr>

--- a/docs/aaa-platform-presentation.pptx
+++ b/docs/aaa-platform-presentation.pptx
@@ -21896,7 +21896,7 @@
                   <a:srgbClr val="FFFFFF"/>
                 </a:solidFill>
               </a:rPr>
-              <a:t>RADIUS Authentication Flow</a:t>
+              <a:t>Radius Static IP assignment flow</a:t>
             </a:r>
           </a:p>
         </p:txBody>
@@ -21953,7 +21953,7 @@
           <p:nvPr/>
         </p:nvPicPr>
         <p:blipFill>
-          <a:blip r:embed="rId3"/>
+          <a:blip r:embed="rId4"/>
           <a:stretch>
             <a:fillRect/>
           </a:stretch>

--- a/docs/aaa-platform-presentation.pptx
+++ b/docs/aaa-platform-presentation.pptx
@@ -6,6 +6,9 @@
   </p:sldMasterIdLst>
   <p:sldIdLst>
     <p:sldId id="256" r:id="rId2"/>
+    <p:sldId id="272" r:id="rId23"/>
+    <p:sldId id="271" r:id="rId22"/>
+    <p:sldId id="273" r:id="rId25"/>
     <p:sldId id="257" r:id="rId3"/>
     <p:sldId id="258" r:id="rId4"/>
     <p:sldId id="259" r:id="rId5"/>
@@ -4362,7 +4365,7 @@
                 <a:ea typeface="Courier New" pitchFamily="34" charset="-122"/>
                 <a:cs typeface="Courier New" pitchFamily="34" charset="-120"/>
               </a:rPr>
-              <a:t> "status": "completed",</a:t>
+              <a:t xml:space="preserve"> "status": "completed",</a:t>
             </a:r>
             <a:endParaRPr lang="en-US" sz="900" dirty="0"/>
           </a:p>
@@ -4401,7 +4404,7 @@
                 <a:ea typeface="Courier New" pitchFamily="34" charset="-122"/>
                 <a:cs typeface="Courier New" pitchFamily="34" charset="-120"/>
               </a:rPr>
-              <a:t> "processed": 4997,</a:t>
+              <a:t xml:space="preserve"> "processed": 4997,</a:t>
             </a:r>
             <a:endParaRPr lang="en-US" sz="900" dirty="0"/>
           </a:p>
@@ -4440,7 +4443,7 @@
                 <a:ea typeface="Courier New" pitchFamily="34" charset="-122"/>
                 <a:cs typeface="Courier New" pitchFamily="34" charset="-120"/>
               </a:rPr>
-              <a:t> "failed": 3,</a:t>
+              <a:t xml:space="preserve"> "failed": 3,</a:t>
             </a:r>
             <a:endParaRPr lang="en-US" sz="900" dirty="0"/>
           </a:p>
@@ -4479,7 +4482,7 @@
                 <a:ea typeface="Courier New" pitchFamily="34" charset="-122"/>
                 <a:cs typeface="Courier New" pitchFamily="34" charset="-120"/>
               </a:rPr>
-              <a:t> "errors": [{</a:t>
+              <a:t xml:space="preserve"> "errors": [{</a:t>
             </a:r>
             <a:endParaRPr lang="en-US" sz="900" dirty="0"/>
           </a:p>
@@ -4518,7 +4521,7 @@
                 <a:ea typeface="Courier New" pitchFamily="34" charset="-122"/>
                 <a:cs typeface="Courier New" pitchFamily="34" charset="-120"/>
               </a:rPr>
-              <a:t>   "row": 42, "field": "imsi",</a:t>
+              <a:t xml:space="preserve">   "row": 42, "field": "imsi",</a:t>
             </a:r>
             <a:endParaRPr lang="en-US" sz="900" dirty="0"/>
           </a:p>
@@ -4557,7 +4560,7 @@
                 <a:ea typeface="Courier New" pitchFamily="34" charset="-122"/>
                 <a:cs typeface="Courier New" pitchFamily="34" charset="-120"/>
               </a:rPr>
-              <a:t>   "message": "Must be 15 digits"}]}</a:t>
+              <a:t xml:space="preserve">   "message": "Must be 15 digits"}]}</a:t>
             </a:r>
             <a:endParaRPr lang="en-US" sz="900" dirty="0"/>
           </a:p>
@@ -8011,7 +8014,7 @@
                 <a:ea typeface="Courier New" pitchFamily="34" charset="-122"/>
                 <a:cs typeface="Courier New" pitchFamily="34" charset="-120"/>
               </a:rPr>
-              <a:t>  aaa-database (CNPG)</a:t>
+              <a:t xml:space="preserve">  aaa-database (CNPG)</a:t>
             </a:r>
             <a:endParaRPr lang="en-US" sz="950" dirty="0"/>
           </a:p>
@@ -8050,7 +8053,7 @@
                 <a:ea typeface="Courier New" pitchFamily="34" charset="-122"/>
                 <a:cs typeface="Courier New" pitchFamily="34" charset="-120"/>
               </a:rPr>
-              <a:t>  aaa-lookup-service</a:t>
+              <a:t xml:space="preserve">  aaa-lookup-service</a:t>
             </a:r>
             <a:endParaRPr lang="en-US" sz="950" dirty="0"/>
           </a:p>
@@ -8089,7 +8092,7 @@
                 <a:ea typeface="Courier New" pitchFamily="34" charset="-122"/>
                 <a:cs typeface="Courier New" pitchFamily="34" charset="-120"/>
               </a:rPr>
-              <a:t>  subscriber-profile-api</a:t>
+              <a:t xml:space="preserve">  subscriber-profile-api</a:t>
             </a:r>
             <a:endParaRPr lang="en-US" sz="950" dirty="0"/>
           </a:p>
@@ -8128,7 +8131,7 @@
                 <a:ea typeface="Courier New" pitchFamily="34" charset="-122"/>
                 <a:cs typeface="Courier New" pitchFamily="34" charset="-120"/>
               </a:rPr>
-              <a:t>  aaa-management-ui</a:t>
+              <a:t xml:space="preserve">  aaa-management-ui</a:t>
             </a:r>
             <a:endParaRPr lang="en-US" sz="950" dirty="0"/>
           </a:p>
@@ -14523,6 +14526,8476 @@
 </p:sld>
 </file>
 
+<file path=ppt/slides/slide16.xml><?xml version="1.0" encoding="utf-8"?>
+<p:sld xmlns:a="http://schemas.openxmlformats.org/drawingml/2006/main" xmlns:r="http://schemas.openxmlformats.org/officeDocument/2006/relationships" xmlns:p="http://schemas.openxmlformats.org/presentationml/2006/main">
+  <p:cSld name="Slide 16">
+    <p:bg>
+      <p:bgPr>
+        <a:solidFill>
+          <a:srgbClr val="EEF3FB"/>
+        </a:solidFill>
+      </p:bgPr>
+    </p:bg>
+    <p:spTree>
+      <p:nvGrpSpPr>
+        <p:cNvPr id="1" name=""/>
+        <p:cNvGrpSpPr/>
+        <p:nvPr/>
+      </p:nvGrpSpPr>
+      <p:grpSpPr>
+        <a:xfrm>
+          <a:off x="0" y="0"/>
+          <a:ext cx="0" cy="0"/>
+          <a:chOff x="0" y="0"/>
+          <a:chExt cx="0" cy="0"/>
+        </a:xfrm>
+      </p:grpSpPr>
+      <p:sp>
+        <p:nvSpPr>
+          <p:cNvPr id="2" name="Shape 0"/>
+          <p:cNvSpPr/>
+          <p:nvPr/>
+        </p:nvSpPr>
+        <p:spPr>
+          <a:xfrm>
+            <a:off x="0" y="0"/>
+            <a:ext cx="9144000" cy="560000"/>
+          </a:xfrm>
+          <a:prstGeom prst="rect">
+            <a:avLst/>
+          </a:prstGeom>
+          <a:solidFill>
+            <a:srgbClr val="1E2761"/>
+          </a:solidFill>
+          <a:ln w="12700">
+            <a:solidFill>
+              <a:srgbClr val="1E2761"/>
+            </a:solidFill>
+            <a:prstDash val="solid"/>
+          </a:ln>
+        </p:spPr>
+      </p:sp>
+      <p:sp>
+        <p:nvSpPr>
+          <p:cNvPr id="3" name="Text 1"/>
+          <p:cNvSpPr/>
+          <p:nvPr/>
+        </p:nvSpPr>
+        <p:spPr>
+          <a:xfrm>
+            <a:off x="365760" y="0"/>
+            <a:ext cx="8412480" cy="560000"/>
+          </a:xfrm>
+          <a:prstGeom prst="rect">
+            <a:avLst/>
+          </a:prstGeom>
+          <a:noFill/>
+          <a:ln/>
+        </p:spPr>
+        <p:txBody>
+          <a:bodyPr wrap="square" lIns="0" tIns="0" rIns="0" bIns="0" rtlCol="0" anchor="ctr"/>
+          <a:lstStyle/>
+          <a:p>
+            <a:pPr indent="0" marL="0">
+              <a:buNone/>
+            </a:pPr>
+            <a:r>
+              <a:rPr lang="en-US" sz="2200" b="1" dirty="0">
+                <a:solidFill>
+                  <a:srgbClr val="FFFFFF"/>
+                </a:solidFill>
+              </a:rPr>
+              <a:t>Pod Architecture — Deployment Topology</a:t>
+            </a:r>
+          </a:p>
+        </p:txBody>
+      </p:sp>
+      <p:sp>
+        <p:nvSpPr>
+          <p:cNvPr id="4" name="Text 2"/>
+          <p:cNvSpPr/>
+          <p:nvPr/>
+        </p:nvSpPr>
+        <p:spPr>
+          <a:xfrm>
+            <a:off x="365760" y="560000"/>
+            <a:ext cx="8412480" cy="230000"/>
+          </a:xfrm>
+          <a:prstGeom prst="rect">
+            <a:avLst/>
+          </a:prstGeom>
+          <a:noFill/>
+          <a:ln/>
+        </p:spPr>
+        <p:txBody>
+          <a:bodyPr wrap="square" rtlCol="0" anchor="ctr"/>
+          <a:lstStyle/>
+          <a:p>
+            <a:pPr indent="0" marL="0">
+              <a:buNone/>
+            </a:pPr>
+            <a:r>
+              <a:rPr lang="en-US" sz="900" i="1" dirty="0">
+                <a:solidFill>
+                  <a:srgbClr val="2E75B6"/>
+                </a:solidFill>
+              </a:rPr>
+              <a:t>Request path: SMF → Radius-to-Rest → Lookup Service ↔ 1st Connection &amp; Provisioning ↔ PostgreSQL (HA cluster)</a:t>
+            </a:r>
+          </a:p>
+        </p:txBody>
+      </p:sp>
+      <p:sp>
+        <p:nvSpPr>
+          <p:cNvPr id="5" name="DB1"/>
+          <p:cNvSpPr/>
+          <p:nvPr/>
+        </p:nvSpPr>
+        <p:spPr>
+          <a:xfrm>
+            <a:off x="550000" y="870000"/>
+            <a:ext cx="1900000" cy="380000"/>
+          </a:xfrm>
+          <a:prstGeom prst="rect">
+            <a:avLst/>
+          </a:prstGeom>
+          <a:solidFill>
+            <a:srgbClr val="1E2761"/>
+          </a:solidFill>
+          <a:ln w="19050">
+            <a:solidFill>
+              <a:srgbClr val="2E75B6"/>
+            </a:solidFill>
+            <a:prstDash val="solid"/>
+          </a:ln>
+        </p:spPr>
+        <p:txBody>
+          <a:bodyPr wrap="square" lIns="91440" tIns="45720" rIns="91440" bIns="45720" rtlCol="0" anchor="ctr"/>
+          <a:lstStyle/>
+          <a:p>
+            <a:pPr algn="ctr" indent="0" marL="0">
+              <a:buNone/>
+            </a:pPr>
+            <a:r>
+              <a:rPr lang="en-US" sz="1000" b="1" dirty="0">
+                <a:solidFill>
+                  <a:srgbClr val="FFFFFF"/>
+                </a:solidFill>
+              </a:rPr>
+              <a:t>PostgreSQL</a:t>
+            </a:r>
+          </a:p>
+        </p:txBody>
+      </p:sp>
+      <p:sp>
+        <p:nvSpPr>
+          <p:cNvPr id="6" name="DB2"/>
+          <p:cNvSpPr/>
+          <p:nvPr/>
+        </p:nvSpPr>
+        <p:spPr>
+          <a:xfrm>
+            <a:off x="3622000" y="870000"/>
+            <a:ext cx="1900000" cy="380000"/>
+          </a:xfrm>
+          <a:prstGeom prst="rect">
+            <a:avLst/>
+          </a:prstGeom>
+          <a:solidFill>
+            <a:srgbClr val="1E2761"/>
+          </a:solidFill>
+          <a:ln w="19050">
+            <a:solidFill>
+              <a:srgbClr val="2E75B6"/>
+            </a:solidFill>
+            <a:prstDash val="solid"/>
+          </a:ln>
+        </p:spPr>
+        <p:txBody>
+          <a:bodyPr wrap="square" lIns="91440" tIns="45720" rIns="91440" bIns="45720" rtlCol="0" anchor="ctr"/>
+          <a:lstStyle/>
+          <a:p>
+            <a:pPr algn="ctr" indent="0" marL="0">
+              <a:buNone/>
+            </a:pPr>
+            <a:r>
+              <a:rPr lang="en-US" sz="1000" b="1" dirty="0">
+                <a:solidFill>
+                  <a:srgbClr val="FFFFFF"/>
+                </a:solidFill>
+              </a:rPr>
+              <a:t>PostgreSQL</a:t>
+            </a:r>
+          </a:p>
+        </p:txBody>
+      </p:sp>
+      <p:sp>
+        <p:nvSpPr>
+          <p:cNvPr id="7" name="DB3"/>
+          <p:cNvSpPr/>
+          <p:nvPr/>
+        </p:nvSpPr>
+        <p:spPr>
+          <a:xfrm>
+            <a:off x="6694000" y="870000"/>
+            <a:ext cx="1900000" cy="380000"/>
+          </a:xfrm>
+          <a:prstGeom prst="rect">
+            <a:avLst/>
+          </a:prstGeom>
+          <a:solidFill>
+            <a:srgbClr val="1E2761"/>
+          </a:solidFill>
+          <a:ln w="19050">
+            <a:solidFill>
+              <a:srgbClr val="2E75B6"/>
+            </a:solidFill>
+            <a:prstDash val="solid"/>
+          </a:ln>
+        </p:spPr>
+        <p:txBody>
+          <a:bodyPr wrap="square" lIns="91440" tIns="45720" rIns="91440" bIns="45720" rtlCol="0" anchor="ctr"/>
+          <a:lstStyle/>
+          <a:p>
+            <a:pPr algn="ctr" indent="0" marL="0">
+              <a:buNone/>
+            </a:pPr>
+            <a:r>
+              <a:rPr lang="en-US" sz="1000" b="1" dirty="0">
+                <a:solidFill>
+                  <a:srgbClr val="FFFFFF"/>
+                </a:solidFill>
+              </a:rPr>
+              <a:t>PostgreSQL</a:t>
+            </a:r>
+          </a:p>
+        </p:txBody>
+      </p:sp>
+      <p:sp>
+        <p:nvSpPr>
+          <p:cNvPr id="8" name="DBLine1"/>
+          <p:cNvSpPr/>
+          <p:nvPr/>
+        </p:nvSpPr>
+        <p:spPr>
+          <a:xfrm>
+            <a:off x="2450000" y="1060000"/>
+            <a:ext cx="1172000" cy="0"/>
+          </a:xfrm>
+          <a:prstGeom prst="line">
+            <a:avLst/>
+          </a:prstGeom>
+          <a:noFill/>
+          <a:ln w="19050">
+            <a:solidFill>
+              <a:srgbClr val="2E75B6"/>
+            </a:solidFill>
+            <a:prstDash val="solid"/>
+            <a:headEnd type="arrow" w="sm" len="sm"/>
+            <a:tailEnd type="arrow" w="sm" len="sm"/>
+          </a:ln>
+        </p:spPr>
+      </p:sp>
+      <p:sp>
+        <p:nvSpPr>
+          <p:cNvPr id="9" name="DBLine2"/>
+          <p:cNvSpPr/>
+          <p:nvPr/>
+        </p:nvSpPr>
+        <p:spPr>
+          <a:xfrm>
+            <a:off x="5522000" y="1060000"/>
+            <a:ext cx="1172000" cy="0"/>
+          </a:xfrm>
+          <a:prstGeom prst="line">
+            <a:avLst/>
+          </a:prstGeom>
+          <a:noFill/>
+          <a:ln w="19050">
+            <a:solidFill>
+              <a:srgbClr val="2E75B6"/>
+            </a:solidFill>
+            <a:prstDash val="solid"/>
+            <a:headEnd type="arrow" w="sm" len="sm"/>
+            <a:tailEnd type="arrow" w="sm" len="sm"/>
+          </a:ln>
+        </p:spPr>
+      </p:sp>
+      <p:sp>
+        <p:nvSpPr>
+          <p:cNvPr id="10" name="VArr_DB1"/>
+          <p:cNvSpPr/>
+          <p:nvPr/>
+        </p:nvSpPr>
+        <p:spPr>
+          <a:xfrm>
+            <a:off x="1500000" y="1250000"/>
+            <a:ext cx="0" cy="230000"/>
+          </a:xfrm>
+          <a:prstGeom prst="line">
+            <a:avLst/>
+          </a:prstGeom>
+          <a:noFill/>
+          <a:ln w="19050">
+            <a:solidFill>
+              <a:srgbClr val="2E75B6"/>
+            </a:solidFill>
+            <a:prstDash val="solid"/>
+            <a:headEnd type="arrow" w="sm" len="sm"/>
+            <a:tailEnd type="arrow" w="sm" len="sm"/>
+          </a:ln>
+        </p:spPr>
+      </p:sp>
+      <p:sp>
+        <p:nvSpPr>
+          <p:cNvPr id="11" name="VArr_DB2"/>
+          <p:cNvSpPr/>
+          <p:nvPr/>
+        </p:nvSpPr>
+        <p:spPr>
+          <a:xfrm>
+            <a:off x="4572000" y="1250000"/>
+            <a:ext cx="0" cy="230000"/>
+          </a:xfrm>
+          <a:prstGeom prst="line">
+            <a:avLst/>
+          </a:prstGeom>
+          <a:noFill/>
+          <a:ln w="19050">
+            <a:solidFill>
+              <a:srgbClr val="2E75B6"/>
+            </a:solidFill>
+            <a:prstDash val="solid"/>
+            <a:headEnd type="arrow" w="sm" len="sm"/>
+            <a:tailEnd type="arrow" w="sm" len="sm"/>
+          </a:ln>
+        </p:spPr>
+      </p:sp>
+      <p:sp>
+        <p:nvSpPr>
+          <p:cNvPr id="12" name="VArr_DB3"/>
+          <p:cNvSpPr/>
+          <p:nvPr/>
+        </p:nvSpPr>
+        <p:spPr>
+          <a:xfrm>
+            <a:off x="7644000" y="1250000"/>
+            <a:ext cx="0" cy="230000"/>
+          </a:xfrm>
+          <a:prstGeom prst="line">
+            <a:avLst/>
+          </a:prstGeom>
+          <a:noFill/>
+          <a:ln w="19050">
+            <a:solidFill>
+              <a:srgbClr val="2E75B6"/>
+            </a:solidFill>
+            <a:prstDash val="solid"/>
+            <a:headEnd type="arrow" w="sm" len="sm"/>
+            <a:tailEnd type="arrow" w="sm" len="sm"/>
+          </a:ln>
+        </p:spPr>
+      </p:sp>
+      <p:sp>
+        <p:nvSpPr>
+          <p:cNvPr id="13" name="LookupShadow"/>
+          <p:cNvSpPr/>
+          <p:nvPr/>
+        </p:nvSpPr>
+        <p:spPr>
+          <a:xfrm>
+            <a:off x="210000" y="1580000"/>
+            <a:ext cx="3200000" cy="510000"/>
+          </a:xfrm>
+          <a:prstGeom prst="ellipse">
+            <a:avLst/>
+          </a:prstGeom>
+          <a:solidFill>
+            <a:srgbClr val="1E2761"/>
+          </a:solidFill>
+          <a:ln w="19050">
+            <a:solidFill>
+              <a:srgbClr val="2E75B6"/>
+            </a:solidFill>
+            <a:prstDash val="solid"/>
+          </a:ln>
+        </p:spPr>
+      </p:sp>
+      <p:sp>
+        <p:nvSpPr>
+          <p:cNvPr id="14" name="LookupMain"/>
+          <p:cNvSpPr/>
+          <p:nvPr/>
+        </p:nvSpPr>
+        <p:spPr>
+          <a:xfrm>
+            <a:off x="150000" y="1530000"/>
+            <a:ext cx="3200000" cy="510000"/>
+          </a:xfrm>
+          <a:prstGeom prst="ellipse">
+            <a:avLst/>
+          </a:prstGeom>
+          <a:solidFill>
+            <a:srgbClr val="1E2761"/>
+          </a:solidFill>
+          <a:ln w="25400">
+            <a:solidFill>
+              <a:srgbClr val="CADCFC"/>
+            </a:solidFill>
+            <a:prstDash val="solid"/>
+          </a:ln>
+        </p:spPr>
+        <p:txBody>
+          <a:bodyPr wrap="square" lIns="91440" tIns="45720" rIns="91440" bIns="45720" rtlCol="0" anchor="ctr"/>
+          <a:lstStyle/>
+          <a:p>
+            <a:pPr algn="ctr" indent="0" marL="0">
+              <a:buNone/>
+            </a:pPr>
+            <a:r>
+              <a:rPr lang="en-US" sz="1400" b="1" dirty="0">
+                <a:solidFill>
+                  <a:srgbClr val="FFFFFF"/>
+                </a:solidFill>
+              </a:rPr>
+              <a:t>Lookup Service</a:t>
+            </a:r>
+          </a:p>
+        </p:txBody>
+      </p:sp>
+      <p:sp>
+        <p:nvSpPr>
+          <p:cNvPr id="15" name="ArrowLookup1stConn"/>
+          <p:cNvSpPr/>
+          <p:nvPr/>
+        </p:nvSpPr>
+        <p:spPr>
+          <a:xfrm>
+            <a:off x="3350000" y="1785000"/>
+            <a:ext cx="1500000" cy="0"/>
+          </a:xfrm>
+          <a:prstGeom prst="line">
+            <a:avLst/>
+          </a:prstGeom>
+          <a:noFill/>
+          <a:ln w="25400">
+            <a:solidFill>
+              <a:srgbClr val="2E75B6"/>
+            </a:solidFill>
+            <a:prstDash val="solid"/>
+            <a:headEnd type="arrow" w="med" len="med"/>
+            <a:tailEnd type="arrow" w="med" len="med"/>
+          </a:ln>
+        </p:spPr>
+      </p:sp>
+      <p:sp>
+        <p:nvSpPr>
+          <p:cNvPr id="16" name="1stConnMain"/>
+          <p:cNvSpPr/>
+          <p:nvPr/>
+        </p:nvSpPr>
+        <p:spPr>
+          <a:xfrm>
+            <a:off x="4850000" y="1530000"/>
+            <a:ext cx="3100000" cy="510000"/>
+          </a:xfrm>
+          <a:prstGeom prst="ellipse">
+            <a:avLst/>
+          </a:prstGeom>
+          <a:solidFill>
+            <a:srgbClr val="1E2761"/>
+          </a:solidFill>
+          <a:ln w="25400">
+            <a:solidFill>
+              <a:srgbClr val="CADCFC"/>
+            </a:solidFill>
+            <a:prstDash val="solid"/>
+          </a:ln>
+        </p:spPr>
+        <p:txBody>
+          <a:bodyPr wrap="square" lIns="91440" tIns="45720" rIns="91440" bIns="45720" rtlCol="0" anchor="ctr"/>
+          <a:lstStyle/>
+          <a:p>
+            <a:pPr algn="ctr" indent="0" marL="0">
+              <a:buNone/>
+            </a:pPr>
+            <a:r>
+              <a:rPr lang="en-US" sz="1200" b="1" dirty="0">
+                <a:solidFill>
+                  <a:srgbClr val="FFFFFF"/>
+                </a:solidFill>
+              </a:rPr>
+              <a:t>1st Connection &amp; Provisioning</a:t>
+            </a:r>
+          </a:p>
+        </p:txBody>
+      </p:sp>
+      <p:sp>
+        <p:nvSpPr>
+          <p:cNvPr id="17" name="ArrowUI"/>
+          <p:cNvSpPr/>
+          <p:nvPr/>
+        </p:nvSpPr>
+        <p:spPr>
+          <a:xfrm>
+            <a:off x="7950000" y="1785000"/>
+            <a:ext cx="200000" cy="0"/>
+          </a:xfrm>
+          <a:prstGeom prst="line">
+            <a:avLst/>
+          </a:prstGeom>
+          <a:noFill/>
+          <a:ln w="19050">
+            <a:solidFill>
+              <a:srgbClr val="2E75B6"/>
+            </a:solidFill>
+            <a:prstDash val="solid"/>
+            <a:tailEnd type="arrow" w="sm" len="sm"/>
+          </a:ln>
+        </p:spPr>
+      </p:sp>
+      <p:sp>
+        <p:nvSpPr>
+          <p:cNvPr id="18" name="UIMain"/>
+          <p:cNvSpPr/>
+          <p:nvPr/>
+        </p:nvSpPr>
+        <p:spPr>
+          <a:xfrm>
+            <a:off x="8150000" y="1640000"/>
+            <a:ext cx="850000" cy="390000"/>
+          </a:xfrm>
+          <a:prstGeom prst="ellipse">
+            <a:avLst/>
+          </a:prstGeom>
+          <a:solidFill>
+            <a:srgbClr val="2E75B6"/>
+          </a:solidFill>
+          <a:ln w="19050">
+            <a:solidFill>
+              <a:srgbClr val="CADCFC"/>
+            </a:solidFill>
+            <a:prstDash val="solid"/>
+          </a:ln>
+        </p:spPr>
+        <p:txBody>
+          <a:bodyPr wrap="square" lIns="45720" tIns="45720" rIns="45720" bIns="45720" rtlCol="0" anchor="ctr"/>
+          <a:lstStyle/>
+          <a:p>
+            <a:pPr algn="ctr" indent="0" marL="0">
+              <a:buNone/>
+            </a:pPr>
+            <a:r>
+              <a:rPr lang="en-US" sz="1100" b="1" dirty="0">
+                <a:solidFill>
+                  <a:srgbClr val="FFFFFF"/>
+                </a:solidFill>
+              </a:rPr>
+              <a:t>UI</a:t>
+            </a:r>
+          </a:p>
+        </p:txBody>
+      </p:sp>
+      <p:sp>
+        <p:nvSpPr>
+          <p:cNvPr id="19" name="VArr_R2R1"/>
+          <p:cNvSpPr/>
+          <p:nvPr/>
+        </p:nvSpPr>
+        <p:spPr>
+          <a:xfrm>
+            <a:off x="975000" y="2040000"/>
+            <a:ext cx="0" cy="250000"/>
+          </a:xfrm>
+          <a:prstGeom prst="line">
+            <a:avLst/>
+          </a:prstGeom>
+          <a:noFill/>
+          <a:ln w="19050">
+            <a:solidFill>
+              <a:srgbClr val="2E75B6"/>
+            </a:solidFill>
+            <a:prstDash val="solid"/>
+            <a:headEnd type="arrow" w="sm" len="sm"/>
+            <a:tailEnd type="arrow" w="sm" len="sm"/>
+          </a:ln>
+        </p:spPr>
+      </p:sp>
+      <p:sp>
+        <p:nvSpPr>
+          <p:cNvPr id="20" name="VArr_R2R2"/>
+          <p:cNvSpPr/>
+          <p:nvPr/>
+        </p:nvSpPr>
+        <p:spPr>
+          <a:xfrm>
+            <a:off x="2750000" y="2040000"/>
+            <a:ext cx="0" cy="250000"/>
+          </a:xfrm>
+          <a:prstGeom prst="line">
+            <a:avLst/>
+          </a:prstGeom>
+          <a:noFill/>
+          <a:ln w="19050">
+            <a:solidFill>
+              <a:srgbClr val="2E75B6"/>
+            </a:solidFill>
+            <a:prstDash val="solid"/>
+            <a:headEnd type="arrow" w="sm" len="sm"/>
+            <a:tailEnd type="arrow" w="sm" len="sm"/>
+          </a:ln>
+        </p:spPr>
+      </p:sp>
+      <p:sp>
+        <p:nvSpPr>
+          <p:cNvPr id="21" name="VArr_R2R3"/>
+          <p:cNvSpPr/>
+          <p:nvPr/>
+        </p:nvSpPr>
+        <p:spPr>
+          <a:xfrm>
+            <a:off x="4625000" y="2040000"/>
+            <a:ext cx="0" cy="250000"/>
+          </a:xfrm>
+          <a:prstGeom prst="line">
+            <a:avLst/>
+          </a:prstGeom>
+          <a:noFill/>
+          <a:ln w="19050">
+            <a:solidFill>
+              <a:srgbClr val="2E75B6"/>
+            </a:solidFill>
+            <a:prstDash val="solid"/>
+            <a:headEnd type="arrow" w="sm" len="sm"/>
+            <a:tailEnd type="arrow" w="sm" len="sm"/>
+          </a:ln>
+        </p:spPr>
+      </p:sp>
+      <p:sp>
+        <p:nvSpPr>
+          <p:cNvPr id="22" name="VArr_R2R4"/>
+          <p:cNvSpPr/>
+          <p:nvPr/>
+        </p:nvSpPr>
+        <p:spPr>
+          <a:xfrm>
+            <a:off x="2800000" y="2040000"/>
+            <a:ext cx="3575000" cy="300000"/>
+          </a:xfrm>
+          <a:prstGeom prst="line">
+            <a:avLst/>
+          </a:prstGeom>
+          <a:noFill/>
+          <a:ln w="19050">
+            <a:solidFill>
+              <a:srgbClr val="2E75B6"/>
+            </a:solidFill>
+            <a:prstDash val="solid"/>
+            <a:headEnd type="arrow" w="sm" len="sm"/>
+            <a:tailEnd type="arrow" w="sm" len="sm"/>
+          </a:ln>
+        </p:spPr>
+      </p:sp>
+      <p:sp>
+        <p:nvSpPr>
+          <p:cNvPr id="23" name="R2R1Shadow"/>
+          <p:cNvSpPr/>
+          <p:nvPr/>
+        </p:nvSpPr>
+        <p:spPr>
+          <a:xfrm>
+            <a:off x="210000" y="2390000"/>
+            <a:ext cx="1650000" cy="430000"/>
+          </a:xfrm>
+          <a:prstGeom prst="ellipse">
+            <a:avLst/>
+          </a:prstGeom>
+          <a:solidFill>
+            <a:srgbClr val="1E2761"/>
+          </a:solidFill>
+          <a:ln w="19050">
+            <a:solidFill>
+              <a:srgbClr val="2E75B6"/>
+            </a:solidFill>
+            <a:prstDash val="solid"/>
+          </a:ln>
+        </p:spPr>
+      </p:sp>
+      <p:sp>
+        <p:nvSpPr>
+          <p:cNvPr id="24" name="R2R1Main"/>
+          <p:cNvSpPr/>
+          <p:nvPr/>
+        </p:nvSpPr>
+        <p:spPr>
+          <a:xfrm>
+            <a:off x="150000" y="2340000"/>
+            <a:ext cx="1650000" cy="430000"/>
+          </a:xfrm>
+          <a:prstGeom prst="ellipse">
+            <a:avLst/>
+          </a:prstGeom>
+          <a:solidFill>
+            <a:srgbClr val="1E2761"/>
+          </a:solidFill>
+          <a:ln w="25400">
+            <a:solidFill>
+              <a:srgbClr val="CADCFC"/>
+            </a:solidFill>
+            <a:prstDash val="solid"/>
+          </a:ln>
+        </p:spPr>
+        <p:txBody>
+          <a:bodyPr wrap="square" lIns="45720" tIns="45720" rIns="45720" bIns="45720" rtlCol="0" anchor="ctr"/>
+          <a:lstStyle/>
+          <a:p>
+            <a:pPr algn="ctr" indent="0" marL="0">
+              <a:buNone/>
+            </a:pPr>
+            <a:r>
+              <a:rPr lang="en-US" sz="900" b="1" dirty="0">
+                <a:solidFill>
+                  <a:srgbClr val="FFFFFF"/>
+                </a:solidFill>
+              </a:rPr>
+              <a:t>Radius to Rest</a:t>
+            </a:r>
+          </a:p>
+        </p:txBody>
+      </p:sp>
+      <p:sp>
+        <p:nvSpPr>
+          <p:cNvPr id="25" name="R2R2Shadow"/>
+          <p:cNvSpPr/>
+          <p:nvPr/>
+        </p:nvSpPr>
+        <p:spPr>
+          <a:xfrm>
+            <a:off x="2060000" y="2390000"/>
+            <a:ext cx="1650000" cy="430000"/>
+          </a:xfrm>
+          <a:prstGeom prst="ellipse">
+            <a:avLst/>
+          </a:prstGeom>
+          <a:solidFill>
+            <a:srgbClr val="1E2761"/>
+          </a:solidFill>
+          <a:ln w="19050">
+            <a:solidFill>
+              <a:srgbClr val="2E75B6"/>
+            </a:solidFill>
+            <a:prstDash val="solid"/>
+          </a:ln>
+        </p:spPr>
+      </p:sp>
+      <p:sp>
+        <p:nvSpPr>
+          <p:cNvPr id="26" name="R2R2Main"/>
+          <p:cNvSpPr/>
+          <p:nvPr/>
+        </p:nvSpPr>
+        <p:spPr>
+          <a:xfrm>
+            <a:off x="2000000" y="2340000"/>
+            <a:ext cx="1650000" cy="430000"/>
+          </a:xfrm>
+          <a:prstGeom prst="ellipse">
+            <a:avLst/>
+          </a:prstGeom>
+          <a:solidFill>
+            <a:srgbClr val="1E2761"/>
+          </a:solidFill>
+          <a:ln w="25400">
+            <a:solidFill>
+              <a:srgbClr val="CADCFC"/>
+            </a:solidFill>
+            <a:prstDash val="solid"/>
+          </a:ln>
+        </p:spPr>
+        <p:txBody>
+          <a:bodyPr wrap="square" lIns="45720" tIns="45720" rIns="45720" bIns="45720" rtlCol="0" anchor="ctr"/>
+          <a:lstStyle/>
+          <a:p>
+            <a:pPr algn="ctr" indent="0" marL="0">
+              <a:buNone/>
+            </a:pPr>
+            <a:r>
+              <a:rPr lang="en-US" sz="900" b="1" dirty="0">
+                <a:solidFill>
+                  <a:srgbClr val="FFFFFF"/>
+                </a:solidFill>
+              </a:rPr>
+              <a:t>Radius to Rest</a:t>
+            </a:r>
+          </a:p>
+        </p:txBody>
+      </p:sp>
+      <p:sp>
+        <p:nvSpPr>
+          <p:cNvPr id="27" name="R2R3Shadow"/>
+          <p:cNvSpPr/>
+          <p:nvPr/>
+        </p:nvSpPr>
+        <p:spPr>
+          <a:xfrm>
+            <a:off x="3860000" y="2390000"/>
+            <a:ext cx="1650000" cy="430000"/>
+          </a:xfrm>
+          <a:prstGeom prst="ellipse">
+            <a:avLst/>
+          </a:prstGeom>
+          <a:solidFill>
+            <a:srgbClr val="1E2761"/>
+          </a:solidFill>
+          <a:ln w="19050">
+            <a:solidFill>
+              <a:srgbClr val="2E75B6"/>
+            </a:solidFill>
+            <a:prstDash val="solid"/>
+          </a:ln>
+        </p:spPr>
+      </p:sp>
+      <p:sp>
+        <p:nvSpPr>
+          <p:cNvPr id="28" name="R2R3Main"/>
+          <p:cNvSpPr/>
+          <p:nvPr/>
+        </p:nvSpPr>
+        <p:spPr>
+          <a:xfrm>
+            <a:off x="3800000" y="2340000"/>
+            <a:ext cx="1650000" cy="430000"/>
+          </a:xfrm>
+          <a:prstGeom prst="ellipse">
+            <a:avLst/>
+          </a:prstGeom>
+          <a:solidFill>
+            <a:srgbClr val="1E2761"/>
+          </a:solidFill>
+          <a:ln w="25400">
+            <a:solidFill>
+              <a:srgbClr val="CADCFC"/>
+            </a:solidFill>
+            <a:prstDash val="solid"/>
+          </a:ln>
+        </p:spPr>
+        <p:txBody>
+          <a:bodyPr wrap="square" lIns="45720" tIns="45720" rIns="45720" bIns="45720" rtlCol="0" anchor="ctr"/>
+          <a:lstStyle/>
+          <a:p>
+            <a:pPr algn="ctr" indent="0" marL="0">
+              <a:buNone/>
+            </a:pPr>
+            <a:r>
+              <a:rPr lang="en-US" sz="900" b="1" dirty="0">
+                <a:solidFill>
+                  <a:srgbClr val="FFFFFF"/>
+                </a:solidFill>
+              </a:rPr>
+              <a:t>Radius to Rest</a:t>
+            </a:r>
+          </a:p>
+        </p:txBody>
+      </p:sp>
+      <p:sp>
+        <p:nvSpPr>
+          <p:cNvPr id="29" name="R2R4Shadow"/>
+          <p:cNvSpPr/>
+          <p:nvPr/>
+        </p:nvSpPr>
+        <p:spPr>
+          <a:xfrm>
+            <a:off x="5610000" y="2390000"/>
+            <a:ext cx="1650000" cy="430000"/>
+          </a:xfrm>
+          <a:prstGeom prst="ellipse">
+            <a:avLst/>
+          </a:prstGeom>
+          <a:solidFill>
+            <a:srgbClr val="1E2761"/>
+          </a:solidFill>
+          <a:ln w="19050">
+            <a:solidFill>
+              <a:srgbClr val="2E75B6"/>
+            </a:solidFill>
+            <a:prstDash val="solid"/>
+          </a:ln>
+        </p:spPr>
+      </p:sp>
+      <p:sp>
+        <p:nvSpPr>
+          <p:cNvPr id="30" name="R2R4Main"/>
+          <p:cNvSpPr/>
+          <p:nvPr/>
+        </p:nvSpPr>
+        <p:spPr>
+          <a:xfrm>
+            <a:off x="5550000" y="2340000"/>
+            <a:ext cx="1650000" cy="430000"/>
+          </a:xfrm>
+          <a:prstGeom prst="ellipse">
+            <a:avLst/>
+          </a:prstGeom>
+          <a:solidFill>
+            <a:srgbClr val="1E2761"/>
+          </a:solidFill>
+          <a:ln w="25400">
+            <a:solidFill>
+              <a:srgbClr val="CADCFC"/>
+            </a:solidFill>
+            <a:prstDash val="solid"/>
+          </a:ln>
+        </p:spPr>
+        <p:txBody>
+          <a:bodyPr wrap="square" lIns="45720" tIns="45720" rIns="45720" bIns="45720" rtlCol="0" anchor="ctr"/>
+          <a:lstStyle/>
+          <a:p>
+            <a:pPr algn="ctr" indent="0" marL="0">
+              <a:buNone/>
+            </a:pPr>
+            <a:r>
+              <a:rPr lang="en-US" sz="900" b="1" dirty="0">
+                <a:solidFill>
+                  <a:srgbClr val="FFFFFF"/>
+                </a:solidFill>
+              </a:rPr>
+              <a:t>Radius to Rest</a:t>
+            </a:r>
+          </a:p>
+        </p:txBody>
+      </p:sp>
+      <p:sp>
+        <p:nvSpPr>
+          <p:cNvPr id="31" name="VArr_SMF1"/>
+          <p:cNvSpPr/>
+          <p:nvPr/>
+        </p:nvSpPr>
+        <p:spPr>
+          <a:xfrm>
+            <a:off x="975000" y="2770000"/>
+            <a:ext cx="0" cy="250000"/>
+          </a:xfrm>
+          <a:prstGeom prst="line">
+            <a:avLst/>
+          </a:prstGeom>
+          <a:noFill/>
+          <a:ln w="19050">
+            <a:solidFill>
+              <a:srgbClr val="2E75B6"/>
+            </a:solidFill>
+            <a:prstDash val="solid"/>
+            <a:headEnd type="arrow" w="sm" len="sm"/>
+            <a:tailEnd type="arrow" w="sm" len="sm"/>
+          </a:ln>
+        </p:spPr>
+      </p:sp>
+      <p:sp>
+        <p:nvSpPr>
+          <p:cNvPr id="32" name="VArr_SMF2"/>
+          <p:cNvSpPr/>
+          <p:nvPr/>
+        </p:nvSpPr>
+        <p:spPr>
+          <a:xfrm>
+            <a:off x="2825000" y="2770000"/>
+            <a:ext cx="0" cy="250000"/>
+          </a:xfrm>
+          <a:prstGeom prst="line">
+            <a:avLst/>
+          </a:prstGeom>
+          <a:noFill/>
+          <a:ln w="19050">
+            <a:solidFill>
+              <a:srgbClr val="2E75B6"/>
+            </a:solidFill>
+            <a:prstDash val="solid"/>
+            <a:headEnd type="arrow" w="sm" len="sm"/>
+            <a:tailEnd type="arrow" w="sm" len="sm"/>
+          </a:ln>
+        </p:spPr>
+      </p:sp>
+      <p:sp>
+        <p:nvSpPr>
+          <p:cNvPr id="33" name="VArr_SMF3"/>
+          <p:cNvSpPr/>
+          <p:nvPr/>
+        </p:nvSpPr>
+        <p:spPr>
+          <a:xfrm>
+            <a:off x="4625000" y="2770000"/>
+            <a:ext cx="0" cy="250000"/>
+          </a:xfrm>
+          <a:prstGeom prst="line">
+            <a:avLst/>
+          </a:prstGeom>
+          <a:noFill/>
+          <a:ln w="19050">
+            <a:solidFill>
+              <a:srgbClr val="2E75B6"/>
+            </a:solidFill>
+            <a:prstDash val="solid"/>
+            <a:headEnd type="arrow" w="sm" len="sm"/>
+            <a:tailEnd type="arrow" w="sm" len="sm"/>
+          </a:ln>
+        </p:spPr>
+      </p:sp>
+      <p:sp>
+        <p:nvSpPr>
+          <p:cNvPr id="34" name="VArr_SMF4"/>
+          <p:cNvSpPr/>
+          <p:nvPr/>
+        </p:nvSpPr>
+        <p:spPr>
+          <a:xfrm>
+            <a:off x="6375000" y="2770000"/>
+            <a:ext cx="0" cy="250000"/>
+          </a:xfrm>
+          <a:prstGeom prst="line">
+            <a:avLst/>
+          </a:prstGeom>
+          <a:noFill/>
+          <a:ln w="19050">
+            <a:solidFill>
+              <a:srgbClr val="2E75B6"/>
+            </a:solidFill>
+            <a:prstDash val="solid"/>
+            <a:headEnd type="arrow" w="sm" len="sm"/>
+            <a:tailEnd type="arrow" w="sm" len="sm"/>
+          </a:ln>
+        </p:spPr>
+      </p:sp>
+      <p:sp>
+        <p:nvSpPr>
+          <p:cNvPr id="35" name="SMF01"/>
+          <p:cNvSpPr/>
+          <p:nvPr/>
+        </p:nvSpPr>
+        <p:spPr>
+          <a:xfrm>
+            <a:off x="220000" y="3070000"/>
+            <a:ext cx="340000" cy="380000"/>
+          </a:xfrm>
+          <a:prstGeom prst="rect">
+            <a:avLst/>
+          </a:prstGeom>
+          <a:solidFill>
+            <a:srgbClr val="2E75B6"/>
+          </a:solidFill>
+          <a:ln w="12700">
+            <a:solidFill>
+              <a:srgbClr val="CADCFC"/>
+            </a:solidFill>
+            <a:prstDash val="solid"/>
+          </a:ln>
+        </p:spPr>
+        <p:txBody>
+          <a:bodyPr wrap="square" lIns="0" tIns="0" rIns="0" bIns="0" rtlCol="0" anchor="ctr"/>
+          <a:lstStyle/>
+          <a:p>
+            <a:pPr algn="ctr" indent="0" marL="0">
+              <a:buNone/>
+            </a:pPr>
+            <a:r>
+              <a:rPr lang="en-US" sz="900" b="1" dirty="0">
+                <a:solidFill>
+                  <a:srgbClr val="FFFFFF"/>
+                </a:solidFill>
+              </a:rPr>
+              <a:t>SMF</a:t>
+            </a:r>
+          </a:p>
+        </p:txBody>
+      </p:sp>
+      <p:sp>
+        <p:nvSpPr>
+          <p:cNvPr id="36" name="SMF02"/>
+          <p:cNvSpPr/>
+          <p:nvPr/>
+        </p:nvSpPr>
+        <p:spPr>
+          <a:xfrm>
+            <a:off x="610000" y="3070000"/>
+            <a:ext cx="340000" cy="380000"/>
+          </a:xfrm>
+          <a:prstGeom prst="rect">
+            <a:avLst/>
+          </a:prstGeom>
+          <a:solidFill>
+            <a:srgbClr val="2E75B6"/>
+          </a:solidFill>
+          <a:ln w="12700">
+            <a:solidFill>
+              <a:srgbClr val="CADCFC"/>
+            </a:solidFill>
+            <a:prstDash val="solid"/>
+          </a:ln>
+        </p:spPr>
+        <p:txBody>
+          <a:bodyPr wrap="square" lIns="0" tIns="0" rIns="0" bIns="0" rtlCol="0" anchor="ctr"/>
+          <a:lstStyle/>
+          <a:p>
+            <a:pPr algn="ctr" indent="0" marL="0">
+              <a:buNone/>
+            </a:pPr>
+            <a:r>
+              <a:rPr lang="en-US" sz="900" b="1" dirty="0">
+                <a:solidFill>
+                  <a:srgbClr val="FFFFFF"/>
+                </a:solidFill>
+              </a:rPr>
+              <a:t>SMF</a:t>
+            </a:r>
+          </a:p>
+        </p:txBody>
+      </p:sp>
+      <p:sp>
+        <p:nvSpPr>
+          <p:cNvPr id="37" name="SMF03"/>
+          <p:cNvSpPr/>
+          <p:nvPr/>
+        </p:nvSpPr>
+        <p:spPr>
+          <a:xfrm>
+            <a:off x="1000000" y="3070000"/>
+            <a:ext cx="340000" cy="380000"/>
+          </a:xfrm>
+          <a:prstGeom prst="rect">
+            <a:avLst/>
+          </a:prstGeom>
+          <a:solidFill>
+            <a:srgbClr val="2E75B6"/>
+          </a:solidFill>
+          <a:ln w="12700">
+            <a:solidFill>
+              <a:srgbClr val="CADCFC"/>
+            </a:solidFill>
+            <a:prstDash val="solid"/>
+          </a:ln>
+        </p:spPr>
+        <p:txBody>
+          <a:bodyPr wrap="square" lIns="0" tIns="0" rIns="0" bIns="0" rtlCol="0" anchor="ctr"/>
+          <a:lstStyle/>
+          <a:p>
+            <a:pPr algn="ctr" indent="0" marL="0">
+              <a:buNone/>
+            </a:pPr>
+            <a:r>
+              <a:rPr lang="en-US" sz="900" b="1" dirty="0">
+                <a:solidFill>
+                  <a:srgbClr val="FFFFFF"/>
+                </a:solidFill>
+              </a:rPr>
+              <a:t>SMF</a:t>
+            </a:r>
+          </a:p>
+        </p:txBody>
+      </p:sp>
+      <p:sp>
+        <p:nvSpPr>
+          <p:cNvPr id="38" name="SMF04"/>
+          <p:cNvSpPr/>
+          <p:nvPr/>
+        </p:nvSpPr>
+        <p:spPr>
+          <a:xfrm>
+            <a:off x="1390000" y="3070000"/>
+            <a:ext cx="340000" cy="380000"/>
+          </a:xfrm>
+          <a:prstGeom prst="rect">
+            <a:avLst/>
+          </a:prstGeom>
+          <a:solidFill>
+            <a:srgbClr val="2E75B6"/>
+          </a:solidFill>
+          <a:ln w="12700">
+            <a:solidFill>
+              <a:srgbClr val="CADCFC"/>
+            </a:solidFill>
+            <a:prstDash val="solid"/>
+          </a:ln>
+        </p:spPr>
+        <p:txBody>
+          <a:bodyPr wrap="square" lIns="0" tIns="0" rIns="0" bIns="0" rtlCol="0" anchor="ctr"/>
+          <a:lstStyle/>
+          <a:p>
+            <a:pPr algn="ctr" indent="0" marL="0">
+              <a:buNone/>
+            </a:pPr>
+            <a:r>
+              <a:rPr lang="en-US" sz="900" b="1" dirty="0">
+                <a:solidFill>
+                  <a:srgbClr val="FFFFFF"/>
+                </a:solidFill>
+              </a:rPr>
+              <a:t>SMF</a:t>
+            </a:r>
+          </a:p>
+        </p:txBody>
+      </p:sp>
+      <p:sp>
+        <p:nvSpPr>
+          <p:cNvPr id="39" name="SMF05"/>
+          <p:cNvSpPr/>
+          <p:nvPr/>
+        </p:nvSpPr>
+        <p:spPr>
+          <a:xfrm>
+            <a:off x="2070000" y="3070000"/>
+            <a:ext cx="340000" cy="380000"/>
+          </a:xfrm>
+          <a:prstGeom prst="rect">
+            <a:avLst/>
+          </a:prstGeom>
+          <a:solidFill>
+            <a:srgbClr val="2E75B6"/>
+          </a:solidFill>
+          <a:ln w="12700">
+            <a:solidFill>
+              <a:srgbClr val="CADCFC"/>
+            </a:solidFill>
+            <a:prstDash val="solid"/>
+          </a:ln>
+        </p:spPr>
+        <p:txBody>
+          <a:bodyPr wrap="square" lIns="0" tIns="0" rIns="0" bIns="0" rtlCol="0" anchor="ctr"/>
+          <a:lstStyle/>
+          <a:p>
+            <a:pPr algn="ctr" indent="0" marL="0">
+              <a:buNone/>
+            </a:pPr>
+            <a:r>
+              <a:rPr lang="en-US" sz="900" b="1" dirty="0">
+                <a:solidFill>
+                  <a:srgbClr val="FFFFFF"/>
+                </a:solidFill>
+              </a:rPr>
+              <a:t>SMF</a:t>
+            </a:r>
+          </a:p>
+        </p:txBody>
+      </p:sp>
+      <p:sp>
+        <p:nvSpPr>
+          <p:cNvPr id="40" name="SMF06"/>
+          <p:cNvSpPr/>
+          <p:nvPr/>
+        </p:nvSpPr>
+        <p:spPr>
+          <a:xfrm>
+            <a:off x="2460000" y="3070000"/>
+            <a:ext cx="340000" cy="380000"/>
+          </a:xfrm>
+          <a:prstGeom prst="rect">
+            <a:avLst/>
+          </a:prstGeom>
+          <a:solidFill>
+            <a:srgbClr val="2E75B6"/>
+          </a:solidFill>
+          <a:ln w="12700">
+            <a:solidFill>
+              <a:srgbClr val="CADCFC"/>
+            </a:solidFill>
+            <a:prstDash val="solid"/>
+          </a:ln>
+        </p:spPr>
+        <p:txBody>
+          <a:bodyPr wrap="square" lIns="0" tIns="0" rIns="0" bIns="0" rtlCol="0" anchor="ctr"/>
+          <a:lstStyle/>
+          <a:p>
+            <a:pPr algn="ctr" indent="0" marL="0">
+              <a:buNone/>
+            </a:pPr>
+            <a:r>
+              <a:rPr lang="en-US" sz="900" b="1" dirty="0">
+                <a:solidFill>
+                  <a:srgbClr val="FFFFFF"/>
+                </a:solidFill>
+              </a:rPr>
+              <a:t>SMF</a:t>
+            </a:r>
+          </a:p>
+        </p:txBody>
+      </p:sp>
+      <p:sp>
+        <p:nvSpPr>
+          <p:cNvPr id="41" name="SMF07"/>
+          <p:cNvSpPr/>
+          <p:nvPr/>
+        </p:nvSpPr>
+        <p:spPr>
+          <a:xfrm>
+            <a:off x="2850000" y="3070000"/>
+            <a:ext cx="340000" cy="380000"/>
+          </a:xfrm>
+          <a:prstGeom prst="rect">
+            <a:avLst/>
+          </a:prstGeom>
+          <a:solidFill>
+            <a:srgbClr val="2E75B6"/>
+          </a:solidFill>
+          <a:ln w="12700">
+            <a:solidFill>
+              <a:srgbClr val="CADCFC"/>
+            </a:solidFill>
+            <a:prstDash val="solid"/>
+          </a:ln>
+        </p:spPr>
+        <p:txBody>
+          <a:bodyPr wrap="square" lIns="0" tIns="0" rIns="0" bIns="0" rtlCol="0" anchor="ctr"/>
+          <a:lstStyle/>
+          <a:p>
+            <a:pPr algn="ctr" indent="0" marL="0">
+              <a:buNone/>
+            </a:pPr>
+            <a:r>
+              <a:rPr lang="en-US" sz="900" b="1" dirty="0">
+                <a:solidFill>
+                  <a:srgbClr val="FFFFFF"/>
+                </a:solidFill>
+              </a:rPr>
+              <a:t>SMF</a:t>
+            </a:r>
+          </a:p>
+        </p:txBody>
+      </p:sp>
+      <p:sp>
+        <p:nvSpPr>
+          <p:cNvPr id="42" name="SMF08"/>
+          <p:cNvSpPr/>
+          <p:nvPr/>
+        </p:nvSpPr>
+        <p:spPr>
+          <a:xfrm>
+            <a:off x="3240000" y="3070000"/>
+            <a:ext cx="340000" cy="380000"/>
+          </a:xfrm>
+          <a:prstGeom prst="rect">
+            <a:avLst/>
+          </a:prstGeom>
+          <a:solidFill>
+            <a:srgbClr val="2E75B6"/>
+          </a:solidFill>
+          <a:ln w="12700">
+            <a:solidFill>
+              <a:srgbClr val="CADCFC"/>
+            </a:solidFill>
+            <a:prstDash val="solid"/>
+          </a:ln>
+        </p:spPr>
+        <p:txBody>
+          <a:bodyPr wrap="square" lIns="0" tIns="0" rIns="0" bIns="0" rtlCol="0" anchor="ctr"/>
+          <a:lstStyle/>
+          <a:p>
+            <a:pPr algn="ctr" indent="0" marL="0">
+              <a:buNone/>
+            </a:pPr>
+            <a:r>
+              <a:rPr lang="en-US" sz="900" b="1" dirty="0">
+                <a:solidFill>
+                  <a:srgbClr val="FFFFFF"/>
+                </a:solidFill>
+              </a:rPr>
+              <a:t>SMF</a:t>
+            </a:r>
+          </a:p>
+        </p:txBody>
+      </p:sp>
+      <p:sp>
+        <p:nvSpPr>
+          <p:cNvPr id="43" name="SMF09"/>
+          <p:cNvSpPr/>
+          <p:nvPr/>
+        </p:nvSpPr>
+        <p:spPr>
+          <a:xfrm>
+            <a:off x="3870000" y="3070000"/>
+            <a:ext cx="340000" cy="380000"/>
+          </a:xfrm>
+          <a:prstGeom prst="rect">
+            <a:avLst/>
+          </a:prstGeom>
+          <a:solidFill>
+            <a:srgbClr val="2E75B6"/>
+          </a:solidFill>
+          <a:ln w="12700">
+            <a:solidFill>
+              <a:srgbClr val="CADCFC"/>
+            </a:solidFill>
+            <a:prstDash val="solid"/>
+          </a:ln>
+        </p:spPr>
+        <p:txBody>
+          <a:bodyPr wrap="square" lIns="0" tIns="0" rIns="0" bIns="0" rtlCol="0" anchor="ctr"/>
+          <a:lstStyle/>
+          <a:p>
+            <a:pPr algn="ctr" indent="0" marL="0">
+              <a:buNone/>
+            </a:pPr>
+            <a:r>
+              <a:rPr lang="en-US" sz="900" b="1" dirty="0">
+                <a:solidFill>
+                  <a:srgbClr val="FFFFFF"/>
+                </a:solidFill>
+              </a:rPr>
+              <a:t>SMF</a:t>
+            </a:r>
+          </a:p>
+        </p:txBody>
+      </p:sp>
+      <p:sp>
+        <p:nvSpPr>
+          <p:cNvPr id="44" name="SMF10"/>
+          <p:cNvSpPr/>
+          <p:nvPr/>
+        </p:nvSpPr>
+        <p:spPr>
+          <a:xfrm>
+            <a:off x="4260000" y="3070000"/>
+            <a:ext cx="340000" cy="380000"/>
+          </a:xfrm>
+          <a:prstGeom prst="rect">
+            <a:avLst/>
+          </a:prstGeom>
+          <a:solidFill>
+            <a:srgbClr val="2E75B6"/>
+          </a:solidFill>
+          <a:ln w="12700">
+            <a:solidFill>
+              <a:srgbClr val="CADCFC"/>
+            </a:solidFill>
+            <a:prstDash val="solid"/>
+          </a:ln>
+        </p:spPr>
+        <p:txBody>
+          <a:bodyPr wrap="square" lIns="0" tIns="0" rIns="0" bIns="0" rtlCol="0" anchor="ctr"/>
+          <a:lstStyle/>
+          <a:p>
+            <a:pPr algn="ctr" indent="0" marL="0">
+              <a:buNone/>
+            </a:pPr>
+            <a:r>
+              <a:rPr lang="en-US" sz="900" b="1" dirty="0">
+                <a:solidFill>
+                  <a:srgbClr val="FFFFFF"/>
+                </a:solidFill>
+              </a:rPr>
+              <a:t>SMF</a:t>
+            </a:r>
+          </a:p>
+        </p:txBody>
+      </p:sp>
+      <p:sp>
+        <p:nvSpPr>
+          <p:cNvPr id="45" name="SMF11"/>
+          <p:cNvSpPr/>
+          <p:nvPr/>
+        </p:nvSpPr>
+        <p:spPr>
+          <a:xfrm>
+            <a:off x="4650000" y="3070000"/>
+            <a:ext cx="340000" cy="380000"/>
+          </a:xfrm>
+          <a:prstGeom prst="rect">
+            <a:avLst/>
+          </a:prstGeom>
+          <a:solidFill>
+            <a:srgbClr val="2E75B6"/>
+          </a:solidFill>
+          <a:ln w="12700">
+            <a:solidFill>
+              <a:srgbClr val="CADCFC"/>
+            </a:solidFill>
+            <a:prstDash val="solid"/>
+          </a:ln>
+        </p:spPr>
+        <p:txBody>
+          <a:bodyPr wrap="square" lIns="0" tIns="0" rIns="0" bIns="0" rtlCol="0" anchor="ctr"/>
+          <a:lstStyle/>
+          <a:p>
+            <a:pPr algn="ctr" indent="0" marL="0">
+              <a:buNone/>
+            </a:pPr>
+            <a:r>
+              <a:rPr lang="en-US" sz="900" b="1" dirty="0">
+                <a:solidFill>
+                  <a:srgbClr val="FFFFFF"/>
+                </a:solidFill>
+              </a:rPr>
+              <a:t>SMF</a:t>
+            </a:r>
+          </a:p>
+        </p:txBody>
+      </p:sp>
+      <p:sp>
+        <p:nvSpPr>
+          <p:cNvPr id="46" name="SMF12"/>
+          <p:cNvSpPr/>
+          <p:nvPr/>
+        </p:nvSpPr>
+        <p:spPr>
+          <a:xfrm>
+            <a:off x="5040000" y="3070000"/>
+            <a:ext cx="340000" cy="380000"/>
+          </a:xfrm>
+          <a:prstGeom prst="rect">
+            <a:avLst/>
+          </a:prstGeom>
+          <a:solidFill>
+            <a:srgbClr val="2E75B6"/>
+          </a:solidFill>
+          <a:ln w="12700">
+            <a:solidFill>
+              <a:srgbClr val="CADCFC"/>
+            </a:solidFill>
+            <a:prstDash val="solid"/>
+          </a:ln>
+        </p:spPr>
+        <p:txBody>
+          <a:bodyPr wrap="square" lIns="0" tIns="0" rIns="0" bIns="0" rtlCol="0" anchor="ctr"/>
+          <a:lstStyle/>
+          <a:p>
+            <a:pPr algn="ctr" indent="0" marL="0">
+              <a:buNone/>
+            </a:pPr>
+            <a:r>
+              <a:rPr lang="en-US" sz="900" b="1" dirty="0">
+                <a:solidFill>
+                  <a:srgbClr val="FFFFFF"/>
+                </a:solidFill>
+              </a:rPr>
+              <a:t>SMF</a:t>
+            </a:r>
+          </a:p>
+        </p:txBody>
+      </p:sp>
+      <p:sp>
+        <p:nvSpPr>
+          <p:cNvPr id="47" name="SMF13"/>
+          <p:cNvSpPr/>
+          <p:nvPr/>
+        </p:nvSpPr>
+        <p:spPr>
+          <a:xfrm>
+            <a:off x="5700000" y="3070000"/>
+            <a:ext cx="340000" cy="380000"/>
+          </a:xfrm>
+          <a:prstGeom prst="rect">
+            <a:avLst/>
+          </a:prstGeom>
+          <a:solidFill>
+            <a:srgbClr val="2E75B6"/>
+          </a:solidFill>
+          <a:ln w="12700">
+            <a:solidFill>
+              <a:srgbClr val="CADCFC"/>
+            </a:solidFill>
+            <a:prstDash val="solid"/>
+          </a:ln>
+        </p:spPr>
+        <p:txBody>
+          <a:bodyPr wrap="square" lIns="0" tIns="0" rIns="0" bIns="0" rtlCol="0" anchor="ctr"/>
+          <a:lstStyle/>
+          <a:p>
+            <a:pPr algn="ctr" indent="0" marL="0">
+              <a:buNone/>
+            </a:pPr>
+            <a:r>
+              <a:rPr lang="en-US" sz="900" b="1" dirty="0">
+                <a:solidFill>
+                  <a:srgbClr val="FFFFFF"/>
+                </a:solidFill>
+              </a:rPr>
+              <a:t>SMF</a:t>
+            </a:r>
+          </a:p>
+        </p:txBody>
+      </p:sp>
+      <p:sp>
+        <p:nvSpPr>
+          <p:cNvPr id="48" name="SMF14"/>
+          <p:cNvSpPr/>
+          <p:nvPr/>
+        </p:nvSpPr>
+        <p:spPr>
+          <a:xfrm>
+            <a:off x="6090000" y="3070000"/>
+            <a:ext cx="340000" cy="380000"/>
+          </a:xfrm>
+          <a:prstGeom prst="rect">
+            <a:avLst/>
+          </a:prstGeom>
+          <a:solidFill>
+            <a:srgbClr val="2E75B6"/>
+          </a:solidFill>
+          <a:ln w="12700">
+            <a:solidFill>
+              <a:srgbClr val="CADCFC"/>
+            </a:solidFill>
+            <a:prstDash val="solid"/>
+          </a:ln>
+        </p:spPr>
+        <p:txBody>
+          <a:bodyPr wrap="square" lIns="0" tIns="0" rIns="0" bIns="0" rtlCol="0" anchor="ctr"/>
+          <a:lstStyle/>
+          <a:p>
+            <a:pPr algn="ctr" indent="0" marL="0">
+              <a:buNone/>
+            </a:pPr>
+            <a:r>
+              <a:rPr lang="en-US" sz="900" b="1" dirty="0">
+                <a:solidFill>
+                  <a:srgbClr val="FFFFFF"/>
+                </a:solidFill>
+              </a:rPr>
+              <a:t>SMF</a:t>
+            </a:r>
+          </a:p>
+        </p:txBody>
+      </p:sp>
+      <p:sp>
+        <p:nvSpPr>
+          <p:cNvPr id="49" name="SMF15"/>
+          <p:cNvSpPr/>
+          <p:nvPr/>
+        </p:nvSpPr>
+        <p:spPr>
+          <a:xfrm>
+            <a:off x="6480000" y="3070000"/>
+            <a:ext cx="340000" cy="380000"/>
+          </a:xfrm>
+          <a:prstGeom prst="rect">
+            <a:avLst/>
+          </a:prstGeom>
+          <a:solidFill>
+            <a:srgbClr val="2E75B6"/>
+          </a:solidFill>
+          <a:ln w="12700">
+            <a:solidFill>
+              <a:srgbClr val="CADCFC"/>
+            </a:solidFill>
+            <a:prstDash val="solid"/>
+          </a:ln>
+        </p:spPr>
+        <p:txBody>
+          <a:bodyPr wrap="square" lIns="0" tIns="0" rIns="0" bIns="0" rtlCol="0" anchor="ctr"/>
+          <a:lstStyle/>
+          <a:p>
+            <a:pPr algn="ctr" indent="0" marL="0">
+              <a:buNone/>
+            </a:pPr>
+            <a:r>
+              <a:rPr lang="en-US" sz="900" b="1" dirty="0">
+                <a:solidFill>
+                  <a:srgbClr val="FFFFFF"/>
+                </a:solidFill>
+              </a:rPr>
+              <a:t>SMF</a:t>
+            </a:r>
+          </a:p>
+        </p:txBody>
+      </p:sp>
+      <p:sp>
+        <p:nvSpPr>
+          <p:cNvPr id="50" name="QAAutomation"/>
+          <p:cNvSpPr/>
+          <p:nvPr/>
+        </p:nvSpPr>
+        <p:spPr>
+          <a:xfrm>
+            <a:off x="7250000" y="3070000"/>
+            <a:ext cx="1700000" cy="380000"/>
+          </a:xfrm>
+          <a:prstGeom prst="rect">
+            <a:avLst/>
+          </a:prstGeom>
+          <a:solidFill>
+            <a:srgbClr val="00B050"/>
+          </a:solidFill>
+          <a:ln w="19050">
+            <a:solidFill>
+              <a:srgbClr val="FFFFFF"/>
+            </a:solidFill>
+            <a:prstDash val="solid"/>
+          </a:ln>
+        </p:spPr>
+        <p:txBody>
+          <a:bodyPr wrap="square" lIns="45720" tIns="0" rIns="45720" bIns="0" rtlCol="0" anchor="ctr"/>
+          <a:lstStyle/>
+          <a:p>
+            <a:pPr algn="ctr" indent="0" marL="0">
+              <a:buNone/>
+            </a:pPr>
+            <a:r>
+              <a:rPr lang="en-US" sz="900" b="1" dirty="0">
+                <a:solidFill>
+                  <a:srgbClr val="FFFFFF"/>
+                </a:solidFill>
+              </a:rPr>
+              <a:t>QA Automation</a:t>
+            </a:r>
+          </a:p>
+        </p:txBody>
+      </p:sp>
+    </p:spTree>
+  </p:cSld>
+  <p:clrMapOvr>
+    <a:masterClrMapping/>
+  </p:clrMapOvr>
+</p:sld>
+</file>
+
+<file path=ppt/slides/slide17.xml><?xml version="1.0" encoding="utf-8"?>
+<p:sld xmlns:a="http://schemas.openxmlformats.org/drawingml/2006/main" xmlns:r="http://schemas.openxmlformats.org/officeDocument/2006/relationships" xmlns:p="http://schemas.openxmlformats.org/presentationml/2006/main">
+  <p:cSld name="Slide 17">
+    <p:bg>
+      <p:bgPr>
+        <a:solidFill>
+          <a:srgbClr val="EEF3FB"/>
+        </a:solidFill>
+      </p:bgPr>
+    </p:bg>
+    <p:spTree>
+      <p:nvGrpSpPr>
+        <p:cNvPr id="1" name=""/>
+        <p:cNvGrpSpPr/>
+        <p:nvPr/>
+      </p:nvGrpSpPr>
+      <p:grpSpPr>
+        <a:xfrm>
+          <a:off x="0" y="0"/>
+          <a:ext cx="0" cy="0"/>
+          <a:chOff x="0" y="0"/>
+          <a:chExt cx="0" cy="0"/>
+        </a:xfrm>
+      </p:grpSpPr>
+      <p:sp>
+        <p:nvSpPr>
+          <p:cNvPr id="2" name="Shape 0"/>
+          <p:cNvSpPr/>
+          <p:nvPr/>
+        </p:nvSpPr>
+        <p:spPr>
+          <a:xfrm>
+            <a:off x="0" y="0"/>
+            <a:ext cx="9144000" cy="560000"/>
+          </a:xfrm>
+          <a:prstGeom prst="rect">
+            <a:avLst/>
+          </a:prstGeom>
+          <a:solidFill>
+            <a:srgbClr val="1E2761"/>
+          </a:solidFill>
+          <a:ln w="12700">
+            <a:solidFill>
+              <a:srgbClr val="1E2761"/>
+            </a:solidFill>
+            <a:prstDash val="solid"/>
+          </a:ln>
+        </p:spPr>
+      </p:sp>
+      <p:sp>
+        <p:nvSpPr>
+          <p:cNvPr id="3" name="Text 1"/>
+          <p:cNvSpPr/>
+          <p:nvPr/>
+        </p:nvSpPr>
+        <p:spPr>
+          <a:xfrm>
+            <a:off x="365760" y="0"/>
+            <a:ext cx="8412480" cy="560000"/>
+          </a:xfrm>
+          <a:prstGeom prst="rect">
+            <a:avLst/>
+          </a:prstGeom>
+          <a:noFill/>
+          <a:ln/>
+        </p:spPr>
+        <p:txBody>
+          <a:bodyPr wrap="square" lIns="0" tIns="0" rIns="0" bIns="0" rtlCol="0" anchor="ctr"/>
+          <a:lstStyle/>
+          <a:p>
+            <a:pPr indent="0" marL="0">
+              <a:buNone/>
+            </a:pPr>
+            <a:r>
+              <a:rPr lang="en-US" sz="2200" b="1" dirty="0">
+                <a:solidFill>
+                  <a:srgbClr val="FFFFFF"/>
+                </a:solidFill>
+              </a:rPr>
+              <a:t>Key Platform Capabilities</a:t>
+            </a:r>
+          </a:p>
+        </p:txBody>
+      </p:sp>
+      <p:sp>
+        <p:nvSpPr>
+          <p:cNvPr id="4" name="Divider"/>
+          <p:cNvSpPr/>
+          <p:nvPr/>
+        </p:nvSpPr>
+        <p:spPr>
+          <a:xfrm>
+            <a:off x="4520000" y="620000"/>
+            <a:ext cx="0" cy="4380000"/>
+          </a:xfrm>
+          <a:prstGeom prst="line">
+            <a:avLst/>
+          </a:prstGeom>
+          <a:noFill/>
+          <a:ln w="12700">
+            <a:solidFill>
+              <a:srgbClr val="CADCFC"/>
+            </a:solidFill>
+            <a:prstDash val="solid"/>
+          </a:ln>
+        </p:spPr>
+      </p:sp>
+      <p:sp>
+        <p:nvSpPr>
+          <p:cNvPr id="5" name="Item1"/>
+          <p:cNvSpPr/>
+          <p:nvPr/>
+        </p:nvSpPr>
+        <p:spPr>
+          <a:xfrm>
+            <a:off x="160000" y="620000"/>
+            <a:ext cx="4280000" cy="580000"/>
+          </a:xfrm>
+          <a:prstGeom prst="rect">
+            <a:avLst/>
+          </a:prstGeom>
+          <a:noFill/>
+          <a:ln/>
+        </p:spPr>
+        <p:txBody>
+          <a:bodyPr wrap="square" lIns="91440" tIns="45720" rIns="91440" bIns="45720" rtlCol="0" anchor="t"/>
+          <a:lstStyle/>
+          <a:p>
+            <a:pPr indent="0" marL="0">
+              <a:buNone/>
+              <a:spcAft>
+                <a:spcPts val="0"/>
+              </a:spcAft>
+            </a:pPr>
+            <a:r>
+              <a:rPr lang="en-US" sz="1100" b="1" dirty="0">
+                <a:solidFill>
+                  <a:srgbClr val="F5A623"/>
+                </a:solidFill>
+              </a:rPr>
+              <a:t xml:space="preserve">01  </a:t>
+            </a:r>
+            <a:r>
+              <a:rPr lang="en-US" sz="1100" b="1" dirty="0">
+                <a:solidFill>
+                  <a:srgbClr val="1E2761"/>
+                </a:solidFill>
+              </a:rPr>
+              <a:t>One Platform for All Donors</a:t>
+            </a:r>
+          </a:p>
+          <a:p>
+            <a:pPr indent="0" marL="457200">
+              <a:buNone/>
+              <a:spcAft>
+                <a:spcPts val="0"/>
+              </a:spcAft>
+            </a:pPr>
+            <a:r>
+              <a:rPr lang="en-US" sz="950" dirty="0">
+                <a:solidFill>
+                  <a:srgbClr val="3C4D6B"/>
+                </a:solidFill>
+              </a:rPr>
+              <a:t>Single system manages all subscriber profiles across all donors and networks</a:t>
+            </a:r>
+          </a:p>
+        </p:txBody>
+      </p:sp>
+      <p:sp>
+        <p:nvSpPr>
+          <p:cNvPr id="6" name="Item2"/>
+          <p:cNvSpPr/>
+          <p:nvPr/>
+        </p:nvSpPr>
+        <p:spPr>
+          <a:xfrm>
+            <a:off x="160000" y="1210000"/>
+            <a:ext cx="4280000" cy="580000"/>
+          </a:xfrm>
+          <a:prstGeom prst="rect">
+            <a:avLst/>
+          </a:prstGeom>
+          <a:noFill/>
+          <a:ln/>
+        </p:spPr>
+        <p:txBody>
+          <a:bodyPr wrap="square" lIns="91440" tIns="45720" rIns="91440" bIns="45720" rtlCol="0" anchor="t"/>
+          <a:lstStyle/>
+          <a:p>
+            <a:pPr indent="0" marL="0">
+              <a:buNone/>
+              <a:spcAft>
+                <a:spcPts val="0"/>
+              </a:spcAft>
+            </a:pPr>
+            <a:r>
+              <a:rPr lang="en-US" sz="1100" b="1" dirty="0">
+                <a:solidFill>
+                  <a:srgbClr val="F5A623"/>
+                </a:solidFill>
+              </a:rPr>
+              <a:t xml:space="preserve">02  </a:t>
+            </a:r>
+            <a:r>
+              <a:rPr lang="en-US" sz="1100" b="1" dirty="0">
+                <a:solidFill>
+                  <a:srgbClr val="1E2761"/>
+                </a:solidFill>
+              </a:rPr>
+              <a:t>Horizontal Scale-Out Capabilities</a:t>
+            </a:r>
+          </a:p>
+          <a:p>
+            <a:pPr indent="0" marL="457200">
+              <a:buNone/>
+              <a:spcAft>
+                <a:spcPts val="0"/>
+              </a:spcAft>
+            </a:pPr>
+            <a:r>
+              <a:rPr lang="en-US" sz="950" dirty="0">
+                <a:solidFill>
+                  <a:srgbClr val="3C4D6B"/>
+                </a:solidFill>
+              </a:rPr>
+              <a:t>Add Lookup / API replicas with zero config changes; scales to millions of daily requests</a:t>
+            </a:r>
+          </a:p>
+        </p:txBody>
+      </p:sp>
+      <p:sp>
+        <p:nvSpPr>
+          <p:cNvPr id="7" name="Item3"/>
+          <p:cNvSpPr/>
+          <p:nvPr/>
+        </p:nvSpPr>
+        <p:spPr>
+          <a:xfrm>
+            <a:off x="160000" y="1800000"/>
+            <a:ext cx="4280000" cy="580000"/>
+          </a:xfrm>
+          <a:prstGeom prst="rect">
+            <a:avLst/>
+          </a:prstGeom>
+          <a:noFill/>
+          <a:ln/>
+        </p:spPr>
+        <p:txBody>
+          <a:bodyPr wrap="square" lIns="91440" tIns="45720" rIns="91440" bIns="45720" rtlCol="0" anchor="t"/>
+          <a:lstStyle/>
+          <a:p>
+            <a:pPr indent="0" marL="0">
+              <a:buNone/>
+              <a:spcAft>
+                <a:spcPts val="0"/>
+              </a:spcAft>
+            </a:pPr>
+            <a:r>
+              <a:rPr lang="en-US" sz="1100" b="1" dirty="0">
+                <a:solidFill>
+                  <a:srgbClr val="F5A623"/>
+                </a:solidFill>
+              </a:rPr>
+              <a:t xml:space="preserve">03  </a:t>
+            </a:r>
+            <a:r>
+              <a:rPr lang="en-US" sz="1100" b="1" dirty="0">
+                <a:solidFill>
+                  <a:srgbClr val="1E2761"/>
+                </a:solidFill>
+              </a:rPr>
+              <a:t>One UI for All</a:t>
+            </a:r>
+          </a:p>
+          <a:p>
+            <a:pPr indent="0" marL="457200">
+              <a:buNone/>
+              <a:spcAft>
+                <a:spcPts val="0"/>
+              </a:spcAft>
+            </a:pPr>
+            <a:r>
+              <a:rPr lang="en-US" sz="950" dirty="0">
+                <a:solidFill>
+                  <a:srgbClr val="3C4D6B"/>
+                </a:solidFill>
+              </a:rPr>
+              <a:t>Unified management portal for subscriber, pool, range-config, and bulk-job management</a:t>
+            </a:r>
+          </a:p>
+        </p:txBody>
+      </p:sp>
+      <p:sp>
+        <p:nvSpPr>
+          <p:cNvPr id="8" name="Item4"/>
+          <p:cNvSpPr/>
+          <p:nvPr/>
+        </p:nvSpPr>
+        <p:spPr>
+          <a:xfrm>
+            <a:off x="160000" y="2390000"/>
+            <a:ext cx="4280000" cy="580000"/>
+          </a:xfrm>
+          <a:prstGeom prst="rect">
+            <a:avLst/>
+          </a:prstGeom>
+          <a:noFill/>
+          <a:ln/>
+        </p:spPr>
+        <p:txBody>
+          <a:bodyPr wrap="square" lIns="91440" tIns="45720" rIns="91440" bIns="45720" rtlCol="0" anchor="t"/>
+          <a:lstStyle/>
+          <a:p>
+            <a:pPr indent="0" marL="0">
+              <a:buNone/>
+              <a:spcAft>
+                <a:spcPts val="0"/>
+              </a:spcAft>
+            </a:pPr>
+            <a:r>
+              <a:rPr lang="en-US" sz="1100" b="1" dirty="0">
+                <a:solidFill>
+                  <a:srgbClr val="F5A623"/>
+                </a:solidFill>
+              </a:rPr>
+              <a:t xml:space="preserve">04  </a:t>
+            </a:r>
+            <a:r>
+              <a:rPr lang="en-US" sz="1100" b="1" dirty="0">
+                <a:solidFill>
+                  <a:srgbClr val="1E2761"/>
+                </a:solidFill>
+              </a:rPr>
+              <a:t>Deployable on OCI or On-Premises</a:t>
+            </a:r>
+          </a:p>
+          <a:p>
+            <a:pPr indent="0" marL="457200">
+              <a:buNone/>
+              <a:spcAft>
+                <a:spcPts val="0"/>
+              </a:spcAft>
+            </a:pPr>
+            <a:r>
+              <a:rPr lang="en-US" sz="950" dirty="0">
+                <a:solidFill>
+                  <a:srgbClr val="3C4D6B"/>
+                </a:solidFill>
+              </a:rPr>
+              <a:t>Helm-based; runs on OCI Kubernetes, on-premises clusters, or local k3d/k8s</a:t>
+            </a:r>
+          </a:p>
+        </p:txBody>
+      </p:sp>
+      <p:sp>
+        <p:nvSpPr>
+          <p:cNvPr id="9" name="Item5"/>
+          <p:cNvSpPr/>
+          <p:nvPr/>
+        </p:nvSpPr>
+        <p:spPr>
+          <a:xfrm>
+            <a:off x="160000" y="2980000"/>
+            <a:ext cx="4280000" cy="860000"/>
+          </a:xfrm>
+          <a:prstGeom prst="rect">
+            <a:avLst/>
+          </a:prstGeom>
+          <a:noFill/>
+          <a:ln/>
+        </p:spPr>
+        <p:txBody>
+          <a:bodyPr wrap="square" lIns="91440" tIns="45720" rIns="91440" bIns="45720" rtlCol="0" anchor="t"/>
+          <a:lstStyle/>
+          <a:p>
+            <a:pPr indent="0" marL="0">
+              <a:buNone/>
+              <a:spcAft>
+                <a:spcPts val="0"/>
+              </a:spcAft>
+            </a:pPr>
+            <a:r>
+              <a:rPr lang="en-US" sz="1100" b="1" dirty="0">
+                <a:solidFill>
+                  <a:srgbClr val="F5A623"/>
+                </a:solidFill>
+              </a:rPr>
+              <a:t xml:space="preserve">05  </a:t>
+            </a:r>
+            <a:r>
+              <a:rPr lang="en-US" sz="1100" b="1" dirty="0">
+                <a:solidFill>
+                  <a:srgbClr val="1E2761"/>
+                </a:solidFill>
+              </a:rPr>
+              <a:t>200+ Regression Tests</a:t>
+            </a:r>
+          </a:p>
+          <a:p>
+            <a:pPr indent="0" marL="457200">
+              <a:buNone/>
+              <a:spcAft>
+                <a:spcPts val="0"/>
+              </a:spcAft>
+            </a:pPr>
+            <a:r>
+              <a:rPr lang="en-US" sz="900" dirty="0">
+                <a:solidFill>
+                  <a:srgbClr val="3C4D6B"/>
+                </a:solidFill>
+              </a:rPr>
+              <a:t>a)  Runs on K8s CI; deployable as dedicated pod on pre-production environment</a:t>
+            </a:r>
+          </a:p>
+          <a:p>
+            <a:pPr indent="0" marL="457200">
+              <a:buNone/>
+              <a:spcAft>
+                <a:spcPts val="0"/>
+              </a:spcAft>
+            </a:pPr>
+            <a:r>
+              <a:rPr lang="en-US" sz="900" dirty="0">
+                <a:solidFill>
+                  <a:srgbClr val="3C4D6B"/>
+                </a:solidFill>
+              </a:rPr>
+              <a:t>b)  CPU &amp; RAM requirements documented per container image</a:t>
+            </a:r>
+          </a:p>
+        </p:txBody>
+      </p:sp>
+      <p:sp>
+        <p:nvSpPr>
+          <p:cNvPr id="10" name="Item6"/>
+          <p:cNvSpPr/>
+          <p:nvPr/>
+        </p:nvSpPr>
+        <p:spPr>
+          <a:xfrm>
+            <a:off x="160000" y="3850000"/>
+            <a:ext cx="4280000" cy="580000"/>
+          </a:xfrm>
+          <a:prstGeom prst="rect">
+            <a:avLst/>
+          </a:prstGeom>
+          <a:noFill/>
+          <a:ln/>
+        </p:spPr>
+        <p:txBody>
+          <a:bodyPr wrap="square" lIns="91440" tIns="45720" rIns="91440" bIns="45720" rtlCol="0" anchor="t"/>
+          <a:lstStyle/>
+          <a:p>
+            <a:pPr indent="0" marL="0">
+              <a:buNone/>
+              <a:spcAft>
+                <a:spcPts val="0"/>
+              </a:spcAft>
+            </a:pPr>
+            <a:r>
+              <a:rPr lang="en-US" sz="1100" b="1" dirty="0">
+                <a:solidFill>
+                  <a:srgbClr val="F5A623"/>
+                </a:solidFill>
+              </a:rPr>
+              <a:t xml:space="preserve">06  </a:t>
+            </a:r>
+            <a:r>
+              <a:rPr lang="en-US" sz="1100" b="1" dirty="0">
+                <a:solidFill>
+                  <a:srgbClr val="1E2761"/>
+                </a:solidFill>
+              </a:rPr>
+              <a:t>Dedicated Load-Test Pod</a:t>
+            </a:r>
+          </a:p>
+          <a:p>
+            <a:pPr indent="0" marL="457200">
+              <a:buNone/>
+              <a:spcAft>
+                <a:spcPts val="0"/>
+              </a:spcAft>
+            </a:pPr>
+            <a:r>
+              <a:rPr lang="en-US" sz="950" dirty="0">
+                <a:solidFill>
+                  <a:srgbClr val="3C4D6B"/>
+                </a:solidFill>
+              </a:rPr>
+              <a:t>Isolated performance-testing workload with configurable concurrency and traffic targets</a:t>
+            </a:r>
+          </a:p>
+        </p:txBody>
+      </p:sp>
+      <p:sp>
+        <p:nvSpPr>
+          <p:cNvPr id="11" name="Item7"/>
+          <p:cNvSpPr/>
+          <p:nvPr/>
+        </p:nvSpPr>
+        <p:spPr>
+          <a:xfrm>
+            <a:off x="4700000" y="620000"/>
+            <a:ext cx="4300000" cy="580000"/>
+          </a:xfrm>
+          <a:prstGeom prst="rect">
+            <a:avLst/>
+          </a:prstGeom>
+          <a:noFill/>
+          <a:ln/>
+        </p:spPr>
+        <p:txBody>
+          <a:bodyPr wrap="square" lIns="91440" tIns="45720" rIns="91440" bIns="45720" rtlCol="0" anchor="t"/>
+          <a:lstStyle/>
+          <a:p>
+            <a:pPr indent="0" marL="0">
+              <a:buNone/>
+              <a:spcAft>
+                <a:spcPts val="0"/>
+              </a:spcAft>
+            </a:pPr>
+            <a:r>
+              <a:rPr lang="en-US" sz="1100" b="1" dirty="0">
+                <a:solidFill>
+                  <a:srgbClr val="F5A623"/>
+                </a:solidFill>
+              </a:rPr>
+              <a:t xml:space="preserve">07  </a:t>
+            </a:r>
+            <a:r>
+              <a:rPr lang="en-US" sz="1100" b="1" dirty="0">
+                <a:solidFill>
+                  <a:srgbClr val="1E2761"/>
+                </a:solidFill>
+              </a:rPr>
+              <a:t>IP Pool Management by Routing Domain</a:t>
+            </a:r>
+          </a:p>
+          <a:p>
+            <a:pPr indent="0" marL="457200">
+              <a:buNone/>
+              <a:spcAft>
+                <a:spcPts val="0"/>
+              </a:spcAft>
+            </a:pPr>
+            <a:r>
+              <a:rPr lang="en-US" sz="950" dirty="0">
+                <a:solidFill>
+                  <a:srgbClr val="3C4D6B"/>
+                </a:solidFill>
+              </a:rPr>
+              <a:t>Per-APN and per-domain pools with race-safe SKIP LOCKED allocation</a:t>
+            </a:r>
+          </a:p>
+        </p:txBody>
+      </p:sp>
+      <p:sp>
+        <p:nvSpPr>
+          <p:cNvPr id="12" name="Item8"/>
+          <p:cNvSpPr/>
+          <p:nvPr/>
+        </p:nvSpPr>
+        <p:spPr>
+          <a:xfrm>
+            <a:off x="4700000" y="1310000"/>
+            <a:ext cx="4300000" cy="580000"/>
+          </a:xfrm>
+          <a:prstGeom prst="rect">
+            <a:avLst/>
+          </a:prstGeom>
+          <a:noFill/>
+          <a:ln/>
+        </p:spPr>
+        <p:txBody>
+          <a:bodyPr wrap="square" lIns="91440" tIns="45720" rIns="91440" bIns="45720" rtlCol="0" anchor="t"/>
+          <a:lstStyle/>
+          <a:p>
+            <a:pPr indent="0" marL="0">
+              <a:buNone/>
+              <a:spcAft>
+                <a:spcPts val="0"/>
+              </a:spcAft>
+            </a:pPr>
+            <a:r>
+              <a:rPr lang="en-US" sz="1100" b="1" dirty="0">
+                <a:solidFill>
+                  <a:srgbClr val="F5A623"/>
+                </a:solidFill>
+              </a:rPr>
+              <a:t xml:space="preserve">08  </a:t>
+            </a:r>
+            <a:r>
+              <a:rPr lang="en-US" sz="1100" b="1" dirty="0">
+                <a:solidFill>
+                  <a:srgbClr val="1E2761"/>
+                </a:solidFill>
+              </a:rPr>
+              <a:t>Native Prometheus Integration</a:t>
+            </a:r>
+          </a:p>
+          <a:p>
+            <a:pPr indent="0" marL="457200">
+              <a:buNone/>
+              <a:spcAft>
+                <a:spcPts val="0"/>
+              </a:spcAft>
+            </a:pPr>
+            <a:r>
+              <a:rPr lang="en-US" sz="950" dirty="0">
+                <a:solidFill>
+                  <a:srgbClr val="3C4D6B"/>
+                </a:solidFill>
+              </a:rPr>
+              <a:t>Metrics scraped natively from all services; no adapters or sidecars required</a:t>
+            </a:r>
+          </a:p>
+        </p:txBody>
+      </p:sp>
+      <p:sp>
+        <p:nvSpPr>
+          <p:cNvPr id="13" name="Item9"/>
+          <p:cNvSpPr/>
+          <p:nvPr/>
+        </p:nvSpPr>
+        <p:spPr>
+          <a:xfrm>
+            <a:off x="4700000" y="2000000"/>
+            <a:ext cx="4300000" cy="580000"/>
+          </a:xfrm>
+          <a:prstGeom prst="rect">
+            <a:avLst/>
+          </a:prstGeom>
+          <a:noFill/>
+          <a:ln/>
+        </p:spPr>
+        <p:txBody>
+          <a:bodyPr wrap="square" lIns="91440" tIns="45720" rIns="91440" bIns="45720" rtlCol="0" anchor="t"/>
+          <a:lstStyle/>
+          <a:p>
+            <a:pPr indent="0" marL="0">
+              <a:buNone/>
+              <a:spcAft>
+                <a:spcPts val="0"/>
+              </a:spcAft>
+            </a:pPr>
+            <a:r>
+              <a:rPr lang="en-US" sz="1100" b="1" dirty="0">
+                <a:solidFill>
+                  <a:srgbClr val="F5A623"/>
+                </a:solidFill>
+              </a:rPr>
+              <a:t xml:space="preserve">09  </a:t>
+            </a:r>
+            <a:r>
+              <a:rPr lang="en-US" sz="1100" b="1" dirty="0">
+                <a:solidFill>
+                  <a:srgbClr val="1E2761"/>
+                </a:solidFill>
+              </a:rPr>
+              <a:t>Out-of-the-Box Prometheus Alerting</a:t>
+            </a:r>
+          </a:p>
+          <a:p>
+            <a:pPr indent="0" marL="457200">
+              <a:buNone/>
+              <a:spcAft>
+                <a:spcPts val="0"/>
+              </a:spcAft>
+            </a:pPr>
+            <a:r>
+              <a:rPr lang="en-US" sz="950" dirty="0">
+                <a:solidFill>
+                  <a:srgbClr val="3C4D6B"/>
+                </a:solidFill>
+              </a:rPr>
+              <a:t>Pre-built alert rules for p99 SLA breach, pool exhaustion, and DB health</a:t>
+            </a:r>
+          </a:p>
+        </p:txBody>
+      </p:sp>
+      <p:sp>
+        <p:nvSpPr>
+          <p:cNvPr id="14" name="Item10"/>
+          <p:cNvSpPr/>
+          <p:nvPr/>
+        </p:nvSpPr>
+        <p:spPr>
+          <a:xfrm>
+            <a:off x="4700000" y="2690000"/>
+            <a:ext cx="4300000" cy="580000"/>
+          </a:xfrm>
+          <a:prstGeom prst="rect">
+            <a:avLst/>
+          </a:prstGeom>
+          <a:noFill/>
+          <a:ln/>
+        </p:spPr>
+        <p:txBody>
+          <a:bodyPr wrap="square" lIns="91440" tIns="45720" rIns="91440" bIns="45720" rtlCol="0" anchor="t"/>
+          <a:lstStyle/>
+          <a:p>
+            <a:pPr indent="0" marL="0">
+              <a:buNone/>
+              <a:spcAft>
+                <a:spcPts val="0"/>
+              </a:spcAft>
+            </a:pPr>
+            <a:r>
+              <a:rPr lang="en-US" sz="1100" b="1" dirty="0">
+                <a:solidFill>
+                  <a:srgbClr val="F5A623"/>
+                </a:solidFill>
+              </a:rPr>
+              <a:t xml:space="preserve">10  </a:t>
+            </a:r>
+            <a:r>
+              <a:rPr lang="en-US" sz="1100" b="1" dirty="0">
+                <a:solidFill>
+                  <a:srgbClr val="1E2761"/>
+                </a:solidFill>
+              </a:rPr>
+              <a:t>Out-of-the-Box Grafana Dashboards</a:t>
+            </a:r>
+          </a:p>
+          <a:p>
+            <a:pPr indent="0" marL="457200">
+              <a:buNone/>
+              <a:spcAft>
+                <a:spcPts val="0"/>
+              </a:spcAft>
+            </a:pPr>
+            <a:r>
+              <a:rPr lang="en-US" sz="950" dirty="0">
+                <a:solidFill>
+                  <a:srgbClr val="3C4D6B"/>
+                </a:solidFill>
+              </a:rPr>
+              <a:t>Pre-built charts for lookup latency, request throughput, and pool utilization</a:t>
+            </a:r>
+          </a:p>
+        </p:txBody>
+      </p:sp>
+      <p:sp>
+        <p:nvSpPr>
+          <p:cNvPr id="15" name="Item11"/>
+          <p:cNvSpPr/>
+          <p:nvPr/>
+        </p:nvSpPr>
+        <p:spPr>
+          <a:xfrm>
+            <a:off x="4700000" y="3380000"/>
+            <a:ext cx="4300000" cy="580000"/>
+          </a:xfrm>
+          <a:prstGeom prst="rect">
+            <a:avLst/>
+          </a:prstGeom>
+          <a:noFill/>
+          <a:ln/>
+        </p:spPr>
+        <p:txBody>
+          <a:bodyPr wrap="square" lIns="91440" tIns="45720" rIns="91440" bIns="45720" rtlCol="0" anchor="t"/>
+          <a:lstStyle/>
+          <a:p>
+            <a:pPr indent="0" marL="0">
+              <a:buNone/>
+              <a:spcAft>
+                <a:spcPts val="0"/>
+              </a:spcAft>
+            </a:pPr>
+            <a:r>
+              <a:rPr lang="en-US" sz="1100" b="1" dirty="0">
+                <a:solidFill>
+                  <a:srgbClr val="F5A623"/>
+                </a:solidFill>
+              </a:rPr>
+              <a:t xml:space="preserve">11  </a:t>
+            </a:r>
+            <a:r>
+              <a:rPr lang="en-US" sz="1100" b="1" dirty="0">
+                <a:solidFill>
+                  <a:srgbClr val="1E2761"/>
+                </a:solidFill>
+              </a:rPr>
+              <a:t>Auto Static-IP for All SIM Types</a:t>
+            </a:r>
+          </a:p>
+          <a:p>
+            <a:pPr indent="0" marL="457200">
+              <a:buNone/>
+              <a:spcAft>
+                <a:spcPts val="0"/>
+              </a:spcAft>
+            </a:pPr>
+            <a:r>
+              <a:rPr lang="en-US" sz="950" dirty="0">
+                <a:solidFill>
+                  <a:srgbClr val="3C4D6B"/>
+                </a:solidFill>
+              </a:rPr>
+              <a:t>Supports imsi / imsi_apn / iccid / iccid_apn modes with full auto-configuration</a:t>
+            </a:r>
+          </a:p>
+        </p:txBody>
+      </p:sp>
+    </p:spTree>
+  </p:cSld>
+  <p:clrMapOvr>
+    <a:masterClrMapping/>
+  </p:clrMapOvr>
+</p:sld>
+</file>
+
+<file path=ppt/slides/slide18.xml><?xml version="1.0" encoding="utf-8"?>
+<p:sld xmlns:a="http://schemas.openxmlformats.org/drawingml/2006/main" xmlns:r="http://schemas.openxmlformats.org/officeDocument/2006/relationships" xmlns:p="http://schemas.openxmlformats.org/presentationml/2006/main">
+  <p:cSld name="Container Resource Requirements">
+    <p:spTree>
+      <p:nvGrpSpPr>
+        <p:cNvPr id="1" name=""/>
+        <p:cNvGrpSpPr/>
+        <p:nvPr/>
+      </p:nvGrpSpPr>
+      <p:grpSpPr>
+        <a:xfrm>
+          <a:off x="0" y="0"/>
+          <a:ext cx="9144000" cy="5143500"/>
+          <a:chOff x="0" y="0"/>
+          <a:chExt cx="9144000" cy="5143500"/>
+        </a:xfrm>
+      </p:grpSpPr>
+      <p:sp>
+        <p:nvSpPr>
+          <p:cNvPr id="2" name="bg"/>
+          <p:cNvSpPr>
+            <a:spLocks noGrp="1"/>
+          </p:cNvSpPr>
+          <p:nvPr/>
+        </p:nvSpPr>
+        <p:spPr>
+          <a:xfrm>
+            <a:off x="0" y="0"/>
+            <a:ext cx="9144000" cy="5143500"/>
+          </a:xfrm>
+          <a:prstGeom prst="rect">
+            <a:avLst/>
+          </a:prstGeom>
+          <a:solidFill>
+            <a:srgbClr val="EEF3FB"/>
+          </a:solidFill>
+          <a:ln>
+            <a:noFill/>
+          </a:ln>
+        </p:spPr>
+        <p:txBody>
+          <a:bodyPr/>
+          <a:lstStyle/>
+          <a:p/>
+        </p:txBody>
+      </p:sp>
+      <p:sp>
+        <p:nvSpPr>
+          <p:cNvPr id="3" name="titlebar"/>
+          <p:cNvSpPr>
+            <a:spLocks noGrp="1"/>
+          </p:cNvSpPr>
+          <p:nvPr/>
+        </p:nvSpPr>
+        <p:spPr>
+          <a:xfrm>
+            <a:off x="0" y="0"/>
+            <a:ext cx="9144000" cy="500000"/>
+          </a:xfrm>
+          <a:prstGeom prst="rect">
+            <a:avLst/>
+          </a:prstGeom>
+          <a:solidFill>
+            <a:srgbClr val="1E2761"/>
+          </a:solidFill>
+          <a:ln>
+            <a:noFill/>
+          </a:ln>
+        </p:spPr>
+        <p:txBody>
+          <a:bodyPr anchor="ctr" lIns="180000" rIns="180000" tIns="45720" bIns="45720"/>
+          <a:lstStyle/>
+          <a:p>
+            <a:pPr algn="ctr"/>
+            <a:r>
+              <a:rPr lang="en-US" sz="2000" b="1" dirty="0">
+                <a:solidFill>
+                  <a:srgbClr val="FFFFFF"/>
+                </a:solidFill>
+                <a:latin typeface="Calibri"/>
+              </a:rPr>
+              <a:t>Container Resource Requirements — CPU &amp; RAM</a:t>
+            </a:r>
+          </a:p>
+        </p:txBody>
+      </p:sp>
+      <p:sp>
+        <p:nvSpPr>
+          <p:cNvPr id="4" name="subtitle"/>
+          <p:cNvSpPr>
+            <a:spLocks noGrp="1"/>
+          </p:cNvSpPr>
+          <p:nvPr/>
+        </p:nvSpPr>
+        <p:spPr>
+          <a:xfrm>
+            <a:off x="350000" y="530000"/>
+            <a:ext cx="8444000" cy="140000"/>
+          </a:xfrm>
+          <a:prstGeom prst="rect">
+            <a:avLst/>
+          </a:prstGeom>
+          <a:noFill/>
+          <a:ln>
+            <a:noFill/>
+          </a:ln>
+        </p:spPr>
+        <p:txBody>
+          <a:bodyPr anchor="ctr" lIns="0" rIns="0" tIns="0" bIns="0"/>
+          <a:lstStyle/>
+          <a:p>
+            <a:pPr algn="l"/>
+            <a:r>
+              <a:rPr lang="en-US" sz="900" i="1" dirty="0">
+                <a:solidFill>
+                  <a:srgbClr val="2E75B6"/>
+                </a:solidFill>
+                <a:latin typeface="Calibri"/>
+              </a:rPr>
+              <a:t>Kubernetes requests ensure scheduling; limits cap burst usage per pod</a:t>
+            </a:r>
+          </a:p>
+        </p:txBody>
+      </p:sp>
+      <p:sp>
+        <p:nvSpPr>
+          <p:cNvPr id="5" name="hdr1"/>
+          <p:cNvSpPr>
+            <a:spLocks noGrp="1"/>
+          </p:cNvSpPr>
+          <p:nvPr/>
+        </p:nvSpPr>
+        <p:spPr>
+          <a:xfrm>
+            <a:off x="150000" y="700000"/>
+            <a:ext cx="2600000" cy="380000"/>
+          </a:xfrm>
+          <a:prstGeom prst="rect">
+            <a:avLst/>
+          </a:prstGeom>
+          <a:solidFill>
+            <a:srgbClr val="1E2761"/>
+          </a:solidFill>
+          <a:ln w="12700">
+            <a:solidFill>
+              <a:srgbClr val="FFFFFF"/>
+            </a:solidFill>
+          </a:ln>
+        </p:spPr>
+        <p:txBody>
+          <a:bodyPr anchor="ctr" lIns="91440" rIns="91440" tIns="45720" bIns="45720"/>
+          <a:lstStyle/>
+          <a:p>
+            <a:pPr algn="l"/>
+            <a:r>
+              <a:rPr lang="en-US" sz="900" b="1" dirty="0">
+                <a:solidFill>
+                  <a:srgbClr val="FFFFFF"/>
+                </a:solidFill>
+                <a:latin typeface="Calibri"/>
+              </a:rPr>
+              <a:t>Container</a:t>
+            </a:r>
+          </a:p>
+        </p:txBody>
+      </p:sp>
+      <p:sp>
+        <p:nvSpPr>
+          <p:cNvPr id="6" name="hdr2"/>
+          <p:cNvSpPr>
+            <a:spLocks noGrp="1"/>
+          </p:cNvSpPr>
+          <p:nvPr/>
+        </p:nvSpPr>
+        <p:spPr>
+          <a:xfrm>
+            <a:off x="2750000" y="700000"/>
+            <a:ext cx="1561000" cy="380000"/>
+          </a:xfrm>
+          <a:prstGeom prst="rect">
+            <a:avLst/>
+          </a:prstGeom>
+          <a:solidFill>
+            <a:srgbClr val="1E2761"/>
+          </a:solidFill>
+          <a:ln w="12700">
+            <a:solidFill>
+              <a:srgbClr val="FFFFFF"/>
+            </a:solidFill>
+          </a:ln>
+        </p:spPr>
+        <p:txBody>
+          <a:bodyPr anchor="ctr" lIns="91440" rIns="91440" tIns="45720" bIns="45720"/>
+          <a:lstStyle/>
+          <a:p>
+            <a:pPr algn="ctr"/>
+            <a:r>
+              <a:rPr lang="en-US" sz="900" b="1" dirty="0">
+                <a:solidFill>
+                  <a:srgbClr val="FFFFFF"/>
+                </a:solidFill>
+                <a:latin typeface="Calibri"/>
+              </a:rPr>
+              <a:t>CPU Request</a:t>
+            </a:r>
+          </a:p>
+        </p:txBody>
+      </p:sp>
+      <p:sp>
+        <p:nvSpPr>
+          <p:cNvPr id="7" name="hdr3"/>
+          <p:cNvSpPr>
+            <a:spLocks noGrp="1"/>
+          </p:cNvSpPr>
+          <p:nvPr/>
+        </p:nvSpPr>
+        <p:spPr>
+          <a:xfrm>
+            <a:off x="4311000" y="700000"/>
+            <a:ext cx="1561000" cy="380000"/>
+          </a:xfrm>
+          <a:prstGeom prst="rect">
+            <a:avLst/>
+          </a:prstGeom>
+          <a:solidFill>
+            <a:srgbClr val="1E2761"/>
+          </a:solidFill>
+          <a:ln w="12700">
+            <a:solidFill>
+              <a:srgbClr val="FFFFFF"/>
+            </a:solidFill>
+          </a:ln>
+        </p:spPr>
+        <p:txBody>
+          <a:bodyPr anchor="ctr" lIns="91440" rIns="91440" tIns="45720" bIns="45720"/>
+          <a:lstStyle/>
+          <a:p>
+            <a:pPr algn="ctr"/>
+            <a:r>
+              <a:rPr lang="en-US" sz="900" b="1" dirty="0">
+                <a:solidFill>
+                  <a:srgbClr val="FFFFFF"/>
+                </a:solidFill>
+                <a:latin typeface="Calibri"/>
+              </a:rPr>
+              <a:t>CPU Limit</a:t>
+            </a:r>
+          </a:p>
+        </p:txBody>
+      </p:sp>
+      <p:sp>
+        <p:nvSpPr>
+          <p:cNvPr id="8" name="hdr4"/>
+          <p:cNvSpPr>
+            <a:spLocks noGrp="1"/>
+          </p:cNvSpPr>
+          <p:nvPr/>
+        </p:nvSpPr>
+        <p:spPr>
+          <a:xfrm>
+            <a:off x="5872000" y="700000"/>
+            <a:ext cx="1561000" cy="380000"/>
+          </a:xfrm>
+          <a:prstGeom prst="rect">
+            <a:avLst/>
+          </a:prstGeom>
+          <a:solidFill>
+            <a:srgbClr val="1E2761"/>
+          </a:solidFill>
+          <a:ln w="12700">
+            <a:solidFill>
+              <a:srgbClr val="FFFFFF"/>
+            </a:solidFill>
+          </a:ln>
+        </p:spPr>
+        <p:txBody>
+          <a:bodyPr anchor="ctr" lIns="91440" rIns="91440" tIns="45720" bIns="45720"/>
+          <a:lstStyle/>
+          <a:p>
+            <a:pPr algn="ctr"/>
+            <a:r>
+              <a:rPr lang="en-US" sz="900" b="1" dirty="0">
+                <a:solidFill>
+                  <a:srgbClr val="FFFFFF"/>
+                </a:solidFill>
+                <a:latin typeface="Calibri"/>
+              </a:rPr>
+              <a:t>RAM Request</a:t>
+            </a:r>
+          </a:p>
+        </p:txBody>
+      </p:sp>
+      <p:sp>
+        <p:nvSpPr>
+          <p:cNvPr id="9" name="hdr5"/>
+          <p:cNvSpPr>
+            <a:spLocks noGrp="1"/>
+          </p:cNvSpPr>
+          <p:nvPr/>
+        </p:nvSpPr>
+        <p:spPr>
+          <a:xfrm>
+            <a:off x="7433000" y="700000"/>
+            <a:ext cx="1561000" cy="380000"/>
+          </a:xfrm>
+          <a:prstGeom prst="rect">
+            <a:avLst/>
+          </a:prstGeom>
+          <a:solidFill>
+            <a:srgbClr val="1E2761"/>
+          </a:solidFill>
+          <a:ln w="12700">
+            <a:solidFill>
+              <a:srgbClr val="FFFFFF"/>
+            </a:solidFill>
+          </a:ln>
+        </p:spPr>
+        <p:txBody>
+          <a:bodyPr anchor="ctr" lIns="91440" rIns="91440" tIns="45720" bIns="45720"/>
+          <a:lstStyle/>
+          <a:p>
+            <a:pPr algn="ctr"/>
+            <a:r>
+              <a:rPr lang="en-US" sz="900" b="1" dirty="0">
+                <a:solidFill>
+                  <a:srgbClr val="FFFFFF"/>
+                </a:solidFill>
+                <a:latin typeface="Calibri"/>
+              </a:rPr>
+              <a:t>RAM Limit</a:t>
+            </a:r>
+          </a:p>
+        </p:txBody>
+      </p:sp>
+      <p:sp>
+        <p:nvSpPr>
+          <p:cNvPr id="10" name="r1c1"/>
+          <p:cNvSpPr>
+            <a:spLocks noGrp="1"/>
+          </p:cNvSpPr>
+          <p:nvPr/>
+        </p:nvSpPr>
+        <p:spPr>
+          <a:xfrm>
+            <a:off x="150000" y="1080000"/>
+            <a:ext cx="2600000" cy="360000"/>
+          </a:xfrm>
+          <a:prstGeom prst="rect">
+            <a:avLst/>
+          </a:prstGeom>
+          <a:solidFill>
+            <a:srgbClr val="CADCFC"/>
+          </a:solidFill>
+          <a:ln w="12700">
+            <a:solidFill>
+              <a:srgbClr val="FFFFFF"/>
+            </a:solidFill>
+          </a:ln>
+        </p:spPr>
+        <p:txBody>
+          <a:bodyPr anchor="ctr" lIns="91440" rIns="91440" tIns="45720" bIns="45720"/>
+          <a:lstStyle/>
+          <a:p>
+            <a:pPr algn="l"/>
+            <a:r>
+              <a:rPr lang="en-US" sz="850" dirty="0">
+                <a:solidFill>
+                  <a:srgbClr val="1E2761"/>
+                </a:solidFill>
+                <a:latin typeface="Calibri"/>
+              </a:rPr>
+              <a:t>aaa-lookup-service</a:t>
+            </a:r>
+          </a:p>
+        </p:txBody>
+      </p:sp>
+      <p:sp>
+        <p:nvSpPr>
+          <p:cNvPr id="11" name="r1c2"/>
+          <p:cNvSpPr>
+            <a:spLocks noGrp="1"/>
+          </p:cNvSpPr>
+          <p:nvPr/>
+        </p:nvSpPr>
+        <p:spPr>
+          <a:xfrm>
+            <a:off x="2750000" y="1080000"/>
+            <a:ext cx="1561000" cy="360000"/>
+          </a:xfrm>
+          <a:prstGeom prst="rect">
+            <a:avLst/>
+          </a:prstGeom>
+          <a:solidFill>
+            <a:srgbClr val="CADCFC"/>
+          </a:solidFill>
+          <a:ln w="12700">
+            <a:solidFill>
+              <a:srgbClr val="FFFFFF"/>
+            </a:solidFill>
+          </a:ln>
+        </p:spPr>
+        <p:txBody>
+          <a:bodyPr anchor="ctr" lIns="91440" rIns="91440" tIns="45720" bIns="45720"/>
+          <a:lstStyle/>
+          <a:p>
+            <a:pPr algn="ctr"/>
+            <a:r>
+              <a:rPr lang="en-US" sz="850" dirty="0">
+                <a:solidFill>
+                  <a:srgbClr val="1E2761"/>
+                </a:solidFill>
+                <a:latin typeface="Calibri"/>
+              </a:rPr>
+              <a:t>500m</a:t>
+            </a:r>
+          </a:p>
+        </p:txBody>
+      </p:sp>
+      <p:sp>
+        <p:nvSpPr>
+          <p:cNvPr id="12" name="r1c3"/>
+          <p:cNvSpPr>
+            <a:spLocks noGrp="1"/>
+          </p:cNvSpPr>
+          <p:nvPr/>
+        </p:nvSpPr>
+        <p:spPr>
+          <a:xfrm>
+            <a:off x="4311000" y="1080000"/>
+            <a:ext cx="1561000" cy="360000"/>
+          </a:xfrm>
+          <a:prstGeom prst="rect">
+            <a:avLst/>
+          </a:prstGeom>
+          <a:solidFill>
+            <a:srgbClr val="CADCFC"/>
+          </a:solidFill>
+          <a:ln w="12700">
+            <a:solidFill>
+              <a:srgbClr val="FFFFFF"/>
+            </a:solidFill>
+          </a:ln>
+        </p:spPr>
+        <p:txBody>
+          <a:bodyPr anchor="ctr" lIns="91440" rIns="91440" tIns="45720" bIns="45720"/>
+          <a:lstStyle/>
+          <a:p>
+            <a:pPr algn="ctr"/>
+            <a:r>
+              <a:rPr lang="en-US" sz="850" dirty="0">
+                <a:solidFill>
+                  <a:srgbClr val="1E2761"/>
+                </a:solidFill>
+                <a:latin typeface="Calibri"/>
+              </a:rPr>
+              <a:t>2 000m</a:t>
+            </a:r>
+          </a:p>
+        </p:txBody>
+      </p:sp>
+      <p:sp>
+        <p:nvSpPr>
+          <p:cNvPr id="13" name="r1c4"/>
+          <p:cNvSpPr>
+            <a:spLocks noGrp="1"/>
+          </p:cNvSpPr>
+          <p:nvPr/>
+        </p:nvSpPr>
+        <p:spPr>
+          <a:xfrm>
+            <a:off x="5872000" y="1080000"/>
+            <a:ext cx="1561000" cy="360000"/>
+          </a:xfrm>
+          <a:prstGeom prst="rect">
+            <a:avLst/>
+          </a:prstGeom>
+          <a:solidFill>
+            <a:srgbClr val="CADCFC"/>
+          </a:solidFill>
+          <a:ln w="12700">
+            <a:solidFill>
+              <a:srgbClr val="FFFFFF"/>
+            </a:solidFill>
+          </a:ln>
+        </p:spPr>
+        <p:txBody>
+          <a:bodyPr anchor="ctr" lIns="91440" rIns="91440" tIns="45720" bIns="45720"/>
+          <a:lstStyle/>
+          <a:p>
+            <a:pPr algn="ctr"/>
+            <a:r>
+              <a:rPr lang="en-US" sz="850" dirty="0">
+                <a:solidFill>
+                  <a:srgbClr val="1E2761"/>
+                </a:solidFill>
+                <a:latin typeface="Calibri"/>
+              </a:rPr>
+              <a:t>256 Mi</a:t>
+            </a:r>
+          </a:p>
+        </p:txBody>
+      </p:sp>
+      <p:sp>
+        <p:nvSpPr>
+          <p:cNvPr id="14" name="r1c5"/>
+          <p:cNvSpPr>
+            <a:spLocks noGrp="1"/>
+          </p:cNvSpPr>
+          <p:nvPr/>
+        </p:nvSpPr>
+        <p:spPr>
+          <a:xfrm>
+            <a:off x="7433000" y="1080000"/>
+            <a:ext cx="1561000" cy="360000"/>
+          </a:xfrm>
+          <a:prstGeom prst="rect">
+            <a:avLst/>
+          </a:prstGeom>
+          <a:solidFill>
+            <a:srgbClr val="CADCFC"/>
+          </a:solidFill>
+          <a:ln w="12700">
+            <a:solidFill>
+              <a:srgbClr val="FFFFFF"/>
+            </a:solidFill>
+          </a:ln>
+        </p:spPr>
+        <p:txBody>
+          <a:bodyPr anchor="ctr" lIns="91440" rIns="91440" tIns="45720" bIns="45720"/>
+          <a:lstStyle/>
+          <a:p>
+            <a:pPr algn="ctr"/>
+            <a:r>
+              <a:rPr lang="en-US" sz="850" dirty="0">
+                <a:solidFill>
+                  <a:srgbClr val="1E2761"/>
+                </a:solidFill>
+                <a:latin typeface="Calibri"/>
+              </a:rPr>
+              <a:t>512 Mi</a:t>
+            </a:r>
+          </a:p>
+        </p:txBody>
+      </p:sp>
+      <p:sp>
+        <p:nvSpPr>
+          <p:cNvPr id="15" name="r2c1"/>
+          <p:cNvSpPr>
+            <a:spLocks noGrp="1"/>
+          </p:cNvSpPr>
+          <p:nvPr/>
+        </p:nvSpPr>
+        <p:spPr>
+          <a:xfrm>
+            <a:off x="150000" y="1440000"/>
+            <a:ext cx="2600000" cy="360000"/>
+          </a:xfrm>
+          <a:prstGeom prst="rect">
+            <a:avLst/>
+          </a:prstGeom>
+          <a:solidFill>
+            <a:srgbClr val="FFFFFF"/>
+          </a:solidFill>
+          <a:ln w="12700">
+            <a:solidFill>
+              <a:srgbClr val="CADCFC"/>
+            </a:solidFill>
+          </a:ln>
+        </p:spPr>
+        <p:txBody>
+          <a:bodyPr anchor="ctr" lIns="91440" rIns="91440" tIns="45720" bIns="45720"/>
+          <a:lstStyle/>
+          <a:p>
+            <a:pPr algn="l"/>
+            <a:r>
+              <a:rPr lang="en-US" sz="850" dirty="0">
+                <a:solidFill>
+                  <a:srgbClr val="1E2761"/>
+                </a:solidFill>
+                <a:latin typeface="Calibri"/>
+              </a:rPr>
+              <a:t>subscriber-profile-api</a:t>
+            </a:r>
+          </a:p>
+        </p:txBody>
+      </p:sp>
+      <p:sp>
+        <p:nvSpPr>
+          <p:cNvPr id="16" name="r2c2"/>
+          <p:cNvSpPr>
+            <a:spLocks noGrp="1"/>
+          </p:cNvSpPr>
+          <p:nvPr/>
+        </p:nvSpPr>
+        <p:spPr>
+          <a:xfrm>
+            <a:off x="2750000" y="1440000"/>
+            <a:ext cx="1561000" cy="360000"/>
+          </a:xfrm>
+          <a:prstGeom prst="rect">
+            <a:avLst/>
+          </a:prstGeom>
+          <a:solidFill>
+            <a:srgbClr val="FFFFFF"/>
+          </a:solidFill>
+          <a:ln w="12700">
+            <a:solidFill>
+              <a:srgbClr val="CADCFC"/>
+            </a:solidFill>
+          </a:ln>
+        </p:spPr>
+        <p:txBody>
+          <a:bodyPr anchor="ctr" lIns="91440" rIns="91440" tIns="45720" bIns="45720"/>
+          <a:lstStyle/>
+          <a:p>
+            <a:pPr algn="ctr"/>
+            <a:r>
+              <a:rPr lang="en-US" sz="850" dirty="0">
+                <a:solidFill>
+                  <a:srgbClr val="1E2761"/>
+                </a:solidFill>
+                <a:latin typeface="Calibri"/>
+              </a:rPr>
+              <a:t>250m</a:t>
+            </a:r>
+          </a:p>
+        </p:txBody>
+      </p:sp>
+      <p:sp>
+        <p:nvSpPr>
+          <p:cNvPr id="17" name="r2c3"/>
+          <p:cNvSpPr>
+            <a:spLocks noGrp="1"/>
+          </p:cNvSpPr>
+          <p:nvPr/>
+        </p:nvSpPr>
+        <p:spPr>
+          <a:xfrm>
+            <a:off x="4311000" y="1440000"/>
+            <a:ext cx="1561000" cy="360000"/>
+          </a:xfrm>
+          <a:prstGeom prst="rect">
+            <a:avLst/>
+          </a:prstGeom>
+          <a:solidFill>
+            <a:srgbClr val="FFFFFF"/>
+          </a:solidFill>
+          <a:ln w="12700">
+            <a:solidFill>
+              <a:srgbClr val="CADCFC"/>
+            </a:solidFill>
+          </a:ln>
+        </p:spPr>
+        <p:txBody>
+          <a:bodyPr anchor="ctr" lIns="91440" rIns="91440" tIns="45720" bIns="45720"/>
+          <a:lstStyle/>
+          <a:p>
+            <a:pPr algn="ctr"/>
+            <a:r>
+              <a:rPr lang="en-US" sz="850" dirty="0">
+                <a:solidFill>
+                  <a:srgbClr val="1E2761"/>
+                </a:solidFill>
+                <a:latin typeface="Calibri"/>
+              </a:rPr>
+              <a:t>1 000m</a:t>
+            </a:r>
+          </a:p>
+        </p:txBody>
+      </p:sp>
+      <p:sp>
+        <p:nvSpPr>
+          <p:cNvPr id="18" name="r2c4"/>
+          <p:cNvSpPr>
+            <a:spLocks noGrp="1"/>
+          </p:cNvSpPr>
+          <p:nvPr/>
+        </p:nvSpPr>
+        <p:spPr>
+          <a:xfrm>
+            <a:off x="5872000" y="1440000"/>
+            <a:ext cx="1561000" cy="360000"/>
+          </a:xfrm>
+          <a:prstGeom prst="rect">
+            <a:avLst/>
+          </a:prstGeom>
+          <a:solidFill>
+            <a:srgbClr val="FFFFFF"/>
+          </a:solidFill>
+          <a:ln w="12700">
+            <a:solidFill>
+              <a:srgbClr val="CADCFC"/>
+            </a:solidFill>
+          </a:ln>
+        </p:spPr>
+        <p:txBody>
+          <a:bodyPr anchor="ctr" lIns="91440" rIns="91440" tIns="45720" bIns="45720"/>
+          <a:lstStyle/>
+          <a:p>
+            <a:pPr algn="ctr"/>
+            <a:r>
+              <a:rPr lang="en-US" sz="850" dirty="0">
+                <a:solidFill>
+                  <a:srgbClr val="1E2761"/>
+                </a:solidFill>
+                <a:latin typeface="Calibri"/>
+              </a:rPr>
+              <a:t>256 Mi</a:t>
+            </a:r>
+          </a:p>
+        </p:txBody>
+      </p:sp>
+      <p:sp>
+        <p:nvSpPr>
+          <p:cNvPr id="19" name="r2c5"/>
+          <p:cNvSpPr>
+            <a:spLocks noGrp="1"/>
+          </p:cNvSpPr>
+          <p:nvPr/>
+        </p:nvSpPr>
+        <p:spPr>
+          <a:xfrm>
+            <a:off x="7433000" y="1440000"/>
+            <a:ext cx="1561000" cy="360000"/>
+          </a:xfrm>
+          <a:prstGeom prst="rect">
+            <a:avLst/>
+          </a:prstGeom>
+          <a:solidFill>
+            <a:srgbClr val="FFFFFF"/>
+          </a:solidFill>
+          <a:ln w="12700">
+            <a:solidFill>
+              <a:srgbClr val="CADCFC"/>
+            </a:solidFill>
+          </a:ln>
+        </p:spPr>
+        <p:txBody>
+          <a:bodyPr anchor="ctr" lIns="91440" rIns="91440" tIns="45720" bIns="45720"/>
+          <a:lstStyle/>
+          <a:p>
+            <a:pPr algn="ctr"/>
+            <a:r>
+              <a:rPr lang="en-US" sz="850" dirty="0">
+                <a:solidFill>
+                  <a:srgbClr val="1E2761"/>
+                </a:solidFill>
+                <a:latin typeface="Calibri"/>
+              </a:rPr>
+              <a:t>512 Mi</a:t>
+            </a:r>
+          </a:p>
+        </p:txBody>
+      </p:sp>
+      <p:sp>
+        <p:nvSpPr>
+          <p:cNvPr id="20" name="r3c1"/>
+          <p:cNvSpPr>
+            <a:spLocks noGrp="1"/>
+          </p:cNvSpPr>
+          <p:nvPr/>
+        </p:nvSpPr>
+        <p:spPr>
+          <a:xfrm>
+            <a:off x="150000" y="1800000"/>
+            <a:ext cx="2600000" cy="360000"/>
+          </a:xfrm>
+          <a:prstGeom prst="rect">
+            <a:avLst/>
+          </a:prstGeom>
+          <a:solidFill>
+            <a:srgbClr val="CADCFC"/>
+          </a:solidFill>
+          <a:ln w="12700">
+            <a:solidFill>
+              <a:srgbClr val="FFFFFF"/>
+            </a:solidFill>
+          </a:ln>
+        </p:spPr>
+        <p:txBody>
+          <a:bodyPr anchor="ctr" lIns="91440" rIns="91440" tIns="45720" bIns="45720"/>
+          <a:lstStyle/>
+          <a:p>
+            <a:pPr algn="l"/>
+            <a:r>
+              <a:rPr lang="en-US" sz="850" dirty="0">
+                <a:solidFill>
+                  <a:srgbClr val="1E2761"/>
+                </a:solidFill>
+                <a:latin typeface="Calibri"/>
+              </a:rPr>
+              <a:t>Radius-to-Rest pod</a:t>
+            </a:r>
+          </a:p>
+        </p:txBody>
+      </p:sp>
+      <p:sp>
+        <p:nvSpPr>
+          <p:cNvPr id="21" name="r3c2"/>
+          <p:cNvSpPr>
+            <a:spLocks noGrp="1"/>
+          </p:cNvSpPr>
+          <p:nvPr/>
+        </p:nvSpPr>
+        <p:spPr>
+          <a:xfrm>
+            <a:off x="2750000" y="1800000"/>
+            <a:ext cx="1561000" cy="360000"/>
+          </a:xfrm>
+          <a:prstGeom prst="rect">
+            <a:avLst/>
+          </a:prstGeom>
+          <a:solidFill>
+            <a:srgbClr val="CADCFC"/>
+          </a:solidFill>
+          <a:ln w="12700">
+            <a:solidFill>
+              <a:srgbClr val="FFFFFF"/>
+            </a:solidFill>
+          </a:ln>
+        </p:spPr>
+        <p:txBody>
+          <a:bodyPr anchor="ctr" lIns="91440" rIns="91440" tIns="45720" bIns="45720"/>
+          <a:lstStyle/>
+          <a:p>
+            <a:pPr algn="ctr"/>
+            <a:r>
+              <a:rPr lang="en-US" sz="850" dirty="0">
+                <a:solidFill>
+                  <a:srgbClr val="1E2761"/>
+                </a:solidFill>
+                <a:latin typeface="Calibri"/>
+              </a:rPr>
+              <a:t>250m</a:t>
+            </a:r>
+          </a:p>
+        </p:txBody>
+      </p:sp>
+      <p:sp>
+        <p:nvSpPr>
+          <p:cNvPr id="22" name="r3c3"/>
+          <p:cNvSpPr>
+            <a:spLocks noGrp="1"/>
+          </p:cNvSpPr>
+          <p:nvPr/>
+        </p:nvSpPr>
+        <p:spPr>
+          <a:xfrm>
+            <a:off x="4311000" y="1800000"/>
+            <a:ext cx="1561000" cy="360000"/>
+          </a:xfrm>
+          <a:prstGeom prst="rect">
+            <a:avLst/>
+          </a:prstGeom>
+          <a:solidFill>
+            <a:srgbClr val="CADCFC"/>
+          </a:solidFill>
+          <a:ln w="12700">
+            <a:solidFill>
+              <a:srgbClr val="FFFFFF"/>
+            </a:solidFill>
+          </a:ln>
+        </p:spPr>
+        <p:txBody>
+          <a:bodyPr anchor="ctr" lIns="91440" rIns="91440" tIns="45720" bIns="45720"/>
+          <a:lstStyle/>
+          <a:p>
+            <a:pPr algn="ctr"/>
+            <a:r>
+              <a:rPr lang="en-US" sz="850" dirty="0">
+                <a:solidFill>
+                  <a:srgbClr val="1E2761"/>
+                </a:solidFill>
+                <a:latin typeface="Calibri"/>
+              </a:rPr>
+              <a:t>1 000m</a:t>
+            </a:r>
+          </a:p>
+        </p:txBody>
+      </p:sp>
+      <p:sp>
+        <p:nvSpPr>
+          <p:cNvPr id="23" name="r3c4"/>
+          <p:cNvSpPr>
+            <a:spLocks noGrp="1"/>
+          </p:cNvSpPr>
+          <p:nvPr/>
+        </p:nvSpPr>
+        <p:spPr>
+          <a:xfrm>
+            <a:off x="5872000" y="1800000"/>
+            <a:ext cx="1561000" cy="360000"/>
+          </a:xfrm>
+          <a:prstGeom prst="rect">
+            <a:avLst/>
+          </a:prstGeom>
+          <a:solidFill>
+            <a:srgbClr val="CADCFC"/>
+          </a:solidFill>
+          <a:ln w="12700">
+            <a:solidFill>
+              <a:srgbClr val="FFFFFF"/>
+            </a:solidFill>
+          </a:ln>
+        </p:spPr>
+        <p:txBody>
+          <a:bodyPr anchor="ctr" lIns="91440" rIns="91440" tIns="45720" bIns="45720"/>
+          <a:lstStyle/>
+          <a:p>
+            <a:pPr algn="ctr"/>
+            <a:r>
+              <a:rPr lang="en-US" sz="850" dirty="0">
+                <a:solidFill>
+                  <a:srgbClr val="1E2761"/>
+                </a:solidFill>
+                <a:latin typeface="Calibri"/>
+              </a:rPr>
+              <a:t>128 Mi</a:t>
+            </a:r>
+          </a:p>
+        </p:txBody>
+      </p:sp>
+      <p:sp>
+        <p:nvSpPr>
+          <p:cNvPr id="24" name="r3c5"/>
+          <p:cNvSpPr>
+            <a:spLocks noGrp="1"/>
+          </p:cNvSpPr>
+          <p:nvPr/>
+        </p:nvSpPr>
+        <p:spPr>
+          <a:xfrm>
+            <a:off x="7433000" y="1800000"/>
+            <a:ext cx="1561000" cy="360000"/>
+          </a:xfrm>
+          <a:prstGeom prst="rect">
+            <a:avLst/>
+          </a:prstGeom>
+          <a:solidFill>
+            <a:srgbClr val="CADCFC"/>
+          </a:solidFill>
+          <a:ln w="12700">
+            <a:solidFill>
+              <a:srgbClr val="FFFFFF"/>
+            </a:solidFill>
+          </a:ln>
+        </p:spPr>
+        <p:txBody>
+          <a:bodyPr anchor="ctr" lIns="91440" rIns="91440" tIns="45720" bIns="45720"/>
+          <a:lstStyle/>
+          <a:p>
+            <a:pPr algn="ctr"/>
+            <a:r>
+              <a:rPr lang="en-US" sz="850" dirty="0">
+                <a:solidFill>
+                  <a:srgbClr val="1E2761"/>
+                </a:solidFill>
+                <a:latin typeface="Calibri"/>
+              </a:rPr>
+              <a:t>256 Mi</a:t>
+            </a:r>
+          </a:p>
+        </p:txBody>
+      </p:sp>
+      <p:sp>
+        <p:nvSpPr>
+          <p:cNvPr id="25" name="r4c1"/>
+          <p:cNvSpPr>
+            <a:spLocks noGrp="1"/>
+          </p:cNvSpPr>
+          <p:nvPr/>
+        </p:nvSpPr>
+        <p:spPr>
+          <a:xfrm>
+            <a:off x="150000" y="2160000"/>
+            <a:ext cx="2600000" cy="360000"/>
+          </a:xfrm>
+          <a:prstGeom prst="rect">
+            <a:avLst/>
+          </a:prstGeom>
+          <a:solidFill>
+            <a:srgbClr val="FFFFFF"/>
+          </a:solidFill>
+          <a:ln w="12700">
+            <a:solidFill>
+              <a:srgbClr val="CADCFC"/>
+            </a:solidFill>
+          </a:ln>
+        </p:spPr>
+        <p:txBody>
+          <a:bodyPr anchor="ctr" lIns="91440" rIns="91440" tIns="45720" bIns="45720"/>
+          <a:lstStyle/>
+          <a:p>
+            <a:pPr algn="l"/>
+            <a:r>
+              <a:rPr lang="en-US" sz="850" dirty="0">
+                <a:solidFill>
+                  <a:srgbClr val="1E2761"/>
+                </a:solidFill>
+                <a:latin typeface="Calibri"/>
+              </a:rPr>
+              <a:t>PostgreSQL (primary)</a:t>
+            </a:r>
+          </a:p>
+        </p:txBody>
+      </p:sp>
+      <p:sp>
+        <p:nvSpPr>
+          <p:cNvPr id="26" name="r4c2"/>
+          <p:cNvSpPr>
+            <a:spLocks noGrp="1"/>
+          </p:cNvSpPr>
+          <p:nvPr/>
+        </p:nvSpPr>
+        <p:spPr>
+          <a:xfrm>
+            <a:off x="2750000" y="2160000"/>
+            <a:ext cx="1561000" cy="360000"/>
+          </a:xfrm>
+          <a:prstGeom prst="rect">
+            <a:avLst/>
+          </a:prstGeom>
+          <a:solidFill>
+            <a:srgbClr val="FFFFFF"/>
+          </a:solidFill>
+          <a:ln w="12700">
+            <a:solidFill>
+              <a:srgbClr val="CADCFC"/>
+            </a:solidFill>
+          </a:ln>
+        </p:spPr>
+        <p:txBody>
+          <a:bodyPr anchor="ctr" lIns="91440" rIns="91440" tIns="45720" bIns="45720"/>
+          <a:lstStyle/>
+          <a:p>
+            <a:pPr algn="ctr"/>
+            <a:r>
+              <a:rPr lang="en-US" sz="850" dirty="0">
+                <a:solidFill>
+                  <a:srgbClr val="1E2761"/>
+                </a:solidFill>
+                <a:latin typeface="Calibri"/>
+              </a:rPr>
+              <a:t>500m</a:t>
+            </a:r>
+          </a:p>
+        </p:txBody>
+      </p:sp>
+      <p:sp>
+        <p:nvSpPr>
+          <p:cNvPr id="27" name="r4c3"/>
+          <p:cNvSpPr>
+            <a:spLocks noGrp="1"/>
+          </p:cNvSpPr>
+          <p:nvPr/>
+        </p:nvSpPr>
+        <p:spPr>
+          <a:xfrm>
+            <a:off x="4311000" y="2160000"/>
+            <a:ext cx="1561000" cy="360000"/>
+          </a:xfrm>
+          <a:prstGeom prst="rect">
+            <a:avLst/>
+          </a:prstGeom>
+          <a:solidFill>
+            <a:srgbClr val="FFFFFF"/>
+          </a:solidFill>
+          <a:ln w="12700">
+            <a:solidFill>
+              <a:srgbClr val="CADCFC"/>
+            </a:solidFill>
+          </a:ln>
+        </p:spPr>
+        <p:txBody>
+          <a:bodyPr anchor="ctr" lIns="91440" rIns="91440" tIns="45720" bIns="45720"/>
+          <a:lstStyle/>
+          <a:p>
+            <a:pPr algn="ctr"/>
+            <a:r>
+              <a:rPr lang="en-US" sz="850" dirty="0">
+                <a:solidFill>
+                  <a:srgbClr val="1E2761"/>
+                </a:solidFill>
+                <a:latin typeface="Calibri"/>
+              </a:rPr>
+              <a:t>2 000m</a:t>
+            </a:r>
+          </a:p>
+        </p:txBody>
+      </p:sp>
+      <p:sp>
+        <p:nvSpPr>
+          <p:cNvPr id="28" name="r4c4"/>
+          <p:cNvSpPr>
+            <a:spLocks noGrp="1"/>
+          </p:cNvSpPr>
+          <p:nvPr/>
+        </p:nvSpPr>
+        <p:spPr>
+          <a:xfrm>
+            <a:off x="5872000" y="2160000"/>
+            <a:ext cx="1561000" cy="360000"/>
+          </a:xfrm>
+          <a:prstGeom prst="rect">
+            <a:avLst/>
+          </a:prstGeom>
+          <a:solidFill>
+            <a:srgbClr val="FFFFFF"/>
+          </a:solidFill>
+          <a:ln w="12700">
+            <a:solidFill>
+              <a:srgbClr val="CADCFC"/>
+            </a:solidFill>
+          </a:ln>
+        </p:spPr>
+        <p:txBody>
+          <a:bodyPr anchor="ctr" lIns="91440" rIns="91440" tIns="45720" bIns="45720"/>
+          <a:lstStyle/>
+          <a:p>
+            <a:pPr algn="ctr"/>
+            <a:r>
+              <a:rPr lang="en-US" sz="850" dirty="0">
+                <a:solidFill>
+                  <a:srgbClr val="1E2761"/>
+                </a:solidFill>
+                <a:latin typeface="Calibri"/>
+              </a:rPr>
+              <a:t>512 Mi</a:t>
+            </a:r>
+          </a:p>
+        </p:txBody>
+      </p:sp>
+      <p:sp>
+        <p:nvSpPr>
+          <p:cNvPr id="29" name="r4c5"/>
+          <p:cNvSpPr>
+            <a:spLocks noGrp="1"/>
+          </p:cNvSpPr>
+          <p:nvPr/>
+        </p:nvSpPr>
+        <p:spPr>
+          <a:xfrm>
+            <a:off x="7433000" y="2160000"/>
+            <a:ext cx="1561000" cy="360000"/>
+          </a:xfrm>
+          <a:prstGeom prst="rect">
+            <a:avLst/>
+          </a:prstGeom>
+          <a:solidFill>
+            <a:srgbClr val="FFFFFF"/>
+          </a:solidFill>
+          <a:ln w="12700">
+            <a:solidFill>
+              <a:srgbClr val="CADCFC"/>
+            </a:solidFill>
+          </a:ln>
+        </p:spPr>
+        <p:txBody>
+          <a:bodyPr anchor="ctr" lIns="91440" rIns="91440" tIns="45720" bIns="45720"/>
+          <a:lstStyle/>
+          <a:p>
+            <a:pPr algn="ctr"/>
+            <a:r>
+              <a:rPr lang="en-US" sz="850" dirty="0">
+                <a:solidFill>
+                  <a:srgbClr val="1E2761"/>
+                </a:solidFill>
+                <a:latin typeface="Calibri"/>
+              </a:rPr>
+              <a:t>2 048 Mi</a:t>
+            </a:r>
+          </a:p>
+        </p:txBody>
+      </p:sp>
+      <p:sp>
+        <p:nvSpPr>
+          <p:cNvPr id="30" name="r5c1"/>
+          <p:cNvSpPr>
+            <a:spLocks noGrp="1"/>
+          </p:cNvSpPr>
+          <p:nvPr/>
+        </p:nvSpPr>
+        <p:spPr>
+          <a:xfrm>
+            <a:off x="150000" y="2520000"/>
+            <a:ext cx="2600000" cy="360000"/>
+          </a:xfrm>
+          <a:prstGeom prst="rect">
+            <a:avLst/>
+          </a:prstGeom>
+          <a:solidFill>
+            <a:srgbClr val="CADCFC"/>
+          </a:solidFill>
+          <a:ln w="12700">
+            <a:solidFill>
+              <a:srgbClr val="FFFFFF"/>
+            </a:solidFill>
+          </a:ln>
+        </p:spPr>
+        <p:txBody>
+          <a:bodyPr anchor="ctr" lIns="91440" rIns="91440" tIns="45720" bIns="45720"/>
+          <a:lstStyle/>
+          <a:p>
+            <a:pPr algn="l"/>
+            <a:r>
+              <a:rPr lang="en-US" sz="850" dirty="0">
+                <a:solidFill>
+                  <a:srgbClr val="1E2761"/>
+                </a:solidFill>
+                <a:latin typeface="Calibri"/>
+              </a:rPr>
+              <a:t>PostgreSQL (replica)</a:t>
+            </a:r>
+          </a:p>
+        </p:txBody>
+      </p:sp>
+      <p:sp>
+        <p:nvSpPr>
+          <p:cNvPr id="31" name="r5c2"/>
+          <p:cNvSpPr>
+            <a:spLocks noGrp="1"/>
+          </p:cNvSpPr>
+          <p:nvPr/>
+        </p:nvSpPr>
+        <p:spPr>
+          <a:xfrm>
+            <a:off x="2750000" y="2520000"/>
+            <a:ext cx="1561000" cy="360000"/>
+          </a:xfrm>
+          <a:prstGeom prst="rect">
+            <a:avLst/>
+          </a:prstGeom>
+          <a:solidFill>
+            <a:srgbClr val="CADCFC"/>
+          </a:solidFill>
+          <a:ln w="12700">
+            <a:solidFill>
+              <a:srgbClr val="FFFFFF"/>
+            </a:solidFill>
+          </a:ln>
+        </p:spPr>
+        <p:txBody>
+          <a:bodyPr anchor="ctr" lIns="91440" rIns="91440" tIns="45720" bIns="45720"/>
+          <a:lstStyle/>
+          <a:p>
+            <a:pPr algn="ctr"/>
+            <a:r>
+              <a:rPr lang="en-US" sz="850" dirty="0">
+                <a:solidFill>
+                  <a:srgbClr val="1E2761"/>
+                </a:solidFill>
+                <a:latin typeface="Calibri"/>
+              </a:rPr>
+              <a:t>500m</a:t>
+            </a:r>
+          </a:p>
+        </p:txBody>
+      </p:sp>
+      <p:sp>
+        <p:nvSpPr>
+          <p:cNvPr id="32" name="r5c3"/>
+          <p:cNvSpPr>
+            <a:spLocks noGrp="1"/>
+          </p:cNvSpPr>
+          <p:nvPr/>
+        </p:nvSpPr>
+        <p:spPr>
+          <a:xfrm>
+            <a:off x="4311000" y="2520000"/>
+            <a:ext cx="1561000" cy="360000"/>
+          </a:xfrm>
+          <a:prstGeom prst="rect">
+            <a:avLst/>
+          </a:prstGeom>
+          <a:solidFill>
+            <a:srgbClr val="CADCFC"/>
+          </a:solidFill>
+          <a:ln w="12700">
+            <a:solidFill>
+              <a:srgbClr val="FFFFFF"/>
+            </a:solidFill>
+          </a:ln>
+        </p:spPr>
+        <p:txBody>
+          <a:bodyPr anchor="ctr" lIns="91440" rIns="91440" tIns="45720" bIns="45720"/>
+          <a:lstStyle/>
+          <a:p>
+            <a:pPr algn="ctr"/>
+            <a:r>
+              <a:rPr lang="en-US" sz="850" dirty="0">
+                <a:solidFill>
+                  <a:srgbClr val="1E2761"/>
+                </a:solidFill>
+                <a:latin typeface="Calibri"/>
+              </a:rPr>
+              <a:t>2 000m</a:t>
+            </a:r>
+          </a:p>
+        </p:txBody>
+      </p:sp>
+      <p:sp>
+        <p:nvSpPr>
+          <p:cNvPr id="33" name="r5c4"/>
+          <p:cNvSpPr>
+            <a:spLocks noGrp="1"/>
+          </p:cNvSpPr>
+          <p:nvPr/>
+        </p:nvSpPr>
+        <p:spPr>
+          <a:xfrm>
+            <a:off x="5872000" y="2520000"/>
+            <a:ext cx="1561000" cy="360000"/>
+          </a:xfrm>
+          <a:prstGeom prst="rect">
+            <a:avLst/>
+          </a:prstGeom>
+          <a:solidFill>
+            <a:srgbClr val="CADCFC"/>
+          </a:solidFill>
+          <a:ln w="12700">
+            <a:solidFill>
+              <a:srgbClr val="FFFFFF"/>
+            </a:solidFill>
+          </a:ln>
+        </p:spPr>
+        <p:txBody>
+          <a:bodyPr anchor="ctr" lIns="91440" rIns="91440" tIns="45720" bIns="45720"/>
+          <a:lstStyle/>
+          <a:p>
+            <a:pPr algn="ctr"/>
+            <a:r>
+              <a:rPr lang="en-US" sz="850" dirty="0">
+                <a:solidFill>
+                  <a:srgbClr val="1E2761"/>
+                </a:solidFill>
+                <a:latin typeface="Calibri"/>
+              </a:rPr>
+              <a:t>512 Mi</a:t>
+            </a:r>
+          </a:p>
+        </p:txBody>
+      </p:sp>
+      <p:sp>
+        <p:nvSpPr>
+          <p:cNvPr id="34" name="r5c5"/>
+          <p:cNvSpPr>
+            <a:spLocks noGrp="1"/>
+          </p:cNvSpPr>
+          <p:nvPr/>
+        </p:nvSpPr>
+        <p:spPr>
+          <a:xfrm>
+            <a:off x="7433000" y="2520000"/>
+            <a:ext cx="1561000" cy="360000"/>
+          </a:xfrm>
+          <a:prstGeom prst="rect">
+            <a:avLst/>
+          </a:prstGeom>
+          <a:solidFill>
+            <a:srgbClr val="CADCFC"/>
+          </a:solidFill>
+          <a:ln w="12700">
+            <a:solidFill>
+              <a:srgbClr val="FFFFFF"/>
+            </a:solidFill>
+          </a:ln>
+        </p:spPr>
+        <p:txBody>
+          <a:bodyPr anchor="ctr" lIns="91440" rIns="91440" tIns="45720" bIns="45720"/>
+          <a:lstStyle/>
+          <a:p>
+            <a:pPr algn="ctr"/>
+            <a:r>
+              <a:rPr lang="en-US" sz="850" dirty="0">
+                <a:solidFill>
+                  <a:srgbClr val="1E2761"/>
+                </a:solidFill>
+                <a:latin typeface="Calibri"/>
+              </a:rPr>
+              <a:t>2 048 Mi</a:t>
+            </a:r>
+          </a:p>
+        </p:txBody>
+      </p:sp>
+      <p:sp>
+        <p:nvSpPr>
+          <p:cNvPr id="35" name="r6c1"/>
+          <p:cNvSpPr>
+            <a:spLocks noGrp="1"/>
+          </p:cNvSpPr>
+          <p:nvPr/>
+        </p:nvSpPr>
+        <p:spPr>
+          <a:xfrm>
+            <a:off x="150000" y="2880000"/>
+            <a:ext cx="2600000" cy="360000"/>
+          </a:xfrm>
+          <a:prstGeom prst="rect">
+            <a:avLst/>
+          </a:prstGeom>
+          <a:solidFill>
+            <a:srgbClr val="FFFFFF"/>
+          </a:solidFill>
+          <a:ln w="12700">
+            <a:solidFill>
+              <a:srgbClr val="CADCFC"/>
+            </a:solidFill>
+          </a:ln>
+        </p:spPr>
+        <p:txBody>
+          <a:bodyPr anchor="ctr" lIns="91440" rIns="91440" tIns="45720" bIns="45720"/>
+          <a:lstStyle/>
+          <a:p>
+            <a:pPr algn="l"/>
+            <a:r>
+              <a:rPr lang="en-US" sz="850" dirty="0">
+                <a:solidFill>
+                  <a:srgbClr val="1E2761"/>
+                </a:solidFill>
+                <a:latin typeface="Calibri"/>
+              </a:rPr>
+              <a:t>PgBouncer</a:t>
+            </a:r>
+          </a:p>
+        </p:txBody>
+      </p:sp>
+      <p:sp>
+        <p:nvSpPr>
+          <p:cNvPr id="36" name="r6c2"/>
+          <p:cNvSpPr>
+            <a:spLocks noGrp="1"/>
+          </p:cNvSpPr>
+          <p:nvPr/>
+        </p:nvSpPr>
+        <p:spPr>
+          <a:xfrm>
+            <a:off x="2750000" y="2880000"/>
+            <a:ext cx="1561000" cy="360000"/>
+          </a:xfrm>
+          <a:prstGeom prst="rect">
+            <a:avLst/>
+          </a:prstGeom>
+          <a:solidFill>
+            <a:srgbClr val="FFFFFF"/>
+          </a:solidFill>
+          <a:ln w="12700">
+            <a:solidFill>
+              <a:srgbClr val="CADCFC"/>
+            </a:solidFill>
+          </a:ln>
+        </p:spPr>
+        <p:txBody>
+          <a:bodyPr anchor="ctr" lIns="91440" rIns="91440" tIns="45720" bIns="45720"/>
+          <a:lstStyle/>
+          <a:p>
+            <a:pPr algn="ctr"/>
+            <a:r>
+              <a:rPr lang="en-US" sz="850" dirty="0">
+                <a:solidFill>
+                  <a:srgbClr val="1E2761"/>
+                </a:solidFill>
+                <a:latin typeface="Calibri"/>
+              </a:rPr>
+              <a:t>100m</a:t>
+            </a:r>
+          </a:p>
+        </p:txBody>
+      </p:sp>
+      <p:sp>
+        <p:nvSpPr>
+          <p:cNvPr id="37" name="r6c3"/>
+          <p:cNvSpPr>
+            <a:spLocks noGrp="1"/>
+          </p:cNvSpPr>
+          <p:nvPr/>
+        </p:nvSpPr>
+        <p:spPr>
+          <a:xfrm>
+            <a:off x="4311000" y="2880000"/>
+            <a:ext cx="1561000" cy="360000"/>
+          </a:xfrm>
+          <a:prstGeom prst="rect">
+            <a:avLst/>
+          </a:prstGeom>
+          <a:solidFill>
+            <a:srgbClr val="FFFFFF"/>
+          </a:solidFill>
+          <a:ln w="12700">
+            <a:solidFill>
+              <a:srgbClr val="CADCFC"/>
+            </a:solidFill>
+          </a:ln>
+        </p:spPr>
+        <p:txBody>
+          <a:bodyPr anchor="ctr" lIns="91440" rIns="91440" tIns="45720" bIns="45720"/>
+          <a:lstStyle/>
+          <a:p>
+            <a:pPr algn="ctr"/>
+            <a:r>
+              <a:rPr lang="en-US" sz="850" dirty="0">
+                <a:solidFill>
+                  <a:srgbClr val="1E2761"/>
+                </a:solidFill>
+                <a:latin typeface="Calibri"/>
+              </a:rPr>
+              <a:t>500m</a:t>
+            </a:r>
+          </a:p>
+        </p:txBody>
+      </p:sp>
+      <p:sp>
+        <p:nvSpPr>
+          <p:cNvPr id="38" name="r6c4"/>
+          <p:cNvSpPr>
+            <a:spLocks noGrp="1"/>
+          </p:cNvSpPr>
+          <p:nvPr/>
+        </p:nvSpPr>
+        <p:spPr>
+          <a:xfrm>
+            <a:off x="5872000" y="2880000"/>
+            <a:ext cx="1561000" cy="360000"/>
+          </a:xfrm>
+          <a:prstGeom prst="rect">
+            <a:avLst/>
+          </a:prstGeom>
+          <a:solidFill>
+            <a:srgbClr val="FFFFFF"/>
+          </a:solidFill>
+          <a:ln w="12700">
+            <a:solidFill>
+              <a:srgbClr val="CADCFC"/>
+            </a:solidFill>
+          </a:ln>
+        </p:spPr>
+        <p:txBody>
+          <a:bodyPr anchor="ctr" lIns="91440" rIns="91440" tIns="45720" bIns="45720"/>
+          <a:lstStyle/>
+          <a:p>
+            <a:pPr algn="ctr"/>
+            <a:r>
+              <a:rPr lang="en-US" sz="850" dirty="0">
+                <a:solidFill>
+                  <a:srgbClr val="1E2761"/>
+                </a:solidFill>
+                <a:latin typeface="Calibri"/>
+              </a:rPr>
+              <a:t>64 Mi</a:t>
+            </a:r>
+          </a:p>
+        </p:txBody>
+      </p:sp>
+      <p:sp>
+        <p:nvSpPr>
+          <p:cNvPr id="39" name="r6c5"/>
+          <p:cNvSpPr>
+            <a:spLocks noGrp="1"/>
+          </p:cNvSpPr>
+          <p:nvPr/>
+        </p:nvSpPr>
+        <p:spPr>
+          <a:xfrm>
+            <a:off x="7433000" y="2880000"/>
+            <a:ext cx="1561000" cy="360000"/>
+          </a:xfrm>
+          <a:prstGeom prst="rect">
+            <a:avLst/>
+          </a:prstGeom>
+          <a:solidFill>
+            <a:srgbClr val="FFFFFF"/>
+          </a:solidFill>
+          <a:ln w="12700">
+            <a:solidFill>
+              <a:srgbClr val="CADCFC"/>
+            </a:solidFill>
+          </a:ln>
+        </p:spPr>
+        <p:txBody>
+          <a:bodyPr anchor="ctr" lIns="91440" rIns="91440" tIns="45720" bIns="45720"/>
+          <a:lstStyle/>
+          <a:p>
+            <a:pPr algn="ctr"/>
+            <a:r>
+              <a:rPr lang="en-US" sz="850" dirty="0">
+                <a:solidFill>
+                  <a:srgbClr val="1E2761"/>
+                </a:solidFill>
+                <a:latin typeface="Calibri"/>
+              </a:rPr>
+              <a:t>128 Mi</a:t>
+            </a:r>
+          </a:p>
+        </p:txBody>
+      </p:sp>
+      <p:sp>
+        <p:nvSpPr>
+          <p:cNvPr id="40" name="r7c1"/>
+          <p:cNvSpPr>
+            <a:spLocks noGrp="1"/>
+          </p:cNvSpPr>
+          <p:nvPr/>
+        </p:nvSpPr>
+        <p:spPr>
+          <a:xfrm>
+            <a:off x="150000" y="3240000"/>
+            <a:ext cx="2600000" cy="360000"/>
+          </a:xfrm>
+          <a:prstGeom prst="rect">
+            <a:avLst/>
+          </a:prstGeom>
+          <a:solidFill>
+            <a:srgbClr val="CADCFC"/>
+          </a:solidFill>
+          <a:ln w="12700">
+            <a:solidFill>
+              <a:srgbClr val="FFFFFF"/>
+            </a:solidFill>
+          </a:ln>
+        </p:spPr>
+        <p:txBody>
+          <a:bodyPr anchor="ctr" lIns="91440" rIns="91440" tIns="45720" bIns="45720"/>
+          <a:lstStyle/>
+          <a:p>
+            <a:pPr algn="l"/>
+            <a:r>
+              <a:rPr lang="en-US" sz="850" dirty="0">
+                <a:solidFill>
+                  <a:srgbClr val="1E2761"/>
+                </a:solidFill>
+                <a:latin typeface="Calibri"/>
+              </a:rPr>
+              <a:t>UI pod</a:t>
+            </a:r>
+          </a:p>
+        </p:txBody>
+      </p:sp>
+      <p:sp>
+        <p:nvSpPr>
+          <p:cNvPr id="41" name="r7c2"/>
+          <p:cNvSpPr>
+            <a:spLocks noGrp="1"/>
+          </p:cNvSpPr>
+          <p:nvPr/>
+        </p:nvSpPr>
+        <p:spPr>
+          <a:xfrm>
+            <a:off x="2750000" y="3240000"/>
+            <a:ext cx="1561000" cy="360000"/>
+          </a:xfrm>
+          <a:prstGeom prst="rect">
+            <a:avLst/>
+          </a:prstGeom>
+          <a:solidFill>
+            <a:srgbClr val="CADCFC"/>
+          </a:solidFill>
+          <a:ln w="12700">
+            <a:solidFill>
+              <a:srgbClr val="FFFFFF"/>
+            </a:solidFill>
+          </a:ln>
+        </p:spPr>
+        <p:txBody>
+          <a:bodyPr anchor="ctr" lIns="91440" rIns="91440" tIns="45720" bIns="45720"/>
+          <a:lstStyle/>
+          <a:p>
+            <a:pPr algn="ctr"/>
+            <a:r>
+              <a:rPr lang="en-US" sz="850" dirty="0">
+                <a:solidFill>
+                  <a:srgbClr val="1E2761"/>
+                </a:solidFill>
+                <a:latin typeface="Calibri"/>
+              </a:rPr>
+              <a:t>100m</a:t>
+            </a:r>
+          </a:p>
+        </p:txBody>
+      </p:sp>
+      <p:sp>
+        <p:nvSpPr>
+          <p:cNvPr id="42" name="r7c3"/>
+          <p:cNvSpPr>
+            <a:spLocks noGrp="1"/>
+          </p:cNvSpPr>
+          <p:nvPr/>
+        </p:nvSpPr>
+        <p:spPr>
+          <a:xfrm>
+            <a:off x="4311000" y="3240000"/>
+            <a:ext cx="1561000" cy="360000"/>
+          </a:xfrm>
+          <a:prstGeom prst="rect">
+            <a:avLst/>
+          </a:prstGeom>
+          <a:solidFill>
+            <a:srgbClr val="CADCFC"/>
+          </a:solidFill>
+          <a:ln w="12700">
+            <a:solidFill>
+              <a:srgbClr val="FFFFFF"/>
+            </a:solidFill>
+          </a:ln>
+        </p:spPr>
+        <p:txBody>
+          <a:bodyPr anchor="ctr" lIns="91440" rIns="91440" tIns="45720" bIns="45720"/>
+          <a:lstStyle/>
+          <a:p>
+            <a:pPr algn="ctr"/>
+            <a:r>
+              <a:rPr lang="en-US" sz="850" dirty="0">
+                <a:solidFill>
+                  <a:srgbClr val="1E2761"/>
+                </a:solidFill>
+                <a:latin typeface="Calibri"/>
+              </a:rPr>
+              <a:t>500m</a:t>
+            </a:r>
+          </a:p>
+        </p:txBody>
+      </p:sp>
+      <p:sp>
+        <p:nvSpPr>
+          <p:cNvPr id="43" name="r7c4"/>
+          <p:cNvSpPr>
+            <a:spLocks noGrp="1"/>
+          </p:cNvSpPr>
+          <p:nvPr/>
+        </p:nvSpPr>
+        <p:spPr>
+          <a:xfrm>
+            <a:off x="5872000" y="3240000"/>
+            <a:ext cx="1561000" cy="360000"/>
+          </a:xfrm>
+          <a:prstGeom prst="rect">
+            <a:avLst/>
+          </a:prstGeom>
+          <a:solidFill>
+            <a:srgbClr val="CADCFC"/>
+          </a:solidFill>
+          <a:ln w="12700">
+            <a:solidFill>
+              <a:srgbClr val="FFFFFF"/>
+            </a:solidFill>
+          </a:ln>
+        </p:spPr>
+        <p:txBody>
+          <a:bodyPr anchor="ctr" lIns="91440" rIns="91440" tIns="45720" bIns="45720"/>
+          <a:lstStyle/>
+          <a:p>
+            <a:pPr algn="ctr"/>
+            <a:r>
+              <a:rPr lang="en-US" sz="850" dirty="0">
+                <a:solidFill>
+                  <a:srgbClr val="1E2761"/>
+                </a:solidFill>
+                <a:latin typeface="Calibri"/>
+              </a:rPr>
+              <a:t>128 Mi</a:t>
+            </a:r>
+          </a:p>
+        </p:txBody>
+      </p:sp>
+      <p:sp>
+        <p:nvSpPr>
+          <p:cNvPr id="44" name="r7c5"/>
+          <p:cNvSpPr>
+            <a:spLocks noGrp="1"/>
+          </p:cNvSpPr>
+          <p:nvPr/>
+        </p:nvSpPr>
+        <p:spPr>
+          <a:xfrm>
+            <a:off x="7433000" y="3240000"/>
+            <a:ext cx="1561000" cy="360000"/>
+          </a:xfrm>
+          <a:prstGeom prst="rect">
+            <a:avLst/>
+          </a:prstGeom>
+          <a:solidFill>
+            <a:srgbClr val="CADCFC"/>
+          </a:solidFill>
+          <a:ln w="12700">
+            <a:solidFill>
+              <a:srgbClr val="FFFFFF"/>
+            </a:solidFill>
+          </a:ln>
+        </p:spPr>
+        <p:txBody>
+          <a:bodyPr anchor="ctr" lIns="91440" rIns="91440" tIns="45720" bIns="45720"/>
+          <a:lstStyle/>
+          <a:p>
+            <a:pPr algn="ctr"/>
+            <a:r>
+              <a:rPr lang="en-US" sz="850" dirty="0">
+                <a:solidFill>
+                  <a:srgbClr val="1E2761"/>
+                </a:solidFill>
+                <a:latin typeface="Calibri"/>
+              </a:rPr>
+              <a:t>256 Mi</a:t>
+            </a:r>
+          </a:p>
+        </p:txBody>
+      </p:sp>
+      <p:sp>
+        <p:nvSpPr>
+          <p:cNvPr id="45" name="r8c1"/>
+          <p:cNvSpPr>
+            <a:spLocks noGrp="1"/>
+          </p:cNvSpPr>
+          <p:nvPr/>
+        </p:nvSpPr>
+        <p:spPr>
+          <a:xfrm>
+            <a:off x="150000" y="3600000"/>
+            <a:ext cx="2600000" cy="360000"/>
+          </a:xfrm>
+          <a:prstGeom prst="rect">
+            <a:avLst/>
+          </a:prstGeom>
+          <a:solidFill>
+            <a:srgbClr val="FFFFFF"/>
+          </a:solidFill>
+          <a:ln w="12700">
+            <a:solidFill>
+              <a:srgbClr val="CADCFC"/>
+            </a:solidFill>
+          </a:ln>
+        </p:spPr>
+        <p:txBody>
+          <a:bodyPr anchor="ctr" lIns="91440" rIns="91440" tIns="45720" bIns="45720"/>
+          <a:lstStyle/>
+          <a:p>
+            <a:pPr algn="l"/>
+            <a:r>
+              <a:rPr lang="en-US" sz="850" dirty="0">
+                <a:solidFill>
+                  <a:srgbClr val="1E2761"/>
+                </a:solidFill>
+                <a:latin typeface="Calibri"/>
+              </a:rPr>
+              <a:t>aaa-regression-tester</a:t>
+            </a:r>
+          </a:p>
+        </p:txBody>
+      </p:sp>
+      <p:sp>
+        <p:nvSpPr>
+          <p:cNvPr id="46" name="r8c2"/>
+          <p:cNvSpPr>
+            <a:spLocks noGrp="1"/>
+          </p:cNvSpPr>
+          <p:nvPr/>
+        </p:nvSpPr>
+        <p:spPr>
+          <a:xfrm>
+            <a:off x="2750000" y="3600000"/>
+            <a:ext cx="1561000" cy="360000"/>
+          </a:xfrm>
+          <a:prstGeom prst="rect">
+            <a:avLst/>
+          </a:prstGeom>
+          <a:solidFill>
+            <a:srgbClr val="FFFFFF"/>
+          </a:solidFill>
+          <a:ln w="12700">
+            <a:solidFill>
+              <a:srgbClr val="CADCFC"/>
+            </a:solidFill>
+          </a:ln>
+        </p:spPr>
+        <p:txBody>
+          <a:bodyPr anchor="ctr" lIns="91440" rIns="91440" tIns="45720" bIns="45720"/>
+          <a:lstStyle/>
+          <a:p>
+            <a:pPr algn="ctr"/>
+            <a:r>
+              <a:rPr lang="en-US" sz="850" dirty="0">
+                <a:solidFill>
+                  <a:srgbClr val="1E2761"/>
+                </a:solidFill>
+                <a:latin typeface="Calibri"/>
+              </a:rPr>
+              <a:t>250m</a:t>
+            </a:r>
+          </a:p>
+        </p:txBody>
+      </p:sp>
+      <p:sp>
+        <p:nvSpPr>
+          <p:cNvPr id="47" name="r8c3"/>
+          <p:cNvSpPr>
+            <a:spLocks noGrp="1"/>
+          </p:cNvSpPr>
+          <p:nvPr/>
+        </p:nvSpPr>
+        <p:spPr>
+          <a:xfrm>
+            <a:off x="4311000" y="3600000"/>
+            <a:ext cx="1561000" cy="360000"/>
+          </a:xfrm>
+          <a:prstGeom prst="rect">
+            <a:avLst/>
+          </a:prstGeom>
+          <a:solidFill>
+            <a:srgbClr val="FFFFFF"/>
+          </a:solidFill>
+          <a:ln w="12700">
+            <a:solidFill>
+              <a:srgbClr val="CADCFC"/>
+            </a:solidFill>
+          </a:ln>
+        </p:spPr>
+        <p:txBody>
+          <a:bodyPr anchor="ctr" lIns="91440" rIns="91440" tIns="45720" bIns="45720"/>
+          <a:lstStyle/>
+          <a:p>
+            <a:pPr algn="ctr"/>
+            <a:r>
+              <a:rPr lang="en-US" sz="850" dirty="0">
+                <a:solidFill>
+                  <a:srgbClr val="1E2761"/>
+                </a:solidFill>
+                <a:latin typeface="Calibri"/>
+              </a:rPr>
+              <a:t>500m</a:t>
+            </a:r>
+          </a:p>
+        </p:txBody>
+      </p:sp>
+      <p:sp>
+        <p:nvSpPr>
+          <p:cNvPr id="48" name="r8c4"/>
+          <p:cNvSpPr>
+            <a:spLocks noGrp="1"/>
+          </p:cNvSpPr>
+          <p:nvPr/>
+        </p:nvSpPr>
+        <p:spPr>
+          <a:xfrm>
+            <a:off x="5872000" y="3600000"/>
+            <a:ext cx="1561000" cy="360000"/>
+          </a:xfrm>
+          <a:prstGeom prst="rect">
+            <a:avLst/>
+          </a:prstGeom>
+          <a:solidFill>
+            <a:srgbClr val="FFFFFF"/>
+          </a:solidFill>
+          <a:ln w="12700">
+            <a:solidFill>
+              <a:srgbClr val="CADCFC"/>
+            </a:solidFill>
+          </a:ln>
+        </p:spPr>
+        <p:txBody>
+          <a:bodyPr anchor="ctr" lIns="91440" rIns="91440" tIns="45720" bIns="45720"/>
+          <a:lstStyle/>
+          <a:p>
+            <a:pPr algn="ctr"/>
+            <a:r>
+              <a:rPr lang="en-US" sz="850" dirty="0">
+                <a:solidFill>
+                  <a:srgbClr val="1E2761"/>
+                </a:solidFill>
+                <a:latin typeface="Calibri"/>
+              </a:rPr>
+              <a:t>256 Mi</a:t>
+            </a:r>
+          </a:p>
+        </p:txBody>
+      </p:sp>
+      <p:sp>
+        <p:nvSpPr>
+          <p:cNvPr id="49" name="r8c5"/>
+          <p:cNvSpPr>
+            <a:spLocks noGrp="1"/>
+          </p:cNvSpPr>
+          <p:nvPr/>
+        </p:nvSpPr>
+        <p:spPr>
+          <a:xfrm>
+            <a:off x="7433000" y="3600000"/>
+            <a:ext cx="1561000" cy="360000"/>
+          </a:xfrm>
+          <a:prstGeom prst="rect">
+            <a:avLst/>
+          </a:prstGeom>
+          <a:solidFill>
+            <a:srgbClr val="FFFFFF"/>
+          </a:solidFill>
+          <a:ln w="12700">
+            <a:solidFill>
+              <a:srgbClr val="CADCFC"/>
+            </a:solidFill>
+          </a:ln>
+        </p:spPr>
+        <p:txBody>
+          <a:bodyPr anchor="ctr" lIns="91440" rIns="91440" tIns="45720" bIns="45720"/>
+          <a:lstStyle/>
+          <a:p>
+            <a:pPr algn="ctr"/>
+            <a:r>
+              <a:rPr lang="en-US" sz="850" dirty="0">
+                <a:solidFill>
+                  <a:srgbClr val="1E2761"/>
+                </a:solidFill>
+                <a:latin typeface="Calibri"/>
+              </a:rPr>
+              <a:t>512 Mi</a:t>
+            </a:r>
+          </a:p>
+        </p:txBody>
+      </p:sp>
+      <p:sp>
+        <p:nvSpPr>
+          <p:cNvPr id="50" name="r9c1"/>
+          <p:cNvSpPr>
+            <a:spLocks noGrp="1"/>
+          </p:cNvSpPr>
+          <p:nvPr/>
+        </p:nvSpPr>
+        <p:spPr>
+          <a:xfrm>
+            <a:off x="150000" y="3960000"/>
+            <a:ext cx="2600000" cy="360000"/>
+          </a:xfrm>
+          <a:prstGeom prst="rect">
+            <a:avLst/>
+          </a:prstGeom>
+          <a:solidFill>
+            <a:srgbClr val="CADCFC"/>
+          </a:solidFill>
+          <a:ln w="12700">
+            <a:solidFill>
+              <a:srgbClr val="FFFFFF"/>
+            </a:solidFill>
+          </a:ln>
+        </p:spPr>
+        <p:txBody>
+          <a:bodyPr anchor="ctr" lIns="91440" rIns="91440" tIns="45720" bIns="45720"/>
+          <a:lstStyle/>
+          <a:p>
+            <a:pPr algn="l"/>
+            <a:r>
+              <a:rPr lang="en-US" sz="850" dirty="0">
+                <a:solidFill>
+                  <a:srgbClr val="1E2761"/>
+                </a:solidFill>
+                <a:latin typeface="Calibri"/>
+              </a:rPr>
+              <a:t>Load-test pod</a:t>
+            </a:r>
+          </a:p>
+        </p:txBody>
+      </p:sp>
+      <p:sp>
+        <p:nvSpPr>
+          <p:cNvPr id="51" name="r9c2"/>
+          <p:cNvSpPr>
+            <a:spLocks noGrp="1"/>
+          </p:cNvSpPr>
+          <p:nvPr/>
+        </p:nvSpPr>
+        <p:spPr>
+          <a:xfrm>
+            <a:off x="2750000" y="3960000"/>
+            <a:ext cx="1561000" cy="360000"/>
+          </a:xfrm>
+          <a:prstGeom prst="rect">
+            <a:avLst/>
+          </a:prstGeom>
+          <a:solidFill>
+            <a:srgbClr val="CADCFC"/>
+          </a:solidFill>
+          <a:ln w="12700">
+            <a:solidFill>
+              <a:srgbClr val="FFFFFF"/>
+            </a:solidFill>
+          </a:ln>
+        </p:spPr>
+        <p:txBody>
+          <a:bodyPr anchor="ctr" lIns="91440" rIns="91440" tIns="45720" bIns="45720"/>
+          <a:lstStyle/>
+          <a:p>
+            <a:pPr algn="ctr"/>
+            <a:r>
+              <a:rPr lang="en-US" sz="850" dirty="0">
+                <a:solidFill>
+                  <a:srgbClr val="1E2761"/>
+                </a:solidFill>
+                <a:latin typeface="Calibri"/>
+              </a:rPr>
+              <a:t>500m</a:t>
+            </a:r>
+          </a:p>
+        </p:txBody>
+      </p:sp>
+      <p:sp>
+        <p:nvSpPr>
+          <p:cNvPr id="52" name="r9c3"/>
+          <p:cNvSpPr>
+            <a:spLocks noGrp="1"/>
+          </p:cNvSpPr>
+          <p:nvPr/>
+        </p:nvSpPr>
+        <p:spPr>
+          <a:xfrm>
+            <a:off x="4311000" y="3960000"/>
+            <a:ext cx="1561000" cy="360000"/>
+          </a:xfrm>
+          <a:prstGeom prst="rect">
+            <a:avLst/>
+          </a:prstGeom>
+          <a:solidFill>
+            <a:srgbClr val="CADCFC"/>
+          </a:solidFill>
+          <a:ln w="12700">
+            <a:solidFill>
+              <a:srgbClr val="FFFFFF"/>
+            </a:solidFill>
+          </a:ln>
+        </p:spPr>
+        <p:txBody>
+          <a:bodyPr anchor="ctr" lIns="91440" rIns="91440" tIns="45720" bIns="45720"/>
+          <a:lstStyle/>
+          <a:p>
+            <a:pPr algn="ctr"/>
+            <a:r>
+              <a:rPr lang="en-US" sz="850" dirty="0">
+                <a:solidFill>
+                  <a:srgbClr val="1E2761"/>
+                </a:solidFill>
+                <a:latin typeface="Calibri"/>
+              </a:rPr>
+              <a:t>2 000m</a:t>
+            </a:r>
+          </a:p>
+        </p:txBody>
+      </p:sp>
+      <p:sp>
+        <p:nvSpPr>
+          <p:cNvPr id="53" name="r9c4"/>
+          <p:cNvSpPr>
+            <a:spLocks noGrp="1"/>
+          </p:cNvSpPr>
+          <p:nvPr/>
+        </p:nvSpPr>
+        <p:spPr>
+          <a:xfrm>
+            <a:off x="5872000" y="3960000"/>
+            <a:ext cx="1561000" cy="360000"/>
+          </a:xfrm>
+          <a:prstGeom prst="rect">
+            <a:avLst/>
+          </a:prstGeom>
+          <a:solidFill>
+            <a:srgbClr val="CADCFC"/>
+          </a:solidFill>
+          <a:ln w="12700">
+            <a:solidFill>
+              <a:srgbClr val="FFFFFF"/>
+            </a:solidFill>
+          </a:ln>
+        </p:spPr>
+        <p:txBody>
+          <a:bodyPr anchor="ctr" lIns="91440" rIns="91440" tIns="45720" bIns="45720"/>
+          <a:lstStyle/>
+          <a:p>
+            <a:pPr algn="ctr"/>
+            <a:r>
+              <a:rPr lang="en-US" sz="850" dirty="0">
+                <a:solidFill>
+                  <a:srgbClr val="1E2761"/>
+                </a:solidFill>
+                <a:latin typeface="Calibri"/>
+              </a:rPr>
+              <a:t>256 Mi</a:t>
+            </a:r>
+          </a:p>
+        </p:txBody>
+      </p:sp>
+      <p:sp>
+        <p:nvSpPr>
+          <p:cNvPr id="54" name="r9c5"/>
+          <p:cNvSpPr>
+            <a:spLocks noGrp="1"/>
+          </p:cNvSpPr>
+          <p:nvPr/>
+        </p:nvSpPr>
+        <p:spPr>
+          <a:xfrm>
+            <a:off x="7433000" y="3960000"/>
+            <a:ext cx="1561000" cy="360000"/>
+          </a:xfrm>
+          <a:prstGeom prst="rect">
+            <a:avLst/>
+          </a:prstGeom>
+          <a:solidFill>
+            <a:srgbClr val="CADCFC"/>
+          </a:solidFill>
+          <a:ln w="12700">
+            <a:solidFill>
+              <a:srgbClr val="FFFFFF"/>
+            </a:solidFill>
+          </a:ln>
+        </p:spPr>
+        <p:txBody>
+          <a:bodyPr anchor="ctr" lIns="91440" rIns="91440" tIns="45720" bIns="45720"/>
+          <a:lstStyle/>
+          <a:p>
+            <a:pPr algn="ctr"/>
+            <a:r>
+              <a:rPr lang="en-US" sz="850" dirty="0">
+                <a:solidFill>
+                  <a:srgbClr val="1E2761"/>
+                </a:solidFill>
+                <a:latin typeface="Calibri"/>
+              </a:rPr>
+              <a:t>1 024 Mi</a:t>
+            </a:r>
+          </a:p>
+        </p:txBody>
+      </p:sp>
+      <p:sp>
+        <p:nvSpPr>
+          <p:cNvPr id="55" name="footer"/>
+          <p:cNvSpPr>
+            <a:spLocks noGrp="1"/>
+          </p:cNvSpPr>
+          <p:nvPr/>
+        </p:nvSpPr>
+        <p:spPr>
+          <a:xfrm>
+            <a:off x="150000" y="4400000"/>
+            <a:ext cx="8844000" cy="650000"/>
+          </a:xfrm>
+          <a:prstGeom prst="rect">
+            <a:avLst/>
+          </a:prstGeom>
+          <a:noFill/>
+          <a:ln>
+            <a:noFill/>
+          </a:ln>
+        </p:spPr>
+        <p:txBody>
+          <a:bodyPr anchor="ctr" lIns="0" rIns="0" tIns="0" bIns="0"/>
+          <a:lstStyle/>
+          <a:p>
+            <a:pPr algn="l"/>
+            <a:r>
+              <a:rPr lang="en-US" sz="750" i="1" dirty="0">
+                <a:solidFill>
+                  <a:srgbClr val="6B7280"/>
+                </a:solidFill>
+                <a:latin typeface="Calibri"/>
+              </a:rPr>
+              <a:t>* 1000m = 1 vCPU. Requests are guaranteed minimums; limits are enforced maximums. Adjust per workload profiling.</a:t>
+            </a:r>
+          </a:p>
+        </p:txBody>
+      </p:sp>
+    </p:spTree>
+  </p:cSld>
+  <p:clrMapOvr>
+    <a:masterClrMapping/>
+  </p:clrMapOvr>
+</p:sld>
+</file>
+
+<file path=ppt/slides/slide19.xml><?xml version="1.0" encoding="utf-8"?>
+<p:sld xmlns:a="http://schemas.openxmlformats.org/drawingml/2006/main" xmlns:r="http://schemas.openxmlformats.org/officeDocument/2006/relationships" xmlns:p="http://schemas.openxmlformats.org/presentationml/2006/main">
+  <p:cSld name="Container Resources">
+    <p:spTree>
+      <p:nvGrpSpPr>
+        <p:cNvPr id="1" name=""/>
+        <p:cNvGrpSpPr/>
+        <p:nvPr/>
+      </p:nvGrpSpPr>
+      <p:grpSpPr>
+        <a:xfrm>
+          <a:off x="0" y="0"/>
+          <a:ext cx="0" cy="0"/>
+          <a:chOff x="0" y="0"/>
+          <a:chExt cx="0" cy="0"/>
+        </a:xfrm>
+      </p:grpSpPr>
+      <p:sp>
+        <p:nvSpPr>
+          <p:cNvPr id="2" name="sp2"/>
+          <p:cNvSpPr>
+            <a:spLocks noGrp="1"/>
+          </p:cNvSpPr>
+          <p:nvPr/>
+        </p:nvSpPr>
+        <p:spPr>
+          <a:xfrm>
+            <a:off x="0" y="0"/>
+            <a:ext cx="9144000" cy="5143500"/>
+          </a:xfrm>
+          <a:prstGeom prst="rect">
+            <a:avLst/>
+          </a:prstGeom>
+          <a:solidFill>
+            <a:srgbClr val="EEF3FB"/>
+          </a:solidFill>
+          <a:ln>
+            <a:noFill/>
+          </a:ln>
+        </p:spPr>
+        <p:txBody>
+          <a:bodyPr anchor="ctr" lIns="91440" rIns="91440" tIns="45720" bIns="45720"/>
+          <a:lstStyle/>
+          <a:p>
+            <a:pPr algn="ctr"/>
+            <a:r>
+              <a:rPr lang="en-US" sz="100" b="0" i="0" dirty="0">
+                <a:solidFill>
+                  <a:srgbClr val="EEF3FB"/>
+                </a:solidFill>
+                <a:latin typeface="Calibri"/>
+              </a:rPr>
+              <a:t/>
+            </a:r>
+          </a:p>
+        </p:txBody>
+      </p:sp>
+      <p:sp>
+        <p:nvSpPr>
+          <p:cNvPr id="3" name="sp3"/>
+          <p:cNvSpPr>
+            <a:spLocks noGrp="1"/>
+          </p:cNvSpPr>
+          <p:nvPr/>
+        </p:nvSpPr>
+        <p:spPr>
+          <a:xfrm>
+            <a:off x="0" y="0"/>
+            <a:ext cx="9144000" cy="490000"/>
+          </a:xfrm>
+          <a:prstGeom prst="rect">
+            <a:avLst/>
+          </a:prstGeom>
+          <a:solidFill>
+            <a:srgbClr val="1E2761"/>
+          </a:solidFill>
+          <a:ln>
+            <a:noFill/>
+          </a:ln>
+        </p:spPr>
+        <p:txBody>
+          <a:bodyPr anchor="ctr" lIns="228600" rIns="228600" tIns="45720" bIns="45720"/>
+          <a:lstStyle/>
+          <a:p>
+            <a:pPr algn="l"/>
+            <a:r>
+              <a:rPr lang="en-US" sz="1900" b="1" dirty="0">
+                <a:solidFill>
+                  <a:srgbClr val="FFFFFF"/>
+                </a:solidFill>
+                <a:latin typeface="Calibri"/>
+              </a:rPr>
+              <a:t>Container Resource Requirements — CPU, RAM, Storage, Replicas &amp; Throughput</a:t>
+            </a:r>
+          </a:p>
+        </p:txBody>
+      </p:sp>
+      <p:sp>
+        <p:nvSpPr>
+          <p:cNvPr id="4" name="sp4"/>
+          <p:cNvSpPr>
+            <a:spLocks noGrp="1"/>
+          </p:cNvSpPr>
+          <p:nvPr/>
+        </p:nvSpPr>
+        <p:spPr>
+          <a:xfrm>
+            <a:off x="150000" y="510000"/>
+            <a:ext cx="6050000" cy="210000"/>
+          </a:xfrm>
+          <a:prstGeom prst="rect">
+            <a:avLst/>
+          </a:prstGeom>
+          <a:solidFill>
+            <a:srgbClr val="EEF3FB"/>
+          </a:solidFill>
+          <a:ln>
+            <a:noFill/>
+          </a:ln>
+        </p:spPr>
+        <p:txBody>
+          <a:bodyPr anchor="ctr" lIns="91440" rIns="91440" tIns="45720" bIns="45720"/>
+          <a:lstStyle/>
+          <a:p>
+            <a:pPr algn="l"/>
+            <a:r>
+              <a:rPr lang="en-US" sz="800" b="0" i="1" dirty="0">
+                <a:solidFill>
+                  <a:srgbClr val="2E75B6"/>
+                </a:solidFill>
+                <a:latin typeface="Calibri"/>
+              </a:rPr>
+              <a:t>Sized for 2,000 Access-Requests/sec  |  99.9% fast path (subscriber profile exists in DB)  |  0.1% first-connection</a:t>
+            </a:r>
+          </a:p>
+        </p:txBody>
+      </p:sp>
+      <p:sp>
+        <p:nvSpPr>
+          <p:cNvPr id="5" name="sp5"/>
+          <p:cNvSpPr>
+            <a:spLocks noGrp="1"/>
+          </p:cNvSpPr>
+          <p:nvPr/>
+        </p:nvSpPr>
+        <p:spPr>
+          <a:xfrm>
+            <a:off x="6300000" y="510000"/>
+            <a:ext cx="2694000" cy="210000"/>
+          </a:xfrm>
+          <a:prstGeom prst="rect">
+            <a:avLst/>
+          </a:prstGeom>
+          <a:solidFill>
+            <a:srgbClr val="1E2761"/>
+          </a:solidFill>
+          <a:ln>
+            <a:noFill/>
+          </a:ln>
+        </p:spPr>
+        <p:txBody>
+          <a:bodyPr anchor="ctr" lIns="91440" rIns="91440" tIns="45720" bIns="45720"/>
+          <a:lstStyle/>
+          <a:p>
+            <a:pPr algn="ctr"/>
+            <a:r>
+              <a:rPr lang="en-US" sz="800" b="1" i="0" dirty="0">
+                <a:solidFill>
+                  <a:srgbClr val="FFFFFF"/>
+                </a:solidFill>
+                <a:latin typeface="Calibri"/>
+              </a:rPr>
+              <a:t>Fast path: 1,998 rps  |  Slow path: 2 rps</a:t>
+            </a:r>
+          </a:p>
+        </p:txBody>
+      </p:sp>
+      <p:sp>
+        <p:nvSpPr>
+          <p:cNvPr id="6" name="sp6"/>
+          <p:cNvSpPr>
+            <a:spLocks noGrp="1"/>
+          </p:cNvSpPr>
+          <p:nvPr/>
+        </p:nvSpPr>
+        <p:spPr>
+          <a:xfrm>
+            <a:off x="150000" y="760000"/>
+            <a:ext cx="1800000" cy="400000"/>
+          </a:xfrm>
+          <a:prstGeom prst="rect">
+            <a:avLst/>
+          </a:prstGeom>
+          <a:solidFill>
+            <a:srgbClr val="1E2761"/>
+          </a:solidFill>
+          <a:ln>
+            <a:solidFill>
+              <a:srgbClr val="9EB3D8"/>
+            </a:solidFill>
+          </a:ln>
+        </p:spPr>
+        <p:txBody>
+          <a:bodyPr anchor="ctr" lIns="45720" rIns="45720" tIns="30480" bIns="30480"/>
+          <a:lstStyle/>
+          <a:p>
+            <a:pPr algn="l" spcBef="0" spcAft="0"/>
+            <a:r>
+              <a:rPr lang="en-US" sz="800" b="1" i="0" dirty="0">
+                <a:solidFill>
+                  <a:srgbClr val="FFFFFF"/>
+                </a:solidFill>
+                <a:latin typeface="Calibri"/>
+              </a:rPr>
+              <a:t>Container</a:t>
+            </a:r>
+          </a:p>
+        </p:txBody>
+      </p:sp>
+      <p:sp>
+        <p:nvSpPr>
+          <p:cNvPr id="7" name="sp7"/>
+          <p:cNvSpPr>
+            <a:spLocks noGrp="1"/>
+          </p:cNvSpPr>
+          <p:nvPr/>
+        </p:nvSpPr>
+        <p:spPr>
+          <a:xfrm>
+            <a:off x="1950000" y="760000"/>
+            <a:ext cx="1006285" cy="400000"/>
+          </a:xfrm>
+          <a:prstGeom prst="rect">
+            <a:avLst/>
+          </a:prstGeom>
+          <a:solidFill>
+            <a:srgbClr val="1E2761"/>
+          </a:solidFill>
+          <a:ln>
+            <a:solidFill>
+              <a:srgbClr val="9EB3D8"/>
+            </a:solidFill>
+          </a:ln>
+        </p:spPr>
+        <p:txBody>
+          <a:bodyPr anchor="ctr" lIns="45720" rIns="45720" tIns="30480" bIns="30480"/>
+          <a:lstStyle/>
+          <a:p>
+            <a:pPr algn="ctr" spcBef="0" spcAft="0"/>
+            <a:r>
+              <a:rPr lang="en-US" sz="800" b="1" i="0" dirty="0">
+                <a:solidFill>
+                  <a:srgbClr val="FFFFFF"/>
+                </a:solidFill>
+                <a:latin typeface="Calibri"/>
+              </a:rPr>
+              <a:t>CPU</a:t>
+            </a:r>
+          </a:p>
+          <a:p>
+            <a:pPr algn="ctr" spcBef="0" spcAft="0"/>
+            <a:r>
+              <a:rPr lang="en-US" sz="800" b="1" i="0" dirty="0">
+                <a:solidFill>
+                  <a:srgbClr val="FFFFFF"/>
+                </a:solidFill>
+                <a:latin typeface="Calibri"/>
+              </a:rPr>
+              <a:t>Request</a:t>
+            </a:r>
+          </a:p>
+        </p:txBody>
+      </p:sp>
+      <p:sp>
+        <p:nvSpPr>
+          <p:cNvPr id="8" name="sp8"/>
+          <p:cNvSpPr>
+            <a:spLocks noGrp="1"/>
+          </p:cNvSpPr>
+          <p:nvPr/>
+        </p:nvSpPr>
+        <p:spPr>
+          <a:xfrm>
+            <a:off x="2956285" y="760000"/>
+            <a:ext cx="1006285" cy="400000"/>
+          </a:xfrm>
+          <a:prstGeom prst="rect">
+            <a:avLst/>
+          </a:prstGeom>
+          <a:solidFill>
+            <a:srgbClr val="1E2761"/>
+          </a:solidFill>
+          <a:ln>
+            <a:solidFill>
+              <a:srgbClr val="9EB3D8"/>
+            </a:solidFill>
+          </a:ln>
+        </p:spPr>
+        <p:txBody>
+          <a:bodyPr anchor="ctr" lIns="45720" rIns="45720" tIns="30480" bIns="30480"/>
+          <a:lstStyle/>
+          <a:p>
+            <a:pPr algn="ctr" spcBef="0" spcAft="0"/>
+            <a:r>
+              <a:rPr lang="en-US" sz="800" b="1" i="0" dirty="0">
+                <a:solidFill>
+                  <a:srgbClr val="FFFFFF"/>
+                </a:solidFill>
+                <a:latin typeface="Calibri"/>
+              </a:rPr>
+              <a:t>CPU</a:t>
+            </a:r>
+          </a:p>
+          <a:p>
+            <a:pPr algn="ctr" spcBef="0" spcAft="0"/>
+            <a:r>
+              <a:rPr lang="en-US" sz="800" b="1" i="0" dirty="0">
+                <a:solidFill>
+                  <a:srgbClr val="FFFFFF"/>
+                </a:solidFill>
+                <a:latin typeface="Calibri"/>
+              </a:rPr>
+              <a:t>Limit</a:t>
+            </a:r>
+          </a:p>
+        </p:txBody>
+      </p:sp>
+      <p:sp>
+        <p:nvSpPr>
+          <p:cNvPr id="9" name="sp9"/>
+          <p:cNvSpPr>
+            <a:spLocks noGrp="1"/>
+          </p:cNvSpPr>
+          <p:nvPr/>
+        </p:nvSpPr>
+        <p:spPr>
+          <a:xfrm>
+            <a:off x="3962570" y="760000"/>
+            <a:ext cx="1006285" cy="400000"/>
+          </a:xfrm>
+          <a:prstGeom prst="rect">
+            <a:avLst/>
+          </a:prstGeom>
+          <a:solidFill>
+            <a:srgbClr val="1E2761"/>
+          </a:solidFill>
+          <a:ln>
+            <a:solidFill>
+              <a:srgbClr val="9EB3D8"/>
+            </a:solidFill>
+          </a:ln>
+        </p:spPr>
+        <p:txBody>
+          <a:bodyPr anchor="ctr" lIns="45720" rIns="45720" tIns="30480" bIns="30480"/>
+          <a:lstStyle/>
+          <a:p>
+            <a:pPr algn="ctr" spcBef="0" spcAft="0"/>
+            <a:r>
+              <a:rPr lang="en-US" sz="800" b="1" i="0" dirty="0">
+                <a:solidFill>
+                  <a:srgbClr val="FFFFFF"/>
+                </a:solidFill>
+                <a:latin typeface="Calibri"/>
+              </a:rPr>
+              <a:t>RAM</a:t>
+            </a:r>
+          </a:p>
+          <a:p>
+            <a:pPr algn="ctr" spcBef="0" spcAft="0"/>
+            <a:r>
+              <a:rPr lang="en-US" sz="800" b="1" i="0" dirty="0">
+                <a:solidFill>
+                  <a:srgbClr val="FFFFFF"/>
+                </a:solidFill>
+                <a:latin typeface="Calibri"/>
+              </a:rPr>
+              <a:t>Request</a:t>
+            </a:r>
+          </a:p>
+        </p:txBody>
+      </p:sp>
+      <p:sp>
+        <p:nvSpPr>
+          <p:cNvPr id="10" name="sp10"/>
+          <p:cNvSpPr>
+            <a:spLocks noGrp="1"/>
+          </p:cNvSpPr>
+          <p:nvPr/>
+        </p:nvSpPr>
+        <p:spPr>
+          <a:xfrm>
+            <a:off x="4968855" y="760000"/>
+            <a:ext cx="1006285" cy="400000"/>
+          </a:xfrm>
+          <a:prstGeom prst="rect">
+            <a:avLst/>
+          </a:prstGeom>
+          <a:solidFill>
+            <a:srgbClr val="1E2761"/>
+          </a:solidFill>
+          <a:ln>
+            <a:solidFill>
+              <a:srgbClr val="9EB3D8"/>
+            </a:solidFill>
+          </a:ln>
+        </p:spPr>
+        <p:txBody>
+          <a:bodyPr anchor="ctr" lIns="45720" rIns="45720" tIns="30480" bIns="30480"/>
+          <a:lstStyle/>
+          <a:p>
+            <a:pPr algn="ctr" spcBef="0" spcAft="0"/>
+            <a:r>
+              <a:rPr lang="en-US" sz="800" b="1" i="0" dirty="0">
+                <a:solidFill>
+                  <a:srgbClr val="FFFFFF"/>
+                </a:solidFill>
+                <a:latin typeface="Calibri"/>
+              </a:rPr>
+              <a:t>RAM</a:t>
+            </a:r>
+          </a:p>
+          <a:p>
+            <a:pPr algn="ctr" spcBef="0" spcAft="0"/>
+            <a:r>
+              <a:rPr lang="en-US" sz="800" b="1" i="0" dirty="0">
+                <a:solidFill>
+                  <a:srgbClr val="FFFFFF"/>
+                </a:solidFill>
+                <a:latin typeface="Calibri"/>
+              </a:rPr>
+              <a:t>Limit</a:t>
+            </a:r>
+          </a:p>
+        </p:txBody>
+      </p:sp>
+      <p:sp>
+        <p:nvSpPr>
+          <p:cNvPr id="11" name="sp11"/>
+          <p:cNvSpPr>
+            <a:spLocks noGrp="1"/>
+          </p:cNvSpPr>
+          <p:nvPr/>
+        </p:nvSpPr>
+        <p:spPr>
+          <a:xfrm>
+            <a:off x="5975140" y="760000"/>
+            <a:ext cx="1006285" cy="400000"/>
+          </a:xfrm>
+          <a:prstGeom prst="rect">
+            <a:avLst/>
+          </a:prstGeom>
+          <a:solidFill>
+            <a:srgbClr val="1E2761"/>
+          </a:solidFill>
+          <a:ln>
+            <a:solidFill>
+              <a:srgbClr val="9EB3D8"/>
+            </a:solidFill>
+          </a:ln>
+        </p:spPr>
+        <p:txBody>
+          <a:bodyPr anchor="ctr" lIns="45720" rIns="45720" tIns="30480" bIns="30480"/>
+          <a:lstStyle/>
+          <a:p>
+            <a:pPr algn="ctr" spcBef="0" spcAft="0"/>
+            <a:r>
+              <a:rPr lang="en-US" sz="800" b="1" i="0" dirty="0">
+                <a:solidFill>
+                  <a:srgbClr val="FFFFFF"/>
+                </a:solidFill>
+                <a:latin typeface="Calibri"/>
+              </a:rPr>
+              <a:t>Storage</a:t>
+            </a:r>
+          </a:p>
+          <a:p>
+            <a:pPr algn="ctr" spcBef="0" spcAft="0"/>
+            <a:r>
+              <a:rPr lang="en-US" sz="800" b="1" i="0" dirty="0">
+                <a:solidFill>
+                  <a:srgbClr val="FFFFFF"/>
+                </a:solidFill>
+                <a:latin typeface="Calibri"/>
+              </a:rPr>
+              <a:t>(PVC)</a:t>
+            </a:r>
+          </a:p>
+        </p:txBody>
+      </p:sp>
+      <p:sp>
+        <p:nvSpPr>
+          <p:cNvPr id="12" name="sp12"/>
+          <p:cNvSpPr>
+            <a:spLocks noGrp="1"/>
+          </p:cNvSpPr>
+          <p:nvPr/>
+        </p:nvSpPr>
+        <p:spPr>
+          <a:xfrm>
+            <a:off x="6981425" y="760000"/>
+            <a:ext cx="1006285" cy="400000"/>
+          </a:xfrm>
+          <a:prstGeom prst="rect">
+            <a:avLst/>
+          </a:prstGeom>
+          <a:solidFill>
+            <a:srgbClr val="C45000"/>
+          </a:solidFill>
+          <a:ln>
+            <a:solidFill>
+              <a:srgbClr val="9EB3D8"/>
+            </a:solidFill>
+          </a:ln>
+        </p:spPr>
+        <p:txBody>
+          <a:bodyPr anchor="ctr" lIns="45720" rIns="45720" tIns="30480" bIns="30480"/>
+          <a:lstStyle/>
+          <a:p>
+            <a:pPr algn="ctr" spcBef="0" spcAft="0"/>
+            <a:r>
+              <a:rPr lang="en-US" sz="800" b="1" i="0" dirty="0">
+                <a:solidFill>
+                  <a:srgbClr val="FFFFFF"/>
+                </a:solidFill>
+                <a:latin typeface="Calibri"/>
+              </a:rPr>
+              <a:t>Replicas</a:t>
+            </a:r>
+          </a:p>
+          <a:p>
+            <a:pPr algn="ctr" spcBef="0" spcAft="0"/>
+            <a:r>
+              <a:rPr lang="en-US" sz="800" b="1" i="0" dirty="0">
+                <a:solidFill>
+                  <a:srgbClr val="FFFFFF"/>
+                </a:solidFill>
+                <a:latin typeface="Calibri"/>
+              </a:rPr>
+              <a:t>@ 2k rps</a:t>
+            </a:r>
+          </a:p>
+        </p:txBody>
+      </p:sp>
+      <p:sp>
+        <p:nvSpPr>
+          <p:cNvPr id="13" name="sp13"/>
+          <p:cNvSpPr>
+            <a:spLocks noGrp="1"/>
+          </p:cNvSpPr>
+          <p:nvPr/>
+        </p:nvSpPr>
+        <p:spPr>
+          <a:xfrm>
+            <a:off x="7987710" y="760000"/>
+            <a:ext cx="1006290" cy="400000"/>
+          </a:xfrm>
+          <a:prstGeom prst="rect">
+            <a:avLst/>
+          </a:prstGeom>
+          <a:solidFill>
+            <a:srgbClr val="025F6B"/>
+          </a:solidFill>
+          <a:ln>
+            <a:solidFill>
+              <a:srgbClr val="9EB3D8"/>
+            </a:solidFill>
+          </a:ln>
+        </p:spPr>
+        <p:txBody>
+          <a:bodyPr anchor="ctr" lIns="45720" rIns="45720" tIns="30480" bIns="30480"/>
+          <a:lstStyle/>
+          <a:p>
+            <a:pPr algn="ctr" spcBef="0" spcAft="0"/>
+            <a:r>
+              <a:rPr lang="en-US" sz="800" b="1" i="0" dirty="0">
+                <a:solidFill>
+                  <a:srgbClr val="FFFFFF"/>
+                </a:solidFill>
+                <a:latin typeface="Calibri"/>
+              </a:rPr>
+              <a:t>Max RPS</a:t>
+            </a:r>
+          </a:p>
+          <a:p>
+            <a:pPr algn="ctr" spcBef="0" spcAft="0"/>
+            <a:r>
+              <a:rPr lang="en-US" sz="800" b="1" i="0" dirty="0">
+                <a:solidFill>
+                  <a:srgbClr val="FFFFFF"/>
+                </a:solidFill>
+                <a:latin typeface="Calibri"/>
+              </a:rPr>
+              <a:t>per Pod</a:t>
+            </a:r>
+          </a:p>
+        </p:txBody>
+      </p:sp>
+      <p:sp>
+        <p:nvSpPr>
+          <p:cNvPr id="14" name="sp14"/>
+          <p:cNvSpPr>
+            <a:spLocks noGrp="1"/>
+          </p:cNvSpPr>
+          <p:nvPr/>
+        </p:nvSpPr>
+        <p:spPr>
+          <a:xfrm>
+            <a:off x="150000" y="1160000"/>
+            <a:ext cx="1800000" cy="375000"/>
+          </a:xfrm>
+          <a:prstGeom prst="rect">
+            <a:avLst/>
+          </a:prstGeom>
+          <a:solidFill>
+            <a:srgbClr val="CADCFC"/>
+          </a:solidFill>
+          <a:ln>
+            <a:solidFill>
+              <a:srgbClr val="9EB3D8"/>
+            </a:solidFill>
+          </a:ln>
+        </p:spPr>
+        <p:txBody>
+          <a:bodyPr anchor="ctr" lIns="91440" rIns="91440" tIns="45720" bIns="45720"/>
+          <a:lstStyle/>
+          <a:p>
+            <a:pPr algn="l"/>
+            <a:r>
+              <a:rPr lang="en-US" sz="820" b="1" i="0" dirty="0">
+                <a:solidFill>
+                  <a:srgbClr val="1E2761"/>
+                </a:solidFill>
+                <a:latin typeface="Calibri"/>
+              </a:rPr>
+              <a:t>aaa-lookup-service</a:t>
+            </a:r>
+          </a:p>
+        </p:txBody>
+      </p:sp>
+      <p:sp>
+        <p:nvSpPr>
+          <p:cNvPr id="15" name="sp15"/>
+          <p:cNvSpPr>
+            <a:spLocks noGrp="1"/>
+          </p:cNvSpPr>
+          <p:nvPr/>
+        </p:nvSpPr>
+        <p:spPr>
+          <a:xfrm>
+            <a:off x="1950000" y="1160000"/>
+            <a:ext cx="1006285" cy="375000"/>
+          </a:xfrm>
+          <a:prstGeom prst="rect">
+            <a:avLst/>
+          </a:prstGeom>
+          <a:solidFill>
+            <a:srgbClr val="CADCFC"/>
+          </a:solidFill>
+          <a:ln>
+            <a:solidFill>
+              <a:srgbClr val="9EB3D8"/>
+            </a:solidFill>
+          </a:ln>
+        </p:spPr>
+        <p:txBody>
+          <a:bodyPr anchor="ctr" lIns="91440" rIns="91440" tIns="45720" bIns="45720"/>
+          <a:lstStyle/>
+          <a:p>
+            <a:pPr algn="ctr"/>
+            <a:r>
+              <a:rPr lang="en-US" sz="820" b="0" i="0" dirty="0">
+                <a:solidFill>
+                  <a:srgbClr val="1E2761"/>
+                </a:solidFill>
+                <a:latin typeface="Calibri"/>
+              </a:rPr>
+              <a:t>500m</a:t>
+            </a:r>
+          </a:p>
+        </p:txBody>
+      </p:sp>
+      <p:sp>
+        <p:nvSpPr>
+          <p:cNvPr id="16" name="sp16"/>
+          <p:cNvSpPr>
+            <a:spLocks noGrp="1"/>
+          </p:cNvSpPr>
+          <p:nvPr/>
+        </p:nvSpPr>
+        <p:spPr>
+          <a:xfrm>
+            <a:off x="2956285" y="1160000"/>
+            <a:ext cx="1006285" cy="375000"/>
+          </a:xfrm>
+          <a:prstGeom prst="rect">
+            <a:avLst/>
+          </a:prstGeom>
+          <a:solidFill>
+            <a:srgbClr val="CADCFC"/>
+          </a:solidFill>
+          <a:ln>
+            <a:solidFill>
+              <a:srgbClr val="9EB3D8"/>
+            </a:solidFill>
+          </a:ln>
+        </p:spPr>
+        <p:txBody>
+          <a:bodyPr anchor="ctr" lIns="91440" rIns="91440" tIns="45720" bIns="45720"/>
+          <a:lstStyle/>
+          <a:p>
+            <a:pPr algn="ctr"/>
+            <a:r>
+              <a:rPr lang="en-US" sz="820" b="0" i="0" dirty="0">
+                <a:solidFill>
+                  <a:srgbClr val="1E2761"/>
+                </a:solidFill>
+                <a:latin typeface="Calibri"/>
+              </a:rPr>
+              <a:t>2,000m</a:t>
+            </a:r>
+          </a:p>
+        </p:txBody>
+      </p:sp>
+      <p:sp>
+        <p:nvSpPr>
+          <p:cNvPr id="17" name="sp17"/>
+          <p:cNvSpPr>
+            <a:spLocks noGrp="1"/>
+          </p:cNvSpPr>
+          <p:nvPr/>
+        </p:nvSpPr>
+        <p:spPr>
+          <a:xfrm>
+            <a:off x="3962570" y="1160000"/>
+            <a:ext cx="1006285" cy="375000"/>
+          </a:xfrm>
+          <a:prstGeom prst="rect">
+            <a:avLst/>
+          </a:prstGeom>
+          <a:solidFill>
+            <a:srgbClr val="CADCFC"/>
+          </a:solidFill>
+          <a:ln>
+            <a:solidFill>
+              <a:srgbClr val="9EB3D8"/>
+            </a:solidFill>
+          </a:ln>
+        </p:spPr>
+        <p:txBody>
+          <a:bodyPr anchor="ctr" lIns="91440" rIns="91440" tIns="45720" bIns="45720"/>
+          <a:lstStyle/>
+          <a:p>
+            <a:pPr algn="ctr"/>
+            <a:r>
+              <a:rPr lang="en-US" sz="820" b="0" i="0" dirty="0">
+                <a:solidFill>
+                  <a:srgbClr val="1E2761"/>
+                </a:solidFill>
+                <a:latin typeface="Calibri"/>
+              </a:rPr>
+              <a:t>256 Mi</a:t>
+            </a:r>
+          </a:p>
+        </p:txBody>
+      </p:sp>
+      <p:sp>
+        <p:nvSpPr>
+          <p:cNvPr id="18" name="sp18"/>
+          <p:cNvSpPr>
+            <a:spLocks noGrp="1"/>
+          </p:cNvSpPr>
+          <p:nvPr/>
+        </p:nvSpPr>
+        <p:spPr>
+          <a:xfrm>
+            <a:off x="4968855" y="1160000"/>
+            <a:ext cx="1006285" cy="375000"/>
+          </a:xfrm>
+          <a:prstGeom prst="rect">
+            <a:avLst/>
+          </a:prstGeom>
+          <a:solidFill>
+            <a:srgbClr val="CADCFC"/>
+          </a:solidFill>
+          <a:ln>
+            <a:solidFill>
+              <a:srgbClr val="9EB3D8"/>
+            </a:solidFill>
+          </a:ln>
+        </p:spPr>
+        <p:txBody>
+          <a:bodyPr anchor="ctr" lIns="91440" rIns="91440" tIns="45720" bIns="45720"/>
+          <a:lstStyle/>
+          <a:p>
+            <a:pPr algn="ctr"/>
+            <a:r>
+              <a:rPr lang="en-US" sz="820" b="0" i="0" dirty="0">
+                <a:solidFill>
+                  <a:srgbClr val="1E2761"/>
+                </a:solidFill>
+                <a:latin typeface="Calibri"/>
+              </a:rPr>
+              <a:t>512 Mi</a:t>
+            </a:r>
+          </a:p>
+        </p:txBody>
+      </p:sp>
+      <p:sp>
+        <p:nvSpPr>
+          <p:cNvPr id="19" name="sp19"/>
+          <p:cNvSpPr>
+            <a:spLocks noGrp="1"/>
+          </p:cNvSpPr>
+          <p:nvPr/>
+        </p:nvSpPr>
+        <p:spPr>
+          <a:xfrm>
+            <a:off x="5975140" y="1160000"/>
+            <a:ext cx="1006285" cy="375000"/>
+          </a:xfrm>
+          <a:prstGeom prst="rect">
+            <a:avLst/>
+          </a:prstGeom>
+          <a:solidFill>
+            <a:srgbClr val="CADCFC"/>
+          </a:solidFill>
+          <a:ln>
+            <a:solidFill>
+              <a:srgbClr val="9EB3D8"/>
+            </a:solidFill>
+          </a:ln>
+        </p:spPr>
+        <p:txBody>
+          <a:bodyPr anchor="ctr" lIns="91440" rIns="91440" tIns="45720" bIns="45720"/>
+          <a:lstStyle/>
+          <a:p>
+            <a:pPr algn="ctr"/>
+            <a:r>
+              <a:rPr lang="en-US" sz="820" b="0" i="0" dirty="0">
+                <a:solidFill>
+                  <a:srgbClr val="1E2761"/>
+                </a:solidFill>
+                <a:latin typeface="Calibri"/>
+              </a:rPr>
+              <a:t>—</a:t>
+            </a:r>
+          </a:p>
+        </p:txBody>
+      </p:sp>
+      <p:sp>
+        <p:nvSpPr>
+          <p:cNvPr id="20" name="sp20"/>
+          <p:cNvSpPr>
+            <a:spLocks noGrp="1"/>
+          </p:cNvSpPr>
+          <p:nvPr/>
+        </p:nvSpPr>
+        <p:spPr>
+          <a:xfrm>
+            <a:off x="6981425" y="1160000"/>
+            <a:ext cx="1006285" cy="375000"/>
+          </a:xfrm>
+          <a:prstGeom prst="rect">
+            <a:avLst/>
+          </a:prstGeom>
+          <a:solidFill>
+            <a:srgbClr val="D6EAD6"/>
+          </a:solidFill>
+          <a:ln>
+            <a:solidFill>
+              <a:srgbClr val="9EB3D8"/>
+            </a:solidFill>
+          </a:ln>
+        </p:spPr>
+        <p:txBody>
+          <a:bodyPr anchor="ctr" lIns="91440" rIns="91440" tIns="45720" bIns="45720"/>
+          <a:lstStyle/>
+          <a:p>
+            <a:pPr algn="ctr"/>
+            <a:r>
+              <a:rPr lang="en-US" sz="820" b="1" i="0" dirty="0">
+                <a:solidFill>
+                  <a:srgbClr val="1A5C1A"/>
+                </a:solidFill>
+                <a:latin typeface="Calibri"/>
+              </a:rPr>
+              <a:t>3</a:t>
+            </a:r>
+          </a:p>
+        </p:txBody>
+      </p:sp>
+      <p:sp>
+        <p:nvSpPr>
+          <p:cNvPr id="21" name="sp21"/>
+          <p:cNvSpPr>
+            <a:spLocks noGrp="1"/>
+          </p:cNvSpPr>
+          <p:nvPr/>
+        </p:nvSpPr>
+        <p:spPr>
+          <a:xfrm>
+            <a:off x="7987710" y="1160000"/>
+            <a:ext cx="1006290" cy="375000"/>
+          </a:xfrm>
+          <a:prstGeom prst="rect">
+            <a:avLst/>
+          </a:prstGeom>
+          <a:solidFill>
+            <a:srgbClr val="D0EEF2"/>
+          </a:solidFill>
+          <a:ln>
+            <a:solidFill>
+              <a:srgbClr val="9EB3D8"/>
+            </a:solidFill>
+          </a:ln>
+        </p:spPr>
+        <p:txBody>
+          <a:bodyPr anchor="ctr" lIns="91440" rIns="91440" tIns="45720" bIns="45720"/>
+          <a:lstStyle/>
+          <a:p>
+            <a:pPr algn="ctr"/>
+            <a:r>
+              <a:rPr lang="en-US" sz="820" b="1" i="0" dirty="0">
+                <a:solidFill>
+                  <a:srgbClr val="014F5A"/>
+                </a:solidFill>
+                <a:latin typeface="Calibri"/>
+              </a:rPr>
+              <a:t>~600 rps</a:t>
+            </a:r>
+          </a:p>
+        </p:txBody>
+      </p:sp>
+      <p:sp>
+        <p:nvSpPr>
+          <p:cNvPr id="22" name="sp22"/>
+          <p:cNvSpPr>
+            <a:spLocks noGrp="1"/>
+          </p:cNvSpPr>
+          <p:nvPr/>
+        </p:nvSpPr>
+        <p:spPr>
+          <a:xfrm>
+            <a:off x="150000" y="1535000"/>
+            <a:ext cx="1800000" cy="375000"/>
+          </a:xfrm>
+          <a:prstGeom prst="rect">
+            <a:avLst/>
+          </a:prstGeom>
+          <a:solidFill>
+            <a:srgbClr val="FFFFFF"/>
+          </a:solidFill>
+          <a:ln>
+            <a:solidFill>
+              <a:srgbClr val="9EB3D8"/>
+            </a:solidFill>
+          </a:ln>
+        </p:spPr>
+        <p:txBody>
+          <a:bodyPr anchor="ctr" lIns="91440" rIns="91440" tIns="45720" bIns="45720"/>
+          <a:lstStyle/>
+          <a:p>
+            <a:pPr algn="l"/>
+            <a:r>
+              <a:rPr lang="en-US" sz="820" b="1" i="0" dirty="0">
+                <a:solidFill>
+                  <a:srgbClr val="1E2761"/>
+                </a:solidFill>
+                <a:latin typeface="Calibri"/>
+              </a:rPr>
+              <a:t>subscriber-profile-api</a:t>
+            </a:r>
+          </a:p>
+        </p:txBody>
+      </p:sp>
+      <p:sp>
+        <p:nvSpPr>
+          <p:cNvPr id="23" name="sp23"/>
+          <p:cNvSpPr>
+            <a:spLocks noGrp="1"/>
+          </p:cNvSpPr>
+          <p:nvPr/>
+        </p:nvSpPr>
+        <p:spPr>
+          <a:xfrm>
+            <a:off x="1950000" y="1535000"/>
+            <a:ext cx="1006285" cy="375000"/>
+          </a:xfrm>
+          <a:prstGeom prst="rect">
+            <a:avLst/>
+          </a:prstGeom>
+          <a:solidFill>
+            <a:srgbClr val="FFFFFF"/>
+          </a:solidFill>
+          <a:ln>
+            <a:solidFill>
+              <a:srgbClr val="9EB3D8"/>
+            </a:solidFill>
+          </a:ln>
+        </p:spPr>
+        <p:txBody>
+          <a:bodyPr anchor="ctr" lIns="91440" rIns="91440" tIns="45720" bIns="45720"/>
+          <a:lstStyle/>
+          <a:p>
+            <a:pPr algn="ctr"/>
+            <a:r>
+              <a:rPr lang="en-US" sz="820" b="0" i="0" dirty="0">
+                <a:solidFill>
+                  <a:srgbClr val="1E2761"/>
+                </a:solidFill>
+                <a:latin typeface="Calibri"/>
+              </a:rPr>
+              <a:t>250m</a:t>
+            </a:r>
+          </a:p>
+        </p:txBody>
+      </p:sp>
+      <p:sp>
+        <p:nvSpPr>
+          <p:cNvPr id="24" name="sp24"/>
+          <p:cNvSpPr>
+            <a:spLocks noGrp="1"/>
+          </p:cNvSpPr>
+          <p:nvPr/>
+        </p:nvSpPr>
+        <p:spPr>
+          <a:xfrm>
+            <a:off x="2956285" y="1535000"/>
+            <a:ext cx="1006285" cy="375000"/>
+          </a:xfrm>
+          <a:prstGeom prst="rect">
+            <a:avLst/>
+          </a:prstGeom>
+          <a:solidFill>
+            <a:srgbClr val="FFFFFF"/>
+          </a:solidFill>
+          <a:ln>
+            <a:solidFill>
+              <a:srgbClr val="9EB3D8"/>
+            </a:solidFill>
+          </a:ln>
+        </p:spPr>
+        <p:txBody>
+          <a:bodyPr anchor="ctr" lIns="91440" rIns="91440" tIns="45720" bIns="45720"/>
+          <a:lstStyle/>
+          <a:p>
+            <a:pPr algn="ctr"/>
+            <a:r>
+              <a:rPr lang="en-US" sz="820" b="0" i="0" dirty="0">
+                <a:solidFill>
+                  <a:srgbClr val="1E2761"/>
+                </a:solidFill>
+                <a:latin typeface="Calibri"/>
+              </a:rPr>
+              <a:t>1,000m</a:t>
+            </a:r>
+          </a:p>
+        </p:txBody>
+      </p:sp>
+      <p:sp>
+        <p:nvSpPr>
+          <p:cNvPr id="25" name="sp25"/>
+          <p:cNvSpPr>
+            <a:spLocks noGrp="1"/>
+          </p:cNvSpPr>
+          <p:nvPr/>
+        </p:nvSpPr>
+        <p:spPr>
+          <a:xfrm>
+            <a:off x="3962570" y="1535000"/>
+            <a:ext cx="1006285" cy="375000"/>
+          </a:xfrm>
+          <a:prstGeom prst="rect">
+            <a:avLst/>
+          </a:prstGeom>
+          <a:solidFill>
+            <a:srgbClr val="FFFFFF"/>
+          </a:solidFill>
+          <a:ln>
+            <a:solidFill>
+              <a:srgbClr val="9EB3D8"/>
+            </a:solidFill>
+          </a:ln>
+        </p:spPr>
+        <p:txBody>
+          <a:bodyPr anchor="ctr" lIns="91440" rIns="91440" tIns="45720" bIns="45720"/>
+          <a:lstStyle/>
+          <a:p>
+            <a:pPr algn="ctr"/>
+            <a:r>
+              <a:rPr lang="en-US" sz="820" b="0" i="0" dirty="0">
+                <a:solidFill>
+                  <a:srgbClr val="1E2761"/>
+                </a:solidFill>
+                <a:latin typeface="Calibri"/>
+              </a:rPr>
+              <a:t>256 Mi</a:t>
+            </a:r>
+          </a:p>
+        </p:txBody>
+      </p:sp>
+      <p:sp>
+        <p:nvSpPr>
+          <p:cNvPr id="26" name="sp26"/>
+          <p:cNvSpPr>
+            <a:spLocks noGrp="1"/>
+          </p:cNvSpPr>
+          <p:nvPr/>
+        </p:nvSpPr>
+        <p:spPr>
+          <a:xfrm>
+            <a:off x="4968855" y="1535000"/>
+            <a:ext cx="1006285" cy="375000"/>
+          </a:xfrm>
+          <a:prstGeom prst="rect">
+            <a:avLst/>
+          </a:prstGeom>
+          <a:solidFill>
+            <a:srgbClr val="FFFFFF"/>
+          </a:solidFill>
+          <a:ln>
+            <a:solidFill>
+              <a:srgbClr val="9EB3D8"/>
+            </a:solidFill>
+          </a:ln>
+        </p:spPr>
+        <p:txBody>
+          <a:bodyPr anchor="ctr" lIns="91440" rIns="91440" tIns="45720" bIns="45720"/>
+          <a:lstStyle/>
+          <a:p>
+            <a:pPr algn="ctr"/>
+            <a:r>
+              <a:rPr lang="en-US" sz="820" b="0" i="0" dirty="0">
+                <a:solidFill>
+                  <a:srgbClr val="1E2761"/>
+                </a:solidFill>
+                <a:latin typeface="Calibri"/>
+              </a:rPr>
+              <a:t>512 Mi</a:t>
+            </a:r>
+          </a:p>
+        </p:txBody>
+      </p:sp>
+      <p:sp>
+        <p:nvSpPr>
+          <p:cNvPr id="27" name="sp27"/>
+          <p:cNvSpPr>
+            <a:spLocks noGrp="1"/>
+          </p:cNvSpPr>
+          <p:nvPr/>
+        </p:nvSpPr>
+        <p:spPr>
+          <a:xfrm>
+            <a:off x="5975140" y="1535000"/>
+            <a:ext cx="1006285" cy="375000"/>
+          </a:xfrm>
+          <a:prstGeom prst="rect">
+            <a:avLst/>
+          </a:prstGeom>
+          <a:solidFill>
+            <a:srgbClr val="FFFFFF"/>
+          </a:solidFill>
+          <a:ln>
+            <a:solidFill>
+              <a:srgbClr val="9EB3D8"/>
+            </a:solidFill>
+          </a:ln>
+        </p:spPr>
+        <p:txBody>
+          <a:bodyPr anchor="ctr" lIns="91440" rIns="91440" tIns="45720" bIns="45720"/>
+          <a:lstStyle/>
+          <a:p>
+            <a:pPr algn="ctr"/>
+            <a:r>
+              <a:rPr lang="en-US" sz="820" b="0" i="0" dirty="0">
+                <a:solidFill>
+                  <a:srgbClr val="1E2761"/>
+                </a:solidFill>
+                <a:latin typeface="Calibri"/>
+              </a:rPr>
+              <a:t>—</a:t>
+            </a:r>
+          </a:p>
+        </p:txBody>
+      </p:sp>
+      <p:sp>
+        <p:nvSpPr>
+          <p:cNvPr id="28" name="sp28"/>
+          <p:cNvSpPr>
+            <a:spLocks noGrp="1"/>
+          </p:cNvSpPr>
+          <p:nvPr/>
+        </p:nvSpPr>
+        <p:spPr>
+          <a:xfrm>
+            <a:off x="6981425" y="1535000"/>
+            <a:ext cx="1006285" cy="375000"/>
+          </a:xfrm>
+          <a:prstGeom prst="rect">
+            <a:avLst/>
+          </a:prstGeom>
+          <a:solidFill>
+            <a:srgbClr val="D6EAD6"/>
+          </a:solidFill>
+          <a:ln>
+            <a:solidFill>
+              <a:srgbClr val="9EB3D8"/>
+            </a:solidFill>
+          </a:ln>
+        </p:spPr>
+        <p:txBody>
+          <a:bodyPr anchor="ctr" lIns="91440" rIns="91440" tIns="45720" bIns="45720"/>
+          <a:lstStyle/>
+          <a:p>
+            <a:pPr algn="ctr"/>
+            <a:r>
+              <a:rPr lang="en-US" sz="820" b="1" i="0" dirty="0">
+                <a:solidFill>
+                  <a:srgbClr val="1A5C1A"/>
+                </a:solidFill>
+                <a:latin typeface="Calibri"/>
+              </a:rPr>
+              <a:t>2</a:t>
+            </a:r>
+          </a:p>
+        </p:txBody>
+      </p:sp>
+      <p:sp>
+        <p:nvSpPr>
+          <p:cNvPr id="29" name="sp29"/>
+          <p:cNvSpPr>
+            <a:spLocks noGrp="1"/>
+          </p:cNvSpPr>
+          <p:nvPr/>
+        </p:nvSpPr>
+        <p:spPr>
+          <a:xfrm>
+            <a:off x="7987710" y="1535000"/>
+            <a:ext cx="1006290" cy="375000"/>
+          </a:xfrm>
+          <a:prstGeom prst="rect">
+            <a:avLst/>
+          </a:prstGeom>
+          <a:solidFill>
+            <a:srgbClr val="FFFFFF"/>
+          </a:solidFill>
+          <a:ln>
+            <a:solidFill>
+              <a:srgbClr val="9EB3D8"/>
+            </a:solidFill>
+          </a:ln>
+        </p:spPr>
+        <p:txBody>
+          <a:bodyPr anchor="ctr" lIns="91440" rIns="91440" tIns="45720" bIns="45720"/>
+          <a:lstStyle/>
+          <a:p>
+            <a:pPr algn="ctr"/>
+            <a:r>
+              <a:rPr lang="en-US" sz="820" b="0" i="0" dirty="0">
+                <a:solidFill>
+                  <a:srgbClr val="1E2761"/>
+                </a:solidFill>
+                <a:latin typeface="Calibri"/>
+              </a:rPr>
+              <a:t>~50 rps</a:t>
+            </a:r>
+          </a:p>
+        </p:txBody>
+      </p:sp>
+      <p:sp>
+        <p:nvSpPr>
+          <p:cNvPr id="30" name="sp30"/>
+          <p:cNvSpPr>
+            <a:spLocks noGrp="1"/>
+          </p:cNvSpPr>
+          <p:nvPr/>
+        </p:nvSpPr>
+        <p:spPr>
+          <a:xfrm>
+            <a:off x="150000" y="1910000"/>
+            <a:ext cx="1800000" cy="375000"/>
+          </a:xfrm>
+          <a:prstGeom prst="rect">
+            <a:avLst/>
+          </a:prstGeom>
+          <a:solidFill>
+            <a:srgbClr val="CADCFC"/>
+          </a:solidFill>
+          <a:ln>
+            <a:solidFill>
+              <a:srgbClr val="9EB3D8"/>
+            </a:solidFill>
+          </a:ln>
+        </p:spPr>
+        <p:txBody>
+          <a:bodyPr anchor="ctr" lIns="91440" rIns="91440" tIns="45720" bIns="45720"/>
+          <a:lstStyle/>
+          <a:p>
+            <a:pPr algn="l"/>
+            <a:r>
+              <a:rPr lang="en-US" sz="820" b="1" i="0" dirty="0">
+                <a:solidFill>
+                  <a:srgbClr val="1E2761"/>
+                </a:solidFill>
+                <a:latin typeface="Calibri"/>
+              </a:rPr>
+              <a:t>Radius-to-Rest pod</a:t>
+            </a:r>
+          </a:p>
+        </p:txBody>
+      </p:sp>
+      <p:sp>
+        <p:nvSpPr>
+          <p:cNvPr id="31" name="sp31"/>
+          <p:cNvSpPr>
+            <a:spLocks noGrp="1"/>
+          </p:cNvSpPr>
+          <p:nvPr/>
+        </p:nvSpPr>
+        <p:spPr>
+          <a:xfrm>
+            <a:off x="1950000" y="1910000"/>
+            <a:ext cx="1006285" cy="375000"/>
+          </a:xfrm>
+          <a:prstGeom prst="rect">
+            <a:avLst/>
+          </a:prstGeom>
+          <a:solidFill>
+            <a:srgbClr val="CADCFC"/>
+          </a:solidFill>
+          <a:ln>
+            <a:solidFill>
+              <a:srgbClr val="9EB3D8"/>
+            </a:solidFill>
+          </a:ln>
+        </p:spPr>
+        <p:txBody>
+          <a:bodyPr anchor="ctr" lIns="91440" rIns="91440" tIns="45720" bIns="45720"/>
+          <a:lstStyle/>
+          <a:p>
+            <a:pPr algn="ctr"/>
+            <a:r>
+              <a:rPr lang="en-US" sz="820" b="0" i="0" dirty="0">
+                <a:solidFill>
+                  <a:srgbClr val="1E2761"/>
+                </a:solidFill>
+                <a:latin typeface="Calibri"/>
+              </a:rPr>
+              <a:t>250m</a:t>
+            </a:r>
+          </a:p>
+        </p:txBody>
+      </p:sp>
+      <p:sp>
+        <p:nvSpPr>
+          <p:cNvPr id="32" name="sp32"/>
+          <p:cNvSpPr>
+            <a:spLocks noGrp="1"/>
+          </p:cNvSpPr>
+          <p:nvPr/>
+        </p:nvSpPr>
+        <p:spPr>
+          <a:xfrm>
+            <a:off x="2956285" y="1910000"/>
+            <a:ext cx="1006285" cy="375000"/>
+          </a:xfrm>
+          <a:prstGeom prst="rect">
+            <a:avLst/>
+          </a:prstGeom>
+          <a:solidFill>
+            <a:srgbClr val="CADCFC"/>
+          </a:solidFill>
+          <a:ln>
+            <a:solidFill>
+              <a:srgbClr val="9EB3D8"/>
+            </a:solidFill>
+          </a:ln>
+        </p:spPr>
+        <p:txBody>
+          <a:bodyPr anchor="ctr" lIns="91440" rIns="91440" tIns="45720" bIns="45720"/>
+          <a:lstStyle/>
+          <a:p>
+            <a:pPr algn="ctr"/>
+            <a:r>
+              <a:rPr lang="en-US" sz="820" b="0" i="0" dirty="0">
+                <a:solidFill>
+                  <a:srgbClr val="1E2761"/>
+                </a:solidFill>
+                <a:latin typeface="Calibri"/>
+              </a:rPr>
+              <a:t>1,000m</a:t>
+            </a:r>
+          </a:p>
+        </p:txBody>
+      </p:sp>
+      <p:sp>
+        <p:nvSpPr>
+          <p:cNvPr id="33" name="sp33"/>
+          <p:cNvSpPr>
+            <a:spLocks noGrp="1"/>
+          </p:cNvSpPr>
+          <p:nvPr/>
+        </p:nvSpPr>
+        <p:spPr>
+          <a:xfrm>
+            <a:off x="3962570" y="1910000"/>
+            <a:ext cx="1006285" cy="375000"/>
+          </a:xfrm>
+          <a:prstGeom prst="rect">
+            <a:avLst/>
+          </a:prstGeom>
+          <a:solidFill>
+            <a:srgbClr val="CADCFC"/>
+          </a:solidFill>
+          <a:ln>
+            <a:solidFill>
+              <a:srgbClr val="9EB3D8"/>
+            </a:solidFill>
+          </a:ln>
+        </p:spPr>
+        <p:txBody>
+          <a:bodyPr anchor="ctr" lIns="91440" rIns="91440" tIns="45720" bIns="45720"/>
+          <a:lstStyle/>
+          <a:p>
+            <a:pPr algn="ctr"/>
+            <a:r>
+              <a:rPr lang="en-US" sz="820" b="0" i="0" dirty="0">
+                <a:solidFill>
+                  <a:srgbClr val="1E2761"/>
+                </a:solidFill>
+                <a:latin typeface="Calibri"/>
+              </a:rPr>
+              <a:t>128 Mi</a:t>
+            </a:r>
+          </a:p>
+        </p:txBody>
+      </p:sp>
+      <p:sp>
+        <p:nvSpPr>
+          <p:cNvPr id="34" name="sp34"/>
+          <p:cNvSpPr>
+            <a:spLocks noGrp="1"/>
+          </p:cNvSpPr>
+          <p:nvPr/>
+        </p:nvSpPr>
+        <p:spPr>
+          <a:xfrm>
+            <a:off x="4968855" y="1910000"/>
+            <a:ext cx="1006285" cy="375000"/>
+          </a:xfrm>
+          <a:prstGeom prst="rect">
+            <a:avLst/>
+          </a:prstGeom>
+          <a:solidFill>
+            <a:srgbClr val="CADCFC"/>
+          </a:solidFill>
+          <a:ln>
+            <a:solidFill>
+              <a:srgbClr val="9EB3D8"/>
+            </a:solidFill>
+          </a:ln>
+        </p:spPr>
+        <p:txBody>
+          <a:bodyPr anchor="ctr" lIns="91440" rIns="91440" tIns="45720" bIns="45720"/>
+          <a:lstStyle/>
+          <a:p>
+            <a:pPr algn="ctr"/>
+            <a:r>
+              <a:rPr lang="en-US" sz="820" b="0" i="0" dirty="0">
+                <a:solidFill>
+                  <a:srgbClr val="1E2761"/>
+                </a:solidFill>
+                <a:latin typeface="Calibri"/>
+              </a:rPr>
+              <a:t>256 Mi</a:t>
+            </a:r>
+          </a:p>
+        </p:txBody>
+      </p:sp>
+      <p:sp>
+        <p:nvSpPr>
+          <p:cNvPr id="35" name="sp35"/>
+          <p:cNvSpPr>
+            <a:spLocks noGrp="1"/>
+          </p:cNvSpPr>
+          <p:nvPr/>
+        </p:nvSpPr>
+        <p:spPr>
+          <a:xfrm>
+            <a:off x="5975140" y="1910000"/>
+            <a:ext cx="1006285" cy="375000"/>
+          </a:xfrm>
+          <a:prstGeom prst="rect">
+            <a:avLst/>
+          </a:prstGeom>
+          <a:solidFill>
+            <a:srgbClr val="CADCFC"/>
+          </a:solidFill>
+          <a:ln>
+            <a:solidFill>
+              <a:srgbClr val="9EB3D8"/>
+            </a:solidFill>
+          </a:ln>
+        </p:spPr>
+        <p:txBody>
+          <a:bodyPr anchor="ctr" lIns="91440" rIns="91440" tIns="45720" bIns="45720"/>
+          <a:lstStyle/>
+          <a:p>
+            <a:pPr algn="ctr"/>
+            <a:r>
+              <a:rPr lang="en-US" sz="820" b="0" i="0" dirty="0">
+                <a:solidFill>
+                  <a:srgbClr val="1E2761"/>
+                </a:solidFill>
+                <a:latin typeface="Calibri"/>
+              </a:rPr>
+              <a:t>—</a:t>
+            </a:r>
+          </a:p>
+        </p:txBody>
+      </p:sp>
+      <p:sp>
+        <p:nvSpPr>
+          <p:cNvPr id="36" name="sp36"/>
+          <p:cNvSpPr>
+            <a:spLocks noGrp="1"/>
+          </p:cNvSpPr>
+          <p:nvPr/>
+        </p:nvSpPr>
+        <p:spPr>
+          <a:xfrm>
+            <a:off x="6981425" y="1910000"/>
+            <a:ext cx="1006285" cy="375000"/>
+          </a:xfrm>
+          <a:prstGeom prst="rect">
+            <a:avLst/>
+          </a:prstGeom>
+          <a:solidFill>
+            <a:srgbClr val="D6EAD6"/>
+          </a:solidFill>
+          <a:ln>
+            <a:solidFill>
+              <a:srgbClr val="9EB3D8"/>
+            </a:solidFill>
+          </a:ln>
+        </p:spPr>
+        <p:txBody>
+          <a:bodyPr anchor="ctr" lIns="91440" rIns="91440" tIns="45720" bIns="45720"/>
+          <a:lstStyle/>
+          <a:p>
+            <a:pPr algn="ctr"/>
+            <a:r>
+              <a:rPr lang="en-US" sz="820" b="1" i="0" dirty="0">
+                <a:solidFill>
+                  <a:srgbClr val="1A5C1A"/>
+                </a:solidFill>
+                <a:latin typeface="Calibri"/>
+              </a:rPr>
+              <a:t>4</a:t>
+            </a:r>
+          </a:p>
+        </p:txBody>
+      </p:sp>
+      <p:sp>
+        <p:nvSpPr>
+          <p:cNvPr id="37" name="sp37"/>
+          <p:cNvSpPr>
+            <a:spLocks noGrp="1"/>
+          </p:cNvSpPr>
+          <p:nvPr/>
+        </p:nvSpPr>
+        <p:spPr>
+          <a:xfrm>
+            <a:off x="7987710" y="1910000"/>
+            <a:ext cx="1006290" cy="375000"/>
+          </a:xfrm>
+          <a:prstGeom prst="rect">
+            <a:avLst/>
+          </a:prstGeom>
+          <a:solidFill>
+            <a:srgbClr val="D0EEF2"/>
+          </a:solidFill>
+          <a:ln>
+            <a:solidFill>
+              <a:srgbClr val="9EB3D8"/>
+            </a:solidFill>
+          </a:ln>
+        </p:spPr>
+        <p:txBody>
+          <a:bodyPr anchor="ctr" lIns="91440" rIns="91440" tIns="45720" bIns="45720"/>
+          <a:lstStyle/>
+          <a:p>
+            <a:pPr algn="ctr"/>
+            <a:r>
+              <a:rPr lang="en-US" sz="820" b="1" i="0" dirty="0">
+                <a:solidFill>
+                  <a:srgbClr val="014F5A"/>
+                </a:solidFill>
+                <a:latin typeface="Calibri"/>
+              </a:rPr>
+              <a:t>~500 rps</a:t>
+            </a:r>
+          </a:p>
+        </p:txBody>
+      </p:sp>
+      <p:sp>
+        <p:nvSpPr>
+          <p:cNvPr id="38" name="sp38"/>
+          <p:cNvSpPr>
+            <a:spLocks noGrp="1"/>
+          </p:cNvSpPr>
+          <p:nvPr/>
+        </p:nvSpPr>
+        <p:spPr>
+          <a:xfrm>
+            <a:off x="150000" y="2285000"/>
+            <a:ext cx="1800000" cy="375000"/>
+          </a:xfrm>
+          <a:prstGeom prst="rect">
+            <a:avLst/>
+          </a:prstGeom>
+          <a:solidFill>
+            <a:srgbClr val="FFFFFF"/>
+          </a:solidFill>
+          <a:ln>
+            <a:solidFill>
+              <a:srgbClr val="9EB3D8"/>
+            </a:solidFill>
+          </a:ln>
+        </p:spPr>
+        <p:txBody>
+          <a:bodyPr anchor="ctr" lIns="91440" rIns="91440" tIns="45720" bIns="45720"/>
+          <a:lstStyle/>
+          <a:p>
+            <a:pPr algn="l"/>
+            <a:r>
+              <a:rPr lang="en-US" sz="820" b="1" i="0" dirty="0">
+                <a:solidFill>
+                  <a:srgbClr val="1E2761"/>
+                </a:solidFill>
+                <a:latin typeface="Calibri"/>
+              </a:rPr>
+              <a:t>PostgreSQL (primary)</a:t>
+            </a:r>
+          </a:p>
+        </p:txBody>
+      </p:sp>
+      <p:sp>
+        <p:nvSpPr>
+          <p:cNvPr id="39" name="sp39"/>
+          <p:cNvSpPr>
+            <a:spLocks noGrp="1"/>
+          </p:cNvSpPr>
+          <p:nvPr/>
+        </p:nvSpPr>
+        <p:spPr>
+          <a:xfrm>
+            <a:off x="1950000" y="2285000"/>
+            <a:ext cx="1006285" cy="375000"/>
+          </a:xfrm>
+          <a:prstGeom prst="rect">
+            <a:avLst/>
+          </a:prstGeom>
+          <a:solidFill>
+            <a:srgbClr val="FFFFFF"/>
+          </a:solidFill>
+          <a:ln>
+            <a:solidFill>
+              <a:srgbClr val="9EB3D8"/>
+            </a:solidFill>
+          </a:ln>
+        </p:spPr>
+        <p:txBody>
+          <a:bodyPr anchor="ctr" lIns="91440" rIns="91440" tIns="45720" bIns="45720"/>
+          <a:lstStyle/>
+          <a:p>
+            <a:pPr algn="ctr"/>
+            <a:r>
+              <a:rPr lang="en-US" sz="820" b="0" i="0" dirty="0">
+                <a:solidFill>
+                  <a:srgbClr val="1E2761"/>
+                </a:solidFill>
+                <a:latin typeface="Calibri"/>
+              </a:rPr>
+              <a:t>500m</a:t>
+            </a:r>
+          </a:p>
+        </p:txBody>
+      </p:sp>
+      <p:sp>
+        <p:nvSpPr>
+          <p:cNvPr id="40" name="sp40"/>
+          <p:cNvSpPr>
+            <a:spLocks noGrp="1"/>
+          </p:cNvSpPr>
+          <p:nvPr/>
+        </p:nvSpPr>
+        <p:spPr>
+          <a:xfrm>
+            <a:off x="2956285" y="2285000"/>
+            <a:ext cx="1006285" cy="375000"/>
+          </a:xfrm>
+          <a:prstGeom prst="rect">
+            <a:avLst/>
+          </a:prstGeom>
+          <a:solidFill>
+            <a:srgbClr val="FFFFFF"/>
+          </a:solidFill>
+          <a:ln>
+            <a:solidFill>
+              <a:srgbClr val="9EB3D8"/>
+            </a:solidFill>
+          </a:ln>
+        </p:spPr>
+        <p:txBody>
+          <a:bodyPr anchor="ctr" lIns="91440" rIns="91440" tIns="45720" bIns="45720"/>
+          <a:lstStyle/>
+          <a:p>
+            <a:pPr algn="ctr"/>
+            <a:r>
+              <a:rPr lang="en-US" sz="820" b="0" i="0" dirty="0">
+                <a:solidFill>
+                  <a:srgbClr val="1E2761"/>
+                </a:solidFill>
+                <a:latin typeface="Calibri"/>
+              </a:rPr>
+              <a:t>2,000m</a:t>
+            </a:r>
+          </a:p>
+        </p:txBody>
+      </p:sp>
+      <p:sp>
+        <p:nvSpPr>
+          <p:cNvPr id="41" name="sp41"/>
+          <p:cNvSpPr>
+            <a:spLocks noGrp="1"/>
+          </p:cNvSpPr>
+          <p:nvPr/>
+        </p:nvSpPr>
+        <p:spPr>
+          <a:xfrm>
+            <a:off x="3962570" y="2285000"/>
+            <a:ext cx="1006285" cy="375000"/>
+          </a:xfrm>
+          <a:prstGeom prst="rect">
+            <a:avLst/>
+          </a:prstGeom>
+          <a:solidFill>
+            <a:srgbClr val="FFFFFF"/>
+          </a:solidFill>
+          <a:ln>
+            <a:solidFill>
+              <a:srgbClr val="9EB3D8"/>
+            </a:solidFill>
+          </a:ln>
+        </p:spPr>
+        <p:txBody>
+          <a:bodyPr anchor="ctr" lIns="91440" rIns="91440" tIns="45720" bIns="45720"/>
+          <a:lstStyle/>
+          <a:p>
+            <a:pPr algn="ctr"/>
+            <a:r>
+              <a:rPr lang="en-US" sz="820" b="0" i="0" dirty="0">
+                <a:solidFill>
+                  <a:srgbClr val="1E2761"/>
+                </a:solidFill>
+                <a:latin typeface="Calibri"/>
+              </a:rPr>
+              <a:t>512 Mi</a:t>
+            </a:r>
+          </a:p>
+        </p:txBody>
+      </p:sp>
+      <p:sp>
+        <p:nvSpPr>
+          <p:cNvPr id="42" name="sp42"/>
+          <p:cNvSpPr>
+            <a:spLocks noGrp="1"/>
+          </p:cNvSpPr>
+          <p:nvPr/>
+        </p:nvSpPr>
+        <p:spPr>
+          <a:xfrm>
+            <a:off x="4968855" y="2285000"/>
+            <a:ext cx="1006285" cy="375000"/>
+          </a:xfrm>
+          <a:prstGeom prst="rect">
+            <a:avLst/>
+          </a:prstGeom>
+          <a:solidFill>
+            <a:srgbClr val="FFFFFF"/>
+          </a:solidFill>
+          <a:ln>
+            <a:solidFill>
+              <a:srgbClr val="9EB3D8"/>
+            </a:solidFill>
+          </a:ln>
+        </p:spPr>
+        <p:txBody>
+          <a:bodyPr anchor="ctr" lIns="91440" rIns="91440" tIns="45720" bIns="45720"/>
+          <a:lstStyle/>
+          <a:p>
+            <a:pPr algn="ctr"/>
+            <a:r>
+              <a:rPr lang="en-US" sz="820" b="0" i="0" dirty="0">
+                <a:solidFill>
+                  <a:srgbClr val="1E2761"/>
+                </a:solidFill>
+                <a:latin typeface="Calibri"/>
+              </a:rPr>
+              <a:t>2,048 Mi</a:t>
+            </a:r>
+          </a:p>
+        </p:txBody>
+      </p:sp>
+      <p:sp>
+        <p:nvSpPr>
+          <p:cNvPr id="43" name="sp43"/>
+          <p:cNvSpPr>
+            <a:spLocks noGrp="1"/>
+          </p:cNvSpPr>
+          <p:nvPr/>
+        </p:nvSpPr>
+        <p:spPr>
+          <a:xfrm>
+            <a:off x="5975140" y="2285000"/>
+            <a:ext cx="1006285" cy="375000"/>
+          </a:xfrm>
+          <a:prstGeom prst="rect">
+            <a:avLst/>
+          </a:prstGeom>
+          <a:solidFill>
+            <a:srgbClr val="FFF3CD"/>
+          </a:solidFill>
+          <a:ln>
+            <a:solidFill>
+              <a:srgbClr val="9EB3D8"/>
+            </a:solidFill>
+          </a:ln>
+        </p:spPr>
+        <p:txBody>
+          <a:bodyPr anchor="ctr" lIns="91440" rIns="91440" tIns="45720" bIns="45720"/>
+          <a:lstStyle/>
+          <a:p>
+            <a:pPr algn="ctr"/>
+            <a:r>
+              <a:rPr lang="en-US" sz="820" b="1" i="0" dirty="0">
+                <a:solidFill>
+                  <a:srgbClr val="7B4F00"/>
+                </a:solidFill>
+                <a:latin typeface="Calibri"/>
+              </a:rPr>
+              <a:t>20 Gi</a:t>
+            </a:r>
+          </a:p>
+        </p:txBody>
+      </p:sp>
+      <p:sp>
+        <p:nvSpPr>
+          <p:cNvPr id="44" name="sp44"/>
+          <p:cNvSpPr>
+            <a:spLocks noGrp="1"/>
+          </p:cNvSpPr>
+          <p:nvPr/>
+        </p:nvSpPr>
+        <p:spPr>
+          <a:xfrm>
+            <a:off x="6981425" y="2285000"/>
+            <a:ext cx="1006285" cy="375000"/>
+          </a:xfrm>
+          <a:prstGeom prst="rect">
+            <a:avLst/>
+          </a:prstGeom>
+          <a:solidFill>
+            <a:srgbClr val="D6EAD6"/>
+          </a:solidFill>
+          <a:ln>
+            <a:solidFill>
+              <a:srgbClr val="9EB3D8"/>
+            </a:solidFill>
+          </a:ln>
+        </p:spPr>
+        <p:txBody>
+          <a:bodyPr anchor="ctr" lIns="91440" rIns="91440" tIns="45720" bIns="45720"/>
+          <a:lstStyle/>
+          <a:p>
+            <a:pPr algn="ctr"/>
+            <a:r>
+              <a:rPr lang="en-US" sz="820" b="1" i="0" dirty="0">
+                <a:solidFill>
+                  <a:srgbClr val="1A5C1A"/>
+                </a:solidFill>
+                <a:latin typeface="Calibri"/>
+              </a:rPr>
+              <a:t>1</a:t>
+            </a:r>
+          </a:p>
+        </p:txBody>
+      </p:sp>
+      <p:sp>
+        <p:nvSpPr>
+          <p:cNvPr id="45" name="sp45"/>
+          <p:cNvSpPr>
+            <a:spLocks noGrp="1"/>
+          </p:cNvSpPr>
+          <p:nvPr/>
+        </p:nvSpPr>
+        <p:spPr>
+          <a:xfrm>
+            <a:off x="7987710" y="2285000"/>
+            <a:ext cx="1006290" cy="375000"/>
+          </a:xfrm>
+          <a:prstGeom prst="rect">
+            <a:avLst/>
+          </a:prstGeom>
+          <a:solidFill>
+            <a:srgbClr val="D0EEF2"/>
+          </a:solidFill>
+          <a:ln>
+            <a:solidFill>
+              <a:srgbClr val="9EB3D8"/>
+            </a:solidFill>
+          </a:ln>
+        </p:spPr>
+        <p:txBody>
+          <a:bodyPr anchor="ctr" lIns="91440" rIns="91440" tIns="45720" bIns="45720"/>
+          <a:lstStyle/>
+          <a:p>
+            <a:pPr algn="ctr"/>
+            <a:r>
+              <a:rPr lang="en-US" sz="820" b="1" i="0" dirty="0">
+                <a:solidFill>
+                  <a:srgbClr val="014F5A"/>
+                </a:solidFill>
+                <a:latin typeface="Calibri"/>
+              </a:rPr>
+              <a:t>~2,000 qps</a:t>
+            </a:r>
+          </a:p>
+        </p:txBody>
+      </p:sp>
+      <p:sp>
+        <p:nvSpPr>
+          <p:cNvPr id="46" name="sp46"/>
+          <p:cNvSpPr>
+            <a:spLocks noGrp="1"/>
+          </p:cNvSpPr>
+          <p:nvPr/>
+        </p:nvSpPr>
+        <p:spPr>
+          <a:xfrm>
+            <a:off x="150000" y="2660000"/>
+            <a:ext cx="1800000" cy="375000"/>
+          </a:xfrm>
+          <a:prstGeom prst="rect">
+            <a:avLst/>
+          </a:prstGeom>
+          <a:solidFill>
+            <a:srgbClr val="CADCFC"/>
+          </a:solidFill>
+          <a:ln>
+            <a:solidFill>
+              <a:srgbClr val="9EB3D8"/>
+            </a:solidFill>
+          </a:ln>
+        </p:spPr>
+        <p:txBody>
+          <a:bodyPr anchor="ctr" lIns="91440" rIns="91440" tIns="45720" bIns="45720"/>
+          <a:lstStyle/>
+          <a:p>
+            <a:pPr algn="l"/>
+            <a:r>
+              <a:rPr lang="en-US" sz="820" b="1" i="0" dirty="0">
+                <a:solidFill>
+                  <a:srgbClr val="1E2761"/>
+                </a:solidFill>
+                <a:latin typeface="Calibri"/>
+              </a:rPr>
+              <a:t>PostgreSQL (replica)</a:t>
+            </a:r>
+          </a:p>
+        </p:txBody>
+      </p:sp>
+      <p:sp>
+        <p:nvSpPr>
+          <p:cNvPr id="47" name="sp47"/>
+          <p:cNvSpPr>
+            <a:spLocks noGrp="1"/>
+          </p:cNvSpPr>
+          <p:nvPr/>
+        </p:nvSpPr>
+        <p:spPr>
+          <a:xfrm>
+            <a:off x="1950000" y="2660000"/>
+            <a:ext cx="1006285" cy="375000"/>
+          </a:xfrm>
+          <a:prstGeom prst="rect">
+            <a:avLst/>
+          </a:prstGeom>
+          <a:solidFill>
+            <a:srgbClr val="CADCFC"/>
+          </a:solidFill>
+          <a:ln>
+            <a:solidFill>
+              <a:srgbClr val="9EB3D8"/>
+            </a:solidFill>
+          </a:ln>
+        </p:spPr>
+        <p:txBody>
+          <a:bodyPr anchor="ctr" lIns="91440" rIns="91440" tIns="45720" bIns="45720"/>
+          <a:lstStyle/>
+          <a:p>
+            <a:pPr algn="ctr"/>
+            <a:r>
+              <a:rPr lang="en-US" sz="820" b="0" i="0" dirty="0">
+                <a:solidFill>
+                  <a:srgbClr val="1E2761"/>
+                </a:solidFill>
+                <a:latin typeface="Calibri"/>
+              </a:rPr>
+              <a:t>500m</a:t>
+            </a:r>
+          </a:p>
+        </p:txBody>
+      </p:sp>
+      <p:sp>
+        <p:nvSpPr>
+          <p:cNvPr id="48" name="sp48"/>
+          <p:cNvSpPr>
+            <a:spLocks noGrp="1"/>
+          </p:cNvSpPr>
+          <p:nvPr/>
+        </p:nvSpPr>
+        <p:spPr>
+          <a:xfrm>
+            <a:off x="2956285" y="2660000"/>
+            <a:ext cx="1006285" cy="375000"/>
+          </a:xfrm>
+          <a:prstGeom prst="rect">
+            <a:avLst/>
+          </a:prstGeom>
+          <a:solidFill>
+            <a:srgbClr val="CADCFC"/>
+          </a:solidFill>
+          <a:ln>
+            <a:solidFill>
+              <a:srgbClr val="9EB3D8"/>
+            </a:solidFill>
+          </a:ln>
+        </p:spPr>
+        <p:txBody>
+          <a:bodyPr anchor="ctr" lIns="91440" rIns="91440" tIns="45720" bIns="45720"/>
+          <a:lstStyle/>
+          <a:p>
+            <a:pPr algn="ctr"/>
+            <a:r>
+              <a:rPr lang="en-US" sz="820" b="0" i="0" dirty="0">
+                <a:solidFill>
+                  <a:srgbClr val="1E2761"/>
+                </a:solidFill>
+                <a:latin typeface="Calibri"/>
+              </a:rPr>
+              <a:t>2,000m</a:t>
+            </a:r>
+          </a:p>
+        </p:txBody>
+      </p:sp>
+      <p:sp>
+        <p:nvSpPr>
+          <p:cNvPr id="49" name="sp49"/>
+          <p:cNvSpPr>
+            <a:spLocks noGrp="1"/>
+          </p:cNvSpPr>
+          <p:nvPr/>
+        </p:nvSpPr>
+        <p:spPr>
+          <a:xfrm>
+            <a:off x="3962570" y="2660000"/>
+            <a:ext cx="1006285" cy="375000"/>
+          </a:xfrm>
+          <a:prstGeom prst="rect">
+            <a:avLst/>
+          </a:prstGeom>
+          <a:solidFill>
+            <a:srgbClr val="CADCFC"/>
+          </a:solidFill>
+          <a:ln>
+            <a:solidFill>
+              <a:srgbClr val="9EB3D8"/>
+            </a:solidFill>
+          </a:ln>
+        </p:spPr>
+        <p:txBody>
+          <a:bodyPr anchor="ctr" lIns="91440" rIns="91440" tIns="45720" bIns="45720"/>
+          <a:lstStyle/>
+          <a:p>
+            <a:pPr algn="ctr"/>
+            <a:r>
+              <a:rPr lang="en-US" sz="820" b="0" i="0" dirty="0">
+                <a:solidFill>
+                  <a:srgbClr val="1E2761"/>
+                </a:solidFill>
+                <a:latin typeface="Calibri"/>
+              </a:rPr>
+              <a:t>512 Mi</a:t>
+            </a:r>
+          </a:p>
+        </p:txBody>
+      </p:sp>
+      <p:sp>
+        <p:nvSpPr>
+          <p:cNvPr id="50" name="sp50"/>
+          <p:cNvSpPr>
+            <a:spLocks noGrp="1"/>
+          </p:cNvSpPr>
+          <p:nvPr/>
+        </p:nvSpPr>
+        <p:spPr>
+          <a:xfrm>
+            <a:off x="4968855" y="2660000"/>
+            <a:ext cx="1006285" cy="375000"/>
+          </a:xfrm>
+          <a:prstGeom prst="rect">
+            <a:avLst/>
+          </a:prstGeom>
+          <a:solidFill>
+            <a:srgbClr val="CADCFC"/>
+          </a:solidFill>
+          <a:ln>
+            <a:solidFill>
+              <a:srgbClr val="9EB3D8"/>
+            </a:solidFill>
+          </a:ln>
+        </p:spPr>
+        <p:txBody>
+          <a:bodyPr anchor="ctr" lIns="91440" rIns="91440" tIns="45720" bIns="45720"/>
+          <a:lstStyle/>
+          <a:p>
+            <a:pPr algn="ctr"/>
+            <a:r>
+              <a:rPr lang="en-US" sz="820" b="0" i="0" dirty="0">
+                <a:solidFill>
+                  <a:srgbClr val="1E2761"/>
+                </a:solidFill>
+                <a:latin typeface="Calibri"/>
+              </a:rPr>
+              <a:t>2,048 Mi</a:t>
+            </a:r>
+          </a:p>
+        </p:txBody>
+      </p:sp>
+      <p:sp>
+        <p:nvSpPr>
+          <p:cNvPr id="51" name="sp51"/>
+          <p:cNvSpPr>
+            <a:spLocks noGrp="1"/>
+          </p:cNvSpPr>
+          <p:nvPr/>
+        </p:nvSpPr>
+        <p:spPr>
+          <a:xfrm>
+            <a:off x="5975140" y="2660000"/>
+            <a:ext cx="1006285" cy="375000"/>
+          </a:xfrm>
+          <a:prstGeom prst="rect">
+            <a:avLst/>
+          </a:prstGeom>
+          <a:solidFill>
+            <a:srgbClr val="FFF3CD"/>
+          </a:solidFill>
+          <a:ln>
+            <a:solidFill>
+              <a:srgbClr val="9EB3D8"/>
+            </a:solidFill>
+          </a:ln>
+        </p:spPr>
+        <p:txBody>
+          <a:bodyPr anchor="ctr" lIns="91440" rIns="91440" tIns="45720" bIns="45720"/>
+          <a:lstStyle/>
+          <a:p>
+            <a:pPr algn="ctr"/>
+            <a:r>
+              <a:rPr lang="en-US" sz="820" b="1" i="0" dirty="0">
+                <a:solidFill>
+                  <a:srgbClr val="7B4F00"/>
+                </a:solidFill>
+                <a:latin typeface="Calibri"/>
+              </a:rPr>
+              <a:t>20 Gi</a:t>
+            </a:r>
+          </a:p>
+        </p:txBody>
+      </p:sp>
+      <p:sp>
+        <p:nvSpPr>
+          <p:cNvPr id="52" name="sp52"/>
+          <p:cNvSpPr>
+            <a:spLocks noGrp="1"/>
+          </p:cNvSpPr>
+          <p:nvPr/>
+        </p:nvSpPr>
+        <p:spPr>
+          <a:xfrm>
+            <a:off x="6981425" y="2660000"/>
+            <a:ext cx="1006285" cy="375000"/>
+          </a:xfrm>
+          <a:prstGeom prst="rect">
+            <a:avLst/>
+          </a:prstGeom>
+          <a:solidFill>
+            <a:srgbClr val="D6EAD6"/>
+          </a:solidFill>
+          <a:ln>
+            <a:solidFill>
+              <a:srgbClr val="9EB3D8"/>
+            </a:solidFill>
+          </a:ln>
+        </p:spPr>
+        <p:txBody>
+          <a:bodyPr anchor="ctr" lIns="91440" rIns="91440" tIns="45720" bIns="45720"/>
+          <a:lstStyle/>
+          <a:p>
+            <a:pPr algn="ctr"/>
+            <a:r>
+              <a:rPr lang="en-US" sz="820" b="1" i="0" dirty="0">
+                <a:solidFill>
+                  <a:srgbClr val="1A5C1A"/>
+                </a:solidFill>
+                <a:latin typeface="Calibri"/>
+              </a:rPr>
+              <a:t>2</a:t>
+            </a:r>
+          </a:p>
+        </p:txBody>
+      </p:sp>
+      <p:sp>
+        <p:nvSpPr>
+          <p:cNvPr id="53" name="sp53"/>
+          <p:cNvSpPr>
+            <a:spLocks noGrp="1"/>
+          </p:cNvSpPr>
+          <p:nvPr/>
+        </p:nvSpPr>
+        <p:spPr>
+          <a:xfrm>
+            <a:off x="7987710" y="2660000"/>
+            <a:ext cx="1006290" cy="375000"/>
+          </a:xfrm>
+          <a:prstGeom prst="rect">
+            <a:avLst/>
+          </a:prstGeom>
+          <a:solidFill>
+            <a:srgbClr val="D6EAD6"/>
+          </a:solidFill>
+          <a:ln>
+            <a:solidFill>
+              <a:srgbClr val="9EB3D8"/>
+            </a:solidFill>
+          </a:ln>
+        </p:spPr>
+        <p:txBody>
+          <a:bodyPr anchor="ctr" lIns="91440" rIns="91440" tIns="45720" bIns="45720"/>
+          <a:lstStyle/>
+          <a:p>
+            <a:pPr algn="ctr"/>
+            <a:r>
+              <a:rPr lang="en-US" sz="820" b="1" i="0" dirty="0">
+                <a:solidFill>
+                  <a:srgbClr val="1A5C1A"/>
+                </a:solidFill>
+                <a:latin typeface="Calibri"/>
+              </a:rPr>
+              <a:t>~5,000 qps</a:t>
+            </a:r>
+          </a:p>
+        </p:txBody>
+      </p:sp>
+      <p:sp>
+        <p:nvSpPr>
+          <p:cNvPr id="54" name="sp54"/>
+          <p:cNvSpPr>
+            <a:spLocks noGrp="1"/>
+          </p:cNvSpPr>
+          <p:nvPr/>
+        </p:nvSpPr>
+        <p:spPr>
+          <a:xfrm>
+            <a:off x="150000" y="3035000"/>
+            <a:ext cx="1800000" cy="375000"/>
+          </a:xfrm>
+          <a:prstGeom prst="rect">
+            <a:avLst/>
+          </a:prstGeom>
+          <a:solidFill>
+            <a:srgbClr val="FFFFFF"/>
+          </a:solidFill>
+          <a:ln>
+            <a:solidFill>
+              <a:srgbClr val="9EB3D8"/>
+            </a:solidFill>
+          </a:ln>
+        </p:spPr>
+        <p:txBody>
+          <a:bodyPr anchor="ctr" lIns="91440" rIns="91440" tIns="45720" bIns="45720"/>
+          <a:lstStyle/>
+          <a:p>
+            <a:pPr algn="l"/>
+            <a:r>
+              <a:rPr lang="en-US" sz="820" b="1" i="0" dirty="0">
+                <a:solidFill>
+                  <a:srgbClr val="1E2761"/>
+                </a:solidFill>
+                <a:latin typeface="Calibri"/>
+              </a:rPr>
+              <a:t>PgBouncer</a:t>
+            </a:r>
+          </a:p>
+        </p:txBody>
+      </p:sp>
+      <p:sp>
+        <p:nvSpPr>
+          <p:cNvPr id="55" name="sp55"/>
+          <p:cNvSpPr>
+            <a:spLocks noGrp="1"/>
+          </p:cNvSpPr>
+          <p:nvPr/>
+        </p:nvSpPr>
+        <p:spPr>
+          <a:xfrm>
+            <a:off x="1950000" y="3035000"/>
+            <a:ext cx="1006285" cy="375000"/>
+          </a:xfrm>
+          <a:prstGeom prst="rect">
+            <a:avLst/>
+          </a:prstGeom>
+          <a:solidFill>
+            <a:srgbClr val="FFFFFF"/>
+          </a:solidFill>
+          <a:ln>
+            <a:solidFill>
+              <a:srgbClr val="9EB3D8"/>
+            </a:solidFill>
+          </a:ln>
+        </p:spPr>
+        <p:txBody>
+          <a:bodyPr anchor="ctr" lIns="91440" rIns="91440" tIns="45720" bIns="45720"/>
+          <a:lstStyle/>
+          <a:p>
+            <a:pPr algn="ctr"/>
+            <a:r>
+              <a:rPr lang="en-US" sz="820" b="0" i="0" dirty="0">
+                <a:solidFill>
+                  <a:srgbClr val="1E2761"/>
+                </a:solidFill>
+                <a:latin typeface="Calibri"/>
+              </a:rPr>
+              <a:t>100m</a:t>
+            </a:r>
+          </a:p>
+        </p:txBody>
+      </p:sp>
+      <p:sp>
+        <p:nvSpPr>
+          <p:cNvPr id="56" name="sp56"/>
+          <p:cNvSpPr>
+            <a:spLocks noGrp="1"/>
+          </p:cNvSpPr>
+          <p:nvPr/>
+        </p:nvSpPr>
+        <p:spPr>
+          <a:xfrm>
+            <a:off x="2956285" y="3035000"/>
+            <a:ext cx="1006285" cy="375000"/>
+          </a:xfrm>
+          <a:prstGeom prst="rect">
+            <a:avLst/>
+          </a:prstGeom>
+          <a:solidFill>
+            <a:srgbClr val="FFFFFF"/>
+          </a:solidFill>
+          <a:ln>
+            <a:solidFill>
+              <a:srgbClr val="9EB3D8"/>
+            </a:solidFill>
+          </a:ln>
+        </p:spPr>
+        <p:txBody>
+          <a:bodyPr anchor="ctr" lIns="91440" rIns="91440" tIns="45720" bIns="45720"/>
+          <a:lstStyle/>
+          <a:p>
+            <a:pPr algn="ctr"/>
+            <a:r>
+              <a:rPr lang="en-US" sz="820" b="0" i="0" dirty="0">
+                <a:solidFill>
+                  <a:srgbClr val="1E2761"/>
+                </a:solidFill>
+                <a:latin typeface="Calibri"/>
+              </a:rPr>
+              <a:t>500m</a:t>
+            </a:r>
+          </a:p>
+        </p:txBody>
+      </p:sp>
+      <p:sp>
+        <p:nvSpPr>
+          <p:cNvPr id="57" name="sp57"/>
+          <p:cNvSpPr>
+            <a:spLocks noGrp="1"/>
+          </p:cNvSpPr>
+          <p:nvPr/>
+        </p:nvSpPr>
+        <p:spPr>
+          <a:xfrm>
+            <a:off x="3962570" y="3035000"/>
+            <a:ext cx="1006285" cy="375000"/>
+          </a:xfrm>
+          <a:prstGeom prst="rect">
+            <a:avLst/>
+          </a:prstGeom>
+          <a:solidFill>
+            <a:srgbClr val="FFFFFF"/>
+          </a:solidFill>
+          <a:ln>
+            <a:solidFill>
+              <a:srgbClr val="9EB3D8"/>
+            </a:solidFill>
+          </a:ln>
+        </p:spPr>
+        <p:txBody>
+          <a:bodyPr anchor="ctr" lIns="91440" rIns="91440" tIns="45720" bIns="45720"/>
+          <a:lstStyle/>
+          <a:p>
+            <a:pPr algn="ctr"/>
+            <a:r>
+              <a:rPr lang="en-US" sz="820" b="0" i="0" dirty="0">
+                <a:solidFill>
+                  <a:srgbClr val="1E2761"/>
+                </a:solidFill>
+                <a:latin typeface="Calibri"/>
+              </a:rPr>
+              <a:t>64 Mi</a:t>
+            </a:r>
+          </a:p>
+        </p:txBody>
+      </p:sp>
+      <p:sp>
+        <p:nvSpPr>
+          <p:cNvPr id="58" name="sp58"/>
+          <p:cNvSpPr>
+            <a:spLocks noGrp="1"/>
+          </p:cNvSpPr>
+          <p:nvPr/>
+        </p:nvSpPr>
+        <p:spPr>
+          <a:xfrm>
+            <a:off x="4968855" y="3035000"/>
+            <a:ext cx="1006285" cy="375000"/>
+          </a:xfrm>
+          <a:prstGeom prst="rect">
+            <a:avLst/>
+          </a:prstGeom>
+          <a:solidFill>
+            <a:srgbClr val="FFFFFF"/>
+          </a:solidFill>
+          <a:ln>
+            <a:solidFill>
+              <a:srgbClr val="9EB3D8"/>
+            </a:solidFill>
+          </a:ln>
+        </p:spPr>
+        <p:txBody>
+          <a:bodyPr anchor="ctr" lIns="91440" rIns="91440" tIns="45720" bIns="45720"/>
+          <a:lstStyle/>
+          <a:p>
+            <a:pPr algn="ctr"/>
+            <a:r>
+              <a:rPr lang="en-US" sz="820" b="0" i="0" dirty="0">
+                <a:solidFill>
+                  <a:srgbClr val="1E2761"/>
+                </a:solidFill>
+                <a:latin typeface="Calibri"/>
+              </a:rPr>
+              <a:t>128 Mi</a:t>
+            </a:r>
+          </a:p>
+        </p:txBody>
+      </p:sp>
+      <p:sp>
+        <p:nvSpPr>
+          <p:cNvPr id="59" name="sp59"/>
+          <p:cNvSpPr>
+            <a:spLocks noGrp="1"/>
+          </p:cNvSpPr>
+          <p:nvPr/>
+        </p:nvSpPr>
+        <p:spPr>
+          <a:xfrm>
+            <a:off x="5975140" y="3035000"/>
+            <a:ext cx="1006285" cy="375000"/>
+          </a:xfrm>
+          <a:prstGeom prst="rect">
+            <a:avLst/>
+          </a:prstGeom>
+          <a:solidFill>
+            <a:srgbClr val="FFFFFF"/>
+          </a:solidFill>
+          <a:ln>
+            <a:solidFill>
+              <a:srgbClr val="9EB3D8"/>
+            </a:solidFill>
+          </a:ln>
+        </p:spPr>
+        <p:txBody>
+          <a:bodyPr anchor="ctr" lIns="91440" rIns="91440" tIns="45720" bIns="45720"/>
+          <a:lstStyle/>
+          <a:p>
+            <a:pPr algn="ctr"/>
+            <a:r>
+              <a:rPr lang="en-US" sz="820" b="0" i="0" dirty="0">
+                <a:solidFill>
+                  <a:srgbClr val="1E2761"/>
+                </a:solidFill>
+                <a:latin typeface="Calibri"/>
+              </a:rPr>
+              <a:t>—</a:t>
+            </a:r>
+          </a:p>
+        </p:txBody>
+      </p:sp>
+      <p:sp>
+        <p:nvSpPr>
+          <p:cNvPr id="60" name="sp60"/>
+          <p:cNvSpPr>
+            <a:spLocks noGrp="1"/>
+          </p:cNvSpPr>
+          <p:nvPr/>
+        </p:nvSpPr>
+        <p:spPr>
+          <a:xfrm>
+            <a:off x="6981425" y="3035000"/>
+            <a:ext cx="1006285" cy="375000"/>
+          </a:xfrm>
+          <a:prstGeom prst="rect">
+            <a:avLst/>
+          </a:prstGeom>
+          <a:solidFill>
+            <a:srgbClr val="D6EAD6"/>
+          </a:solidFill>
+          <a:ln>
+            <a:solidFill>
+              <a:srgbClr val="9EB3D8"/>
+            </a:solidFill>
+          </a:ln>
+        </p:spPr>
+        <p:txBody>
+          <a:bodyPr anchor="ctr" lIns="91440" rIns="91440" tIns="45720" bIns="45720"/>
+          <a:lstStyle/>
+          <a:p>
+            <a:pPr algn="ctr"/>
+            <a:r>
+              <a:rPr lang="en-US" sz="820" b="1" i="0" dirty="0">
+                <a:solidFill>
+                  <a:srgbClr val="1A5C1A"/>
+                </a:solidFill>
+                <a:latin typeface="Calibri"/>
+              </a:rPr>
+              <a:t>2</a:t>
+            </a:r>
+          </a:p>
+        </p:txBody>
+      </p:sp>
+      <p:sp>
+        <p:nvSpPr>
+          <p:cNvPr id="61" name="sp61"/>
+          <p:cNvSpPr>
+            <a:spLocks noGrp="1"/>
+          </p:cNvSpPr>
+          <p:nvPr/>
+        </p:nvSpPr>
+        <p:spPr>
+          <a:xfrm>
+            <a:off x="7987710" y="3035000"/>
+            <a:ext cx="1006290" cy="375000"/>
+          </a:xfrm>
+          <a:prstGeom prst="rect">
+            <a:avLst/>
+          </a:prstGeom>
+          <a:solidFill>
+            <a:srgbClr val="D6EAD6"/>
+          </a:solidFill>
+          <a:ln>
+            <a:solidFill>
+              <a:srgbClr val="9EB3D8"/>
+            </a:solidFill>
+          </a:ln>
+        </p:spPr>
+        <p:txBody>
+          <a:bodyPr anchor="ctr" lIns="91440" rIns="91440" tIns="45720" bIns="45720"/>
+          <a:lstStyle/>
+          <a:p>
+            <a:pPr algn="ctr"/>
+            <a:r>
+              <a:rPr lang="en-US" sz="820" b="1" i="0" dirty="0">
+                <a:solidFill>
+                  <a:srgbClr val="1A5C1A"/>
+                </a:solidFill>
+                <a:latin typeface="Calibri"/>
+              </a:rPr>
+              <a:t>&gt;10,000</a:t>
+            </a:r>
+          </a:p>
+        </p:txBody>
+      </p:sp>
+      <p:sp>
+        <p:nvSpPr>
+          <p:cNvPr id="62" name="sp62"/>
+          <p:cNvSpPr>
+            <a:spLocks noGrp="1"/>
+          </p:cNvSpPr>
+          <p:nvPr/>
+        </p:nvSpPr>
+        <p:spPr>
+          <a:xfrm>
+            <a:off x="150000" y="3410000"/>
+            <a:ext cx="1800000" cy="375000"/>
+          </a:xfrm>
+          <a:prstGeom prst="rect">
+            <a:avLst/>
+          </a:prstGeom>
+          <a:solidFill>
+            <a:srgbClr val="CADCFC"/>
+          </a:solidFill>
+          <a:ln>
+            <a:solidFill>
+              <a:srgbClr val="9EB3D8"/>
+            </a:solidFill>
+          </a:ln>
+        </p:spPr>
+        <p:txBody>
+          <a:bodyPr anchor="ctr" lIns="91440" rIns="91440" tIns="45720" bIns="45720"/>
+          <a:lstStyle/>
+          <a:p>
+            <a:pPr algn="l"/>
+            <a:r>
+              <a:rPr lang="en-US" sz="820" b="1" i="0" dirty="0">
+                <a:solidFill>
+                  <a:srgbClr val="1E2761"/>
+                </a:solidFill>
+                <a:latin typeface="Calibri"/>
+              </a:rPr>
+              <a:t>UI pod</a:t>
+            </a:r>
+          </a:p>
+        </p:txBody>
+      </p:sp>
+      <p:sp>
+        <p:nvSpPr>
+          <p:cNvPr id="63" name="sp63"/>
+          <p:cNvSpPr>
+            <a:spLocks noGrp="1"/>
+          </p:cNvSpPr>
+          <p:nvPr/>
+        </p:nvSpPr>
+        <p:spPr>
+          <a:xfrm>
+            <a:off x="1950000" y="3410000"/>
+            <a:ext cx="1006285" cy="375000"/>
+          </a:xfrm>
+          <a:prstGeom prst="rect">
+            <a:avLst/>
+          </a:prstGeom>
+          <a:solidFill>
+            <a:srgbClr val="CADCFC"/>
+          </a:solidFill>
+          <a:ln>
+            <a:solidFill>
+              <a:srgbClr val="9EB3D8"/>
+            </a:solidFill>
+          </a:ln>
+        </p:spPr>
+        <p:txBody>
+          <a:bodyPr anchor="ctr" lIns="91440" rIns="91440" tIns="45720" bIns="45720"/>
+          <a:lstStyle/>
+          <a:p>
+            <a:pPr algn="ctr"/>
+            <a:r>
+              <a:rPr lang="en-US" sz="820" b="0" i="0" dirty="0">
+                <a:solidFill>
+                  <a:srgbClr val="1E2761"/>
+                </a:solidFill>
+                <a:latin typeface="Calibri"/>
+              </a:rPr>
+              <a:t>100m</a:t>
+            </a:r>
+          </a:p>
+        </p:txBody>
+      </p:sp>
+      <p:sp>
+        <p:nvSpPr>
+          <p:cNvPr id="64" name="sp64"/>
+          <p:cNvSpPr>
+            <a:spLocks noGrp="1"/>
+          </p:cNvSpPr>
+          <p:nvPr/>
+        </p:nvSpPr>
+        <p:spPr>
+          <a:xfrm>
+            <a:off x="2956285" y="3410000"/>
+            <a:ext cx="1006285" cy="375000"/>
+          </a:xfrm>
+          <a:prstGeom prst="rect">
+            <a:avLst/>
+          </a:prstGeom>
+          <a:solidFill>
+            <a:srgbClr val="CADCFC"/>
+          </a:solidFill>
+          <a:ln>
+            <a:solidFill>
+              <a:srgbClr val="9EB3D8"/>
+            </a:solidFill>
+          </a:ln>
+        </p:spPr>
+        <p:txBody>
+          <a:bodyPr anchor="ctr" lIns="91440" rIns="91440" tIns="45720" bIns="45720"/>
+          <a:lstStyle/>
+          <a:p>
+            <a:pPr algn="ctr"/>
+            <a:r>
+              <a:rPr lang="en-US" sz="820" b="0" i="0" dirty="0">
+                <a:solidFill>
+                  <a:srgbClr val="1E2761"/>
+                </a:solidFill>
+                <a:latin typeface="Calibri"/>
+              </a:rPr>
+              <a:t>500m</a:t>
+            </a:r>
+          </a:p>
+        </p:txBody>
+      </p:sp>
+      <p:sp>
+        <p:nvSpPr>
+          <p:cNvPr id="65" name="sp65"/>
+          <p:cNvSpPr>
+            <a:spLocks noGrp="1"/>
+          </p:cNvSpPr>
+          <p:nvPr/>
+        </p:nvSpPr>
+        <p:spPr>
+          <a:xfrm>
+            <a:off x="3962570" y="3410000"/>
+            <a:ext cx="1006285" cy="375000"/>
+          </a:xfrm>
+          <a:prstGeom prst="rect">
+            <a:avLst/>
+          </a:prstGeom>
+          <a:solidFill>
+            <a:srgbClr val="CADCFC"/>
+          </a:solidFill>
+          <a:ln>
+            <a:solidFill>
+              <a:srgbClr val="9EB3D8"/>
+            </a:solidFill>
+          </a:ln>
+        </p:spPr>
+        <p:txBody>
+          <a:bodyPr anchor="ctr" lIns="91440" rIns="91440" tIns="45720" bIns="45720"/>
+          <a:lstStyle/>
+          <a:p>
+            <a:pPr algn="ctr"/>
+            <a:r>
+              <a:rPr lang="en-US" sz="820" b="0" i="0" dirty="0">
+                <a:solidFill>
+                  <a:srgbClr val="1E2761"/>
+                </a:solidFill>
+                <a:latin typeface="Calibri"/>
+              </a:rPr>
+              <a:t>128 Mi</a:t>
+            </a:r>
+          </a:p>
+        </p:txBody>
+      </p:sp>
+      <p:sp>
+        <p:nvSpPr>
+          <p:cNvPr id="66" name="sp66"/>
+          <p:cNvSpPr>
+            <a:spLocks noGrp="1"/>
+          </p:cNvSpPr>
+          <p:nvPr/>
+        </p:nvSpPr>
+        <p:spPr>
+          <a:xfrm>
+            <a:off x="4968855" y="3410000"/>
+            <a:ext cx="1006285" cy="375000"/>
+          </a:xfrm>
+          <a:prstGeom prst="rect">
+            <a:avLst/>
+          </a:prstGeom>
+          <a:solidFill>
+            <a:srgbClr val="CADCFC"/>
+          </a:solidFill>
+          <a:ln>
+            <a:solidFill>
+              <a:srgbClr val="9EB3D8"/>
+            </a:solidFill>
+          </a:ln>
+        </p:spPr>
+        <p:txBody>
+          <a:bodyPr anchor="ctr" lIns="91440" rIns="91440" tIns="45720" bIns="45720"/>
+          <a:lstStyle/>
+          <a:p>
+            <a:pPr algn="ctr"/>
+            <a:r>
+              <a:rPr lang="en-US" sz="820" b="0" i="0" dirty="0">
+                <a:solidFill>
+                  <a:srgbClr val="1E2761"/>
+                </a:solidFill>
+                <a:latin typeface="Calibri"/>
+              </a:rPr>
+              <a:t>256 Mi</a:t>
+            </a:r>
+          </a:p>
+        </p:txBody>
+      </p:sp>
+      <p:sp>
+        <p:nvSpPr>
+          <p:cNvPr id="67" name="sp67"/>
+          <p:cNvSpPr>
+            <a:spLocks noGrp="1"/>
+          </p:cNvSpPr>
+          <p:nvPr/>
+        </p:nvSpPr>
+        <p:spPr>
+          <a:xfrm>
+            <a:off x="5975140" y="3410000"/>
+            <a:ext cx="1006285" cy="375000"/>
+          </a:xfrm>
+          <a:prstGeom prst="rect">
+            <a:avLst/>
+          </a:prstGeom>
+          <a:solidFill>
+            <a:srgbClr val="CADCFC"/>
+          </a:solidFill>
+          <a:ln>
+            <a:solidFill>
+              <a:srgbClr val="9EB3D8"/>
+            </a:solidFill>
+          </a:ln>
+        </p:spPr>
+        <p:txBody>
+          <a:bodyPr anchor="ctr" lIns="91440" rIns="91440" tIns="45720" bIns="45720"/>
+          <a:lstStyle/>
+          <a:p>
+            <a:pPr algn="ctr"/>
+            <a:r>
+              <a:rPr lang="en-US" sz="820" b="0" i="0" dirty="0">
+                <a:solidFill>
+                  <a:srgbClr val="1E2761"/>
+                </a:solidFill>
+                <a:latin typeface="Calibri"/>
+              </a:rPr>
+              <a:t>—</a:t>
+            </a:r>
+          </a:p>
+        </p:txBody>
+      </p:sp>
+      <p:sp>
+        <p:nvSpPr>
+          <p:cNvPr id="68" name="sp68"/>
+          <p:cNvSpPr>
+            <a:spLocks noGrp="1"/>
+          </p:cNvSpPr>
+          <p:nvPr/>
+        </p:nvSpPr>
+        <p:spPr>
+          <a:xfrm>
+            <a:off x="6981425" y="3410000"/>
+            <a:ext cx="1006285" cy="375000"/>
+          </a:xfrm>
+          <a:prstGeom prst="rect">
+            <a:avLst/>
+          </a:prstGeom>
+          <a:solidFill>
+            <a:srgbClr val="D6EAD6"/>
+          </a:solidFill>
+          <a:ln>
+            <a:solidFill>
+              <a:srgbClr val="9EB3D8"/>
+            </a:solidFill>
+          </a:ln>
+        </p:spPr>
+        <p:txBody>
+          <a:bodyPr anchor="ctr" lIns="91440" rIns="91440" tIns="45720" bIns="45720"/>
+          <a:lstStyle/>
+          <a:p>
+            <a:pPr algn="ctr"/>
+            <a:r>
+              <a:rPr lang="en-US" sz="820" b="1" i="0" dirty="0">
+                <a:solidFill>
+                  <a:srgbClr val="1A5C1A"/>
+                </a:solidFill>
+                <a:latin typeface="Calibri"/>
+              </a:rPr>
+              <a:t>1</a:t>
+            </a:r>
+          </a:p>
+        </p:txBody>
+      </p:sp>
+      <p:sp>
+        <p:nvSpPr>
+          <p:cNvPr id="69" name="sp69"/>
+          <p:cNvSpPr>
+            <a:spLocks noGrp="1"/>
+          </p:cNvSpPr>
+          <p:nvPr/>
+        </p:nvSpPr>
+        <p:spPr>
+          <a:xfrm>
+            <a:off x="7987710" y="3410000"/>
+            <a:ext cx="1006290" cy="375000"/>
+          </a:xfrm>
+          <a:prstGeom prst="rect">
+            <a:avLst/>
+          </a:prstGeom>
+          <a:solidFill>
+            <a:srgbClr val="CADCFC"/>
+          </a:solidFill>
+          <a:ln>
+            <a:solidFill>
+              <a:srgbClr val="9EB3D8"/>
+            </a:solidFill>
+          </a:ln>
+        </p:spPr>
+        <p:txBody>
+          <a:bodyPr anchor="ctr" lIns="91440" rIns="91440" tIns="45720" bIns="45720"/>
+          <a:lstStyle/>
+          <a:p>
+            <a:pPr algn="ctr"/>
+            <a:r>
+              <a:rPr lang="en-US" sz="820" b="0" i="0" dirty="0">
+                <a:solidFill>
+                  <a:srgbClr val="1E2761"/>
+                </a:solidFill>
+                <a:latin typeface="Calibri"/>
+              </a:rPr>
+              <a:t>~200 rps</a:t>
+            </a:r>
+          </a:p>
+        </p:txBody>
+      </p:sp>
+      <p:sp>
+        <p:nvSpPr>
+          <p:cNvPr id="70" name="sp70"/>
+          <p:cNvSpPr>
+            <a:spLocks noGrp="1"/>
+          </p:cNvSpPr>
+          <p:nvPr/>
+        </p:nvSpPr>
+        <p:spPr>
+          <a:xfrm>
+            <a:off x="150000" y="3785000"/>
+            <a:ext cx="1800000" cy="375000"/>
+          </a:xfrm>
+          <a:prstGeom prst="rect">
+            <a:avLst/>
+          </a:prstGeom>
+          <a:solidFill>
+            <a:srgbClr val="FFFFFF"/>
+          </a:solidFill>
+          <a:ln>
+            <a:solidFill>
+              <a:srgbClr val="9EB3D8"/>
+            </a:solidFill>
+          </a:ln>
+        </p:spPr>
+        <p:txBody>
+          <a:bodyPr anchor="ctr" lIns="91440" rIns="91440" tIns="45720" bIns="45720"/>
+          <a:lstStyle/>
+          <a:p>
+            <a:pPr algn="l"/>
+            <a:r>
+              <a:rPr lang="en-US" sz="820" b="1" i="0" dirty="0">
+                <a:solidFill>
+                  <a:srgbClr val="1E2761"/>
+                </a:solidFill>
+                <a:latin typeface="Calibri"/>
+              </a:rPr>
+              <a:t>aaa-regression-tester</a:t>
+            </a:r>
+          </a:p>
+        </p:txBody>
+      </p:sp>
+      <p:sp>
+        <p:nvSpPr>
+          <p:cNvPr id="71" name="sp71"/>
+          <p:cNvSpPr>
+            <a:spLocks noGrp="1"/>
+          </p:cNvSpPr>
+          <p:nvPr/>
+        </p:nvSpPr>
+        <p:spPr>
+          <a:xfrm>
+            <a:off x="1950000" y="3785000"/>
+            <a:ext cx="1006285" cy="375000"/>
+          </a:xfrm>
+          <a:prstGeom prst="rect">
+            <a:avLst/>
+          </a:prstGeom>
+          <a:solidFill>
+            <a:srgbClr val="FFFFFF"/>
+          </a:solidFill>
+          <a:ln>
+            <a:solidFill>
+              <a:srgbClr val="9EB3D8"/>
+            </a:solidFill>
+          </a:ln>
+        </p:spPr>
+        <p:txBody>
+          <a:bodyPr anchor="ctr" lIns="91440" rIns="91440" tIns="45720" bIns="45720"/>
+          <a:lstStyle/>
+          <a:p>
+            <a:pPr algn="ctr"/>
+            <a:r>
+              <a:rPr lang="en-US" sz="820" b="0" i="0" dirty="0">
+                <a:solidFill>
+                  <a:srgbClr val="1E2761"/>
+                </a:solidFill>
+                <a:latin typeface="Calibri"/>
+              </a:rPr>
+              <a:t>250m</a:t>
+            </a:r>
+          </a:p>
+        </p:txBody>
+      </p:sp>
+      <p:sp>
+        <p:nvSpPr>
+          <p:cNvPr id="72" name="sp72"/>
+          <p:cNvSpPr>
+            <a:spLocks noGrp="1"/>
+          </p:cNvSpPr>
+          <p:nvPr/>
+        </p:nvSpPr>
+        <p:spPr>
+          <a:xfrm>
+            <a:off x="2956285" y="3785000"/>
+            <a:ext cx="1006285" cy="375000"/>
+          </a:xfrm>
+          <a:prstGeom prst="rect">
+            <a:avLst/>
+          </a:prstGeom>
+          <a:solidFill>
+            <a:srgbClr val="FFFFFF"/>
+          </a:solidFill>
+          <a:ln>
+            <a:solidFill>
+              <a:srgbClr val="9EB3D8"/>
+            </a:solidFill>
+          </a:ln>
+        </p:spPr>
+        <p:txBody>
+          <a:bodyPr anchor="ctr" lIns="91440" rIns="91440" tIns="45720" bIns="45720"/>
+          <a:lstStyle/>
+          <a:p>
+            <a:pPr algn="ctr"/>
+            <a:r>
+              <a:rPr lang="en-US" sz="820" b="0" i="0" dirty="0">
+                <a:solidFill>
+                  <a:srgbClr val="1E2761"/>
+                </a:solidFill>
+                <a:latin typeface="Calibri"/>
+              </a:rPr>
+              <a:t>500m</a:t>
+            </a:r>
+          </a:p>
+        </p:txBody>
+      </p:sp>
+      <p:sp>
+        <p:nvSpPr>
+          <p:cNvPr id="73" name="sp73"/>
+          <p:cNvSpPr>
+            <a:spLocks noGrp="1"/>
+          </p:cNvSpPr>
+          <p:nvPr/>
+        </p:nvSpPr>
+        <p:spPr>
+          <a:xfrm>
+            <a:off x="3962570" y="3785000"/>
+            <a:ext cx="1006285" cy="375000"/>
+          </a:xfrm>
+          <a:prstGeom prst="rect">
+            <a:avLst/>
+          </a:prstGeom>
+          <a:solidFill>
+            <a:srgbClr val="FFFFFF"/>
+          </a:solidFill>
+          <a:ln>
+            <a:solidFill>
+              <a:srgbClr val="9EB3D8"/>
+            </a:solidFill>
+          </a:ln>
+        </p:spPr>
+        <p:txBody>
+          <a:bodyPr anchor="ctr" lIns="91440" rIns="91440" tIns="45720" bIns="45720"/>
+          <a:lstStyle/>
+          <a:p>
+            <a:pPr algn="ctr"/>
+            <a:r>
+              <a:rPr lang="en-US" sz="820" b="0" i="0" dirty="0">
+                <a:solidFill>
+                  <a:srgbClr val="1E2761"/>
+                </a:solidFill>
+                <a:latin typeface="Calibri"/>
+              </a:rPr>
+              <a:t>256 Mi</a:t>
+            </a:r>
+          </a:p>
+        </p:txBody>
+      </p:sp>
+      <p:sp>
+        <p:nvSpPr>
+          <p:cNvPr id="74" name="sp74"/>
+          <p:cNvSpPr>
+            <a:spLocks noGrp="1"/>
+          </p:cNvSpPr>
+          <p:nvPr/>
+        </p:nvSpPr>
+        <p:spPr>
+          <a:xfrm>
+            <a:off x="4968855" y="3785000"/>
+            <a:ext cx="1006285" cy="375000"/>
+          </a:xfrm>
+          <a:prstGeom prst="rect">
+            <a:avLst/>
+          </a:prstGeom>
+          <a:solidFill>
+            <a:srgbClr val="FFFFFF"/>
+          </a:solidFill>
+          <a:ln>
+            <a:solidFill>
+              <a:srgbClr val="9EB3D8"/>
+            </a:solidFill>
+          </a:ln>
+        </p:spPr>
+        <p:txBody>
+          <a:bodyPr anchor="ctr" lIns="91440" rIns="91440" tIns="45720" bIns="45720"/>
+          <a:lstStyle/>
+          <a:p>
+            <a:pPr algn="ctr"/>
+            <a:r>
+              <a:rPr lang="en-US" sz="820" b="0" i="0" dirty="0">
+                <a:solidFill>
+                  <a:srgbClr val="1E2761"/>
+                </a:solidFill>
+                <a:latin typeface="Calibri"/>
+              </a:rPr>
+              <a:t>512 Mi</a:t>
+            </a:r>
+          </a:p>
+        </p:txBody>
+      </p:sp>
+      <p:sp>
+        <p:nvSpPr>
+          <p:cNvPr id="75" name="sp75"/>
+          <p:cNvSpPr>
+            <a:spLocks noGrp="1"/>
+          </p:cNvSpPr>
+          <p:nvPr/>
+        </p:nvSpPr>
+        <p:spPr>
+          <a:xfrm>
+            <a:off x="5975140" y="3785000"/>
+            <a:ext cx="1006285" cy="375000"/>
+          </a:xfrm>
+          <a:prstGeom prst="rect">
+            <a:avLst/>
+          </a:prstGeom>
+          <a:solidFill>
+            <a:srgbClr val="FFFFFF"/>
+          </a:solidFill>
+          <a:ln>
+            <a:solidFill>
+              <a:srgbClr val="9EB3D8"/>
+            </a:solidFill>
+          </a:ln>
+        </p:spPr>
+        <p:txBody>
+          <a:bodyPr anchor="ctr" lIns="91440" rIns="91440" tIns="45720" bIns="45720"/>
+          <a:lstStyle/>
+          <a:p>
+            <a:pPr algn="ctr"/>
+            <a:r>
+              <a:rPr lang="en-US" sz="820" b="0" i="0" dirty="0">
+                <a:solidFill>
+                  <a:srgbClr val="1E2761"/>
+                </a:solidFill>
+                <a:latin typeface="Calibri"/>
+              </a:rPr>
+              <a:t>—</a:t>
+            </a:r>
+          </a:p>
+        </p:txBody>
+      </p:sp>
+      <p:sp>
+        <p:nvSpPr>
+          <p:cNvPr id="76" name="sp76"/>
+          <p:cNvSpPr>
+            <a:spLocks noGrp="1"/>
+          </p:cNvSpPr>
+          <p:nvPr/>
+        </p:nvSpPr>
+        <p:spPr>
+          <a:xfrm>
+            <a:off x="6981425" y="3785000"/>
+            <a:ext cx="1006285" cy="375000"/>
+          </a:xfrm>
+          <a:prstGeom prst="rect">
+            <a:avLst/>
+          </a:prstGeom>
+          <a:solidFill>
+            <a:srgbClr val="FFFFFF"/>
+          </a:solidFill>
+          <a:ln>
+            <a:solidFill>
+              <a:srgbClr val="9EB3D8"/>
+            </a:solidFill>
+          </a:ln>
+        </p:spPr>
+        <p:txBody>
+          <a:bodyPr anchor="ctr" lIns="91440" rIns="91440" tIns="45720" bIns="45720"/>
+          <a:lstStyle/>
+          <a:p>
+            <a:pPr algn="ctr"/>
+            <a:r>
+              <a:rPr lang="en-US" sz="820" b="0" i="0" dirty="0">
+                <a:solidFill>
+                  <a:srgbClr val="888888"/>
+                </a:solidFill>
+                <a:latin typeface="Calibri"/>
+              </a:rPr>
+              <a:t>1 *</a:t>
+            </a:r>
+          </a:p>
+        </p:txBody>
+      </p:sp>
+      <p:sp>
+        <p:nvSpPr>
+          <p:cNvPr id="77" name="sp77"/>
+          <p:cNvSpPr>
+            <a:spLocks noGrp="1"/>
+          </p:cNvSpPr>
+          <p:nvPr/>
+        </p:nvSpPr>
+        <p:spPr>
+          <a:xfrm>
+            <a:off x="7987710" y="3785000"/>
+            <a:ext cx="1006290" cy="375000"/>
+          </a:xfrm>
+          <a:prstGeom prst="rect">
+            <a:avLst/>
+          </a:prstGeom>
+          <a:solidFill>
+            <a:srgbClr val="FFFFFF"/>
+          </a:solidFill>
+          <a:ln>
+            <a:solidFill>
+              <a:srgbClr val="9EB3D8"/>
+            </a:solidFill>
+          </a:ln>
+        </p:spPr>
+        <p:txBody>
+          <a:bodyPr anchor="ctr" lIns="91440" rIns="91440" tIns="45720" bIns="45720"/>
+          <a:lstStyle/>
+          <a:p>
+            <a:pPr algn="ctr"/>
+            <a:r>
+              <a:rPr lang="en-US" sz="820" b="0" i="0" dirty="0">
+                <a:solidFill>
+                  <a:srgbClr val="888888"/>
+                </a:solidFill>
+                <a:latin typeface="Calibri"/>
+              </a:rPr>
+              <a:t>N/A</a:t>
+            </a:r>
+          </a:p>
+        </p:txBody>
+      </p:sp>
+      <p:sp>
+        <p:nvSpPr>
+          <p:cNvPr id="78" name="sp78"/>
+          <p:cNvSpPr>
+            <a:spLocks noGrp="1"/>
+          </p:cNvSpPr>
+          <p:nvPr/>
+        </p:nvSpPr>
+        <p:spPr>
+          <a:xfrm>
+            <a:off x="150000" y="4160000"/>
+            <a:ext cx="1800000" cy="375000"/>
+          </a:xfrm>
+          <a:prstGeom prst="rect">
+            <a:avLst/>
+          </a:prstGeom>
+          <a:solidFill>
+            <a:srgbClr val="CADCFC"/>
+          </a:solidFill>
+          <a:ln>
+            <a:solidFill>
+              <a:srgbClr val="9EB3D8"/>
+            </a:solidFill>
+          </a:ln>
+        </p:spPr>
+        <p:txBody>
+          <a:bodyPr anchor="ctr" lIns="91440" rIns="91440" tIns="45720" bIns="45720"/>
+          <a:lstStyle/>
+          <a:p>
+            <a:pPr algn="l"/>
+            <a:r>
+              <a:rPr lang="en-US" sz="820" b="1" i="0" dirty="0">
+                <a:solidFill>
+                  <a:srgbClr val="1E2761"/>
+                </a:solidFill>
+                <a:latin typeface="Calibri"/>
+              </a:rPr>
+              <a:t>Load-test pod</a:t>
+            </a:r>
+          </a:p>
+        </p:txBody>
+      </p:sp>
+      <p:sp>
+        <p:nvSpPr>
+          <p:cNvPr id="79" name="sp79"/>
+          <p:cNvSpPr>
+            <a:spLocks noGrp="1"/>
+          </p:cNvSpPr>
+          <p:nvPr/>
+        </p:nvSpPr>
+        <p:spPr>
+          <a:xfrm>
+            <a:off x="1950000" y="4160000"/>
+            <a:ext cx="1006285" cy="375000"/>
+          </a:xfrm>
+          <a:prstGeom prst="rect">
+            <a:avLst/>
+          </a:prstGeom>
+          <a:solidFill>
+            <a:srgbClr val="CADCFC"/>
+          </a:solidFill>
+          <a:ln>
+            <a:solidFill>
+              <a:srgbClr val="9EB3D8"/>
+            </a:solidFill>
+          </a:ln>
+        </p:spPr>
+        <p:txBody>
+          <a:bodyPr anchor="ctr" lIns="91440" rIns="91440" tIns="45720" bIns="45720"/>
+          <a:lstStyle/>
+          <a:p>
+            <a:pPr algn="ctr"/>
+            <a:r>
+              <a:rPr lang="en-US" sz="820" b="0" i="0" dirty="0">
+                <a:solidFill>
+                  <a:srgbClr val="1E2761"/>
+                </a:solidFill>
+                <a:latin typeface="Calibri"/>
+              </a:rPr>
+              <a:t>500m</a:t>
+            </a:r>
+          </a:p>
+        </p:txBody>
+      </p:sp>
+      <p:sp>
+        <p:nvSpPr>
+          <p:cNvPr id="80" name="sp80"/>
+          <p:cNvSpPr>
+            <a:spLocks noGrp="1"/>
+          </p:cNvSpPr>
+          <p:nvPr/>
+        </p:nvSpPr>
+        <p:spPr>
+          <a:xfrm>
+            <a:off x="2956285" y="4160000"/>
+            <a:ext cx="1006285" cy="375000"/>
+          </a:xfrm>
+          <a:prstGeom prst="rect">
+            <a:avLst/>
+          </a:prstGeom>
+          <a:solidFill>
+            <a:srgbClr val="CADCFC"/>
+          </a:solidFill>
+          <a:ln>
+            <a:solidFill>
+              <a:srgbClr val="9EB3D8"/>
+            </a:solidFill>
+          </a:ln>
+        </p:spPr>
+        <p:txBody>
+          <a:bodyPr anchor="ctr" lIns="91440" rIns="91440" tIns="45720" bIns="45720"/>
+          <a:lstStyle/>
+          <a:p>
+            <a:pPr algn="ctr"/>
+            <a:r>
+              <a:rPr lang="en-US" sz="820" b="0" i="0" dirty="0">
+                <a:solidFill>
+                  <a:srgbClr val="1E2761"/>
+                </a:solidFill>
+                <a:latin typeface="Calibri"/>
+              </a:rPr>
+              <a:t>2,000m</a:t>
+            </a:r>
+          </a:p>
+        </p:txBody>
+      </p:sp>
+      <p:sp>
+        <p:nvSpPr>
+          <p:cNvPr id="81" name="sp81"/>
+          <p:cNvSpPr>
+            <a:spLocks noGrp="1"/>
+          </p:cNvSpPr>
+          <p:nvPr/>
+        </p:nvSpPr>
+        <p:spPr>
+          <a:xfrm>
+            <a:off x="3962570" y="4160000"/>
+            <a:ext cx="1006285" cy="375000"/>
+          </a:xfrm>
+          <a:prstGeom prst="rect">
+            <a:avLst/>
+          </a:prstGeom>
+          <a:solidFill>
+            <a:srgbClr val="CADCFC"/>
+          </a:solidFill>
+          <a:ln>
+            <a:solidFill>
+              <a:srgbClr val="9EB3D8"/>
+            </a:solidFill>
+          </a:ln>
+        </p:spPr>
+        <p:txBody>
+          <a:bodyPr anchor="ctr" lIns="91440" rIns="91440" tIns="45720" bIns="45720"/>
+          <a:lstStyle/>
+          <a:p>
+            <a:pPr algn="ctr"/>
+            <a:r>
+              <a:rPr lang="en-US" sz="820" b="0" i="0" dirty="0">
+                <a:solidFill>
+                  <a:srgbClr val="1E2761"/>
+                </a:solidFill>
+                <a:latin typeface="Calibri"/>
+              </a:rPr>
+              <a:t>256 Mi</a:t>
+            </a:r>
+          </a:p>
+        </p:txBody>
+      </p:sp>
+      <p:sp>
+        <p:nvSpPr>
+          <p:cNvPr id="82" name="sp82"/>
+          <p:cNvSpPr>
+            <a:spLocks noGrp="1"/>
+          </p:cNvSpPr>
+          <p:nvPr/>
+        </p:nvSpPr>
+        <p:spPr>
+          <a:xfrm>
+            <a:off x="4968855" y="4160000"/>
+            <a:ext cx="1006285" cy="375000"/>
+          </a:xfrm>
+          <a:prstGeom prst="rect">
+            <a:avLst/>
+          </a:prstGeom>
+          <a:solidFill>
+            <a:srgbClr val="CADCFC"/>
+          </a:solidFill>
+          <a:ln>
+            <a:solidFill>
+              <a:srgbClr val="9EB3D8"/>
+            </a:solidFill>
+          </a:ln>
+        </p:spPr>
+        <p:txBody>
+          <a:bodyPr anchor="ctr" lIns="91440" rIns="91440" tIns="45720" bIns="45720"/>
+          <a:lstStyle/>
+          <a:p>
+            <a:pPr algn="ctr"/>
+            <a:r>
+              <a:rPr lang="en-US" sz="820" b="0" i="0" dirty="0">
+                <a:solidFill>
+                  <a:srgbClr val="1E2761"/>
+                </a:solidFill>
+                <a:latin typeface="Calibri"/>
+              </a:rPr>
+              <a:t>1,024 Mi</a:t>
+            </a:r>
+          </a:p>
+        </p:txBody>
+      </p:sp>
+      <p:sp>
+        <p:nvSpPr>
+          <p:cNvPr id="83" name="sp83"/>
+          <p:cNvSpPr>
+            <a:spLocks noGrp="1"/>
+          </p:cNvSpPr>
+          <p:nvPr/>
+        </p:nvSpPr>
+        <p:spPr>
+          <a:xfrm>
+            <a:off x="5975140" y="4160000"/>
+            <a:ext cx="1006285" cy="375000"/>
+          </a:xfrm>
+          <a:prstGeom prst="rect">
+            <a:avLst/>
+          </a:prstGeom>
+          <a:solidFill>
+            <a:srgbClr val="CADCFC"/>
+          </a:solidFill>
+          <a:ln>
+            <a:solidFill>
+              <a:srgbClr val="9EB3D8"/>
+            </a:solidFill>
+          </a:ln>
+        </p:spPr>
+        <p:txBody>
+          <a:bodyPr anchor="ctr" lIns="91440" rIns="91440" tIns="45720" bIns="45720"/>
+          <a:lstStyle/>
+          <a:p>
+            <a:pPr algn="ctr"/>
+            <a:r>
+              <a:rPr lang="en-US" sz="820" b="0" i="0" dirty="0">
+                <a:solidFill>
+                  <a:srgbClr val="1E2761"/>
+                </a:solidFill>
+                <a:latin typeface="Calibri"/>
+              </a:rPr>
+              <a:t>—</a:t>
+            </a:r>
+          </a:p>
+        </p:txBody>
+      </p:sp>
+      <p:sp>
+        <p:nvSpPr>
+          <p:cNvPr id="84" name="sp84"/>
+          <p:cNvSpPr>
+            <a:spLocks noGrp="1"/>
+          </p:cNvSpPr>
+          <p:nvPr/>
+        </p:nvSpPr>
+        <p:spPr>
+          <a:xfrm>
+            <a:off x="6981425" y="4160000"/>
+            <a:ext cx="1006285" cy="375000"/>
+          </a:xfrm>
+          <a:prstGeom prst="rect">
+            <a:avLst/>
+          </a:prstGeom>
+          <a:solidFill>
+            <a:srgbClr val="CADCFC"/>
+          </a:solidFill>
+          <a:ln>
+            <a:solidFill>
+              <a:srgbClr val="9EB3D8"/>
+            </a:solidFill>
+          </a:ln>
+        </p:spPr>
+        <p:txBody>
+          <a:bodyPr anchor="ctr" lIns="91440" rIns="91440" tIns="45720" bIns="45720"/>
+          <a:lstStyle/>
+          <a:p>
+            <a:pPr algn="ctr"/>
+            <a:r>
+              <a:rPr lang="en-US" sz="820" b="0" i="0" dirty="0">
+                <a:solidFill>
+                  <a:srgbClr val="888888"/>
+                </a:solidFill>
+                <a:latin typeface="Calibri"/>
+              </a:rPr>
+              <a:t>1 *</a:t>
+            </a:r>
+          </a:p>
+        </p:txBody>
+      </p:sp>
+      <p:sp>
+        <p:nvSpPr>
+          <p:cNvPr id="85" name="sp85"/>
+          <p:cNvSpPr>
+            <a:spLocks noGrp="1"/>
+          </p:cNvSpPr>
+          <p:nvPr/>
+        </p:nvSpPr>
+        <p:spPr>
+          <a:xfrm>
+            <a:off x="7987710" y="4160000"/>
+            <a:ext cx="1006290" cy="375000"/>
+          </a:xfrm>
+          <a:prstGeom prst="rect">
+            <a:avLst/>
+          </a:prstGeom>
+          <a:solidFill>
+            <a:srgbClr val="CADCFC"/>
+          </a:solidFill>
+          <a:ln>
+            <a:solidFill>
+              <a:srgbClr val="9EB3D8"/>
+            </a:solidFill>
+          </a:ln>
+        </p:spPr>
+        <p:txBody>
+          <a:bodyPr anchor="ctr" lIns="91440" rIns="91440" tIns="45720" bIns="45720"/>
+          <a:lstStyle/>
+          <a:p>
+            <a:pPr algn="ctr"/>
+            <a:r>
+              <a:rPr lang="en-US" sz="820" b="0" i="0" dirty="0">
+                <a:solidFill>
+                  <a:srgbClr val="888888"/>
+                </a:solidFill>
+                <a:latin typeface="Calibri"/>
+              </a:rPr>
+              <a:t>N/A (gen.)</a:t>
+            </a:r>
+          </a:p>
+        </p:txBody>
+      </p:sp>
+      <p:sp>
+        <p:nvSpPr>
+          <p:cNvPr id="86" name="sp86"/>
+          <p:cNvSpPr>
+            <a:spLocks noGrp="1"/>
+          </p:cNvSpPr>
+          <p:nvPr/>
+        </p:nvSpPr>
+        <p:spPr>
+          <a:xfrm>
+            <a:off x="150000" y="4710000"/>
+            <a:ext cx="8844000" cy="260000"/>
+          </a:xfrm>
+          <a:prstGeom prst="rect">
+            <a:avLst/>
+          </a:prstGeom>
+          <a:solidFill>
+            <a:srgbClr val="EEF3FB"/>
+          </a:solidFill>
+          <a:ln>
+            <a:noFill/>
+          </a:ln>
+        </p:spPr>
+        <p:txBody>
+          <a:bodyPr anchor="ctr" lIns="91440" rIns="91440" tIns="45720" bIns="45720"/>
+          <a:lstStyle/>
+          <a:p>
+            <a:pPr algn="l"/>
+            <a:r>
+              <a:rPr lang="en-US" sz="700" b="0" i="1" dirty="0">
+                <a:solidFill>
+                  <a:srgbClr val="6B7280"/>
+                </a:solidFill>
+                <a:latin typeface="Calibri"/>
+              </a:rPr>
+              <a:t>* On-demand job pod  |  RPS figures are for fast-path requests only (subscriber profile exists in DB)  |  1 SQL query per IMSI lookup → ~2,000 qps at 2k rps  |  PVC size configurable (20 Gi = baseline)</a:t>
+            </a:r>
+          </a:p>
+        </p:txBody>
+      </p:sp>
+    </p:spTree>
+  </p:cSld>
+  <p:clrMapOvr>
+    <a:masterClrMapping/>
+  </p:clrMapOvr>
+</p:sld>
+</file>
+
 <file path=ppt/slides/slide2.xml><?xml version="1.0" encoding="utf-8"?>
 <p:sld xmlns:a="http://schemas.openxmlformats.org/drawingml/2006/main" xmlns:r="http://schemas.openxmlformats.org/officeDocument/2006/relationships" xmlns:p="http://schemas.openxmlformats.org/presentationml/2006/main">
   <p:cSld name="Slide 2">
@@ -15219,7 +23692,7 @@
                   <a:srgbClr val="2E75B6"/>
                 </a:solidFill>
               </a:rPr>
-              <a:t>aaa-radius-server orchestrates two independent backend services optimized for their workloads</a:t>
+              <a:t>aaa-lookup-service orchestrates first-connection — radius-server routes all Access-Requests to lookup only, which calls subscriber-profile-api on DB miss</a:t>
             </a:r>
             <a:endParaRPr lang="en-US" sz="1300" dirty="0"/>
           </a:p>
@@ -15348,7 +23821,7 @@
                   <a:srgbClr val="CADCFC"/>
                 </a:solidFill>
               </a:rPr>
-              <a:t>RADIUS Frontend  |  Receives Access-Requests from network equipment</a:t>
+              <a:t>RADIUS Frontend  |  Forwards all Access-Requests to lookup-service only</a:t>
             </a:r>
             <a:endParaRPr lang="en-US" sz="1000" dirty="0"/>
           </a:p>
@@ -15430,7 +23903,7 @@
                   <a:srgbClr val="2E75B6"/>
                 </a:solidFill>
               </a:rPr>
-              <a:t>Stage 1: GET /lookup (every request)</a:t>
+              <a:t>Every Access-Request → GET /lookup</a:t>
             </a:r>
             <a:endParaRPr lang="en-US" sz="850" dirty="0"/>
           </a:p>
@@ -15755,7 +24228,7 @@
                   <a:srgbClr val="3C4D6B"/>
                 </a:solidFill>
               </a:rPr>
-              <a:t>Returns 404 to trigger first-connection flow</a:t>
+              <a:t>On DB miss: calls POST /first-connection on subscriber-profile-api</a:t>
             </a:r>
             <a:endParaRPr lang="en-US" sz="1100" dirty="0"/>
           </a:p>
@@ -15791,7 +24264,7 @@
                   <a:srgbClr val="2E75B6"/>
                 </a:solidFill>
               </a:rPr>
-              <a:t>WRITE PATH</a:t>
+              <a:t>FIRST-CONNECTION PATH</a:t>
             </a:r>
             <a:endParaRPr lang="en-US" sz="1000" dirty="0"/>
           </a:p>
@@ -15903,7 +24376,7 @@
                   <a:srgbClr val="3C4D6B"/>
                 </a:solidFill>
               </a:rPr>
-              <a:t>First-connection: allocates IP + creates profile on 404</a:t>
+              <a:t>Called by lookup-service on 404: allocates IP + creates profile</a:t>
             </a:r>
             <a:endParaRPr lang="en-US" sz="1100" dirty="0"/>
           </a:p>
@@ -19009,7 +27482,7 @@
                 <a:ea typeface="Courier New" pitchFamily="34" charset="-122"/>
                 <a:cs typeface="Courier New" pitchFamily="34" charset="-120"/>
               </a:rPr>
-              <a:t>   FOR UPDATE SKIP LOCKED</a:t>
+              <a:t xml:space="preserve">   FOR UPDATE SKIP LOCKED</a:t>
             </a:r>
             <a:endParaRPr lang="en-US" sz="950" dirty="0"/>
           </a:p>
@@ -20410,7 +28883,7 @@
                 <a:ea typeface="Courier New" pitchFamily="34" charset="-122"/>
                 <a:cs typeface="Courier New" pitchFamily="34" charset="-120"/>
               </a:rPr>
-              <a:t>       - 278770...000</a:t>
+              <a:t xml:space="preserve">       - 278770...000</a:t>
             </a:r>
             <a:endParaRPr lang="en-US" sz="850" dirty="0"/>
           </a:p>
